--- a/Programacion II/Clases/Clase 2 - Colecciones dinamicas ArrayList/Presentacion.pptx
+++ b/Programacion II/Clases/Clase 2 - Colecciones dinamicas ArrayList/Presentacion.pptx
@@ -18,6 +18,10 @@
     <p:sldId id="266" r:id="rId17"/>
     <p:sldId id="267" r:id="rId18"/>
     <p:sldId id="268" r:id="rId19"/>
+    <p:sldId id="269" r:id="rId20"/>
+    <p:sldId id="270" r:id="rId21"/>
+    <p:sldId id="271" r:id="rId22"/>
+    <p:sldId id="272" r:id="rId23"/>
   </p:sldIdLst>
   <p:sldSz cx="12191695" cy="6858000" type="screen4x3"/>
   <p:notesSz cx="6858000" cy="9144000"/>
@@ -3618,154 +3622,21 @@
                 </a:solidFill>
                 <a:latin typeface="Calibri"/>
               </a:rPr>
-              <a:t>Antes de entregar — autochequeo</a:t>
-            </a:r>
-          </a:p>
-        </p:txBody>
-      </p:sp>
-      <p:sp>
-        <p:nvSpPr>
-          <p:cNvPr id="5" name="Rounded Rectangle 4"/>
-          <p:cNvSpPr/>
-          <p:nvPr/>
-        </p:nvSpPr>
-        <p:spPr>
-          <a:xfrm>
-            <a:off x="457200" y="1261872"/>
-            <a:ext cx="11277295" cy="566928"/>
-          </a:xfrm>
-          <a:prstGeom prst="roundRect">
-            <a:avLst>
-              <a:gd name="adj" fmla="val 12000"/>
-            </a:avLst>
-          </a:prstGeom>
-          <a:solidFill>
-            <a:srgbClr val="F2F2F2"/>
-          </a:solidFill>
-          <a:ln>
-            <a:noFill/>
-          </a:ln>
-        </p:spPr>
-        <p:style>
-          <a:lnRef idx="1">
-            <a:schemeClr val="accent1"/>
-          </a:lnRef>
-          <a:fillRef idx="3">
-            <a:schemeClr val="accent1"/>
-          </a:fillRef>
-          <a:effectRef idx="2">
-            <a:schemeClr val="accent1"/>
-          </a:effectRef>
-          <a:fontRef idx="minor">
-            <a:schemeClr val="lt1"/>
-          </a:fontRef>
-        </p:style>
-        <p:txBody>
-          <a:bodyPr rtlCol="0" anchor="ctr"/>
-          <a:lstStyle/>
-          <a:p>
-            <a:pPr algn="ctr"/>
-          </a:p>
-        </p:txBody>
-      </p:sp>
-      <p:sp>
-        <p:nvSpPr>
-          <p:cNvPr id="6" name="Rectangle 5"/>
-          <p:cNvSpPr/>
-          <p:nvPr/>
-        </p:nvSpPr>
-        <p:spPr>
-          <a:xfrm>
-            <a:off x="640080" y="1408175"/>
-            <a:ext cx="274320" cy="274320"/>
-          </a:xfrm>
-          <a:prstGeom prst="rect">
-            <a:avLst/>
-          </a:prstGeom>
-          <a:solidFill>
-            <a:srgbClr val="FFFFFF"/>
-          </a:solidFill>
-          <a:ln>
-            <a:solidFill>
-              <a:srgbClr val="333333"/>
-            </a:solidFill>
-          </a:ln>
-        </p:spPr>
-        <p:style>
-          <a:lnRef idx="1">
-            <a:schemeClr val="accent1"/>
-          </a:lnRef>
-          <a:fillRef idx="3">
-            <a:schemeClr val="accent1"/>
-          </a:fillRef>
-          <a:effectRef idx="2">
-            <a:schemeClr val="accent1"/>
-          </a:effectRef>
-          <a:fontRef idx="minor">
-            <a:schemeClr val="lt1"/>
-          </a:fontRef>
-        </p:style>
-        <p:txBody>
-          <a:bodyPr rtlCol="0" anchor="ctr"/>
-          <a:lstStyle/>
-          <a:p>
-            <a:pPr algn="ctr"/>
-          </a:p>
-        </p:txBody>
-      </p:sp>
-      <p:sp>
-        <p:nvSpPr>
-          <p:cNvPr id="7" name="Rectangle 6"/>
-          <p:cNvSpPr/>
-          <p:nvPr/>
-        </p:nvSpPr>
-        <p:spPr>
-          <a:xfrm>
-            <a:off x="640080" y="1408175"/>
-            <a:ext cx="73152" cy="274320"/>
-          </a:xfrm>
-          <a:prstGeom prst="rect">
-            <a:avLst/>
-          </a:prstGeom>
-          <a:solidFill>
-            <a:srgbClr val="269CCB"/>
-          </a:solidFill>
-          <a:ln>
-            <a:noFill/>
-          </a:ln>
-        </p:spPr>
-        <p:style>
-          <a:lnRef idx="1">
-            <a:schemeClr val="accent1"/>
-          </a:lnRef>
-          <a:fillRef idx="3">
-            <a:schemeClr val="accent1"/>
-          </a:fillRef>
-          <a:effectRef idx="2">
-            <a:schemeClr val="accent1"/>
-          </a:effectRef>
-          <a:fontRef idx="minor">
-            <a:schemeClr val="lt1"/>
-          </a:fontRef>
-        </p:style>
-        <p:txBody>
-          <a:bodyPr rtlCol="0" anchor="ctr"/>
-          <a:lstStyle/>
-          <a:p>
-            <a:pPr algn="ctr"/>
-          </a:p>
-        </p:txBody>
-      </p:sp>
-      <p:sp>
-        <p:nvSpPr>
-          <p:cNvPr id="8" name="TextBox 7"/>
+              <a:t>Demo del dia</a:t>
+            </a:r>
+          </a:p>
+        </p:txBody>
+      </p:sp>
+      <p:sp>
+        <p:nvSpPr>
+          <p:cNvPr id="5" name="TextBox 4"/>
           <p:cNvSpPr txBox="1"/>
           <p:nvPr/>
         </p:nvSpPr>
         <p:spPr>
           <a:xfrm>
-            <a:off x="1097280" y="1353312"/>
-            <a:ext cx="10362895" cy="402336"/>
+            <a:off x="457200" y="1170432"/>
+            <a:ext cx="11277295" cy="5230368"/>
           </a:xfrm>
           <a:prstGeom prst="rect">
             <a:avLst/>
@@ -3773,354 +3644,99 @@
           <a:noFill/>
         </p:spPr>
         <p:txBody>
-          <a:bodyPr wrap="square" anchor="ctr"/>
-          <a:lstStyle/>
-          <a:p>
-            <a:r>
-              <a:rPr sz="1500" b="0" i="0">
+          <a:bodyPr wrap="square">
+            <a:spAutoFit/>
+          </a:bodyPr>
+          <a:lstStyle/>
+          <a:p>
+            <a:pPr>
+              <a:spcAft>
+                <a:spcPts val="800"/>
+              </a:spcAft>
+            </a:pPr>
+            <a:r>
+              <a:rPr sz="2000" b="0" i="0">
                 <a:solidFill>
                   <a:srgbClr val="333333"/>
                 </a:solidFill>
                 <a:latin typeface="Calibri"/>
               </a:rPr>
-              <a:t>Si su lista imprime algo como vetcare.Mascota@6d06d69c, que metodo heredado de Object le esta faltando a la clase Mascota?</a:t>
-            </a:r>
-          </a:p>
-        </p:txBody>
-      </p:sp>
-      <p:sp>
-        <p:nvSpPr>
-          <p:cNvPr id="9" name="Rounded Rectangle 8"/>
-          <p:cNvSpPr/>
-          <p:nvPr/>
-        </p:nvSpPr>
-        <p:spPr>
-          <a:xfrm>
-            <a:off x="457200" y="1938528"/>
-            <a:ext cx="11277295" cy="566928"/>
-          </a:xfrm>
-          <a:prstGeom prst="roundRect">
-            <a:avLst>
-              <a:gd name="adj" fmla="val 12000"/>
-            </a:avLst>
-          </a:prstGeom>
-          <a:solidFill>
-            <a:srgbClr val="F2F2F2"/>
-          </a:solidFill>
-          <a:ln>
-            <a:noFill/>
-          </a:ln>
-        </p:spPr>
-        <p:style>
-          <a:lnRef idx="1">
-            <a:schemeClr val="accent1"/>
-          </a:lnRef>
-          <a:fillRef idx="3">
-            <a:schemeClr val="accent1"/>
-          </a:fillRef>
-          <a:effectRef idx="2">
-            <a:schemeClr val="accent1"/>
-          </a:effectRef>
-          <a:fontRef idx="minor">
-            <a:schemeClr val="lt1"/>
-          </a:fontRef>
-        </p:style>
-        <p:txBody>
-          <a:bodyPr rtlCol="0" anchor="ctr"/>
-          <a:lstStyle/>
-          <a:p>
-            <a:pPr algn="ctr"/>
-          </a:p>
-        </p:txBody>
-      </p:sp>
-      <p:sp>
-        <p:nvSpPr>
-          <p:cNvPr id="10" name="Rectangle 9"/>
-          <p:cNvSpPr/>
-          <p:nvPr/>
-        </p:nvSpPr>
-        <p:spPr>
-          <a:xfrm>
-            <a:off x="640080" y="2084832"/>
-            <a:ext cx="274320" cy="274320"/>
-          </a:xfrm>
-          <a:prstGeom prst="rect">
-            <a:avLst/>
-          </a:prstGeom>
-          <a:solidFill>
-            <a:srgbClr val="FFFFFF"/>
-          </a:solidFill>
-          <a:ln>
-            <a:solidFill>
-              <a:srgbClr val="333333"/>
-            </a:solidFill>
-          </a:ln>
-        </p:spPr>
-        <p:style>
-          <a:lnRef idx="1">
-            <a:schemeClr val="accent1"/>
-          </a:lnRef>
-          <a:fillRef idx="3">
-            <a:schemeClr val="accent1"/>
-          </a:fillRef>
-          <a:effectRef idx="2">
-            <a:schemeClr val="accent1"/>
-          </a:effectRef>
-          <a:fontRef idx="minor">
-            <a:schemeClr val="lt1"/>
-          </a:fontRef>
-        </p:style>
-        <p:txBody>
-          <a:bodyPr rtlCol="0" anchor="ctr"/>
-          <a:lstStyle/>
-          <a:p>
-            <a:pPr algn="ctr"/>
-          </a:p>
-        </p:txBody>
-      </p:sp>
-      <p:sp>
-        <p:nvSpPr>
-          <p:cNvPr id="11" name="Rectangle 10"/>
-          <p:cNvSpPr/>
-          <p:nvPr/>
-        </p:nvSpPr>
-        <p:spPr>
-          <a:xfrm>
-            <a:off x="640080" y="2084832"/>
-            <a:ext cx="73152" cy="274320"/>
-          </a:xfrm>
-          <a:prstGeom prst="rect">
-            <a:avLst/>
-          </a:prstGeom>
-          <a:solidFill>
-            <a:srgbClr val="269CCB"/>
-          </a:solidFill>
-          <a:ln>
-            <a:noFill/>
-          </a:ln>
-        </p:spPr>
-        <p:style>
-          <a:lnRef idx="1">
-            <a:schemeClr val="accent1"/>
-          </a:lnRef>
-          <a:fillRef idx="3">
-            <a:schemeClr val="accent1"/>
-          </a:fillRef>
-          <a:effectRef idx="2">
-            <a:schemeClr val="accent1"/>
-          </a:effectRef>
-          <a:fontRef idx="minor">
-            <a:schemeClr val="lt1"/>
-          </a:fontRef>
-        </p:style>
-        <p:txBody>
-          <a:bodyPr rtlCol="0" anchor="ctr"/>
-          <a:lstStyle/>
-          <a:p>
-            <a:pPr algn="ctr"/>
-          </a:p>
-        </p:txBody>
-      </p:sp>
-      <p:sp>
-        <p:nvSpPr>
-          <p:cNvPr id="12" name="TextBox 11"/>
-          <p:cNvSpPr txBox="1"/>
-          <p:nvPr/>
-        </p:nvSpPr>
-        <p:spPr>
-          <a:xfrm>
-            <a:off x="1097280" y="2029968"/>
-            <a:ext cx="10362895" cy="402336"/>
-          </a:xfrm>
-          <a:prstGeom prst="rect">
-            <a:avLst/>
-          </a:prstGeom>
-          <a:noFill/>
-        </p:spPr>
-        <p:txBody>
-          <a:bodyPr wrap="square" anchor="ctr"/>
-          <a:lstStyle/>
-          <a:p>
-            <a:r>
-              <a:rPr sz="1500" b="0" i="0">
+              <a:t>–   </a:t>
+            </a:r>
+            <a:r>
+              <a:rPr sz="2000" b="1" i="0">
                 <a:solidFill>
                   <a:srgbClr val="333333"/>
                 </a:solidFill>
                 <a:latin typeface="Calibri"/>
               </a:rPr>
-              <a:t>Cuando el recorrido llega a la ultima ficha y truena con IndexOutOfBoundsException, revise la condicion del for: el ultimo indice valido es igual a size() o es size() menos uno?</a:t>
-            </a:r>
-          </a:p>
-        </p:txBody>
-      </p:sp>
-      <p:sp>
-        <p:nvSpPr>
-          <p:cNvPr id="13" name="Rounded Rectangle 12"/>
-          <p:cNvSpPr/>
-          <p:nvPr/>
-        </p:nvSpPr>
-        <p:spPr>
-          <a:xfrm>
-            <a:off x="457200" y="2615184"/>
-            <a:ext cx="11277295" cy="566928"/>
-          </a:xfrm>
-          <a:prstGeom prst="roundRect">
-            <a:avLst>
-              <a:gd name="adj" fmla="val 12000"/>
-            </a:avLst>
-          </a:prstGeom>
-          <a:solidFill>
-            <a:srgbClr val="F2F2F2"/>
-          </a:solidFill>
-          <a:ln>
-            <a:noFill/>
-          </a:ln>
-        </p:spPr>
-        <p:style>
-          <a:lnRef idx="1">
-            <a:schemeClr val="accent1"/>
-          </a:lnRef>
-          <a:fillRef idx="3">
-            <a:schemeClr val="accent1"/>
-          </a:fillRef>
-          <a:effectRef idx="2">
-            <a:schemeClr val="accent1"/>
-          </a:effectRef>
-          <a:fontRef idx="minor">
-            <a:schemeClr val="lt1"/>
-          </a:fontRef>
-        </p:style>
-        <p:txBody>
-          <a:bodyPr rtlCol="0" anchor="ctr"/>
-          <a:lstStyle/>
-          <a:p>
-            <a:pPr algn="ctr"/>
-          </a:p>
-        </p:txBody>
-      </p:sp>
-      <p:sp>
-        <p:nvSpPr>
-          <p:cNvPr id="14" name="Rectangle 13"/>
-          <p:cNvSpPr/>
-          <p:nvPr/>
-        </p:nvSpPr>
-        <p:spPr>
-          <a:xfrm>
-            <a:off x="640080" y="2761488"/>
-            <a:ext cx="274320" cy="274320"/>
-          </a:xfrm>
-          <a:prstGeom prst="rect">
-            <a:avLst/>
-          </a:prstGeom>
-          <a:solidFill>
-            <a:srgbClr val="FFFFFF"/>
-          </a:solidFill>
-          <a:ln>
-            <a:solidFill>
-              <a:srgbClr val="333333"/>
-            </a:solidFill>
-          </a:ln>
-        </p:spPr>
-        <p:style>
-          <a:lnRef idx="1">
-            <a:schemeClr val="accent1"/>
-          </a:lnRef>
-          <a:fillRef idx="3">
-            <a:schemeClr val="accent1"/>
-          </a:fillRef>
-          <a:effectRef idx="2">
-            <a:schemeClr val="accent1"/>
-          </a:effectRef>
-          <a:fontRef idx="minor">
-            <a:schemeClr val="lt1"/>
-          </a:fontRef>
-        </p:style>
-        <p:txBody>
-          <a:bodyPr rtlCol="0" anchor="ctr"/>
-          <a:lstStyle/>
-          <a:p>
-            <a:pPr algn="ctr"/>
-          </a:p>
-        </p:txBody>
-      </p:sp>
-      <p:sp>
-        <p:nvSpPr>
-          <p:cNvPr id="15" name="Rectangle 14"/>
-          <p:cNvSpPr/>
-          <p:nvPr/>
-        </p:nvSpPr>
-        <p:spPr>
-          <a:xfrm>
-            <a:off x="640080" y="2761488"/>
-            <a:ext cx="73152" cy="274320"/>
-          </a:xfrm>
-          <a:prstGeom prst="rect">
-            <a:avLst/>
-          </a:prstGeom>
-          <a:solidFill>
-            <a:srgbClr val="269CCB"/>
-          </a:solidFill>
-          <a:ln>
-            <a:noFill/>
-          </a:ln>
-        </p:spPr>
-        <p:style>
-          <a:lnRef idx="1">
-            <a:schemeClr val="accent1"/>
-          </a:lnRef>
-          <a:fillRef idx="3">
-            <a:schemeClr val="accent1"/>
-          </a:fillRef>
-          <a:effectRef idx="2">
-            <a:schemeClr val="accent1"/>
-          </a:effectRef>
-          <a:fontRef idx="minor">
-            <a:schemeClr val="lt1"/>
-          </a:fontRef>
-        </p:style>
-        <p:txBody>
-          <a:bodyPr rtlCol="0" anchor="ctr"/>
-          <a:lstStyle/>
-          <a:p>
-            <a:pPr algn="ctr"/>
-          </a:p>
-        </p:txBody>
-      </p:sp>
-      <p:sp>
-        <p:nvSpPr>
-          <p:cNvPr id="16" name="TextBox 15"/>
-          <p:cNvSpPr txBox="1"/>
-          <p:nvPr/>
-        </p:nvSpPr>
-        <p:spPr>
-          <a:xfrm>
-            <a:off x="1097280" y="2706624"/>
-            <a:ext cx="10362895" cy="402336"/>
-          </a:xfrm>
-          <a:prstGeom prst="rect">
-            <a:avLst/>
-          </a:prstGeom>
-          <a:noFill/>
-        </p:spPr>
-        <p:txBody>
-          <a:bodyPr wrap="square" anchor="ctr"/>
-          <a:lstStyle/>
-          <a:p>
-            <a:r>
-              <a:rPr sz="1500" b="0" i="0">
+              <a:t>Herramienta:</a:t>
+            </a:r>
+            <a:r>
+              <a:rPr sz="2000" b="0" i="0">
                 <a:solidFill>
                   <a:srgbClr val="333333"/>
                 </a:solidFill>
                 <a:latin typeface="Calibri"/>
               </a:rPr>
-              <a:t>Si borra una mascota justo dentro de un for-each y aparece ConcurrentModificationException, quien deberia estar autorizado para sacar el elemento: la lista o el objeto que la esta recorriendo?</a:t>
-            </a:r>
-          </a:p>
-        </p:txBody>
-      </p:sp>
-      <p:sp>
-        <p:nvSpPr>
-          <p:cNvPr id="17" name="TextBox 16"/>
+              <a:t> Visual Studio Code (Java)</a:t>
+            </a:r>
+          </a:p>
+          <a:p>
+            <a:pPr>
+              <a:spcAft>
+                <a:spcPts val="800"/>
+              </a:spcAft>
+            </a:pPr>
+            <a:r>
+              <a:rPr sz="2000" b="0" i="0">
+                <a:solidFill>
+                  <a:srgbClr val="333333"/>
+                </a:solidFill>
+                <a:latin typeface="Calibri"/>
+              </a:rPr>
+              <a:t>–   </a:t>
+            </a:r>
+            <a:r>
+              <a:rPr sz="2000" b="1" i="0">
+                <a:solidFill>
+                  <a:srgbClr val="333333"/>
+                </a:solidFill>
+                <a:latin typeface="Calibri"/>
+              </a:rPr>
+              <a:t>Demo:</a:t>
+            </a:r>
+            <a:r>
+              <a:rPr sz="2000" b="0" i="0">
+                <a:solidFill>
+                  <a:srgbClr val="333333"/>
+                </a:solidFill>
+                <a:latin typeface="Calibri"/>
+              </a:rPr>
+              <a:t> El docente muestra un Mascota[3] que revienta al intentar guardar la cuarta ficha y luego el mismo caso resuelto con ArrayList, imprimiendo size() despues de cada operacion.</a:t>
+            </a:r>
+          </a:p>
+          <a:p>
+            <a:pPr>
+              <a:spcAft>
+                <a:spcPts val="800"/>
+              </a:spcAft>
+            </a:pPr>
+            <a:r>
+              <a:rPr sz="2000" b="0" i="0">
+                <a:solidFill>
+                  <a:srgbClr val="333333"/>
+                </a:solidFill>
+                <a:latin typeface="Calibri"/>
+              </a:rPr>
+              <a:t>–   Mismo dominio VetCare — no otro ejemplo.</a:t>
+            </a:r>
+          </a:p>
+        </p:txBody>
+      </p:sp>
+      <p:sp>
+        <p:nvSpPr>
+          <p:cNvPr id="6" name="TextBox 5"/>
           <p:cNvSpPr txBox="1"/>
           <p:nvPr/>
         </p:nvSpPr>
@@ -4294,7 +3910,7 @@
                 </a:solidFill>
                 <a:latin typeface="Calibri"/>
               </a:rPr>
-              <a:t>Criterios de exito / entregable</a:t>
+              <a:t>Taller PI — por que importa</a:t>
             </a:r>
           </a:p>
         </p:txBody>
@@ -4342,7 +3958,7 @@
                 </a:solidFill>
                 <a:latin typeface="Calibri"/>
               </a:rPr>
-              <a:t>Entregable:</a:t>
+              <a:t>Por que importa al PI:</a:t>
             </a:r>
             <a:r>
               <a:rPr sz="2000" b="0" i="0">
@@ -4351,7 +3967,7 @@
                 </a:solidFill>
                 <a:latin typeface="Calibri"/>
               </a:rPr>
-              <a:t> Proyecto Java con las clases Mascota y RegistroMascotas y un menu de consola que agrega, lista, busca por ID y elimina mascotas, comprimido y subido a la plataforma del curso.</a:t>
+              <a:t> VetCare no puede tener un tope de pacientes escrito a mano en el codigo, y toda la persistencia en CSV de las clases finales va a leer y escribir exactamente esta lista de mascotas.</a:t>
             </a:r>
           </a:p>
           <a:p>
@@ -4367,25 +3983,7 @@
                 </a:solidFill>
                 <a:latin typeface="Calibri"/>
               </a:rPr>
-              <a:t>–   </a:t>
-            </a:r>
-            <a:r>
-              <a:rPr sz="2000" b="1" i="0">
-                <a:solidFill>
-                  <a:srgbClr val="333333"/>
-                </a:solidFill>
-                <a:latin typeface="Calibri"/>
-              </a:rPr>
-              <a:t>Exito:</a:t>
-            </a:r>
-            <a:r>
-              <a:rPr sz="2000" b="0" i="0">
-                <a:solidFill>
-                  <a:srgbClr val="333333"/>
-                </a:solidFill>
-                <a:latin typeface="Calibri"/>
-              </a:rPr>
-              <a:t> El registro acepta mas de tres mascotas sin declarar ningun tamano fijo y size() refleja el numero real de fichas activas.</a:t>
+              <a:t>–   El requisito tecnico del PI pide colecciones de Java, y ArrayList es la coleccion base sobre la que despues montaremos la cola de la sala de espera, el HashMap de expedientes y la tabla de Swing.</a:t>
             </a:r>
           </a:p>
           <a:p>
@@ -4401,127 +3999,7 @@
                 </a:solidFill>
                 <a:latin typeface="Calibri"/>
               </a:rPr>
-              <a:t>–   </a:t>
-            </a:r>
-            <a:r>
-              <a:rPr sz="2000" b="1" i="0">
-                <a:solidFill>
-                  <a:srgbClr val="333333"/>
-                </a:solidFill>
-                <a:latin typeface="Calibri"/>
-              </a:rPr>
-              <a:t>Exito:</a:t>
-            </a:r>
-            <a:r>
-              <a:rPr sz="2000" b="0" i="0">
-                <a:solidFill>
-                  <a:srgbClr val="333333"/>
-                </a:solidFill>
-                <a:latin typeface="Calibri"/>
-              </a:rPr>
-              <a:t> Al intentar agregar un ID ya existente el programa lo rechaza con mensaje claro y no aumenta el tamano de la lista.</a:t>
-            </a:r>
-          </a:p>
-          <a:p>
-            <a:pPr>
-              <a:spcAft>
-                <a:spcPts val="800"/>
-              </a:spcAft>
-            </a:pPr>
-            <a:r>
-              <a:rPr sz="2000" b="0" i="0">
-                <a:solidFill>
-                  <a:srgbClr val="333333"/>
-                </a:solidFill>
-                <a:latin typeface="Calibri"/>
-              </a:rPr>
-              <a:t>–   </a:t>
-            </a:r>
-            <a:r>
-              <a:rPr sz="2000" b="1" i="0">
-                <a:solidFill>
-                  <a:srgbClr val="333333"/>
-                </a:solidFill>
-                <a:latin typeface="Calibri"/>
-              </a:rPr>
-              <a:t>Exito:</a:t>
-            </a:r>
-            <a:r>
-              <a:rPr sz="2000" b="0" i="0">
-                <a:solidFill>
-                  <a:srgbClr val="333333"/>
-                </a:solidFill>
-                <a:latin typeface="Calibri"/>
-              </a:rPr>
-              <a:t> buscarPorId devuelve la mascota correcta cuando existe y maneja el caso de no encontrada sin lanzar NullPointerException.</a:t>
-            </a:r>
-          </a:p>
-          <a:p>
-            <a:pPr>
-              <a:spcAft>
-                <a:spcPts val="800"/>
-              </a:spcAft>
-            </a:pPr>
-            <a:r>
-              <a:rPr sz="2000" b="0" i="0">
-                <a:solidFill>
-                  <a:srgbClr val="333333"/>
-                </a:solidFill>
-                <a:latin typeface="Calibri"/>
-              </a:rPr>
-              <a:t>–   </a:t>
-            </a:r>
-            <a:r>
-              <a:rPr sz="2000" b="1" i="0">
-                <a:solidFill>
-                  <a:srgbClr val="333333"/>
-                </a:solidFill>
-                <a:latin typeface="Calibri"/>
-              </a:rPr>
-              <a:t>Exito:</a:t>
-            </a:r>
-            <a:r>
-              <a:rPr sz="2000" b="0" i="0">
-                <a:solidFill>
-                  <a:srgbClr val="333333"/>
-                </a:solidFill>
-                <a:latin typeface="Calibri"/>
-              </a:rPr>
-              <a:t> La eliminacion masiva por edad se hace con Iterator o removeIf y el programa termina sin ConcurrentModificationException.</a:t>
-            </a:r>
-          </a:p>
-          <a:p>
-            <a:pPr>
-              <a:spcAft>
-                <a:spcPts val="800"/>
-              </a:spcAft>
-            </a:pPr>
-            <a:r>
-              <a:rPr sz="2000" b="0" i="0">
-                <a:solidFill>
-                  <a:srgbClr val="333333"/>
-                </a:solidFill>
-                <a:latin typeface="Calibri"/>
-              </a:rPr>
-              <a:t>–   </a:t>
-            </a:r>
-            <a:r>
-              <a:rPr sz="2000" b="1" i="0">
-                <a:solidFill>
-                  <a:srgbClr val="333333"/>
-                </a:solidFill>
-                <a:latin typeface="Calibri"/>
-              </a:rPr>
-              <a:t>Entrega en la plataforma del curso</a:t>
-            </a:r>
-            <a:r>
-              <a:rPr sz="2000" b="0" i="0">
-                <a:solidFill>
-                  <a:srgbClr val="333333"/>
-                </a:solidFill>
-                <a:latin typeface="Calibri"/>
-              </a:rPr>
-              <a:t> — en la fecha que indique el docente.</a:t>
+              <a:t>–   Encapsular la lista dentro de RegistroMascotas es lo que permitira cambiar la interfaz de consola por una ventana grafica sin reescribir la logica del negocio.</a:t>
             </a:r>
           </a:p>
         </p:txBody>
@@ -4702,109 +4180,21 @@
                 </a:solidFill>
                 <a:latin typeface="Calibri"/>
               </a:rPr>
-              <a:t>Para el PI esta semana</a:t>
-            </a:r>
-          </a:p>
-        </p:txBody>
-      </p:sp>
-      <p:sp>
-        <p:nvSpPr>
-          <p:cNvPr id="5" name="Rounded Rectangle 4"/>
-          <p:cNvSpPr/>
-          <p:nvPr/>
-        </p:nvSpPr>
-        <p:spPr>
-          <a:xfrm>
-            <a:off x="457200" y="1261872"/>
-            <a:ext cx="11277295" cy="1051560"/>
-          </a:xfrm>
-          <a:prstGeom prst="roundRect">
-            <a:avLst>
-              <a:gd name="adj" fmla="val 12000"/>
-            </a:avLst>
-          </a:prstGeom>
-          <a:solidFill>
-            <a:srgbClr val="E8F4FA"/>
-          </a:solidFill>
-          <a:ln>
-            <a:noFill/>
-          </a:ln>
-        </p:spPr>
-        <p:style>
-          <a:lnRef idx="1">
-            <a:schemeClr val="accent1"/>
-          </a:lnRef>
-          <a:fillRef idx="3">
-            <a:schemeClr val="accent1"/>
-          </a:fillRef>
-          <a:effectRef idx="2">
-            <a:schemeClr val="accent1"/>
-          </a:effectRef>
-          <a:fontRef idx="minor">
-            <a:schemeClr val="lt1"/>
-          </a:fontRef>
-        </p:style>
-        <p:txBody>
-          <a:bodyPr rtlCol="0" anchor="ctr"/>
-          <a:lstStyle/>
-          <a:p>
-            <a:pPr algn="ctr"/>
-          </a:p>
-        </p:txBody>
-      </p:sp>
-      <p:sp>
-        <p:nvSpPr>
-          <p:cNvPr id="6" name="Rectangle 5"/>
-          <p:cNvSpPr/>
-          <p:nvPr/>
-        </p:nvSpPr>
-        <p:spPr>
-          <a:xfrm>
-            <a:off x="457200" y="1261872"/>
-            <a:ext cx="128016" cy="1051560"/>
-          </a:xfrm>
-          <a:prstGeom prst="rect">
-            <a:avLst/>
-          </a:prstGeom>
-          <a:solidFill>
-            <a:srgbClr val="269CCB"/>
-          </a:solidFill>
-          <a:ln>
-            <a:noFill/>
-          </a:ln>
-        </p:spPr>
-        <p:style>
-          <a:lnRef idx="1">
-            <a:schemeClr val="accent1"/>
-          </a:lnRef>
-          <a:fillRef idx="3">
-            <a:schemeClr val="accent1"/>
-          </a:fillRef>
-          <a:effectRef idx="2">
-            <a:schemeClr val="accent1"/>
-          </a:effectRef>
-          <a:fontRef idx="minor">
-            <a:schemeClr val="lt1"/>
-          </a:fontRef>
-        </p:style>
-        <p:txBody>
-          <a:bodyPr rtlCol="0" anchor="ctr"/>
-          <a:lstStyle/>
-          <a:p>
-            <a:pPr algn="ctr"/>
-          </a:p>
-        </p:txBody>
-      </p:sp>
-      <p:sp>
-        <p:nvSpPr>
-          <p:cNvPr id="7" name="TextBox 6"/>
+              <a:t>Taller PI — punto de partida</a:t>
+            </a:r>
+          </a:p>
+        </p:txBody>
+      </p:sp>
+      <p:sp>
+        <p:nvSpPr>
+          <p:cNvPr id="5" name="TextBox 4"/>
           <p:cNvSpPr txBox="1"/>
           <p:nvPr/>
         </p:nvSpPr>
         <p:spPr>
           <a:xfrm>
-            <a:off x="777240" y="1399031"/>
-            <a:ext cx="10774375" cy="822959"/>
+            <a:off x="457200" y="1170432"/>
+            <a:ext cx="11277295" cy="5230368"/>
           </a:xfrm>
           <a:prstGeom prst="rect">
             <a:avLst/>
@@ -4817,313 +4207,58 @@
           </a:bodyPr>
           <a:lstStyle/>
           <a:p>
-            <a:r>
-              <a:rPr sz="1200" b="1" i="0">
-                <a:solidFill>
-                  <a:srgbClr val="269CCB"/>
-                </a:solidFill>
-                <a:latin typeface="Calibri"/>
-              </a:rPr>
-              <a:t>Info</a:t>
-            </a:r>
-          </a:p>
-          <a:p>
             <a:pPr>
-              <a:spcBef>
-                <a:spcPts val="400"/>
-              </a:spcBef>
+              <a:spcAft>
+                <a:spcPts val="800"/>
+              </a:spcAft>
             </a:pPr>
             <a:r>
-              <a:rPr sz="1400" b="0" i="0">
+              <a:rPr sz="2000" b="0" i="0">
                 <a:solidFill>
                   <a:srgbClr val="333333"/>
                 </a:solidFill>
                 <a:latin typeface="Calibri"/>
               </a:rPr>
-              <a:t>Hito: El registro de mascotas de VetCare deja de vivir en un arreglo de tamano fijo y pasa a un ArrayList&lt;Mascota&gt; que crece con la clinica.</a:t>
-            </a:r>
-          </a:p>
-        </p:txBody>
-      </p:sp>
-      <p:sp>
-        <p:nvSpPr>
-          <p:cNvPr id="8" name="Rounded Rectangle 7"/>
-          <p:cNvSpPr/>
-          <p:nvPr/>
-        </p:nvSpPr>
-        <p:spPr>
-          <a:xfrm>
-            <a:off x="457200" y="2478024"/>
-            <a:ext cx="11277295" cy="1051560"/>
-          </a:xfrm>
-          <a:prstGeom prst="roundRect">
-            <a:avLst>
-              <a:gd name="adj" fmla="val 12000"/>
-            </a:avLst>
-          </a:prstGeom>
-          <a:solidFill>
-            <a:srgbClr val="FFF8E1"/>
-          </a:solidFill>
-          <a:ln>
-            <a:noFill/>
-          </a:ln>
-        </p:spPr>
-        <p:style>
-          <a:lnRef idx="1">
-            <a:schemeClr val="accent1"/>
-          </a:lnRef>
-          <a:fillRef idx="3">
-            <a:schemeClr val="accent1"/>
-          </a:fillRef>
-          <a:effectRef idx="2">
-            <a:schemeClr val="accent1"/>
-          </a:effectRef>
-          <a:fontRef idx="minor">
-            <a:schemeClr val="lt1"/>
-          </a:fontRef>
-        </p:style>
-        <p:txBody>
-          <a:bodyPr rtlCol="0" anchor="ctr"/>
-          <a:lstStyle/>
-          <a:p>
-            <a:pPr algn="ctr"/>
-          </a:p>
-        </p:txBody>
-      </p:sp>
-      <p:sp>
-        <p:nvSpPr>
-          <p:cNvPr id="9" name="Rectangle 8"/>
-          <p:cNvSpPr/>
-          <p:nvPr/>
-        </p:nvSpPr>
-        <p:spPr>
-          <a:xfrm>
-            <a:off x="457200" y="2478024"/>
-            <a:ext cx="128016" cy="1051560"/>
-          </a:xfrm>
-          <a:prstGeom prst="rect">
-            <a:avLst/>
-          </a:prstGeom>
-          <a:solidFill>
-            <a:srgbClr val="FFD000"/>
-          </a:solidFill>
-          <a:ln>
-            <a:noFill/>
-          </a:ln>
-        </p:spPr>
-        <p:style>
-          <a:lnRef idx="1">
-            <a:schemeClr val="accent1"/>
-          </a:lnRef>
-          <a:fillRef idx="3">
-            <a:schemeClr val="accent1"/>
-          </a:fillRef>
-          <a:effectRef idx="2">
-            <a:schemeClr val="accent1"/>
-          </a:effectRef>
-          <a:fontRef idx="minor">
-            <a:schemeClr val="lt1"/>
-          </a:fontRef>
-        </p:style>
-        <p:txBody>
-          <a:bodyPr rtlCol="0" anchor="ctr"/>
-          <a:lstStyle/>
-          <a:p>
-            <a:pPr algn="ctr"/>
-          </a:p>
-        </p:txBody>
-      </p:sp>
-      <p:sp>
-        <p:nvSpPr>
-          <p:cNvPr id="10" name="TextBox 9"/>
-          <p:cNvSpPr txBox="1"/>
-          <p:nvPr/>
-        </p:nvSpPr>
-        <p:spPr>
-          <a:xfrm>
-            <a:off x="777240" y="2615184"/>
-            <a:ext cx="10774375" cy="822959"/>
-          </a:xfrm>
-          <a:prstGeom prst="rect">
-            <a:avLst/>
-          </a:prstGeom>
-          <a:noFill/>
-        </p:spPr>
-        <p:txBody>
-          <a:bodyPr wrap="square">
-            <a:spAutoFit/>
-          </a:bodyPr>
-          <a:lstStyle/>
-          <a:p>
-            <a:r>
-              <a:rPr sz="1200" b="1" i="0">
-                <a:solidFill>
-                  <a:srgbClr val="FFD000"/>
-                </a:solidFill>
-                <a:latin typeface="Calibri"/>
-              </a:rPr>
-              <a:t>Aclaración</a:t>
+              <a:t>–   La recepcionista de Huellitas transcribio seis fichas de papel: M-001 Firulais canino 4 anios de Ana Gomez, M-002 Michi felino 2 anios de Luis Perez, M-003 Rocky canino 9 anios de Ana Gomez, M-004 Nieve felino 1 ano de Sara Diaz, M-005 Toby canino 11 anios de Sara Diaz y una ficha repetida de M-001.</a:t>
             </a:r>
           </a:p>
           <a:p>
             <a:pPr>
-              <a:spcBef>
-                <a:spcPts val="400"/>
-              </a:spcBef>
+              <a:spcAft>
+                <a:spcPts val="800"/>
+              </a:spcAft>
             </a:pPr>
             <a:r>
-              <a:rPr sz="1400" b="0" i="0">
+              <a:rPr sz="2000" b="0" i="0">
                 <a:solidFill>
                   <a:srgbClr val="333333"/>
                 </a:solidFill>
                 <a:latin typeface="Calibri"/>
               </a:rPr>
-              <a:t>Enunciado completo: Clases/Proyecto Integrador/ (VetCare).</a:t>
-            </a:r>
-          </a:p>
-        </p:txBody>
-      </p:sp>
-      <p:sp>
-        <p:nvSpPr>
-          <p:cNvPr id="11" name="Rounded Rectangle 10"/>
-          <p:cNvSpPr/>
-          <p:nvPr/>
-        </p:nvSpPr>
-        <p:spPr>
-          <a:xfrm>
-            <a:off x="457200" y="3694176"/>
-            <a:ext cx="11277295" cy="1051560"/>
-          </a:xfrm>
-          <a:prstGeom prst="roundRect">
-            <a:avLst>
-              <a:gd name="adj" fmla="val 12000"/>
-            </a:avLst>
-          </a:prstGeom>
-          <a:solidFill>
-            <a:srgbClr val="FBE4E4"/>
-          </a:solidFill>
-          <a:ln>
-            <a:noFill/>
-          </a:ln>
-        </p:spPr>
-        <p:style>
-          <a:lnRef idx="1">
-            <a:schemeClr val="accent1"/>
-          </a:lnRef>
-          <a:fillRef idx="3">
-            <a:schemeClr val="accent1"/>
-          </a:fillRef>
-          <a:effectRef idx="2">
-            <a:schemeClr val="accent1"/>
-          </a:effectRef>
-          <a:fontRef idx="minor">
-            <a:schemeClr val="lt1"/>
-          </a:fontRef>
-        </p:style>
-        <p:txBody>
-          <a:bodyPr rtlCol="0" anchor="ctr"/>
-          <a:lstStyle/>
-          <a:p>
-            <a:pPr algn="ctr"/>
-          </a:p>
-        </p:txBody>
-      </p:sp>
-      <p:sp>
-        <p:nvSpPr>
-          <p:cNvPr id="12" name="Rectangle 11"/>
-          <p:cNvSpPr/>
-          <p:nvPr/>
-        </p:nvSpPr>
-        <p:spPr>
-          <a:xfrm>
-            <a:off x="457200" y="3694176"/>
-            <a:ext cx="128016" cy="1051560"/>
-          </a:xfrm>
-          <a:prstGeom prst="rect">
-            <a:avLst/>
-          </a:prstGeom>
-          <a:solidFill>
-            <a:srgbClr val="A02030"/>
-          </a:solidFill>
-          <a:ln>
-            <a:noFill/>
-          </a:ln>
-        </p:spPr>
-        <p:style>
-          <a:lnRef idx="1">
-            <a:schemeClr val="accent1"/>
-          </a:lnRef>
-          <a:fillRef idx="3">
-            <a:schemeClr val="accent1"/>
-          </a:fillRef>
-          <a:effectRef idx="2">
-            <a:schemeClr val="accent1"/>
-          </a:effectRef>
-          <a:fontRef idx="minor">
-            <a:schemeClr val="lt1"/>
-          </a:fontRef>
-        </p:style>
-        <p:txBody>
-          <a:bodyPr rtlCol="0" anchor="ctr"/>
-          <a:lstStyle/>
-          <a:p>
-            <a:pPr algn="ctr"/>
-          </a:p>
-        </p:txBody>
-      </p:sp>
-      <p:sp>
-        <p:nvSpPr>
-          <p:cNvPr id="13" name="TextBox 12"/>
-          <p:cNvSpPr txBox="1"/>
-          <p:nvPr/>
-        </p:nvSpPr>
-        <p:spPr>
-          <a:xfrm>
-            <a:off x="777240" y="3831336"/>
-            <a:ext cx="10774375" cy="822959"/>
-          </a:xfrm>
-          <a:prstGeom prst="rect">
-            <a:avLst/>
-          </a:prstGeom>
-          <a:noFill/>
-        </p:spPr>
-        <p:txBody>
-          <a:bodyPr wrap="square">
-            <a:spAutoFit/>
-          </a:bodyPr>
-          <a:lstStyle/>
-          <a:p>
-            <a:r>
-              <a:rPr sz="1200" b="1" i="0">
-                <a:solidFill>
-                  <a:srgbClr val="A02030"/>
-                </a:solidFill>
-                <a:latin typeface="Calibri"/>
-              </a:rPr>
-              <a:t>Atención</a:t>
+              <a:t>–   El codigo de partida es un Mascota[3] que ya no admite mas fichas y lanza ArrayIndexOutOfBoundsException al guardar la cuarta.</a:t>
             </a:r>
           </a:p>
           <a:p>
             <a:pPr>
-              <a:spcBef>
-                <a:spcPts val="400"/>
-              </a:spcBef>
+              <a:spcAft>
+                <a:spcPts val="800"/>
+              </a:spcAft>
             </a:pPr>
             <a:r>
-              <a:rPr sz="1400" b="0" i="0">
+              <a:rPr sz="2000" b="0" i="0">
                 <a:solidFill>
                   <a:srgbClr val="333333"/>
                 </a:solidFill>
                 <a:latin typeface="Calibri"/>
               </a:rPr>
-              <a:t>Entrega del taller, si el docente lo asigna · en la fecha que indique el docente.</a:t>
-            </a:r>
-          </a:p>
-        </p:txBody>
-      </p:sp>
-      <p:sp>
-        <p:nvSpPr>
-          <p:cNvPr id="14" name="TextBox 13"/>
+              <a:t>–   No hay archivos ni base de datos todavia: todo vive en memoria durante la ejecucion, y al cerrar el programa los datos se pierden (eso se resuelve en las clases de persistencia).</a:t>
+            </a:r>
+          </a:p>
+        </p:txBody>
+      </p:sp>
+      <p:sp>
+        <p:nvSpPr>
+          <p:cNvPr id="6" name="TextBox 5"/>
           <p:cNvSpPr txBox="1"/>
           <p:nvPr/>
         </p:nvSpPr>
@@ -5191,6 +4326,2641 @@
         <p:spPr>
           <a:xfrm>
             <a:off x="0" y="0"/>
+            <a:ext cx="12191695" cy="960120"/>
+          </a:xfrm>
+          <a:prstGeom prst="rect">
+            <a:avLst/>
+          </a:prstGeom>
+          <a:solidFill>
+            <a:srgbClr val="095292"/>
+          </a:solidFill>
+          <a:ln>
+            <a:noFill/>
+          </a:ln>
+        </p:spPr>
+        <p:style>
+          <a:lnRef idx="1">
+            <a:schemeClr val="accent1"/>
+          </a:lnRef>
+          <a:fillRef idx="3">
+            <a:schemeClr val="accent1"/>
+          </a:fillRef>
+          <a:effectRef idx="2">
+            <a:schemeClr val="accent1"/>
+          </a:effectRef>
+          <a:fontRef idx="minor">
+            <a:schemeClr val="lt1"/>
+          </a:fontRef>
+        </p:style>
+        <p:txBody>
+          <a:bodyPr rtlCol="0" anchor="ctr"/>
+          <a:lstStyle/>
+          <a:p>
+            <a:pPr algn="ctr"/>
+          </a:p>
+        </p:txBody>
+      </p:sp>
+      <p:sp>
+        <p:nvSpPr>
+          <p:cNvPr id="3" name="Rectangle 2"/>
+          <p:cNvSpPr/>
+          <p:nvPr/>
+        </p:nvSpPr>
+        <p:spPr>
+          <a:xfrm>
+            <a:off x="0" y="960120"/>
+            <a:ext cx="12191695" cy="41148"/>
+          </a:xfrm>
+          <a:prstGeom prst="rect">
+            <a:avLst/>
+          </a:prstGeom>
+          <a:solidFill>
+            <a:srgbClr val="FFD000"/>
+          </a:solidFill>
+          <a:ln>
+            <a:noFill/>
+          </a:ln>
+        </p:spPr>
+        <p:style>
+          <a:lnRef idx="1">
+            <a:schemeClr val="accent1"/>
+          </a:lnRef>
+          <a:fillRef idx="3">
+            <a:schemeClr val="accent1"/>
+          </a:fillRef>
+          <a:effectRef idx="2">
+            <a:schemeClr val="accent1"/>
+          </a:effectRef>
+          <a:fontRef idx="minor">
+            <a:schemeClr val="lt1"/>
+          </a:fontRef>
+        </p:style>
+        <p:txBody>
+          <a:bodyPr rtlCol="0" anchor="ctr"/>
+          <a:lstStyle/>
+          <a:p>
+            <a:pPr algn="ctr"/>
+          </a:p>
+        </p:txBody>
+      </p:sp>
+      <p:sp>
+        <p:nvSpPr>
+          <p:cNvPr id="4" name="TextBox 3"/>
+          <p:cNvSpPr txBox="1"/>
+          <p:nvPr/>
+        </p:nvSpPr>
+        <p:spPr>
+          <a:xfrm>
+            <a:off x="457200" y="164592"/>
+            <a:ext cx="11277295" cy="502920"/>
+          </a:xfrm>
+          <a:prstGeom prst="rect">
+            <a:avLst/>
+          </a:prstGeom>
+          <a:noFill/>
+        </p:spPr>
+        <p:txBody>
+          <a:bodyPr wrap="square">
+            <a:spAutoFit/>
+          </a:bodyPr>
+          <a:lstStyle/>
+          <a:p>
+            <a:r>
+              <a:rPr sz="2600" b="1" i="0">
+                <a:solidFill>
+                  <a:srgbClr val="FFFFFF"/>
+                </a:solidFill>
+                <a:latin typeface="Calibri"/>
+              </a:rPr>
+              <a:t>Taller PI — pasos guiados</a:t>
+            </a:r>
+          </a:p>
+        </p:txBody>
+      </p:sp>
+      <p:sp>
+        <p:nvSpPr>
+          <p:cNvPr id="5" name="Rounded Rectangle 4"/>
+          <p:cNvSpPr/>
+          <p:nvPr/>
+        </p:nvSpPr>
+        <p:spPr>
+          <a:xfrm>
+            <a:off x="457200" y="1234440"/>
+            <a:ext cx="11277295" cy="950976"/>
+          </a:xfrm>
+          <a:prstGeom prst="roundRect">
+            <a:avLst>
+              <a:gd name="adj" fmla="val 12000"/>
+            </a:avLst>
+          </a:prstGeom>
+          <a:solidFill>
+            <a:srgbClr val="F2F2F2"/>
+          </a:solidFill>
+          <a:ln>
+            <a:noFill/>
+          </a:ln>
+        </p:spPr>
+        <p:style>
+          <a:lnRef idx="1">
+            <a:schemeClr val="accent1"/>
+          </a:lnRef>
+          <a:fillRef idx="3">
+            <a:schemeClr val="accent1"/>
+          </a:fillRef>
+          <a:effectRef idx="2">
+            <a:schemeClr val="accent1"/>
+          </a:effectRef>
+          <a:fontRef idx="minor">
+            <a:schemeClr val="lt1"/>
+          </a:fontRef>
+        </p:style>
+        <p:txBody>
+          <a:bodyPr rtlCol="0" anchor="ctr"/>
+          <a:lstStyle/>
+          <a:p>
+            <a:pPr algn="ctr"/>
+          </a:p>
+        </p:txBody>
+      </p:sp>
+      <p:sp>
+        <p:nvSpPr>
+          <p:cNvPr id="6" name="Rounded Rectangle 5"/>
+          <p:cNvSpPr/>
+          <p:nvPr/>
+        </p:nvSpPr>
+        <p:spPr>
+          <a:xfrm>
+            <a:off x="594360" y="1490472"/>
+            <a:ext cx="438912" cy="438912"/>
+          </a:xfrm>
+          <a:prstGeom prst="roundRect">
+            <a:avLst>
+              <a:gd name="adj" fmla="val 12000"/>
+            </a:avLst>
+          </a:prstGeom>
+          <a:solidFill>
+            <a:srgbClr val="095292"/>
+          </a:solidFill>
+          <a:ln>
+            <a:noFill/>
+          </a:ln>
+        </p:spPr>
+        <p:style>
+          <a:lnRef idx="1">
+            <a:schemeClr val="accent1"/>
+          </a:lnRef>
+          <a:fillRef idx="3">
+            <a:schemeClr val="accent1"/>
+          </a:fillRef>
+          <a:effectRef idx="2">
+            <a:schemeClr val="accent1"/>
+          </a:effectRef>
+          <a:fontRef idx="minor">
+            <a:schemeClr val="lt1"/>
+          </a:fontRef>
+        </p:style>
+        <p:txBody>
+          <a:bodyPr rtlCol="0" anchor="ctr"/>
+          <a:lstStyle/>
+          <a:p>
+            <a:pPr algn="ctr"/>
+          </a:p>
+        </p:txBody>
+      </p:sp>
+      <p:sp>
+        <p:nvSpPr>
+          <p:cNvPr id="7" name="TextBox 6"/>
+          <p:cNvSpPr txBox="1"/>
+          <p:nvPr/>
+        </p:nvSpPr>
+        <p:spPr>
+          <a:xfrm>
+            <a:off x="594360" y="1490472"/>
+            <a:ext cx="438912" cy="438912"/>
+          </a:xfrm>
+          <a:prstGeom prst="rect">
+            <a:avLst/>
+          </a:prstGeom>
+          <a:noFill/>
+        </p:spPr>
+        <p:txBody>
+          <a:bodyPr wrap="square" anchor="ctr"/>
+          <a:lstStyle/>
+          <a:p>
+            <a:pPr algn="ctr"/>
+            <a:r>
+              <a:rPr sz="1600" b="1" i="0">
+                <a:solidFill>
+                  <a:srgbClr val="FFFFFF"/>
+                </a:solidFill>
+                <a:latin typeface="Calibri"/>
+              </a:rPr>
+              <a:t>1</a:t>
+            </a:r>
+          </a:p>
+        </p:txBody>
+      </p:sp>
+      <p:sp>
+        <p:nvSpPr>
+          <p:cNvPr id="8" name="TextBox 7"/>
+          <p:cNvSpPr txBox="1"/>
+          <p:nvPr/>
+        </p:nvSpPr>
+        <p:spPr>
+          <a:xfrm>
+            <a:off x="1188720" y="1325880"/>
+            <a:ext cx="10271455" cy="786384"/>
+          </a:xfrm>
+          <a:prstGeom prst="rect">
+            <a:avLst/>
+          </a:prstGeom>
+          <a:noFill/>
+        </p:spPr>
+        <p:txBody>
+          <a:bodyPr wrap="square" anchor="ctr"/>
+          <a:lstStyle/>
+          <a:p>
+            <a:r>
+              <a:rPr sz="1400" b="1" i="0">
+                <a:solidFill>
+                  <a:srgbClr val="095292"/>
+                </a:solidFill>
+                <a:latin typeface="Calibri"/>
+              </a:rPr>
+              <a:t>Cree en VS Code el proyecto Java llamado VetCare con paquete vetcare, y dentro de el la clase Mascota con los atributos privados id, nombre, especie, edad y dueno, su constructor completo, sus getters y el metodo toString(); verifique imprimiendo una mascota de prueba y confirmando que en consola sale el texto legible y no vetcare.Mascota@1a2b3c.</a:t>
+            </a:r>
+          </a:p>
+        </p:txBody>
+      </p:sp>
+      <p:sp>
+        <p:nvSpPr>
+          <p:cNvPr id="9" name="Rounded Rectangle 8"/>
+          <p:cNvSpPr/>
+          <p:nvPr/>
+        </p:nvSpPr>
+        <p:spPr>
+          <a:xfrm>
+            <a:off x="457200" y="2276856"/>
+            <a:ext cx="11277295" cy="950976"/>
+          </a:xfrm>
+          <a:prstGeom prst="roundRect">
+            <a:avLst>
+              <a:gd name="adj" fmla="val 12000"/>
+            </a:avLst>
+          </a:prstGeom>
+          <a:solidFill>
+            <a:srgbClr val="E8F4FA"/>
+          </a:solidFill>
+          <a:ln>
+            <a:noFill/>
+          </a:ln>
+        </p:spPr>
+        <p:style>
+          <a:lnRef idx="1">
+            <a:schemeClr val="accent1"/>
+          </a:lnRef>
+          <a:fillRef idx="3">
+            <a:schemeClr val="accent1"/>
+          </a:fillRef>
+          <a:effectRef idx="2">
+            <a:schemeClr val="accent1"/>
+          </a:effectRef>
+          <a:fontRef idx="minor">
+            <a:schemeClr val="lt1"/>
+          </a:fontRef>
+        </p:style>
+        <p:txBody>
+          <a:bodyPr rtlCol="0" anchor="ctr"/>
+          <a:lstStyle/>
+          <a:p>
+            <a:pPr algn="ctr"/>
+          </a:p>
+        </p:txBody>
+      </p:sp>
+      <p:sp>
+        <p:nvSpPr>
+          <p:cNvPr id="10" name="Rounded Rectangle 9"/>
+          <p:cNvSpPr/>
+          <p:nvPr/>
+        </p:nvSpPr>
+        <p:spPr>
+          <a:xfrm>
+            <a:off x="594360" y="2532888"/>
+            <a:ext cx="438912" cy="438912"/>
+          </a:xfrm>
+          <a:prstGeom prst="roundRect">
+            <a:avLst>
+              <a:gd name="adj" fmla="val 12000"/>
+            </a:avLst>
+          </a:prstGeom>
+          <a:solidFill>
+            <a:srgbClr val="095292"/>
+          </a:solidFill>
+          <a:ln>
+            <a:noFill/>
+          </a:ln>
+        </p:spPr>
+        <p:style>
+          <a:lnRef idx="1">
+            <a:schemeClr val="accent1"/>
+          </a:lnRef>
+          <a:fillRef idx="3">
+            <a:schemeClr val="accent1"/>
+          </a:fillRef>
+          <a:effectRef idx="2">
+            <a:schemeClr val="accent1"/>
+          </a:effectRef>
+          <a:fontRef idx="minor">
+            <a:schemeClr val="lt1"/>
+          </a:fontRef>
+        </p:style>
+        <p:txBody>
+          <a:bodyPr rtlCol="0" anchor="ctr"/>
+          <a:lstStyle/>
+          <a:p>
+            <a:pPr algn="ctr"/>
+          </a:p>
+        </p:txBody>
+      </p:sp>
+      <p:sp>
+        <p:nvSpPr>
+          <p:cNvPr id="11" name="TextBox 10"/>
+          <p:cNvSpPr txBox="1"/>
+          <p:nvPr/>
+        </p:nvSpPr>
+        <p:spPr>
+          <a:xfrm>
+            <a:off x="594360" y="2532888"/>
+            <a:ext cx="438912" cy="438912"/>
+          </a:xfrm>
+          <a:prstGeom prst="rect">
+            <a:avLst/>
+          </a:prstGeom>
+          <a:noFill/>
+        </p:spPr>
+        <p:txBody>
+          <a:bodyPr wrap="square" anchor="ctr"/>
+          <a:lstStyle/>
+          <a:p>
+            <a:pPr algn="ctr"/>
+            <a:r>
+              <a:rPr sz="1600" b="1" i="0">
+                <a:solidFill>
+                  <a:srgbClr val="FFFFFF"/>
+                </a:solidFill>
+                <a:latin typeface="Calibri"/>
+              </a:rPr>
+              <a:t>2</a:t>
+            </a:r>
+          </a:p>
+        </p:txBody>
+      </p:sp>
+      <p:sp>
+        <p:nvSpPr>
+          <p:cNvPr id="12" name="TextBox 11"/>
+          <p:cNvSpPr txBox="1"/>
+          <p:nvPr/>
+        </p:nvSpPr>
+        <p:spPr>
+          <a:xfrm>
+            <a:off x="1188720" y="2368296"/>
+            <a:ext cx="10271455" cy="786384"/>
+          </a:xfrm>
+          <a:prstGeom prst="rect">
+            <a:avLst/>
+          </a:prstGeom>
+          <a:noFill/>
+        </p:spPr>
+        <p:txBody>
+          <a:bodyPr wrap="square" anchor="ctr"/>
+          <a:lstStyle/>
+          <a:p>
+            <a:r>
+              <a:rPr sz="1400" b="1" i="0">
+                <a:solidFill>
+                  <a:srgbClr val="095292"/>
+                </a:solidFill>
+                <a:latin typeface="Calibri"/>
+              </a:rPr>
+              <a:t>Cree la clase RegistroMascotas con el atributo private final List&lt;Mascota&gt; mascotas = new ArrayList&lt;&gt;(); y el metodo agregar(Mascota m) que rechace un ID ya existente; verifique agregando dos veces la mascota M-001 y comprobando que la consola muestra el aviso de ID repetido y que cantidad() sigue devolviendo 1.</a:t>
+            </a:r>
+          </a:p>
+        </p:txBody>
+      </p:sp>
+      <p:sp>
+        <p:nvSpPr>
+          <p:cNvPr id="13" name="Rounded Rectangle 12"/>
+          <p:cNvSpPr/>
+          <p:nvPr/>
+        </p:nvSpPr>
+        <p:spPr>
+          <a:xfrm>
+            <a:off x="457200" y="3319272"/>
+            <a:ext cx="11277295" cy="950976"/>
+          </a:xfrm>
+          <a:prstGeom prst="roundRect">
+            <a:avLst>
+              <a:gd name="adj" fmla="val 12000"/>
+            </a:avLst>
+          </a:prstGeom>
+          <a:solidFill>
+            <a:srgbClr val="F2F2F2"/>
+          </a:solidFill>
+          <a:ln>
+            <a:noFill/>
+          </a:ln>
+        </p:spPr>
+        <p:style>
+          <a:lnRef idx="1">
+            <a:schemeClr val="accent1"/>
+          </a:lnRef>
+          <a:fillRef idx="3">
+            <a:schemeClr val="accent1"/>
+          </a:fillRef>
+          <a:effectRef idx="2">
+            <a:schemeClr val="accent1"/>
+          </a:effectRef>
+          <a:fontRef idx="minor">
+            <a:schemeClr val="lt1"/>
+          </a:fontRef>
+        </p:style>
+        <p:txBody>
+          <a:bodyPr rtlCol="0" anchor="ctr"/>
+          <a:lstStyle/>
+          <a:p>
+            <a:pPr algn="ctr"/>
+          </a:p>
+        </p:txBody>
+      </p:sp>
+      <p:sp>
+        <p:nvSpPr>
+          <p:cNvPr id="14" name="Rounded Rectangle 13"/>
+          <p:cNvSpPr/>
+          <p:nvPr/>
+        </p:nvSpPr>
+        <p:spPr>
+          <a:xfrm>
+            <a:off x="594360" y="3575304"/>
+            <a:ext cx="438912" cy="438912"/>
+          </a:xfrm>
+          <a:prstGeom prst="roundRect">
+            <a:avLst>
+              <a:gd name="adj" fmla="val 12000"/>
+            </a:avLst>
+          </a:prstGeom>
+          <a:solidFill>
+            <a:srgbClr val="095292"/>
+          </a:solidFill>
+          <a:ln>
+            <a:noFill/>
+          </a:ln>
+        </p:spPr>
+        <p:style>
+          <a:lnRef idx="1">
+            <a:schemeClr val="accent1"/>
+          </a:lnRef>
+          <a:fillRef idx="3">
+            <a:schemeClr val="accent1"/>
+          </a:fillRef>
+          <a:effectRef idx="2">
+            <a:schemeClr val="accent1"/>
+          </a:effectRef>
+          <a:fontRef idx="minor">
+            <a:schemeClr val="lt1"/>
+          </a:fontRef>
+        </p:style>
+        <p:txBody>
+          <a:bodyPr rtlCol="0" anchor="ctr"/>
+          <a:lstStyle/>
+          <a:p>
+            <a:pPr algn="ctr"/>
+          </a:p>
+        </p:txBody>
+      </p:sp>
+      <p:sp>
+        <p:nvSpPr>
+          <p:cNvPr id="15" name="TextBox 14"/>
+          <p:cNvSpPr txBox="1"/>
+          <p:nvPr/>
+        </p:nvSpPr>
+        <p:spPr>
+          <a:xfrm>
+            <a:off x="594360" y="3575304"/>
+            <a:ext cx="438912" cy="438912"/>
+          </a:xfrm>
+          <a:prstGeom prst="rect">
+            <a:avLst/>
+          </a:prstGeom>
+          <a:noFill/>
+        </p:spPr>
+        <p:txBody>
+          <a:bodyPr wrap="square" anchor="ctr"/>
+          <a:lstStyle/>
+          <a:p>
+            <a:pPr algn="ctr"/>
+            <a:r>
+              <a:rPr sz="1600" b="1" i="0">
+                <a:solidFill>
+                  <a:srgbClr val="FFFFFF"/>
+                </a:solidFill>
+                <a:latin typeface="Calibri"/>
+              </a:rPr>
+              <a:t>3</a:t>
+            </a:r>
+          </a:p>
+        </p:txBody>
+      </p:sp>
+      <p:sp>
+        <p:nvSpPr>
+          <p:cNvPr id="16" name="TextBox 15"/>
+          <p:cNvSpPr txBox="1"/>
+          <p:nvPr/>
+        </p:nvSpPr>
+        <p:spPr>
+          <a:xfrm>
+            <a:off x="1188720" y="3410712"/>
+            <a:ext cx="10271455" cy="786384"/>
+          </a:xfrm>
+          <a:prstGeom prst="rect">
+            <a:avLst/>
+          </a:prstGeom>
+          <a:noFill/>
+        </p:spPr>
+        <p:txBody>
+          <a:bodyPr wrap="square" anchor="ctr"/>
+          <a:lstStyle/>
+          <a:p>
+            <a:r>
+              <a:rPr sz="1400" b="1" i="0">
+                <a:solidFill>
+                  <a:srgbClr val="095292"/>
+                </a:solidFill>
+                <a:latin typeface="Calibri"/>
+              </a:rPr>
+              <a:t>Implemente listar(), que recorra con for indexado e imprima cada ficha numerada, y buscarPorId(String id), que recorra con for-each y devuelva la Mascota o null; verifique que buscarPorId("M-003") imprime la ficha de Rocky y que buscarPorId("M-099") imprime que no existe, sin lanzar NullPointerException.</a:t>
+            </a:r>
+          </a:p>
+        </p:txBody>
+      </p:sp>
+      <p:sp>
+        <p:nvSpPr>
+          <p:cNvPr id="17" name="Rounded Rectangle 16"/>
+          <p:cNvSpPr/>
+          <p:nvPr/>
+        </p:nvSpPr>
+        <p:spPr>
+          <a:xfrm>
+            <a:off x="457200" y="4361688"/>
+            <a:ext cx="11277295" cy="950976"/>
+          </a:xfrm>
+          <a:prstGeom prst="roundRect">
+            <a:avLst>
+              <a:gd name="adj" fmla="val 12000"/>
+            </a:avLst>
+          </a:prstGeom>
+          <a:solidFill>
+            <a:srgbClr val="E8F4FA"/>
+          </a:solidFill>
+          <a:ln>
+            <a:noFill/>
+          </a:ln>
+        </p:spPr>
+        <p:style>
+          <a:lnRef idx="1">
+            <a:schemeClr val="accent1"/>
+          </a:lnRef>
+          <a:fillRef idx="3">
+            <a:schemeClr val="accent1"/>
+          </a:fillRef>
+          <a:effectRef idx="2">
+            <a:schemeClr val="accent1"/>
+          </a:effectRef>
+          <a:fontRef idx="minor">
+            <a:schemeClr val="lt1"/>
+          </a:fontRef>
+        </p:style>
+        <p:txBody>
+          <a:bodyPr rtlCol="0" anchor="ctr"/>
+          <a:lstStyle/>
+          <a:p>
+            <a:pPr algn="ctr"/>
+          </a:p>
+        </p:txBody>
+      </p:sp>
+      <p:sp>
+        <p:nvSpPr>
+          <p:cNvPr id="18" name="Rounded Rectangle 17"/>
+          <p:cNvSpPr/>
+          <p:nvPr/>
+        </p:nvSpPr>
+        <p:spPr>
+          <a:xfrm>
+            <a:off x="594360" y="4617720"/>
+            <a:ext cx="438912" cy="438912"/>
+          </a:xfrm>
+          <a:prstGeom prst="roundRect">
+            <a:avLst>
+              <a:gd name="adj" fmla="val 12000"/>
+            </a:avLst>
+          </a:prstGeom>
+          <a:solidFill>
+            <a:srgbClr val="095292"/>
+          </a:solidFill>
+          <a:ln>
+            <a:noFill/>
+          </a:ln>
+        </p:spPr>
+        <p:style>
+          <a:lnRef idx="1">
+            <a:schemeClr val="accent1"/>
+          </a:lnRef>
+          <a:fillRef idx="3">
+            <a:schemeClr val="accent1"/>
+          </a:fillRef>
+          <a:effectRef idx="2">
+            <a:schemeClr val="accent1"/>
+          </a:effectRef>
+          <a:fontRef idx="minor">
+            <a:schemeClr val="lt1"/>
+          </a:fontRef>
+        </p:style>
+        <p:txBody>
+          <a:bodyPr rtlCol="0" anchor="ctr"/>
+          <a:lstStyle/>
+          <a:p>
+            <a:pPr algn="ctr"/>
+          </a:p>
+        </p:txBody>
+      </p:sp>
+      <p:sp>
+        <p:nvSpPr>
+          <p:cNvPr id="19" name="TextBox 18"/>
+          <p:cNvSpPr txBox="1"/>
+          <p:nvPr/>
+        </p:nvSpPr>
+        <p:spPr>
+          <a:xfrm>
+            <a:off x="594360" y="4617720"/>
+            <a:ext cx="438912" cy="438912"/>
+          </a:xfrm>
+          <a:prstGeom prst="rect">
+            <a:avLst/>
+          </a:prstGeom>
+          <a:noFill/>
+        </p:spPr>
+        <p:txBody>
+          <a:bodyPr wrap="square" anchor="ctr"/>
+          <a:lstStyle/>
+          <a:p>
+            <a:pPr algn="ctr"/>
+            <a:r>
+              <a:rPr sz="1600" b="1" i="0">
+                <a:solidFill>
+                  <a:srgbClr val="FFFFFF"/>
+                </a:solidFill>
+                <a:latin typeface="Calibri"/>
+              </a:rPr>
+              <a:t>4</a:t>
+            </a:r>
+          </a:p>
+        </p:txBody>
+      </p:sp>
+      <p:sp>
+        <p:nvSpPr>
+          <p:cNvPr id="20" name="TextBox 19"/>
+          <p:cNvSpPr txBox="1"/>
+          <p:nvPr/>
+        </p:nvSpPr>
+        <p:spPr>
+          <a:xfrm>
+            <a:off x="1188720" y="4453128"/>
+            <a:ext cx="10271455" cy="786384"/>
+          </a:xfrm>
+          <a:prstGeom prst="rect">
+            <a:avLst/>
+          </a:prstGeom>
+          <a:noFill/>
+        </p:spPr>
+        <p:txBody>
+          <a:bodyPr wrap="square" anchor="ctr"/>
+          <a:lstStyle/>
+          <a:p>
+            <a:r>
+              <a:rPr sz="1400" b="1" i="0">
+                <a:solidFill>
+                  <a:srgbClr val="095292"/>
+                </a:solidFill>
+                <a:latin typeface="Calibri"/>
+              </a:rPr>
+              <a:t>Implemente eliminarPorId(String id) usando remove(objeto) y el metodo pasarAGeriatria(int edadMinima) usando Iterator con it.remove(); verifique que despues de eliminar M-002 y de pasar a geriatria a las mascotas de 9 anios o mas, size() bajo exactamente en la cantidad de fichas retiradas y el programa no lanza ConcurrentModificationException.</a:t>
+            </a:r>
+          </a:p>
+        </p:txBody>
+      </p:sp>
+      <p:sp>
+        <p:nvSpPr>
+          <p:cNvPr id="21" name="Rounded Rectangle 20"/>
+          <p:cNvSpPr/>
+          <p:nvPr/>
+        </p:nvSpPr>
+        <p:spPr>
+          <a:xfrm>
+            <a:off x="457200" y="5404104"/>
+            <a:ext cx="11277295" cy="950976"/>
+          </a:xfrm>
+          <a:prstGeom prst="roundRect">
+            <a:avLst>
+              <a:gd name="adj" fmla="val 12000"/>
+            </a:avLst>
+          </a:prstGeom>
+          <a:solidFill>
+            <a:srgbClr val="F2F2F2"/>
+          </a:solidFill>
+          <a:ln>
+            <a:noFill/>
+          </a:ln>
+        </p:spPr>
+        <p:style>
+          <a:lnRef idx="1">
+            <a:schemeClr val="accent1"/>
+          </a:lnRef>
+          <a:fillRef idx="3">
+            <a:schemeClr val="accent1"/>
+          </a:fillRef>
+          <a:effectRef idx="2">
+            <a:schemeClr val="accent1"/>
+          </a:effectRef>
+          <a:fontRef idx="minor">
+            <a:schemeClr val="lt1"/>
+          </a:fontRef>
+        </p:style>
+        <p:txBody>
+          <a:bodyPr rtlCol="0" anchor="ctr"/>
+          <a:lstStyle/>
+          <a:p>
+            <a:pPr algn="ctr"/>
+          </a:p>
+        </p:txBody>
+      </p:sp>
+      <p:sp>
+        <p:nvSpPr>
+          <p:cNvPr id="22" name="Rounded Rectangle 21"/>
+          <p:cNvSpPr/>
+          <p:nvPr/>
+        </p:nvSpPr>
+        <p:spPr>
+          <a:xfrm>
+            <a:off x="594360" y="5660136"/>
+            <a:ext cx="438912" cy="438912"/>
+          </a:xfrm>
+          <a:prstGeom prst="roundRect">
+            <a:avLst>
+              <a:gd name="adj" fmla="val 12000"/>
+            </a:avLst>
+          </a:prstGeom>
+          <a:solidFill>
+            <a:srgbClr val="095292"/>
+          </a:solidFill>
+          <a:ln>
+            <a:noFill/>
+          </a:ln>
+        </p:spPr>
+        <p:style>
+          <a:lnRef idx="1">
+            <a:schemeClr val="accent1"/>
+          </a:lnRef>
+          <a:fillRef idx="3">
+            <a:schemeClr val="accent1"/>
+          </a:fillRef>
+          <a:effectRef idx="2">
+            <a:schemeClr val="accent1"/>
+          </a:effectRef>
+          <a:fontRef idx="minor">
+            <a:schemeClr val="lt1"/>
+          </a:fontRef>
+        </p:style>
+        <p:txBody>
+          <a:bodyPr rtlCol="0" anchor="ctr"/>
+          <a:lstStyle/>
+          <a:p>
+            <a:pPr algn="ctr"/>
+          </a:p>
+        </p:txBody>
+      </p:sp>
+      <p:sp>
+        <p:nvSpPr>
+          <p:cNvPr id="23" name="TextBox 22"/>
+          <p:cNvSpPr txBox="1"/>
+          <p:nvPr/>
+        </p:nvSpPr>
+        <p:spPr>
+          <a:xfrm>
+            <a:off x="594360" y="5660136"/>
+            <a:ext cx="438912" cy="438912"/>
+          </a:xfrm>
+          <a:prstGeom prst="rect">
+            <a:avLst/>
+          </a:prstGeom>
+          <a:noFill/>
+        </p:spPr>
+        <p:txBody>
+          <a:bodyPr wrap="square" anchor="ctr"/>
+          <a:lstStyle/>
+          <a:p>
+            <a:pPr algn="ctr"/>
+            <a:r>
+              <a:rPr sz="1600" b="1" i="0">
+                <a:solidFill>
+                  <a:srgbClr val="FFFFFF"/>
+                </a:solidFill>
+                <a:latin typeface="Calibri"/>
+              </a:rPr>
+              <a:t>5</a:t>
+            </a:r>
+          </a:p>
+        </p:txBody>
+      </p:sp>
+      <p:sp>
+        <p:nvSpPr>
+          <p:cNvPr id="24" name="TextBox 23"/>
+          <p:cNvSpPr txBox="1"/>
+          <p:nvPr/>
+        </p:nvSpPr>
+        <p:spPr>
+          <a:xfrm>
+            <a:off x="1188720" y="5495544"/>
+            <a:ext cx="10271455" cy="786384"/>
+          </a:xfrm>
+          <a:prstGeom prst="rect">
+            <a:avLst/>
+          </a:prstGeom>
+          <a:noFill/>
+        </p:spPr>
+        <p:txBody>
+          <a:bodyPr wrap="square" anchor="ctr"/>
+          <a:lstStyle/>
+          <a:p>
+            <a:r>
+              <a:rPr sz="1400" b="1" i="0">
+                <a:solidFill>
+                  <a:srgbClr val="095292"/>
+                </a:solidFill>
+                <a:latin typeface="Calibri"/>
+              </a:rPr>
+              <a:t>Arme un menu de consola con Scanner y opciones 1-Agregar, 2-Listar, 3-Buscar por ID, 4-Eliminar, 5-Salir dentro de un ciclo while; ejecute el programa cargando las seis fichas del escenario, tome captura de la consola con el listado final y suba el proyecto comprimido mas la captura a la plataforma del curso.</a:t>
+            </a:r>
+          </a:p>
+        </p:txBody>
+      </p:sp>
+      <p:sp>
+        <p:nvSpPr>
+          <p:cNvPr id="25" name="TextBox 24"/>
+          <p:cNvSpPr txBox="1"/>
+          <p:nvPr/>
+        </p:nvSpPr>
+        <p:spPr>
+          <a:xfrm>
+            <a:off x="11185855" y="6473952"/>
+            <a:ext cx="640080" cy="274320"/>
+          </a:xfrm>
+          <a:prstGeom prst="rect">
+            <a:avLst/>
+          </a:prstGeom>
+          <a:noFill/>
+        </p:spPr>
+        <p:txBody>
+          <a:bodyPr wrap="square">
+            <a:spAutoFit/>
+          </a:bodyPr>
+          <a:lstStyle/>
+          <a:p>
+            <a:pPr algn="r"/>
+            <a:r>
+              <a:rPr sz="1100" b="0" i="0">
+                <a:solidFill>
+                  <a:srgbClr val="666666"/>
+                </a:solidFill>
+                <a:latin typeface="Calibri"/>
+              </a:rPr>
+              <a:t>13</a:t>
+            </a:r>
+          </a:p>
+        </p:txBody>
+      </p:sp>
+    </p:spTree>
+  </p:cSld>
+  <p:clrMapOvr>
+    <a:masterClrMapping/>
+  </p:clrMapOvr>
+</p:sld>
+</file>
+
+<file path=ppt/slides/slide14.xml><?xml version="1.0" encoding="utf-8"?>
+<p:sld xmlns:a="http://schemas.openxmlformats.org/drawingml/2006/main" xmlns:p="http://schemas.openxmlformats.org/presentationml/2006/main" xmlns:r="http://schemas.openxmlformats.org/officeDocument/2006/relationships">
+  <p:cSld>
+    <p:bg>
+      <p:bgPr>
+        <a:solidFill>
+          <a:srgbClr val="FFFFFF"/>
+        </a:solidFill>
+        <a:effectLst/>
+      </p:bgPr>
+    </p:bg>
+    <p:spTree>
+      <p:nvGrpSpPr>
+        <p:cNvPr id="1" name=""/>
+        <p:cNvGrpSpPr/>
+        <p:nvPr/>
+      </p:nvGrpSpPr>
+      <p:grpSpPr/>
+      <p:sp>
+        <p:nvSpPr>
+          <p:cNvPr id="2" name="Rectangle 1"/>
+          <p:cNvSpPr/>
+          <p:nvPr/>
+        </p:nvSpPr>
+        <p:spPr>
+          <a:xfrm>
+            <a:off x="0" y="0"/>
+            <a:ext cx="12191695" cy="960120"/>
+          </a:xfrm>
+          <a:prstGeom prst="rect">
+            <a:avLst/>
+          </a:prstGeom>
+          <a:solidFill>
+            <a:srgbClr val="095292"/>
+          </a:solidFill>
+          <a:ln>
+            <a:noFill/>
+          </a:ln>
+        </p:spPr>
+        <p:style>
+          <a:lnRef idx="1">
+            <a:schemeClr val="accent1"/>
+          </a:lnRef>
+          <a:fillRef idx="3">
+            <a:schemeClr val="accent1"/>
+          </a:fillRef>
+          <a:effectRef idx="2">
+            <a:schemeClr val="accent1"/>
+          </a:effectRef>
+          <a:fontRef idx="minor">
+            <a:schemeClr val="lt1"/>
+          </a:fontRef>
+        </p:style>
+        <p:txBody>
+          <a:bodyPr rtlCol="0" anchor="ctr"/>
+          <a:lstStyle/>
+          <a:p>
+            <a:pPr algn="ctr"/>
+          </a:p>
+        </p:txBody>
+      </p:sp>
+      <p:sp>
+        <p:nvSpPr>
+          <p:cNvPr id="3" name="Rectangle 2"/>
+          <p:cNvSpPr/>
+          <p:nvPr/>
+        </p:nvSpPr>
+        <p:spPr>
+          <a:xfrm>
+            <a:off x="0" y="960120"/>
+            <a:ext cx="12191695" cy="41148"/>
+          </a:xfrm>
+          <a:prstGeom prst="rect">
+            <a:avLst/>
+          </a:prstGeom>
+          <a:solidFill>
+            <a:srgbClr val="FFD000"/>
+          </a:solidFill>
+          <a:ln>
+            <a:noFill/>
+          </a:ln>
+        </p:spPr>
+        <p:style>
+          <a:lnRef idx="1">
+            <a:schemeClr val="accent1"/>
+          </a:lnRef>
+          <a:fillRef idx="3">
+            <a:schemeClr val="accent1"/>
+          </a:fillRef>
+          <a:effectRef idx="2">
+            <a:schemeClr val="accent1"/>
+          </a:effectRef>
+          <a:fontRef idx="minor">
+            <a:schemeClr val="lt1"/>
+          </a:fontRef>
+        </p:style>
+        <p:txBody>
+          <a:bodyPr rtlCol="0" anchor="ctr"/>
+          <a:lstStyle/>
+          <a:p>
+            <a:pPr algn="ctr"/>
+          </a:p>
+        </p:txBody>
+      </p:sp>
+      <p:sp>
+        <p:nvSpPr>
+          <p:cNvPr id="4" name="TextBox 3"/>
+          <p:cNvSpPr txBox="1"/>
+          <p:nvPr/>
+        </p:nvSpPr>
+        <p:spPr>
+          <a:xfrm>
+            <a:off x="457200" y="164592"/>
+            <a:ext cx="11277295" cy="502920"/>
+          </a:xfrm>
+          <a:prstGeom prst="rect">
+            <a:avLst/>
+          </a:prstGeom>
+          <a:noFill/>
+        </p:spPr>
+        <p:txBody>
+          <a:bodyPr wrap="square">
+            <a:spAutoFit/>
+          </a:bodyPr>
+          <a:lstStyle/>
+          <a:p>
+            <a:r>
+              <a:rPr sz="2600" b="1" i="0">
+                <a:solidFill>
+                  <a:srgbClr val="FFFFFF"/>
+                </a:solidFill>
+                <a:latin typeface="Calibri"/>
+              </a:rPr>
+              <a:t>Antes de entregar — autochequeo</a:t>
+            </a:r>
+          </a:p>
+        </p:txBody>
+      </p:sp>
+      <p:sp>
+        <p:nvSpPr>
+          <p:cNvPr id="5" name="Rounded Rectangle 4"/>
+          <p:cNvSpPr/>
+          <p:nvPr/>
+        </p:nvSpPr>
+        <p:spPr>
+          <a:xfrm>
+            <a:off x="457200" y="1261872"/>
+            <a:ext cx="11277295" cy="566928"/>
+          </a:xfrm>
+          <a:prstGeom prst="roundRect">
+            <a:avLst>
+              <a:gd name="adj" fmla="val 12000"/>
+            </a:avLst>
+          </a:prstGeom>
+          <a:solidFill>
+            <a:srgbClr val="F2F2F2"/>
+          </a:solidFill>
+          <a:ln>
+            <a:noFill/>
+          </a:ln>
+        </p:spPr>
+        <p:style>
+          <a:lnRef idx="1">
+            <a:schemeClr val="accent1"/>
+          </a:lnRef>
+          <a:fillRef idx="3">
+            <a:schemeClr val="accent1"/>
+          </a:fillRef>
+          <a:effectRef idx="2">
+            <a:schemeClr val="accent1"/>
+          </a:effectRef>
+          <a:fontRef idx="minor">
+            <a:schemeClr val="lt1"/>
+          </a:fontRef>
+        </p:style>
+        <p:txBody>
+          <a:bodyPr rtlCol="0" anchor="ctr"/>
+          <a:lstStyle/>
+          <a:p>
+            <a:pPr algn="ctr"/>
+          </a:p>
+        </p:txBody>
+      </p:sp>
+      <p:sp>
+        <p:nvSpPr>
+          <p:cNvPr id="6" name="Rectangle 5"/>
+          <p:cNvSpPr/>
+          <p:nvPr/>
+        </p:nvSpPr>
+        <p:spPr>
+          <a:xfrm>
+            <a:off x="640080" y="1408175"/>
+            <a:ext cx="274320" cy="274320"/>
+          </a:xfrm>
+          <a:prstGeom prst="rect">
+            <a:avLst/>
+          </a:prstGeom>
+          <a:solidFill>
+            <a:srgbClr val="FFFFFF"/>
+          </a:solidFill>
+          <a:ln>
+            <a:solidFill>
+              <a:srgbClr val="333333"/>
+            </a:solidFill>
+          </a:ln>
+        </p:spPr>
+        <p:style>
+          <a:lnRef idx="1">
+            <a:schemeClr val="accent1"/>
+          </a:lnRef>
+          <a:fillRef idx="3">
+            <a:schemeClr val="accent1"/>
+          </a:fillRef>
+          <a:effectRef idx="2">
+            <a:schemeClr val="accent1"/>
+          </a:effectRef>
+          <a:fontRef idx="minor">
+            <a:schemeClr val="lt1"/>
+          </a:fontRef>
+        </p:style>
+        <p:txBody>
+          <a:bodyPr rtlCol="0" anchor="ctr"/>
+          <a:lstStyle/>
+          <a:p>
+            <a:pPr algn="ctr"/>
+          </a:p>
+        </p:txBody>
+      </p:sp>
+      <p:sp>
+        <p:nvSpPr>
+          <p:cNvPr id="7" name="Rectangle 6"/>
+          <p:cNvSpPr/>
+          <p:nvPr/>
+        </p:nvSpPr>
+        <p:spPr>
+          <a:xfrm>
+            <a:off x="640080" y="1408175"/>
+            <a:ext cx="73152" cy="274320"/>
+          </a:xfrm>
+          <a:prstGeom prst="rect">
+            <a:avLst/>
+          </a:prstGeom>
+          <a:solidFill>
+            <a:srgbClr val="269CCB"/>
+          </a:solidFill>
+          <a:ln>
+            <a:noFill/>
+          </a:ln>
+        </p:spPr>
+        <p:style>
+          <a:lnRef idx="1">
+            <a:schemeClr val="accent1"/>
+          </a:lnRef>
+          <a:fillRef idx="3">
+            <a:schemeClr val="accent1"/>
+          </a:fillRef>
+          <a:effectRef idx="2">
+            <a:schemeClr val="accent1"/>
+          </a:effectRef>
+          <a:fontRef idx="minor">
+            <a:schemeClr val="lt1"/>
+          </a:fontRef>
+        </p:style>
+        <p:txBody>
+          <a:bodyPr rtlCol="0" anchor="ctr"/>
+          <a:lstStyle/>
+          <a:p>
+            <a:pPr algn="ctr"/>
+          </a:p>
+        </p:txBody>
+      </p:sp>
+      <p:sp>
+        <p:nvSpPr>
+          <p:cNvPr id="8" name="TextBox 7"/>
+          <p:cNvSpPr txBox="1"/>
+          <p:nvPr/>
+        </p:nvSpPr>
+        <p:spPr>
+          <a:xfrm>
+            <a:off x="1097280" y="1353312"/>
+            <a:ext cx="10362895" cy="402336"/>
+          </a:xfrm>
+          <a:prstGeom prst="rect">
+            <a:avLst/>
+          </a:prstGeom>
+          <a:noFill/>
+        </p:spPr>
+        <p:txBody>
+          <a:bodyPr wrap="square" anchor="ctr"/>
+          <a:lstStyle/>
+          <a:p>
+            <a:r>
+              <a:rPr sz="1500" b="0" i="0">
+                <a:solidFill>
+                  <a:srgbClr val="333333"/>
+                </a:solidFill>
+                <a:latin typeface="Calibri"/>
+              </a:rPr>
+              <a:t>Si su lista imprime algo como vetcare.Mascota@6d06d69c, que metodo heredado de Object le esta faltando a la clase Mascota?</a:t>
+            </a:r>
+          </a:p>
+        </p:txBody>
+      </p:sp>
+      <p:sp>
+        <p:nvSpPr>
+          <p:cNvPr id="9" name="Rounded Rectangle 8"/>
+          <p:cNvSpPr/>
+          <p:nvPr/>
+        </p:nvSpPr>
+        <p:spPr>
+          <a:xfrm>
+            <a:off x="457200" y="1938528"/>
+            <a:ext cx="11277295" cy="566928"/>
+          </a:xfrm>
+          <a:prstGeom prst="roundRect">
+            <a:avLst>
+              <a:gd name="adj" fmla="val 12000"/>
+            </a:avLst>
+          </a:prstGeom>
+          <a:solidFill>
+            <a:srgbClr val="F2F2F2"/>
+          </a:solidFill>
+          <a:ln>
+            <a:noFill/>
+          </a:ln>
+        </p:spPr>
+        <p:style>
+          <a:lnRef idx="1">
+            <a:schemeClr val="accent1"/>
+          </a:lnRef>
+          <a:fillRef idx="3">
+            <a:schemeClr val="accent1"/>
+          </a:fillRef>
+          <a:effectRef idx="2">
+            <a:schemeClr val="accent1"/>
+          </a:effectRef>
+          <a:fontRef idx="minor">
+            <a:schemeClr val="lt1"/>
+          </a:fontRef>
+        </p:style>
+        <p:txBody>
+          <a:bodyPr rtlCol="0" anchor="ctr"/>
+          <a:lstStyle/>
+          <a:p>
+            <a:pPr algn="ctr"/>
+          </a:p>
+        </p:txBody>
+      </p:sp>
+      <p:sp>
+        <p:nvSpPr>
+          <p:cNvPr id="10" name="Rectangle 9"/>
+          <p:cNvSpPr/>
+          <p:nvPr/>
+        </p:nvSpPr>
+        <p:spPr>
+          <a:xfrm>
+            <a:off x="640080" y="2084832"/>
+            <a:ext cx="274320" cy="274320"/>
+          </a:xfrm>
+          <a:prstGeom prst="rect">
+            <a:avLst/>
+          </a:prstGeom>
+          <a:solidFill>
+            <a:srgbClr val="FFFFFF"/>
+          </a:solidFill>
+          <a:ln>
+            <a:solidFill>
+              <a:srgbClr val="333333"/>
+            </a:solidFill>
+          </a:ln>
+        </p:spPr>
+        <p:style>
+          <a:lnRef idx="1">
+            <a:schemeClr val="accent1"/>
+          </a:lnRef>
+          <a:fillRef idx="3">
+            <a:schemeClr val="accent1"/>
+          </a:fillRef>
+          <a:effectRef idx="2">
+            <a:schemeClr val="accent1"/>
+          </a:effectRef>
+          <a:fontRef idx="minor">
+            <a:schemeClr val="lt1"/>
+          </a:fontRef>
+        </p:style>
+        <p:txBody>
+          <a:bodyPr rtlCol="0" anchor="ctr"/>
+          <a:lstStyle/>
+          <a:p>
+            <a:pPr algn="ctr"/>
+          </a:p>
+        </p:txBody>
+      </p:sp>
+      <p:sp>
+        <p:nvSpPr>
+          <p:cNvPr id="11" name="Rectangle 10"/>
+          <p:cNvSpPr/>
+          <p:nvPr/>
+        </p:nvSpPr>
+        <p:spPr>
+          <a:xfrm>
+            <a:off x="640080" y="2084832"/>
+            <a:ext cx="73152" cy="274320"/>
+          </a:xfrm>
+          <a:prstGeom prst="rect">
+            <a:avLst/>
+          </a:prstGeom>
+          <a:solidFill>
+            <a:srgbClr val="269CCB"/>
+          </a:solidFill>
+          <a:ln>
+            <a:noFill/>
+          </a:ln>
+        </p:spPr>
+        <p:style>
+          <a:lnRef idx="1">
+            <a:schemeClr val="accent1"/>
+          </a:lnRef>
+          <a:fillRef idx="3">
+            <a:schemeClr val="accent1"/>
+          </a:fillRef>
+          <a:effectRef idx="2">
+            <a:schemeClr val="accent1"/>
+          </a:effectRef>
+          <a:fontRef idx="minor">
+            <a:schemeClr val="lt1"/>
+          </a:fontRef>
+        </p:style>
+        <p:txBody>
+          <a:bodyPr rtlCol="0" anchor="ctr"/>
+          <a:lstStyle/>
+          <a:p>
+            <a:pPr algn="ctr"/>
+          </a:p>
+        </p:txBody>
+      </p:sp>
+      <p:sp>
+        <p:nvSpPr>
+          <p:cNvPr id="12" name="TextBox 11"/>
+          <p:cNvSpPr txBox="1"/>
+          <p:nvPr/>
+        </p:nvSpPr>
+        <p:spPr>
+          <a:xfrm>
+            <a:off x="1097280" y="2029968"/>
+            <a:ext cx="10362895" cy="402336"/>
+          </a:xfrm>
+          <a:prstGeom prst="rect">
+            <a:avLst/>
+          </a:prstGeom>
+          <a:noFill/>
+        </p:spPr>
+        <p:txBody>
+          <a:bodyPr wrap="square" anchor="ctr"/>
+          <a:lstStyle/>
+          <a:p>
+            <a:r>
+              <a:rPr sz="1500" b="0" i="0">
+                <a:solidFill>
+                  <a:srgbClr val="333333"/>
+                </a:solidFill>
+                <a:latin typeface="Calibri"/>
+              </a:rPr>
+              <a:t>Cuando el recorrido llega a la ultima ficha y truena con IndexOutOfBoundsException, revise la condicion del for: el ultimo indice valido es igual a size() o es size() menos uno?</a:t>
+            </a:r>
+          </a:p>
+        </p:txBody>
+      </p:sp>
+      <p:sp>
+        <p:nvSpPr>
+          <p:cNvPr id="13" name="Rounded Rectangle 12"/>
+          <p:cNvSpPr/>
+          <p:nvPr/>
+        </p:nvSpPr>
+        <p:spPr>
+          <a:xfrm>
+            <a:off x="457200" y="2615184"/>
+            <a:ext cx="11277295" cy="566928"/>
+          </a:xfrm>
+          <a:prstGeom prst="roundRect">
+            <a:avLst>
+              <a:gd name="adj" fmla="val 12000"/>
+            </a:avLst>
+          </a:prstGeom>
+          <a:solidFill>
+            <a:srgbClr val="F2F2F2"/>
+          </a:solidFill>
+          <a:ln>
+            <a:noFill/>
+          </a:ln>
+        </p:spPr>
+        <p:style>
+          <a:lnRef idx="1">
+            <a:schemeClr val="accent1"/>
+          </a:lnRef>
+          <a:fillRef idx="3">
+            <a:schemeClr val="accent1"/>
+          </a:fillRef>
+          <a:effectRef idx="2">
+            <a:schemeClr val="accent1"/>
+          </a:effectRef>
+          <a:fontRef idx="minor">
+            <a:schemeClr val="lt1"/>
+          </a:fontRef>
+        </p:style>
+        <p:txBody>
+          <a:bodyPr rtlCol="0" anchor="ctr"/>
+          <a:lstStyle/>
+          <a:p>
+            <a:pPr algn="ctr"/>
+          </a:p>
+        </p:txBody>
+      </p:sp>
+      <p:sp>
+        <p:nvSpPr>
+          <p:cNvPr id="14" name="Rectangle 13"/>
+          <p:cNvSpPr/>
+          <p:nvPr/>
+        </p:nvSpPr>
+        <p:spPr>
+          <a:xfrm>
+            <a:off x="640080" y="2761488"/>
+            <a:ext cx="274320" cy="274320"/>
+          </a:xfrm>
+          <a:prstGeom prst="rect">
+            <a:avLst/>
+          </a:prstGeom>
+          <a:solidFill>
+            <a:srgbClr val="FFFFFF"/>
+          </a:solidFill>
+          <a:ln>
+            <a:solidFill>
+              <a:srgbClr val="333333"/>
+            </a:solidFill>
+          </a:ln>
+        </p:spPr>
+        <p:style>
+          <a:lnRef idx="1">
+            <a:schemeClr val="accent1"/>
+          </a:lnRef>
+          <a:fillRef idx="3">
+            <a:schemeClr val="accent1"/>
+          </a:fillRef>
+          <a:effectRef idx="2">
+            <a:schemeClr val="accent1"/>
+          </a:effectRef>
+          <a:fontRef idx="minor">
+            <a:schemeClr val="lt1"/>
+          </a:fontRef>
+        </p:style>
+        <p:txBody>
+          <a:bodyPr rtlCol="0" anchor="ctr"/>
+          <a:lstStyle/>
+          <a:p>
+            <a:pPr algn="ctr"/>
+          </a:p>
+        </p:txBody>
+      </p:sp>
+      <p:sp>
+        <p:nvSpPr>
+          <p:cNvPr id="15" name="Rectangle 14"/>
+          <p:cNvSpPr/>
+          <p:nvPr/>
+        </p:nvSpPr>
+        <p:spPr>
+          <a:xfrm>
+            <a:off x="640080" y="2761488"/>
+            <a:ext cx="73152" cy="274320"/>
+          </a:xfrm>
+          <a:prstGeom prst="rect">
+            <a:avLst/>
+          </a:prstGeom>
+          <a:solidFill>
+            <a:srgbClr val="269CCB"/>
+          </a:solidFill>
+          <a:ln>
+            <a:noFill/>
+          </a:ln>
+        </p:spPr>
+        <p:style>
+          <a:lnRef idx="1">
+            <a:schemeClr val="accent1"/>
+          </a:lnRef>
+          <a:fillRef idx="3">
+            <a:schemeClr val="accent1"/>
+          </a:fillRef>
+          <a:effectRef idx="2">
+            <a:schemeClr val="accent1"/>
+          </a:effectRef>
+          <a:fontRef idx="minor">
+            <a:schemeClr val="lt1"/>
+          </a:fontRef>
+        </p:style>
+        <p:txBody>
+          <a:bodyPr rtlCol="0" anchor="ctr"/>
+          <a:lstStyle/>
+          <a:p>
+            <a:pPr algn="ctr"/>
+          </a:p>
+        </p:txBody>
+      </p:sp>
+      <p:sp>
+        <p:nvSpPr>
+          <p:cNvPr id="16" name="TextBox 15"/>
+          <p:cNvSpPr txBox="1"/>
+          <p:nvPr/>
+        </p:nvSpPr>
+        <p:spPr>
+          <a:xfrm>
+            <a:off x="1097280" y="2706624"/>
+            <a:ext cx="10362895" cy="402336"/>
+          </a:xfrm>
+          <a:prstGeom prst="rect">
+            <a:avLst/>
+          </a:prstGeom>
+          <a:noFill/>
+        </p:spPr>
+        <p:txBody>
+          <a:bodyPr wrap="square" anchor="ctr"/>
+          <a:lstStyle/>
+          <a:p>
+            <a:r>
+              <a:rPr sz="1500" b="0" i="0">
+                <a:solidFill>
+                  <a:srgbClr val="333333"/>
+                </a:solidFill>
+                <a:latin typeface="Calibri"/>
+              </a:rPr>
+              <a:t>Si borra una mascota justo dentro de un for-each y aparece ConcurrentModificationException, quien deberia estar autorizado para sacar el elemento: la lista o el objeto que la esta recorriendo?</a:t>
+            </a:r>
+          </a:p>
+        </p:txBody>
+      </p:sp>
+      <p:sp>
+        <p:nvSpPr>
+          <p:cNvPr id="17" name="TextBox 16"/>
+          <p:cNvSpPr txBox="1"/>
+          <p:nvPr/>
+        </p:nvSpPr>
+        <p:spPr>
+          <a:xfrm>
+            <a:off x="11185855" y="6473952"/>
+            <a:ext cx="640080" cy="274320"/>
+          </a:xfrm>
+          <a:prstGeom prst="rect">
+            <a:avLst/>
+          </a:prstGeom>
+          <a:noFill/>
+        </p:spPr>
+        <p:txBody>
+          <a:bodyPr wrap="square">
+            <a:spAutoFit/>
+          </a:bodyPr>
+          <a:lstStyle/>
+          <a:p>
+            <a:pPr algn="r"/>
+            <a:r>
+              <a:rPr sz="1100" b="0" i="0">
+                <a:solidFill>
+                  <a:srgbClr val="666666"/>
+                </a:solidFill>
+                <a:latin typeface="Calibri"/>
+              </a:rPr>
+              <a:t>14</a:t>
+            </a:r>
+          </a:p>
+        </p:txBody>
+      </p:sp>
+    </p:spTree>
+  </p:cSld>
+  <p:clrMapOvr>
+    <a:masterClrMapping/>
+  </p:clrMapOvr>
+</p:sld>
+</file>
+
+<file path=ppt/slides/slide15.xml><?xml version="1.0" encoding="utf-8"?>
+<p:sld xmlns:a="http://schemas.openxmlformats.org/drawingml/2006/main" xmlns:p="http://schemas.openxmlformats.org/presentationml/2006/main" xmlns:r="http://schemas.openxmlformats.org/officeDocument/2006/relationships">
+  <p:cSld>
+    <p:bg>
+      <p:bgPr>
+        <a:solidFill>
+          <a:srgbClr val="FFFFFF"/>
+        </a:solidFill>
+        <a:effectLst/>
+      </p:bgPr>
+    </p:bg>
+    <p:spTree>
+      <p:nvGrpSpPr>
+        <p:cNvPr id="1" name=""/>
+        <p:cNvGrpSpPr/>
+        <p:nvPr/>
+      </p:nvGrpSpPr>
+      <p:grpSpPr/>
+      <p:sp>
+        <p:nvSpPr>
+          <p:cNvPr id="2" name="Rectangle 1"/>
+          <p:cNvSpPr/>
+          <p:nvPr/>
+        </p:nvSpPr>
+        <p:spPr>
+          <a:xfrm>
+            <a:off x="0" y="0"/>
+            <a:ext cx="12191695" cy="960120"/>
+          </a:xfrm>
+          <a:prstGeom prst="rect">
+            <a:avLst/>
+          </a:prstGeom>
+          <a:solidFill>
+            <a:srgbClr val="095292"/>
+          </a:solidFill>
+          <a:ln>
+            <a:noFill/>
+          </a:ln>
+        </p:spPr>
+        <p:style>
+          <a:lnRef idx="1">
+            <a:schemeClr val="accent1"/>
+          </a:lnRef>
+          <a:fillRef idx="3">
+            <a:schemeClr val="accent1"/>
+          </a:fillRef>
+          <a:effectRef idx="2">
+            <a:schemeClr val="accent1"/>
+          </a:effectRef>
+          <a:fontRef idx="minor">
+            <a:schemeClr val="lt1"/>
+          </a:fontRef>
+        </p:style>
+        <p:txBody>
+          <a:bodyPr rtlCol="0" anchor="ctr"/>
+          <a:lstStyle/>
+          <a:p>
+            <a:pPr algn="ctr"/>
+          </a:p>
+        </p:txBody>
+      </p:sp>
+      <p:sp>
+        <p:nvSpPr>
+          <p:cNvPr id="3" name="Rectangle 2"/>
+          <p:cNvSpPr/>
+          <p:nvPr/>
+        </p:nvSpPr>
+        <p:spPr>
+          <a:xfrm>
+            <a:off x="0" y="960120"/>
+            <a:ext cx="12191695" cy="41148"/>
+          </a:xfrm>
+          <a:prstGeom prst="rect">
+            <a:avLst/>
+          </a:prstGeom>
+          <a:solidFill>
+            <a:srgbClr val="FFD000"/>
+          </a:solidFill>
+          <a:ln>
+            <a:noFill/>
+          </a:ln>
+        </p:spPr>
+        <p:style>
+          <a:lnRef idx="1">
+            <a:schemeClr val="accent1"/>
+          </a:lnRef>
+          <a:fillRef idx="3">
+            <a:schemeClr val="accent1"/>
+          </a:fillRef>
+          <a:effectRef idx="2">
+            <a:schemeClr val="accent1"/>
+          </a:effectRef>
+          <a:fontRef idx="minor">
+            <a:schemeClr val="lt1"/>
+          </a:fontRef>
+        </p:style>
+        <p:txBody>
+          <a:bodyPr rtlCol="0" anchor="ctr"/>
+          <a:lstStyle/>
+          <a:p>
+            <a:pPr algn="ctr"/>
+          </a:p>
+        </p:txBody>
+      </p:sp>
+      <p:sp>
+        <p:nvSpPr>
+          <p:cNvPr id="4" name="TextBox 3"/>
+          <p:cNvSpPr txBox="1"/>
+          <p:nvPr/>
+        </p:nvSpPr>
+        <p:spPr>
+          <a:xfrm>
+            <a:off x="457200" y="164592"/>
+            <a:ext cx="11277295" cy="502920"/>
+          </a:xfrm>
+          <a:prstGeom prst="rect">
+            <a:avLst/>
+          </a:prstGeom>
+          <a:noFill/>
+        </p:spPr>
+        <p:txBody>
+          <a:bodyPr wrap="square">
+            <a:spAutoFit/>
+          </a:bodyPr>
+          <a:lstStyle/>
+          <a:p>
+            <a:r>
+              <a:rPr sz="2600" b="1" i="0">
+                <a:solidFill>
+                  <a:srgbClr val="FFFFFF"/>
+                </a:solidFill>
+                <a:latin typeface="Calibri"/>
+              </a:rPr>
+              <a:t>Criterios de exito / entregable</a:t>
+            </a:r>
+          </a:p>
+        </p:txBody>
+      </p:sp>
+      <p:sp>
+        <p:nvSpPr>
+          <p:cNvPr id="5" name="TextBox 4"/>
+          <p:cNvSpPr txBox="1"/>
+          <p:nvPr/>
+        </p:nvSpPr>
+        <p:spPr>
+          <a:xfrm>
+            <a:off x="457200" y="1170432"/>
+            <a:ext cx="11277295" cy="5230368"/>
+          </a:xfrm>
+          <a:prstGeom prst="rect">
+            <a:avLst/>
+          </a:prstGeom>
+          <a:noFill/>
+        </p:spPr>
+        <p:txBody>
+          <a:bodyPr wrap="square">
+            <a:spAutoFit/>
+          </a:bodyPr>
+          <a:lstStyle/>
+          <a:p>
+            <a:pPr>
+              <a:spcAft>
+                <a:spcPts val="800"/>
+              </a:spcAft>
+            </a:pPr>
+            <a:r>
+              <a:rPr sz="2000" b="0" i="0">
+                <a:solidFill>
+                  <a:srgbClr val="333333"/>
+                </a:solidFill>
+                <a:latin typeface="Calibri"/>
+              </a:rPr>
+              <a:t>–   </a:t>
+            </a:r>
+            <a:r>
+              <a:rPr sz="2000" b="1" i="0">
+                <a:solidFill>
+                  <a:srgbClr val="333333"/>
+                </a:solidFill>
+                <a:latin typeface="Calibri"/>
+              </a:rPr>
+              <a:t>Entregable:</a:t>
+            </a:r>
+            <a:r>
+              <a:rPr sz="2000" b="0" i="0">
+                <a:solidFill>
+                  <a:srgbClr val="333333"/>
+                </a:solidFill>
+                <a:latin typeface="Calibri"/>
+              </a:rPr>
+              <a:t> Proyecto Java con las clases Mascota y RegistroMascotas y un menu de consola que agrega, lista, busca por ID y elimina mascotas, comprimido y subido a la plataforma del curso.</a:t>
+            </a:r>
+          </a:p>
+          <a:p>
+            <a:pPr>
+              <a:spcAft>
+                <a:spcPts val="800"/>
+              </a:spcAft>
+            </a:pPr>
+            <a:r>
+              <a:rPr sz="2000" b="0" i="0">
+                <a:solidFill>
+                  <a:srgbClr val="333333"/>
+                </a:solidFill>
+                <a:latin typeface="Calibri"/>
+              </a:rPr>
+              <a:t>–   </a:t>
+            </a:r>
+            <a:r>
+              <a:rPr sz="2000" b="1" i="0">
+                <a:solidFill>
+                  <a:srgbClr val="333333"/>
+                </a:solidFill>
+                <a:latin typeface="Calibri"/>
+              </a:rPr>
+              <a:t>Exito:</a:t>
+            </a:r>
+            <a:r>
+              <a:rPr sz="2000" b="0" i="0">
+                <a:solidFill>
+                  <a:srgbClr val="333333"/>
+                </a:solidFill>
+                <a:latin typeface="Calibri"/>
+              </a:rPr>
+              <a:t> El registro acepta mas de tres mascotas sin declarar ningun tamano fijo y size() refleja el numero real de fichas activas.</a:t>
+            </a:r>
+          </a:p>
+          <a:p>
+            <a:pPr>
+              <a:spcAft>
+                <a:spcPts val="800"/>
+              </a:spcAft>
+            </a:pPr>
+            <a:r>
+              <a:rPr sz="2000" b="0" i="0">
+                <a:solidFill>
+                  <a:srgbClr val="333333"/>
+                </a:solidFill>
+                <a:latin typeface="Calibri"/>
+              </a:rPr>
+              <a:t>–   </a:t>
+            </a:r>
+            <a:r>
+              <a:rPr sz="2000" b="1" i="0">
+                <a:solidFill>
+                  <a:srgbClr val="333333"/>
+                </a:solidFill>
+                <a:latin typeface="Calibri"/>
+              </a:rPr>
+              <a:t>Exito:</a:t>
+            </a:r>
+            <a:r>
+              <a:rPr sz="2000" b="0" i="0">
+                <a:solidFill>
+                  <a:srgbClr val="333333"/>
+                </a:solidFill>
+                <a:latin typeface="Calibri"/>
+              </a:rPr>
+              <a:t> Al intentar agregar un ID ya existente el programa lo rechaza con mensaje claro y no aumenta el tamano de la lista.</a:t>
+            </a:r>
+          </a:p>
+          <a:p>
+            <a:pPr>
+              <a:spcAft>
+                <a:spcPts val="800"/>
+              </a:spcAft>
+            </a:pPr>
+            <a:r>
+              <a:rPr sz="2000" b="0" i="0">
+                <a:solidFill>
+                  <a:srgbClr val="333333"/>
+                </a:solidFill>
+                <a:latin typeface="Calibri"/>
+              </a:rPr>
+              <a:t>–   </a:t>
+            </a:r>
+            <a:r>
+              <a:rPr sz="2000" b="1" i="0">
+                <a:solidFill>
+                  <a:srgbClr val="333333"/>
+                </a:solidFill>
+                <a:latin typeface="Calibri"/>
+              </a:rPr>
+              <a:t>Exito:</a:t>
+            </a:r>
+            <a:r>
+              <a:rPr sz="2000" b="0" i="0">
+                <a:solidFill>
+                  <a:srgbClr val="333333"/>
+                </a:solidFill>
+                <a:latin typeface="Calibri"/>
+              </a:rPr>
+              <a:t> buscarPorId devuelve la mascota correcta cuando existe y maneja el caso de no encontrada sin lanzar NullPointerException.</a:t>
+            </a:r>
+          </a:p>
+          <a:p>
+            <a:pPr>
+              <a:spcAft>
+                <a:spcPts val="800"/>
+              </a:spcAft>
+            </a:pPr>
+            <a:r>
+              <a:rPr sz="2000" b="0" i="0">
+                <a:solidFill>
+                  <a:srgbClr val="333333"/>
+                </a:solidFill>
+                <a:latin typeface="Calibri"/>
+              </a:rPr>
+              <a:t>–   </a:t>
+            </a:r>
+            <a:r>
+              <a:rPr sz="2000" b="1" i="0">
+                <a:solidFill>
+                  <a:srgbClr val="333333"/>
+                </a:solidFill>
+                <a:latin typeface="Calibri"/>
+              </a:rPr>
+              <a:t>Exito:</a:t>
+            </a:r>
+            <a:r>
+              <a:rPr sz="2000" b="0" i="0">
+                <a:solidFill>
+                  <a:srgbClr val="333333"/>
+                </a:solidFill>
+                <a:latin typeface="Calibri"/>
+              </a:rPr>
+              <a:t> La eliminacion masiva por edad se hace con Iterator o removeIf y el programa termina sin ConcurrentModificationException.</a:t>
+            </a:r>
+          </a:p>
+          <a:p>
+            <a:pPr>
+              <a:spcAft>
+                <a:spcPts val="800"/>
+              </a:spcAft>
+            </a:pPr>
+            <a:r>
+              <a:rPr sz="2000" b="0" i="0">
+                <a:solidFill>
+                  <a:srgbClr val="333333"/>
+                </a:solidFill>
+                <a:latin typeface="Calibri"/>
+              </a:rPr>
+              <a:t>–   </a:t>
+            </a:r>
+            <a:r>
+              <a:rPr sz="2000" b="1" i="0">
+                <a:solidFill>
+                  <a:srgbClr val="333333"/>
+                </a:solidFill>
+                <a:latin typeface="Calibri"/>
+              </a:rPr>
+              <a:t>Entrega en la plataforma del curso</a:t>
+            </a:r>
+            <a:r>
+              <a:rPr sz="2000" b="0" i="0">
+                <a:solidFill>
+                  <a:srgbClr val="333333"/>
+                </a:solidFill>
+                <a:latin typeface="Calibri"/>
+              </a:rPr>
+              <a:t> — en la fecha que indique el docente.</a:t>
+            </a:r>
+          </a:p>
+        </p:txBody>
+      </p:sp>
+      <p:sp>
+        <p:nvSpPr>
+          <p:cNvPr id="6" name="TextBox 5"/>
+          <p:cNvSpPr txBox="1"/>
+          <p:nvPr/>
+        </p:nvSpPr>
+        <p:spPr>
+          <a:xfrm>
+            <a:off x="11185855" y="6473952"/>
+            <a:ext cx="640080" cy="274320"/>
+          </a:xfrm>
+          <a:prstGeom prst="rect">
+            <a:avLst/>
+          </a:prstGeom>
+          <a:noFill/>
+        </p:spPr>
+        <p:txBody>
+          <a:bodyPr wrap="square">
+            <a:spAutoFit/>
+          </a:bodyPr>
+          <a:lstStyle/>
+          <a:p>
+            <a:pPr algn="r"/>
+            <a:r>
+              <a:rPr sz="1100" b="0" i="0">
+                <a:solidFill>
+                  <a:srgbClr val="666666"/>
+                </a:solidFill>
+                <a:latin typeface="Calibri"/>
+              </a:rPr>
+              <a:t>15</a:t>
+            </a:r>
+          </a:p>
+        </p:txBody>
+      </p:sp>
+    </p:spTree>
+  </p:cSld>
+  <p:clrMapOvr>
+    <a:masterClrMapping/>
+  </p:clrMapOvr>
+</p:sld>
+</file>
+
+<file path=ppt/slides/slide16.xml><?xml version="1.0" encoding="utf-8"?>
+<p:sld xmlns:a="http://schemas.openxmlformats.org/drawingml/2006/main" xmlns:p="http://schemas.openxmlformats.org/presentationml/2006/main" xmlns:r="http://schemas.openxmlformats.org/officeDocument/2006/relationships">
+  <p:cSld>
+    <p:bg>
+      <p:bgPr>
+        <a:solidFill>
+          <a:srgbClr val="FFFFFF"/>
+        </a:solidFill>
+        <a:effectLst/>
+      </p:bgPr>
+    </p:bg>
+    <p:spTree>
+      <p:nvGrpSpPr>
+        <p:cNvPr id="1" name=""/>
+        <p:cNvGrpSpPr/>
+        <p:nvPr/>
+      </p:nvGrpSpPr>
+      <p:grpSpPr/>
+      <p:sp>
+        <p:nvSpPr>
+          <p:cNvPr id="2" name="Rectangle 1"/>
+          <p:cNvSpPr/>
+          <p:nvPr/>
+        </p:nvSpPr>
+        <p:spPr>
+          <a:xfrm>
+            <a:off x="0" y="0"/>
+            <a:ext cx="12191695" cy="960120"/>
+          </a:xfrm>
+          <a:prstGeom prst="rect">
+            <a:avLst/>
+          </a:prstGeom>
+          <a:solidFill>
+            <a:srgbClr val="095292"/>
+          </a:solidFill>
+          <a:ln>
+            <a:noFill/>
+          </a:ln>
+        </p:spPr>
+        <p:style>
+          <a:lnRef idx="1">
+            <a:schemeClr val="accent1"/>
+          </a:lnRef>
+          <a:fillRef idx="3">
+            <a:schemeClr val="accent1"/>
+          </a:fillRef>
+          <a:effectRef idx="2">
+            <a:schemeClr val="accent1"/>
+          </a:effectRef>
+          <a:fontRef idx="minor">
+            <a:schemeClr val="lt1"/>
+          </a:fontRef>
+        </p:style>
+        <p:txBody>
+          <a:bodyPr rtlCol="0" anchor="ctr"/>
+          <a:lstStyle/>
+          <a:p>
+            <a:pPr algn="ctr"/>
+          </a:p>
+        </p:txBody>
+      </p:sp>
+      <p:sp>
+        <p:nvSpPr>
+          <p:cNvPr id="3" name="Rectangle 2"/>
+          <p:cNvSpPr/>
+          <p:nvPr/>
+        </p:nvSpPr>
+        <p:spPr>
+          <a:xfrm>
+            <a:off x="0" y="960120"/>
+            <a:ext cx="12191695" cy="41148"/>
+          </a:xfrm>
+          <a:prstGeom prst="rect">
+            <a:avLst/>
+          </a:prstGeom>
+          <a:solidFill>
+            <a:srgbClr val="FFD000"/>
+          </a:solidFill>
+          <a:ln>
+            <a:noFill/>
+          </a:ln>
+        </p:spPr>
+        <p:style>
+          <a:lnRef idx="1">
+            <a:schemeClr val="accent1"/>
+          </a:lnRef>
+          <a:fillRef idx="3">
+            <a:schemeClr val="accent1"/>
+          </a:fillRef>
+          <a:effectRef idx="2">
+            <a:schemeClr val="accent1"/>
+          </a:effectRef>
+          <a:fontRef idx="minor">
+            <a:schemeClr val="lt1"/>
+          </a:fontRef>
+        </p:style>
+        <p:txBody>
+          <a:bodyPr rtlCol="0" anchor="ctr"/>
+          <a:lstStyle/>
+          <a:p>
+            <a:pPr algn="ctr"/>
+          </a:p>
+        </p:txBody>
+      </p:sp>
+      <p:sp>
+        <p:nvSpPr>
+          <p:cNvPr id="4" name="TextBox 3"/>
+          <p:cNvSpPr txBox="1"/>
+          <p:nvPr/>
+        </p:nvSpPr>
+        <p:spPr>
+          <a:xfrm>
+            <a:off x="457200" y="164592"/>
+            <a:ext cx="11277295" cy="502920"/>
+          </a:xfrm>
+          <a:prstGeom prst="rect">
+            <a:avLst/>
+          </a:prstGeom>
+          <a:noFill/>
+        </p:spPr>
+        <p:txBody>
+          <a:bodyPr wrap="square">
+            <a:spAutoFit/>
+          </a:bodyPr>
+          <a:lstStyle/>
+          <a:p>
+            <a:r>
+              <a:rPr sz="2600" b="1" i="0">
+                <a:solidFill>
+                  <a:srgbClr val="FFFFFF"/>
+                </a:solidFill>
+                <a:latin typeface="Calibri"/>
+              </a:rPr>
+              <a:t>Para el PI esta semana</a:t>
+            </a:r>
+          </a:p>
+        </p:txBody>
+      </p:sp>
+      <p:sp>
+        <p:nvSpPr>
+          <p:cNvPr id="5" name="Rounded Rectangle 4"/>
+          <p:cNvSpPr/>
+          <p:nvPr/>
+        </p:nvSpPr>
+        <p:spPr>
+          <a:xfrm>
+            <a:off x="457200" y="1261872"/>
+            <a:ext cx="11277295" cy="1051560"/>
+          </a:xfrm>
+          <a:prstGeom prst="roundRect">
+            <a:avLst>
+              <a:gd name="adj" fmla="val 12000"/>
+            </a:avLst>
+          </a:prstGeom>
+          <a:solidFill>
+            <a:srgbClr val="E8F4FA"/>
+          </a:solidFill>
+          <a:ln>
+            <a:noFill/>
+          </a:ln>
+        </p:spPr>
+        <p:style>
+          <a:lnRef idx="1">
+            <a:schemeClr val="accent1"/>
+          </a:lnRef>
+          <a:fillRef idx="3">
+            <a:schemeClr val="accent1"/>
+          </a:fillRef>
+          <a:effectRef idx="2">
+            <a:schemeClr val="accent1"/>
+          </a:effectRef>
+          <a:fontRef idx="minor">
+            <a:schemeClr val="lt1"/>
+          </a:fontRef>
+        </p:style>
+        <p:txBody>
+          <a:bodyPr rtlCol="0" anchor="ctr"/>
+          <a:lstStyle/>
+          <a:p>
+            <a:pPr algn="ctr"/>
+          </a:p>
+        </p:txBody>
+      </p:sp>
+      <p:sp>
+        <p:nvSpPr>
+          <p:cNvPr id="6" name="Rectangle 5"/>
+          <p:cNvSpPr/>
+          <p:nvPr/>
+        </p:nvSpPr>
+        <p:spPr>
+          <a:xfrm>
+            <a:off x="457200" y="1261872"/>
+            <a:ext cx="128016" cy="1051560"/>
+          </a:xfrm>
+          <a:prstGeom prst="rect">
+            <a:avLst/>
+          </a:prstGeom>
+          <a:solidFill>
+            <a:srgbClr val="269CCB"/>
+          </a:solidFill>
+          <a:ln>
+            <a:noFill/>
+          </a:ln>
+        </p:spPr>
+        <p:style>
+          <a:lnRef idx="1">
+            <a:schemeClr val="accent1"/>
+          </a:lnRef>
+          <a:fillRef idx="3">
+            <a:schemeClr val="accent1"/>
+          </a:fillRef>
+          <a:effectRef idx="2">
+            <a:schemeClr val="accent1"/>
+          </a:effectRef>
+          <a:fontRef idx="minor">
+            <a:schemeClr val="lt1"/>
+          </a:fontRef>
+        </p:style>
+        <p:txBody>
+          <a:bodyPr rtlCol="0" anchor="ctr"/>
+          <a:lstStyle/>
+          <a:p>
+            <a:pPr algn="ctr"/>
+          </a:p>
+        </p:txBody>
+      </p:sp>
+      <p:sp>
+        <p:nvSpPr>
+          <p:cNvPr id="7" name="TextBox 6"/>
+          <p:cNvSpPr txBox="1"/>
+          <p:nvPr/>
+        </p:nvSpPr>
+        <p:spPr>
+          <a:xfrm>
+            <a:off x="777240" y="1399031"/>
+            <a:ext cx="10774375" cy="822959"/>
+          </a:xfrm>
+          <a:prstGeom prst="rect">
+            <a:avLst/>
+          </a:prstGeom>
+          <a:noFill/>
+        </p:spPr>
+        <p:txBody>
+          <a:bodyPr wrap="square">
+            <a:spAutoFit/>
+          </a:bodyPr>
+          <a:lstStyle/>
+          <a:p>
+            <a:r>
+              <a:rPr sz="1200" b="1" i="0">
+                <a:solidFill>
+                  <a:srgbClr val="269CCB"/>
+                </a:solidFill>
+                <a:latin typeface="Calibri"/>
+              </a:rPr>
+              <a:t>Info</a:t>
+            </a:r>
+          </a:p>
+          <a:p>
+            <a:pPr>
+              <a:spcBef>
+                <a:spcPts val="400"/>
+              </a:spcBef>
+            </a:pPr>
+            <a:r>
+              <a:rPr sz="1400" b="0" i="0">
+                <a:solidFill>
+                  <a:srgbClr val="333333"/>
+                </a:solidFill>
+                <a:latin typeface="Calibri"/>
+              </a:rPr>
+              <a:t>Hito: El registro de mascotas de VetCare deja de vivir en un arreglo de tamano fijo y pasa a un ArrayList&lt;Mascota&gt; que crece con la clinica.</a:t>
+            </a:r>
+          </a:p>
+        </p:txBody>
+      </p:sp>
+      <p:sp>
+        <p:nvSpPr>
+          <p:cNvPr id="8" name="Rounded Rectangle 7"/>
+          <p:cNvSpPr/>
+          <p:nvPr/>
+        </p:nvSpPr>
+        <p:spPr>
+          <a:xfrm>
+            <a:off x="457200" y="2478024"/>
+            <a:ext cx="11277295" cy="1051560"/>
+          </a:xfrm>
+          <a:prstGeom prst="roundRect">
+            <a:avLst>
+              <a:gd name="adj" fmla="val 12000"/>
+            </a:avLst>
+          </a:prstGeom>
+          <a:solidFill>
+            <a:srgbClr val="FFF8E1"/>
+          </a:solidFill>
+          <a:ln>
+            <a:noFill/>
+          </a:ln>
+        </p:spPr>
+        <p:style>
+          <a:lnRef idx="1">
+            <a:schemeClr val="accent1"/>
+          </a:lnRef>
+          <a:fillRef idx="3">
+            <a:schemeClr val="accent1"/>
+          </a:fillRef>
+          <a:effectRef idx="2">
+            <a:schemeClr val="accent1"/>
+          </a:effectRef>
+          <a:fontRef idx="minor">
+            <a:schemeClr val="lt1"/>
+          </a:fontRef>
+        </p:style>
+        <p:txBody>
+          <a:bodyPr rtlCol="0" anchor="ctr"/>
+          <a:lstStyle/>
+          <a:p>
+            <a:pPr algn="ctr"/>
+          </a:p>
+        </p:txBody>
+      </p:sp>
+      <p:sp>
+        <p:nvSpPr>
+          <p:cNvPr id="9" name="Rectangle 8"/>
+          <p:cNvSpPr/>
+          <p:nvPr/>
+        </p:nvSpPr>
+        <p:spPr>
+          <a:xfrm>
+            <a:off x="457200" y="2478024"/>
+            <a:ext cx="128016" cy="1051560"/>
+          </a:xfrm>
+          <a:prstGeom prst="rect">
+            <a:avLst/>
+          </a:prstGeom>
+          <a:solidFill>
+            <a:srgbClr val="FFD000"/>
+          </a:solidFill>
+          <a:ln>
+            <a:noFill/>
+          </a:ln>
+        </p:spPr>
+        <p:style>
+          <a:lnRef idx="1">
+            <a:schemeClr val="accent1"/>
+          </a:lnRef>
+          <a:fillRef idx="3">
+            <a:schemeClr val="accent1"/>
+          </a:fillRef>
+          <a:effectRef idx="2">
+            <a:schemeClr val="accent1"/>
+          </a:effectRef>
+          <a:fontRef idx="minor">
+            <a:schemeClr val="lt1"/>
+          </a:fontRef>
+        </p:style>
+        <p:txBody>
+          <a:bodyPr rtlCol="0" anchor="ctr"/>
+          <a:lstStyle/>
+          <a:p>
+            <a:pPr algn="ctr"/>
+          </a:p>
+        </p:txBody>
+      </p:sp>
+      <p:sp>
+        <p:nvSpPr>
+          <p:cNvPr id="10" name="TextBox 9"/>
+          <p:cNvSpPr txBox="1"/>
+          <p:nvPr/>
+        </p:nvSpPr>
+        <p:spPr>
+          <a:xfrm>
+            <a:off x="777240" y="2615184"/>
+            <a:ext cx="10774375" cy="822959"/>
+          </a:xfrm>
+          <a:prstGeom prst="rect">
+            <a:avLst/>
+          </a:prstGeom>
+          <a:noFill/>
+        </p:spPr>
+        <p:txBody>
+          <a:bodyPr wrap="square">
+            <a:spAutoFit/>
+          </a:bodyPr>
+          <a:lstStyle/>
+          <a:p>
+            <a:r>
+              <a:rPr sz="1200" b="1" i="0">
+                <a:solidFill>
+                  <a:srgbClr val="FFD000"/>
+                </a:solidFill>
+                <a:latin typeface="Calibri"/>
+              </a:rPr>
+              <a:t>Aclaración</a:t>
+            </a:r>
+          </a:p>
+          <a:p>
+            <a:pPr>
+              <a:spcBef>
+                <a:spcPts val="400"/>
+              </a:spcBef>
+            </a:pPr>
+            <a:r>
+              <a:rPr sz="1400" b="0" i="0">
+                <a:solidFill>
+                  <a:srgbClr val="333333"/>
+                </a:solidFill>
+                <a:latin typeface="Calibri"/>
+              </a:rPr>
+              <a:t>Enunciado completo: Clases/Proyecto Integrador/ (VetCare).</a:t>
+            </a:r>
+          </a:p>
+        </p:txBody>
+      </p:sp>
+      <p:sp>
+        <p:nvSpPr>
+          <p:cNvPr id="11" name="Rounded Rectangle 10"/>
+          <p:cNvSpPr/>
+          <p:nvPr/>
+        </p:nvSpPr>
+        <p:spPr>
+          <a:xfrm>
+            <a:off x="457200" y="3694176"/>
+            <a:ext cx="11277295" cy="1051560"/>
+          </a:xfrm>
+          <a:prstGeom prst="roundRect">
+            <a:avLst>
+              <a:gd name="adj" fmla="val 12000"/>
+            </a:avLst>
+          </a:prstGeom>
+          <a:solidFill>
+            <a:srgbClr val="FBE4E4"/>
+          </a:solidFill>
+          <a:ln>
+            <a:noFill/>
+          </a:ln>
+        </p:spPr>
+        <p:style>
+          <a:lnRef idx="1">
+            <a:schemeClr val="accent1"/>
+          </a:lnRef>
+          <a:fillRef idx="3">
+            <a:schemeClr val="accent1"/>
+          </a:fillRef>
+          <a:effectRef idx="2">
+            <a:schemeClr val="accent1"/>
+          </a:effectRef>
+          <a:fontRef idx="minor">
+            <a:schemeClr val="lt1"/>
+          </a:fontRef>
+        </p:style>
+        <p:txBody>
+          <a:bodyPr rtlCol="0" anchor="ctr"/>
+          <a:lstStyle/>
+          <a:p>
+            <a:pPr algn="ctr"/>
+          </a:p>
+        </p:txBody>
+      </p:sp>
+      <p:sp>
+        <p:nvSpPr>
+          <p:cNvPr id="12" name="Rectangle 11"/>
+          <p:cNvSpPr/>
+          <p:nvPr/>
+        </p:nvSpPr>
+        <p:spPr>
+          <a:xfrm>
+            <a:off x="457200" y="3694176"/>
+            <a:ext cx="128016" cy="1051560"/>
+          </a:xfrm>
+          <a:prstGeom prst="rect">
+            <a:avLst/>
+          </a:prstGeom>
+          <a:solidFill>
+            <a:srgbClr val="A02030"/>
+          </a:solidFill>
+          <a:ln>
+            <a:noFill/>
+          </a:ln>
+        </p:spPr>
+        <p:style>
+          <a:lnRef idx="1">
+            <a:schemeClr val="accent1"/>
+          </a:lnRef>
+          <a:fillRef idx="3">
+            <a:schemeClr val="accent1"/>
+          </a:fillRef>
+          <a:effectRef idx="2">
+            <a:schemeClr val="accent1"/>
+          </a:effectRef>
+          <a:fontRef idx="minor">
+            <a:schemeClr val="lt1"/>
+          </a:fontRef>
+        </p:style>
+        <p:txBody>
+          <a:bodyPr rtlCol="0" anchor="ctr"/>
+          <a:lstStyle/>
+          <a:p>
+            <a:pPr algn="ctr"/>
+          </a:p>
+        </p:txBody>
+      </p:sp>
+      <p:sp>
+        <p:nvSpPr>
+          <p:cNvPr id="13" name="TextBox 12"/>
+          <p:cNvSpPr txBox="1"/>
+          <p:nvPr/>
+        </p:nvSpPr>
+        <p:spPr>
+          <a:xfrm>
+            <a:off x="777240" y="3831336"/>
+            <a:ext cx="10774375" cy="822959"/>
+          </a:xfrm>
+          <a:prstGeom prst="rect">
+            <a:avLst/>
+          </a:prstGeom>
+          <a:noFill/>
+        </p:spPr>
+        <p:txBody>
+          <a:bodyPr wrap="square">
+            <a:spAutoFit/>
+          </a:bodyPr>
+          <a:lstStyle/>
+          <a:p>
+            <a:r>
+              <a:rPr sz="1200" b="1" i="0">
+                <a:solidFill>
+                  <a:srgbClr val="A02030"/>
+                </a:solidFill>
+                <a:latin typeface="Calibri"/>
+              </a:rPr>
+              <a:t>Atención</a:t>
+            </a:r>
+          </a:p>
+          <a:p>
+            <a:pPr>
+              <a:spcBef>
+                <a:spcPts val="400"/>
+              </a:spcBef>
+            </a:pPr>
+            <a:r>
+              <a:rPr sz="1400" b="0" i="0">
+                <a:solidFill>
+                  <a:srgbClr val="333333"/>
+                </a:solidFill>
+                <a:latin typeface="Calibri"/>
+              </a:rPr>
+              <a:t>Entrega del taller, si el docente lo asigna · en la fecha que indique el docente.</a:t>
+            </a:r>
+          </a:p>
+        </p:txBody>
+      </p:sp>
+      <p:sp>
+        <p:nvSpPr>
+          <p:cNvPr id="14" name="TextBox 13"/>
+          <p:cNvSpPr txBox="1"/>
+          <p:nvPr/>
+        </p:nvSpPr>
+        <p:spPr>
+          <a:xfrm>
+            <a:off x="11185855" y="6473952"/>
+            <a:ext cx="640080" cy="274320"/>
+          </a:xfrm>
+          <a:prstGeom prst="rect">
+            <a:avLst/>
+          </a:prstGeom>
+          <a:noFill/>
+        </p:spPr>
+        <p:txBody>
+          <a:bodyPr wrap="square">
+            <a:spAutoFit/>
+          </a:bodyPr>
+          <a:lstStyle/>
+          <a:p>
+            <a:pPr algn="r"/>
+            <a:r>
+              <a:rPr sz="1100" b="0" i="0">
+                <a:solidFill>
+                  <a:srgbClr val="666666"/>
+                </a:solidFill>
+                <a:latin typeface="Calibri"/>
+              </a:rPr>
+              <a:t>16</a:t>
+            </a:r>
+          </a:p>
+        </p:txBody>
+      </p:sp>
+    </p:spTree>
+  </p:cSld>
+  <p:clrMapOvr>
+    <a:masterClrMapping/>
+  </p:clrMapOvr>
+</p:sld>
+</file>
+
+<file path=ppt/slides/slide17.xml><?xml version="1.0" encoding="utf-8"?>
+<p:sld xmlns:a="http://schemas.openxmlformats.org/drawingml/2006/main" xmlns:p="http://schemas.openxmlformats.org/presentationml/2006/main" xmlns:r="http://schemas.openxmlformats.org/officeDocument/2006/relationships">
+  <p:cSld>
+    <p:bg>
+      <p:bgPr>
+        <a:solidFill>
+          <a:srgbClr val="FFFFFF"/>
+        </a:solidFill>
+        <a:effectLst/>
+      </p:bgPr>
+    </p:bg>
+    <p:spTree>
+      <p:nvGrpSpPr>
+        <p:cNvPr id="1" name=""/>
+        <p:cNvGrpSpPr/>
+        <p:nvPr/>
+      </p:nvGrpSpPr>
+      <p:grpSpPr/>
+      <p:sp>
+        <p:nvSpPr>
+          <p:cNvPr id="2" name="Rectangle 1"/>
+          <p:cNvSpPr/>
+          <p:nvPr/>
+        </p:nvSpPr>
+        <p:spPr>
+          <a:xfrm>
+            <a:off x="0" y="0"/>
             <a:ext cx="12191695" cy="164592"/>
           </a:xfrm>
           <a:prstGeom prst="rect">
@@ -6712,7 +8482,7 @@
                 </a:solidFill>
                 <a:latin typeface="Calibri"/>
               </a:rPr>
-              <a:t>Teoria Core</a:t>
+              <a:t>El problema real de Huellitas</a:t>
             </a:r>
           </a:p>
         </p:txBody>
@@ -6751,7 +8521,7 @@
                 </a:solidFill>
                 <a:latin typeface="Calibri"/>
               </a:rPr>
-              <a:t>–   Empecemos por el problema real de Huellitas</a:t>
+              <a:t>–   Empecemos por el problema real de Huellitas.</a:t>
             </a:r>
           </a:p>
           <a:p>
@@ -6767,7 +8537,7 @@
                 </a:solidFill>
                 <a:latin typeface="Calibri"/>
               </a:rPr>
-              <a:t>–   Un ArrayList es exactamente esa carpeta que se agranda sola, y aqui viene lo importante: por dentro tambien es un…</a:t>
+              <a:t>–   Hoy la clinica guarda las fichas de las mascotas en una carpeta de carton con 50 separadores; cuando llega la mascota 51 toca comprar otra carpeta y volver a organizar todo.</a:t>
             </a:r>
           </a:p>
           <a:p>
@@ -6783,7 +8553,7 @@
                 </a:solidFill>
                 <a:latin typeface="Calibri"/>
               </a:rPr>
-              <a:t>–   La interfaz de trabajo es corta y hay que dominarla de memoria</a:t>
+              <a:t>–   En Java eso mismo es un arreglo: cuando usted escribe Mascota[] fichero = new Mascota[50] esta pidiendole a la maquina un bloque de memoria contiguo con exactamente 50 casillas, y ese numero queda grabado en piedra para toda la vida del objeto.</a:t>
             </a:r>
           </a:p>
           <a:p>
@@ -6799,7 +8569,7 @@
                 </a:solidFill>
                 <a:latin typeface="Calibri"/>
               </a:rPr>
-              <a:t>–   Recorrer la lista tiene dos formas y cada una tiene su momento</a:t>
+              <a:t>–   El arreglo no tiene metodo para crecer, solo tiene el atributo length, que es de solo lectura; si quiere 80 casillas debe crear otro arreglo mas grande, copiar una por una las 50 fichas viejas y reasignar la variable.</a:t>
             </a:r>
           </a:p>
           <a:p>
@@ -6815,7 +8585,23 @@
                 </a:solidFill>
                 <a:latin typeface="Calibri"/>
               </a:rPr>
-              <a:t>–   La ultima idea es de diseno, y es la que hace que este codigo sirva para el resto del proyecto integrador</a:t>
+              <a:t>–   Un arreglo es rapidisimo y perfectamente valido cuando usted sabe de antemano cuantos elementos va a tener (los 7 dias de la semana, los 12 meses)</a:t>
+            </a:r>
+          </a:p>
+          <a:p>
+            <a:pPr>
+              <a:spcAft>
+                <a:spcPts val="800"/>
+              </a:spcAft>
+            </a:pPr>
+            <a:r>
+              <a:rPr sz="2000" b="0" i="0">
+                <a:solidFill>
+                  <a:srgbClr val="333333"/>
+                </a:solidFill>
+                <a:latin typeface="Calibri"/>
+              </a:rPr>
+              <a:t>–   Pero es una pesima idea para algo que crece todos los dias, como el numero de pacientes de una veterinaria que apenas esta digitalizando su operacion.</a:t>
             </a:r>
           </a:p>
         </p:txBody>
@@ -6996,141 +8782,21 @@
                 </a:solidFill>
                 <a:latin typeface="Calibri"/>
               </a:rPr>
-              <a:t>El arreglo se llena; la lista crece sola</a:t>
-            </a:r>
-          </a:p>
-        </p:txBody>
-      </p:sp>
-      <p:sp>
-        <p:nvSpPr>
-          <p:cNvPr id="5" name="Rounded Rectangle 4"/>
-          <p:cNvSpPr/>
-          <p:nvPr/>
-        </p:nvSpPr>
-        <p:spPr>
-          <a:xfrm>
-            <a:off x="457200" y="1261872"/>
-            <a:ext cx="11277295" cy="4773168"/>
-          </a:xfrm>
-          <a:prstGeom prst="roundRect">
-            <a:avLst>
-              <a:gd name="adj" fmla="val 12000"/>
-            </a:avLst>
-          </a:prstGeom>
-          <a:solidFill>
-            <a:srgbClr val="1E2A38"/>
-          </a:solidFill>
-          <a:ln>
-            <a:noFill/>
-          </a:ln>
-        </p:spPr>
-        <p:style>
-          <a:lnRef idx="1">
-            <a:schemeClr val="accent1"/>
-          </a:lnRef>
-          <a:fillRef idx="3">
-            <a:schemeClr val="accent1"/>
-          </a:fillRef>
-          <a:effectRef idx="2">
-            <a:schemeClr val="accent1"/>
-          </a:effectRef>
-          <a:fontRef idx="minor">
-            <a:schemeClr val="lt1"/>
-          </a:fontRef>
-        </p:style>
-        <p:txBody>
-          <a:bodyPr rtlCol="0" anchor="ctr"/>
-          <a:lstStyle/>
-          <a:p>
-            <a:pPr algn="ctr"/>
-          </a:p>
-        </p:txBody>
-      </p:sp>
-      <p:sp>
-        <p:nvSpPr>
-          <p:cNvPr id="6" name="Rectangle 5"/>
-          <p:cNvSpPr/>
-          <p:nvPr/>
-        </p:nvSpPr>
-        <p:spPr>
-          <a:xfrm>
-            <a:off x="457200" y="1261872"/>
-            <a:ext cx="11277295" cy="320040"/>
-          </a:xfrm>
-          <a:prstGeom prst="rect">
-            <a:avLst/>
-          </a:prstGeom>
-          <a:solidFill>
-            <a:srgbClr val="095292"/>
-          </a:solidFill>
-          <a:ln>
-            <a:noFill/>
-          </a:ln>
-        </p:spPr>
-        <p:style>
-          <a:lnRef idx="1">
-            <a:schemeClr val="accent1"/>
-          </a:lnRef>
-          <a:fillRef idx="3">
-            <a:schemeClr val="accent1"/>
-          </a:fillRef>
-          <a:effectRef idx="2">
-            <a:schemeClr val="accent1"/>
-          </a:effectRef>
-          <a:fontRef idx="minor">
-            <a:schemeClr val="lt1"/>
-          </a:fontRef>
-        </p:style>
-        <p:txBody>
-          <a:bodyPr rtlCol="0" anchor="ctr"/>
-          <a:lstStyle/>
-          <a:p>
-            <a:pPr algn="ctr"/>
-          </a:p>
-        </p:txBody>
-      </p:sp>
-      <p:sp>
-        <p:nvSpPr>
-          <p:cNvPr id="7" name="TextBox 6"/>
+              <a:t>Un ArrayList es exactamente esa carpeta que se agranda sola, y aqui...</a:t>
+            </a:r>
+          </a:p>
+        </p:txBody>
+      </p:sp>
+      <p:sp>
+        <p:nvSpPr>
+          <p:cNvPr id="5" name="TextBox 4"/>
           <p:cNvSpPr txBox="1"/>
           <p:nvPr/>
         </p:nvSpPr>
         <p:spPr>
           <a:xfrm>
-            <a:off x="685800" y="1307592"/>
-            <a:ext cx="10820095" cy="256032"/>
-          </a:xfrm>
-          <a:prstGeom prst="rect">
-            <a:avLst/>
-          </a:prstGeom>
-          <a:noFill/>
-        </p:spPr>
-        <p:txBody>
-          <a:bodyPr wrap="square" anchor="ctr"/>
-          <a:lstStyle/>
-          <a:p>
-            <a:r>
-              <a:rPr sz="1000" b="1" i="0">
-                <a:solidFill>
-                  <a:srgbClr val="269CCB"/>
-                </a:solidFill>
-                <a:latin typeface="Calibri"/>
-              </a:rPr>
-              <a:t>● ● ●</a:t>
-            </a:r>
-          </a:p>
-        </p:txBody>
-      </p:sp>
-      <p:sp>
-        <p:nvSpPr>
-          <p:cNvPr id="8" name="TextBox 7"/>
-          <p:cNvSpPr txBox="1"/>
-          <p:nvPr/>
-        </p:nvSpPr>
-        <p:spPr>
-          <a:xfrm>
-            <a:off x="777240" y="1719072"/>
-            <a:ext cx="10637215" cy="4133087"/>
+            <a:off x="457200" y="1170432"/>
+            <a:ext cx="11277295" cy="5230368"/>
           </a:xfrm>
           <a:prstGeom prst="rect">
             <a:avLst/>
@@ -7145,331 +8811,88 @@
           <a:p>
             <a:pPr>
               <a:spcAft>
-                <a:spcPts val="314"/>
+                <a:spcPts val="800"/>
               </a:spcAft>
             </a:pPr>
             <a:r>
-              <a:rPr sz="1100" b="0" i="0">
-                <a:solidFill>
-                  <a:srgbClr val="FFFFFF"/>
-                </a:solidFill>
-                <a:latin typeface="Calibri"/>
-              </a:rPr>
-              <a:t>Mascota nieve = new Mascota("M-004", "Nieve", "Felino", 1, "Sara Diaz");</a:t>
+              <a:rPr sz="2000" b="0" i="0">
+                <a:solidFill>
+                  <a:srgbClr val="333333"/>
+                </a:solidFill>
+                <a:latin typeface="Calibri"/>
+              </a:rPr>
+              <a:t>–   Un ArrayList es exactamente esa carpeta que se agranda sola, y aqui viene lo importante: por dentro tambien es un arreglo.</a:t>
             </a:r>
           </a:p>
           <a:p>
             <a:pPr>
               <a:spcAft>
-                <a:spcPts val="314"/>
+                <a:spcPts val="800"/>
               </a:spcAft>
             </a:pPr>
             <a:r>
-              <a:rPr sz="1100" b="0" i="0">
-                <a:solidFill>
-                  <a:srgbClr val="FFFFFF"/>
-                </a:solidFill>
-                <a:latin typeface="Calibri"/>
-              </a:rPr>
-              <a:t/>
+              <a:rPr sz="2000" b="0" i="0">
+                <a:solidFill>
+                  <a:srgbClr val="333333"/>
+                </a:solidFill>
+                <a:latin typeface="Calibri"/>
+              </a:rPr>
+              <a:t>–   La clase ArrayList guarda un arreglo interno oculto (llamado elementData) y lleva dos numeros distintos: la capacidad, que es cuantas casillas tiene el arreglo interno, y el tamano, que es cuantos elementos usted realmente guardo.</a:t>
             </a:r>
           </a:p>
           <a:p>
             <a:pPr>
               <a:spcAft>
-                <a:spcPts val="314"/>
+                <a:spcPts val="800"/>
               </a:spcAft>
             </a:pPr>
             <a:r>
-              <a:rPr sz="1100" b="0" i="0">
-                <a:solidFill>
-                  <a:srgbClr val="FFFFFF"/>
-                </a:solidFill>
-                <a:latin typeface="Calibri"/>
-              </a:rPr>
-              <a:t>Mascota[] fichero = new Mascota[3];          // tamano decidido HOY, para siempre</a:t>
+              <a:rPr sz="2000" b="0" i="0">
+                <a:solidFill>
+                  <a:srgbClr val="333333"/>
+                </a:solidFill>
+                <a:latin typeface="Calibri"/>
+              </a:rPr>
+              <a:t>–   Cuando usted hace add y el arreglo interno se llena, ArrayList crea silenciosamente uno nuevo aproximadamente 1.5 veces mas grande, copia todo con Arrays.copyOf y sigue como si nada; usted nunca se entera.</a:t>
             </a:r>
           </a:p>
           <a:p>
             <a:pPr>
               <a:spcAft>
-                <a:spcPts val="314"/>
+                <a:spcPts val="800"/>
               </a:spcAft>
             </a:pPr>
             <a:r>
-              <a:rPr sz="1100" b="0" i="0">
-                <a:solidFill>
-                  <a:srgbClr val="FFFFFF"/>
-                </a:solidFill>
-                <a:latin typeface="Calibri"/>
-              </a:rPr>
-              <a:t>fichero[3] = nieve;                          // ArrayIndexOutOfBoundsException</a:t>
+              <a:rPr sz="2000" b="0" i="0">
+                <a:solidFill>
+                  <a:srgbClr val="333333"/>
+                </a:solidFill>
+                <a:latin typeface="Calibri"/>
+              </a:rPr>
+              <a:t>–   Esa arquitectura explica el rendimiento: get(i) es instantaneo porque salta directo a la posicion i del arreglo interno, agregar al final es barato casi siempre, pero add(0, mascota) o remove(0) obligan a correr un puesto a todos los demas elementos.</a:t>
             </a:r>
           </a:p>
           <a:p>
             <a:pPr>
               <a:spcAft>
-                <a:spcPts val="314"/>
+                <a:spcPts val="800"/>
               </a:spcAft>
             </a:pPr>
             <a:r>
-              <a:rPr sz="1100" b="0" i="0">
-                <a:solidFill>
-                  <a:srgbClr val="FFFFFF"/>
-                </a:solidFill>
-                <a:latin typeface="Calibri"/>
-              </a:rPr>
-              <a:t/>
-            </a:r>
-          </a:p>
-          <a:p>
-            <a:pPr>
-              <a:spcAft>
-                <a:spcPts val="314"/>
-              </a:spcAft>
-            </a:pPr>
-            <a:r>
-              <a:rPr sz="1100" b="0" i="0">
-                <a:solidFill>
-                  <a:srgbClr val="FFFFFF"/>
-                </a:solidFill>
-                <a:latin typeface="Calibri"/>
-              </a:rPr>
-              <a:t>List&lt;Mascota&gt; mascotas = new ArrayList&lt;&gt;();  // interfaz List, implementacion ArrayList</a:t>
-            </a:r>
-          </a:p>
-          <a:p>
-            <a:pPr>
-              <a:spcAft>
-                <a:spcPts val="314"/>
-              </a:spcAft>
-            </a:pPr>
-            <a:r>
-              <a:rPr sz="1100" b="0" i="0">
-                <a:solidFill>
-                  <a:srgbClr val="FFFFFF"/>
-                </a:solidFill>
-                <a:latin typeface="Calibri"/>
-              </a:rPr>
-              <a:t>mascotas.add(nieve);                         // add SIEMPRE agrega al final</a:t>
-            </a:r>
-          </a:p>
-          <a:p>
-            <a:pPr>
-              <a:spcAft>
-                <a:spcPts val="314"/>
-              </a:spcAft>
-            </a:pPr>
-            <a:r>
-              <a:rPr sz="1100" b="0" i="0">
-                <a:solidFill>
-                  <a:srgbClr val="FFFFFF"/>
-                </a:solidFill>
-                <a:latin typeface="Calibri"/>
-              </a:rPr>
-              <a:t>System.out.println(mascotas.size());         // size() = cuantas hay, no capacidad</a:t>
-            </a:r>
-          </a:p>
-          <a:p>
-            <a:pPr>
-              <a:spcAft>
-                <a:spcPts val="314"/>
-              </a:spcAft>
-            </a:pPr>
-            <a:r>
-              <a:rPr sz="1100" b="0" i="0">
-                <a:solidFill>
-                  <a:srgbClr val="FFFFFF"/>
-                </a:solidFill>
-                <a:latin typeface="Calibri"/>
-              </a:rPr>
-              <a:t>Mascota m = mascotas.get(0);                 // get(indice): de 0 a size()-1</a:t>
-            </a:r>
-          </a:p>
-          <a:p>
-            <a:pPr>
-              <a:spcAft>
-                <a:spcPts val="314"/>
-              </a:spcAft>
-            </a:pPr>
-            <a:r>
-              <a:rPr sz="1100" b="0" i="0">
-                <a:solidFill>
-                  <a:srgbClr val="FFFFFF"/>
-                </a:solidFill>
-                <a:latin typeface="Calibri"/>
-              </a:rPr>
-              <a:t/>
-            </a:r>
-          </a:p>
-          <a:p>
-            <a:pPr>
-              <a:spcAft>
-                <a:spcPts val="314"/>
-              </a:spcAft>
-            </a:pPr>
-            <a:r>
-              <a:rPr sz="1100" b="0" i="0">
-                <a:solidFill>
-                  <a:srgbClr val="FFFFFF"/>
-                </a:solidFill>
-                <a:latin typeface="Calibri"/>
-              </a:rPr>
-              <a:t>for (Mascota x: mascotas) {                 // for-each: solo para LEER</a:t>
-            </a:r>
-          </a:p>
-          <a:p>
-            <a:pPr>
-              <a:spcAft>
-                <a:spcPts val="314"/>
-              </a:spcAft>
-            </a:pPr>
-            <a:r>
-              <a:rPr sz="1100" b="0" i="0">
-                <a:solidFill>
-                  <a:srgbClr val="FFFFFF"/>
-                </a:solidFill>
-                <a:latin typeface="Calibri"/>
-              </a:rPr>
-              <a:t>    System.out.println(x);                   // usa toString() de Mascota</a:t>
-            </a:r>
-          </a:p>
-          <a:p>
-            <a:pPr>
-              <a:spcAft>
-                <a:spcPts val="314"/>
-              </a:spcAft>
-            </a:pPr>
-            <a:r>
-              <a:rPr sz="1100" b="0" i="0">
-                <a:solidFill>
-                  <a:srgbClr val="FFFFFF"/>
-                </a:solidFill>
-                <a:latin typeface="Calibri"/>
-              </a:rPr>
-              <a:t>}</a:t>
-            </a:r>
-          </a:p>
-          <a:p>
-            <a:pPr>
-              <a:spcAft>
-                <a:spcPts val="314"/>
-              </a:spcAft>
-            </a:pPr>
-            <a:r>
-              <a:rPr sz="1100" b="0" i="0">
-                <a:solidFill>
-                  <a:srgbClr val="FFFFFF"/>
-                </a:solidFill>
-                <a:latin typeface="Calibri"/>
-              </a:rPr>
-              <a:t/>
-            </a:r>
-          </a:p>
-          <a:p>
-            <a:pPr>
-              <a:spcAft>
-                <a:spcPts val="314"/>
-              </a:spcAft>
-            </a:pPr>
-            <a:r>
-              <a:rPr sz="1100" b="0" i="0">
-                <a:solidFill>
-                  <a:srgbClr val="FFFFFF"/>
-                </a:solidFill>
-                <a:latin typeface="Calibri"/>
-              </a:rPr>
-              <a:t>Iterator&lt;Mascota&gt; it = mascotas.iterator();  // para BORRAR mientras se recorre</a:t>
-            </a:r>
-          </a:p>
-          <a:p>
-            <a:pPr>
-              <a:spcAft>
-                <a:spcPts val="314"/>
-              </a:spcAft>
-            </a:pPr>
-            <a:r>
-              <a:rPr sz="1100" b="0" i="0">
-                <a:solidFill>
-                  <a:srgbClr val="FFFFFF"/>
-                </a:solidFill>
-                <a:latin typeface="Calibri"/>
-              </a:rPr>
-              <a:t>while (it.hasNext()) {</a:t>
-            </a:r>
-          </a:p>
-          <a:p>
-            <a:pPr>
-              <a:spcAft>
-                <a:spcPts val="314"/>
-              </a:spcAft>
-            </a:pPr>
-            <a:r>
-              <a:rPr sz="1100" b="0" i="0">
-                <a:solidFill>
-                  <a:srgbClr val="FFFFFF"/>
-                </a:solidFill>
-                <a:latin typeface="Calibri"/>
-              </a:rPr>
-              <a:t>    if (it.next().getEdad() &gt;= 9) it.remove();   // geriatria, sin excepcion</a:t>
-            </a:r>
-          </a:p>
-          <a:p>
-            <a:pPr>
-              <a:spcAft>
-                <a:spcPts val="314"/>
-              </a:spcAft>
-            </a:pPr>
-            <a:r>
-              <a:rPr sz="1100" b="0" i="0">
-                <a:solidFill>
-                  <a:srgbClr val="FFFFFF"/>
-                </a:solidFill>
-                <a:latin typeface="Calibri"/>
-              </a:rPr>
-              <a:t>}</a:t>
-            </a:r>
-          </a:p>
-        </p:txBody>
-      </p:sp>
-      <p:sp>
-        <p:nvSpPr>
-          <p:cNvPr id="9" name="TextBox 8"/>
-          <p:cNvSpPr txBox="1"/>
-          <p:nvPr/>
-        </p:nvSpPr>
-        <p:spPr>
-          <a:xfrm>
-            <a:off x="457200" y="6080760"/>
-            <a:ext cx="11277295" cy="320040"/>
-          </a:xfrm>
-          <a:prstGeom prst="rect">
-            <a:avLst/>
-          </a:prstGeom>
-          <a:noFill/>
-        </p:spPr>
-        <p:txBody>
-          <a:bodyPr wrap="square">
-            <a:spAutoFit/>
-          </a:bodyPr>
-          <a:lstStyle/>
-          <a:p>
-            <a:pPr algn="ctr"/>
-            <a:r>
-              <a:rPr sz="1200" b="0" i="1">
-                <a:solidFill>
-                  <a:srgbClr val="666666"/>
-                </a:solidFill>
-                <a:latin typeface="Calibri"/>
-              </a:rPr>
-              <a:t>El arreglo obliga a adivinar el futuro; el ArrayList lo administra por usted, siempre que respete size() y borre con Iterator.</a:t>
-            </a:r>
-          </a:p>
-        </p:txBody>
-      </p:sp>
-      <p:sp>
-        <p:nvSpPr>
-          <p:cNvPr id="10" name="TextBox 9"/>
+              <a:rPr sz="2000" b="0" i="0">
+                <a:solidFill>
+                  <a:srgbClr val="333333"/>
+                </a:solidFill>
+                <a:latin typeface="Calibri"/>
+              </a:rPr>
+              <a:t>–   En VetCare eso significa que agregar la mascota nueva al final del registro no cuesta nada, mientras que borrar siempre la primera ficha de una lista de 5.000 pacientes es la operacion mas cara que usted puede pedir.</a:t>
+            </a:r>
+          </a:p>
+        </p:txBody>
+      </p:sp>
+      <p:sp>
+        <p:nvSpPr>
+          <p:cNvPr id="6" name="TextBox 5"/>
           <p:cNvSpPr txBox="1"/>
           <p:nvPr/>
         </p:nvSpPr>
@@ -7643,7 +9066,7 @@
                 </a:solidFill>
                 <a:latin typeface="Calibri"/>
               </a:rPr>
-              <a:t>Demo del dia</a:t>
+              <a:t>La interfaz de trabajo es corta y hay que dominarla de memoria</a:t>
             </a:r>
           </a:p>
         </p:txBody>
@@ -7682,25 +9105,7 @@
                 </a:solidFill>
                 <a:latin typeface="Calibri"/>
               </a:rPr>
-              <a:t>–   </a:t>
-            </a:r>
-            <a:r>
-              <a:rPr sz="2000" b="1" i="0">
-                <a:solidFill>
-                  <a:srgbClr val="333333"/>
-                </a:solidFill>
-                <a:latin typeface="Calibri"/>
-              </a:rPr>
-              <a:t>Herramienta:</a:t>
-            </a:r>
-            <a:r>
-              <a:rPr sz="2000" b="0" i="0">
-                <a:solidFill>
-                  <a:srgbClr val="333333"/>
-                </a:solidFill>
-                <a:latin typeface="Calibri"/>
-              </a:rPr>
-              <a:t> Visual Studio Code (Java)</a:t>
+              <a:t>–   La interfaz de trabajo es corta y hay que dominarla de memoria.</a:t>
             </a:r>
           </a:p>
           <a:p>
@@ -7716,25 +9121,7 @@
                 </a:solidFill>
                 <a:latin typeface="Calibri"/>
               </a:rPr>
-              <a:t>–   </a:t>
-            </a:r>
-            <a:r>
-              <a:rPr sz="2000" b="1" i="0">
-                <a:solidFill>
-                  <a:srgbClr val="333333"/>
-                </a:solidFill>
-                <a:latin typeface="Calibri"/>
-              </a:rPr>
-              <a:t>Demo:</a:t>
-            </a:r>
-            <a:r>
-              <a:rPr sz="2000" b="0" i="0">
-                <a:solidFill>
-                  <a:srgbClr val="333333"/>
-                </a:solidFill>
-                <a:latin typeface="Calibri"/>
-              </a:rPr>
-              <a:t> El docente muestra un Mascota[3] que revienta al intentar guardar la cuarta ficha y luego el mismo caso resuelto con ArrayList, imprimiendo size() despues de cada operacion.</a:t>
+              <a:t>–   Se declara asi: List&lt;Mascota&gt; mascotas = new ArrayList&lt;&gt;(); el List&lt;Mascota&gt; del lado izquierdo es la interfaz (el contrato) y el ArrayList&lt;&gt; del lado derecho es la implementacion concreta.</a:t>
             </a:r>
           </a:p>
           <a:p>
@@ -7750,7 +9137,71 @@
                 </a:solidFill>
                 <a:latin typeface="Calibri"/>
               </a:rPr>
-              <a:t>–   Mismo dominio VetCare — no otro ejemplo.</a:t>
+              <a:t>–   Los metodos que usaremos toda la clase son add(objeto) para agregar al final, get(indice) para leer la posicion indicada, size() para saber cuantos hay</a:t>
+            </a:r>
+          </a:p>
+          <a:p>
+            <a:pPr>
+              <a:spcAft>
+                <a:spcPts val="800"/>
+              </a:spcAft>
+            </a:pPr>
+            <a:r>
+              <a:rPr sz="2000" b="0" i="0">
+                <a:solidFill>
+                  <a:srgbClr val="333333"/>
+                </a:solidFill>
+                <a:latin typeface="Calibri"/>
+              </a:rPr>
+              <a:t>–   Remove(indice) o remove(objeto) para sacar, set(indice, objeto) para reemplazar, isEmpty(), contains(objeto) e indexOf(objeto).</a:t>
+            </a:r>
+          </a:p>
+          <a:p>
+            <a:pPr>
+              <a:spcAft>
+                <a:spcPts val="800"/>
+              </a:spcAft>
+            </a:pPr>
+            <a:r>
+              <a:rPr sz="2000" b="0" i="0">
+                <a:solidFill>
+                  <a:srgbClr val="333333"/>
+                </a:solidFill>
+                <a:latin typeface="Calibri"/>
+              </a:rPr>
+              <a:t>–   El &lt;Mascota&gt; entre los picos se llama generico y no es decoracion: le dice al compilador que ahi solo entran Mascotas, de modo que si un estudiante intenta guardar un String el error aparece al compilar y no como un ClassCastException en plena sustentacion.</a:t>
+            </a:r>
+          </a:p>
+          <a:p>
+            <a:pPr>
+              <a:spcAft>
+                <a:spcPts val="800"/>
+              </a:spcAft>
+            </a:pPr>
+            <a:r>
+              <a:rPr sz="2000" b="0" i="0">
+                <a:solidFill>
+                  <a:srgbClr val="333333"/>
+                </a:solidFill>
+                <a:latin typeface="Calibri"/>
+              </a:rPr>
+              <a:t>–   Ojo con un detalle fino que confunde a todo el mundo: contains e indexOf comparan usando equals, asi que si usted no sobreescribe equals en Mascota, dos objetos con el mismo ID pero creados por separado seran considerados diferentes</a:t>
+            </a:r>
+          </a:p>
+          <a:p>
+            <a:pPr>
+              <a:spcAft>
+                <a:spcPts val="800"/>
+              </a:spcAft>
+            </a:pPr>
+            <a:r>
+              <a:rPr sz="2000" b="0" i="0">
+                <a:solidFill>
+                  <a:srgbClr val="333333"/>
+                </a:solidFill>
+                <a:latin typeface="Calibri"/>
+              </a:rPr>
+              <a:t>–   Por eso en VetCare buscamos por ID recorriendo la lista y comparando m.getId().equalsIgnoreCase(id).</a:t>
             </a:r>
           </a:p>
         </p:txBody>
@@ -7931,7 +9382,7 @@
                 </a:solidFill>
                 <a:latin typeface="Calibri"/>
               </a:rPr>
-              <a:t>Taller PI — por que importa</a:t>
+              <a:t>Recorrer la lista tiene dos formas y cada una tiene su momento</a:t>
             </a:r>
           </a:p>
         </p:txBody>
@@ -7970,25 +9421,7 @@
                 </a:solidFill>
                 <a:latin typeface="Calibri"/>
               </a:rPr>
-              <a:t>–   </a:t>
-            </a:r>
-            <a:r>
-              <a:rPr sz="2000" b="1" i="0">
-                <a:solidFill>
-                  <a:srgbClr val="333333"/>
-                </a:solidFill>
-                <a:latin typeface="Calibri"/>
-              </a:rPr>
-              <a:t>Por que importa al PI:</a:t>
-            </a:r>
-            <a:r>
-              <a:rPr sz="2000" b="0" i="0">
-                <a:solidFill>
-                  <a:srgbClr val="333333"/>
-                </a:solidFill>
-                <a:latin typeface="Calibri"/>
-              </a:rPr>
-              <a:t> VetCare no puede tener un tope de pacientes escrito a mano en el codigo, y toda la persistencia en CSV de las clases finales va a leer y escribir exactamente esta lista de mascotas.</a:t>
+              <a:t>–   Recorrer la lista tiene dos formas y cada una tiene su momento.</a:t>
             </a:r>
           </a:p>
           <a:p>
@@ -8004,7 +9437,7 @@
                 </a:solidFill>
                 <a:latin typeface="Calibri"/>
               </a:rPr>
-              <a:t>–   El requisito tecnico del PI pide colecciones de Java, y ArrayList es la coleccion base sobre la que despues montaremos la cola de la sala de espera, el HashMap de expedientes y la tabla de Swing.</a:t>
+              <a:t>–   El for clasico con indice (for (int i = 0; i &lt; mascotas.size(); i++)) se usa cuando usted necesita el numero de la posicion, por ejemplo para imprimir el listado numerado de la sala de espera.</a:t>
             </a:r>
           </a:p>
           <a:p>
@@ -8020,7 +9453,55 @@
                 </a:solidFill>
                 <a:latin typeface="Calibri"/>
               </a:rPr>
-              <a:t>–   Encapsular la lista dentro de RegistroMascotas es lo que permitira cambiar la interfaz de consola por una ventana grafica sin reescribir la logica del negocio.</a:t>
+              <a:t>–   El for-each (for (Mascota m: mascotas)) se usa cuando solo va a leer, es mas limpio y es el que debe volverse su reflejo.</a:t>
+            </a:r>
+          </a:p>
+          <a:p>
+            <a:pPr>
+              <a:spcAft>
+                <a:spcPts val="800"/>
+              </a:spcAft>
+            </a:pPr>
+            <a:r>
+              <a:rPr sz="2000" b="0" i="0">
+                <a:solidFill>
+                  <a:srgbClr val="333333"/>
+                </a:solidFill>
+                <a:latin typeface="Calibri"/>
+              </a:rPr>
+              <a:t>–   Ahora la trampa que se lleva por delante a media clase: si usted borra un elemento dentro de un for-each, Java lanza ConcurrentModificationException, porque el recorrido se da cuenta de que la lista cambio debajo de sus pies.</a:t>
+            </a:r>
+          </a:p>
+          <a:p>
+            <a:pPr>
+              <a:spcAft>
+                <a:spcPts val="800"/>
+              </a:spcAft>
+            </a:pPr>
+            <a:r>
+              <a:rPr sz="2000" b="0" i="0">
+                <a:solidFill>
+                  <a:srgbClr val="333333"/>
+                </a:solidFill>
+                <a:latin typeface="Calibri"/>
+              </a:rPr>
+              <a:t>–   La solucion correcta es usar un Iterator explicito y llamar a it.remove(), o usar mascotas.removeIf(m -&gt; m.getEdad() &gt;= 9).</a:t>
+            </a:r>
+          </a:p>
+          <a:p>
+            <a:pPr>
+              <a:spcAft>
+                <a:spcPts val="800"/>
+              </a:spcAft>
+            </a:pPr>
+            <a:r>
+              <a:rPr sz="2000" b="0" i="0">
+                <a:solidFill>
+                  <a:srgbClr val="333333"/>
+                </a:solidFill>
+                <a:latin typeface="Calibri"/>
+              </a:rPr>
+              <a:t>–   En VetCare esto aparece apenas queremos pasar a control geriatrico a todas las mascotas de nueve anios o mas: se recorre con Iterator, se saca con it.remove() y no truena nada.</a:t>
             </a:r>
           </a:p>
         </p:txBody>
@@ -8201,7 +9682,7 @@
                 </a:solidFill>
                 <a:latin typeface="Calibri"/>
               </a:rPr>
-              <a:t>Taller PI — punto de partida</a:t>
+              <a:t>La ultima idea es de diseno, y es la que hace que este codigo sirva...</a:t>
             </a:r>
           </a:p>
         </p:txBody>
@@ -8240,7 +9721,7 @@
                 </a:solidFill>
                 <a:latin typeface="Calibri"/>
               </a:rPr>
-              <a:t>–   La recepcionista de Huellitas transcribio seis fichas de papel: M-001 Firulais canino 4 anios de Ana Gomez, M-002 Michi felino 2 anios de Luis Perez, M-003 Rocky canino 9 anios de Ana Gomez, M-004 Nieve felino 1 ano de Sara Diaz, M-005 Toby canino 11 anios de Sara Diaz y una ficha repetida de M-001.</a:t>
+              <a:t>–   La ultima idea es de diseno, y es la que hace que este codigo sirva para el resto del proyecto integrador.</a:t>
             </a:r>
           </a:p>
           <a:p>
@@ -8256,7 +9737,7 @@
                 </a:solidFill>
                 <a:latin typeface="Calibri"/>
               </a:rPr>
-              <a:t>–   El codigo de partida es un Mascota[3] que ya no admite mas fichas y lanza ArrayIndexOutOfBoundsException al guardar la cuarta.</a:t>
+              <a:t>–   La lista no debe ser un atributo publico que cualquiera manipula desde main; debe vivir privada dentro de la clase RegistroMascotas</a:t>
             </a:r>
           </a:p>
           <a:p>
@@ -8272,7 +9753,55 @@
                 </a:solidFill>
                 <a:latin typeface="Calibri"/>
               </a:rPr>
-              <a:t>–   No hay archivos ni base de datos todavia: todo vive en memoria durante la ejecucion, y al cerrar el programa los datos se pierden (eso se resuelve en las clases de persistencia).</a:t>
+              <a:t>–   Y el mundo exterior solo puede hablarle a traves de metodos con reglas de negocio: agregar valida que el ID no este repetido, eliminarPorId avisa si la mascota no existe, buscarPorId devuelve null cuando no la encuentra.</a:t>
+            </a:r>
+          </a:p>
+          <a:p>
+            <a:pPr>
+              <a:spcAft>
+                <a:spcPts val="800"/>
+              </a:spcAft>
+            </a:pPr>
+            <a:r>
+              <a:rPr sz="2000" b="0" i="0">
+                <a:solidFill>
+                  <a:srgbClr val="333333"/>
+                </a:solidFill>
+                <a:latin typeface="Calibri"/>
+              </a:rPr>
+              <a:t>–   Eso es encapsulamiento aplicado a colecciones, y es lo que hara posible que en las proximas clases la misma clase RegistroMascotas alimente una tabla de Swing y despues se guarde en un archivo CSV sin cambiar una sola linea de la logica.</a:t>
+            </a:r>
+          </a:p>
+          <a:p>
+            <a:pPr>
+              <a:spcAft>
+                <a:spcPts val="800"/>
+              </a:spcAft>
+            </a:pPr>
+            <a:r>
+              <a:rPr sz="2000" b="0" i="0">
+                <a:solidFill>
+                  <a:srgbClr val="333333"/>
+                </a:solidFill>
+                <a:latin typeface="Calibri"/>
+              </a:rPr>
+              <a:t>–   Programe siempre contra la interfaz (List) y no contra la implementacion (ArrayList), porque si manana necesita cambiar a LinkedList solo toca una linea.</a:t>
+            </a:r>
+          </a:p>
+          <a:p>
+            <a:pPr>
+              <a:spcAft>
+                <a:spcPts val="800"/>
+              </a:spcAft>
+            </a:pPr>
+            <a:r>
+              <a:rPr sz="2000" b="0" i="0">
+                <a:solidFill>
+                  <a:srgbClr val="333333"/>
+                </a:solidFill>
+                <a:latin typeface="Calibri"/>
+              </a:rPr>
+              <a:t>–   Y sobreescriba toString() en Mascota desde ya: sin el, imprimir la lista muestra basura como vetcare.Mascota@6d06d69c y los estudiantes creen que el programa fallo.</a:t>
             </a:r>
           </a:p>
         </p:txBody>
@@ -8453,7 +9982,7 @@
                 </a:solidFill>
                 <a:latin typeface="Calibri"/>
               </a:rPr>
-              <a:t>Taller PI — pasos guiados</a:t>
+              <a:t>El arreglo se llena; la lista crece sola</a:t>
             </a:r>
           </a:p>
         </p:txBody>
@@ -8466,8 +9995,8 @@
         </p:nvSpPr>
         <p:spPr>
           <a:xfrm>
-            <a:off x="457200" y="1234440"/>
-            <a:ext cx="11277295" cy="950976"/>
+            <a:off x="457200" y="1261872"/>
+            <a:ext cx="11277295" cy="4773168"/>
           </a:xfrm>
           <a:prstGeom prst="roundRect">
             <a:avLst>
@@ -8475,7 +10004,7 @@
             </a:avLst>
           </a:prstGeom>
           <a:solidFill>
-            <a:srgbClr val="F2F2F2"/>
+            <a:srgbClr val="1E2A38"/>
           </a:solidFill>
           <a:ln>
             <a:noFill/>
@@ -8505,19 +10034,17 @@
       </p:sp>
       <p:sp>
         <p:nvSpPr>
-          <p:cNvPr id="6" name="Rounded Rectangle 5"/>
+          <p:cNvPr id="6" name="Rectangle 5"/>
           <p:cNvSpPr/>
           <p:nvPr/>
         </p:nvSpPr>
         <p:spPr>
           <a:xfrm>
-            <a:off x="594360" y="1490472"/>
-            <a:ext cx="438912" cy="438912"/>
-          </a:xfrm>
-          <a:prstGeom prst="roundRect">
-            <a:avLst>
-              <a:gd name="adj" fmla="val 12000"/>
-            </a:avLst>
+            <a:off x="457200" y="1261872"/>
+            <a:ext cx="11277295" cy="320040"/>
+          </a:xfrm>
+          <a:prstGeom prst="rect">
+            <a:avLst/>
           </a:prstGeom>
           <a:solidFill>
             <a:srgbClr val="095292"/>
@@ -8556,8 +10083,8 @@
         </p:nvSpPr>
         <p:spPr>
           <a:xfrm>
-            <a:off x="594360" y="1490472"/>
-            <a:ext cx="438912" cy="438912"/>
+            <a:off x="685800" y="1307592"/>
+            <a:ext cx="10820095" cy="256032"/>
           </a:xfrm>
           <a:prstGeom prst="rect">
             <a:avLst/>
@@ -8568,15 +10095,14 @@
           <a:bodyPr wrap="square" anchor="ctr"/>
           <a:lstStyle/>
           <a:p>
-            <a:pPr algn="ctr"/>
-            <a:r>
-              <a:rPr sz="1600" b="1" i="0">
-                <a:solidFill>
-                  <a:srgbClr val="FFFFFF"/>
-                </a:solidFill>
-                <a:latin typeface="Calibri"/>
-              </a:rPr>
-              <a:t>1</a:t>
+            <a:r>
+              <a:rPr sz="1000" b="1" i="0">
+                <a:solidFill>
+                  <a:srgbClr val="269CCB"/>
+                </a:solidFill>
+                <a:latin typeface="Calibri"/>
+              </a:rPr>
+              <a:t>● ● ●</a:t>
             </a:r>
           </a:p>
         </p:txBody>
@@ -8589,8 +10115,8 @@
         </p:nvSpPr>
         <p:spPr>
           <a:xfrm>
-            <a:off x="1188720" y="1325880"/>
-            <a:ext cx="10271455" cy="786384"/>
+            <a:off x="777240" y="1719072"/>
+            <a:ext cx="10637215" cy="4133087"/>
           </a:xfrm>
           <a:prstGeom prst="rect">
             <a:avLst/>
@@ -8598,644 +10124,338 @@
           <a:noFill/>
         </p:spPr>
         <p:txBody>
-          <a:bodyPr wrap="square" anchor="ctr"/>
-          <a:lstStyle/>
-          <a:p>
-            <a:r>
-              <a:rPr sz="1400" b="1" i="0">
-                <a:solidFill>
-                  <a:srgbClr val="095292"/>
-                </a:solidFill>
-                <a:latin typeface="Calibri"/>
-              </a:rPr>
-              <a:t>Cree en VS Code el proyecto Java llamado VetCare con paquete vetcare, y dentro de el la clase Mascota con los atributos privados id, nombre, especie, edad y dueno, su constructor completo, sus getters y el metodo toString(); verifique imprimiendo una mascota de prueba y confirmando que en consola sale el texto legible y no vetcare.Mascota@1a2b3c.</a:t>
-            </a:r>
-          </a:p>
-        </p:txBody>
-      </p:sp>
-      <p:sp>
-        <p:nvSpPr>
-          <p:cNvPr id="9" name="Rounded Rectangle 8"/>
-          <p:cNvSpPr/>
-          <p:nvPr/>
-        </p:nvSpPr>
-        <p:spPr>
-          <a:xfrm>
-            <a:off x="457200" y="2276856"/>
-            <a:ext cx="11277295" cy="950976"/>
-          </a:xfrm>
-          <a:prstGeom prst="roundRect">
-            <a:avLst>
-              <a:gd name="adj" fmla="val 12000"/>
-            </a:avLst>
-          </a:prstGeom>
-          <a:solidFill>
-            <a:srgbClr val="E8F4FA"/>
-          </a:solidFill>
-          <a:ln>
-            <a:noFill/>
-          </a:ln>
-        </p:spPr>
-        <p:style>
-          <a:lnRef idx="1">
-            <a:schemeClr val="accent1"/>
-          </a:lnRef>
-          <a:fillRef idx="3">
-            <a:schemeClr val="accent1"/>
-          </a:fillRef>
-          <a:effectRef idx="2">
-            <a:schemeClr val="accent1"/>
-          </a:effectRef>
-          <a:fontRef idx="minor">
-            <a:schemeClr val="lt1"/>
-          </a:fontRef>
-        </p:style>
-        <p:txBody>
-          <a:bodyPr rtlCol="0" anchor="ctr"/>
+          <a:bodyPr wrap="square">
+            <a:spAutoFit/>
+          </a:bodyPr>
+          <a:lstStyle/>
+          <a:p>
+            <a:pPr>
+              <a:spcAft>
+                <a:spcPts val="314"/>
+              </a:spcAft>
+            </a:pPr>
+            <a:r>
+              <a:rPr sz="1100" b="0" i="0">
+                <a:solidFill>
+                  <a:srgbClr val="FFFFFF"/>
+                </a:solidFill>
+                <a:latin typeface="Calibri"/>
+              </a:rPr>
+              <a:t>Mascota nieve = new Mascota("M-004", "Nieve", "Felino", 1, "Sara Diaz");</a:t>
+            </a:r>
+          </a:p>
+          <a:p>
+            <a:pPr>
+              <a:spcAft>
+                <a:spcPts val="314"/>
+              </a:spcAft>
+            </a:pPr>
+            <a:r>
+              <a:rPr sz="1100" b="0" i="0">
+                <a:solidFill>
+                  <a:srgbClr val="FFFFFF"/>
+                </a:solidFill>
+                <a:latin typeface="Calibri"/>
+              </a:rPr>
+              <a:t/>
+            </a:r>
+          </a:p>
+          <a:p>
+            <a:pPr>
+              <a:spcAft>
+                <a:spcPts val="314"/>
+              </a:spcAft>
+            </a:pPr>
+            <a:r>
+              <a:rPr sz="1100" b="0" i="0">
+                <a:solidFill>
+                  <a:srgbClr val="FFFFFF"/>
+                </a:solidFill>
+                <a:latin typeface="Calibri"/>
+              </a:rPr>
+              <a:t>Mascota[] fichero = new Mascota[3];          // tamano decidido HOY, para siempre</a:t>
+            </a:r>
+          </a:p>
+          <a:p>
+            <a:pPr>
+              <a:spcAft>
+                <a:spcPts val="314"/>
+              </a:spcAft>
+            </a:pPr>
+            <a:r>
+              <a:rPr sz="1100" b="0" i="0">
+                <a:solidFill>
+                  <a:srgbClr val="FFFFFF"/>
+                </a:solidFill>
+                <a:latin typeface="Calibri"/>
+              </a:rPr>
+              <a:t>fichero[3] = nieve;                          // ArrayIndexOutOfBoundsException</a:t>
+            </a:r>
+          </a:p>
+          <a:p>
+            <a:pPr>
+              <a:spcAft>
+                <a:spcPts val="314"/>
+              </a:spcAft>
+            </a:pPr>
+            <a:r>
+              <a:rPr sz="1100" b="0" i="0">
+                <a:solidFill>
+                  <a:srgbClr val="FFFFFF"/>
+                </a:solidFill>
+                <a:latin typeface="Calibri"/>
+              </a:rPr>
+              <a:t/>
+            </a:r>
+          </a:p>
+          <a:p>
+            <a:pPr>
+              <a:spcAft>
+                <a:spcPts val="314"/>
+              </a:spcAft>
+            </a:pPr>
+            <a:r>
+              <a:rPr sz="1100" b="0" i="0">
+                <a:solidFill>
+                  <a:srgbClr val="FFFFFF"/>
+                </a:solidFill>
+                <a:latin typeface="Calibri"/>
+              </a:rPr>
+              <a:t>List&lt;Mascota&gt; mascotas = new ArrayList&lt;&gt;();  // interfaz List, implementacion ArrayList</a:t>
+            </a:r>
+          </a:p>
+          <a:p>
+            <a:pPr>
+              <a:spcAft>
+                <a:spcPts val="314"/>
+              </a:spcAft>
+            </a:pPr>
+            <a:r>
+              <a:rPr sz="1100" b="0" i="0">
+                <a:solidFill>
+                  <a:srgbClr val="FFFFFF"/>
+                </a:solidFill>
+                <a:latin typeface="Calibri"/>
+              </a:rPr>
+              <a:t>mascotas.add(nieve);                         // add SIEMPRE agrega al final</a:t>
+            </a:r>
+          </a:p>
+          <a:p>
+            <a:pPr>
+              <a:spcAft>
+                <a:spcPts val="314"/>
+              </a:spcAft>
+            </a:pPr>
+            <a:r>
+              <a:rPr sz="1100" b="0" i="0">
+                <a:solidFill>
+                  <a:srgbClr val="FFFFFF"/>
+                </a:solidFill>
+                <a:latin typeface="Calibri"/>
+              </a:rPr>
+              <a:t>System.out.println(mascotas.size());         // size() = cuantas hay, no capacidad</a:t>
+            </a:r>
+          </a:p>
+          <a:p>
+            <a:pPr>
+              <a:spcAft>
+                <a:spcPts val="314"/>
+              </a:spcAft>
+            </a:pPr>
+            <a:r>
+              <a:rPr sz="1100" b="0" i="0">
+                <a:solidFill>
+                  <a:srgbClr val="FFFFFF"/>
+                </a:solidFill>
+                <a:latin typeface="Calibri"/>
+              </a:rPr>
+              <a:t>Mascota m = mascotas.get(0);                 // get(indice): de 0 a size()-1</a:t>
+            </a:r>
+          </a:p>
+          <a:p>
+            <a:pPr>
+              <a:spcAft>
+                <a:spcPts val="314"/>
+              </a:spcAft>
+            </a:pPr>
+            <a:r>
+              <a:rPr sz="1100" b="0" i="0">
+                <a:solidFill>
+                  <a:srgbClr val="FFFFFF"/>
+                </a:solidFill>
+                <a:latin typeface="Calibri"/>
+              </a:rPr>
+              <a:t/>
+            </a:r>
+          </a:p>
+          <a:p>
+            <a:pPr>
+              <a:spcAft>
+                <a:spcPts val="314"/>
+              </a:spcAft>
+            </a:pPr>
+            <a:r>
+              <a:rPr sz="1100" b="0" i="0">
+                <a:solidFill>
+                  <a:srgbClr val="FFFFFF"/>
+                </a:solidFill>
+                <a:latin typeface="Calibri"/>
+              </a:rPr>
+              <a:t>for (Mascota x: mascotas) {                 // for-each: solo para LEER</a:t>
+            </a:r>
+          </a:p>
+          <a:p>
+            <a:pPr>
+              <a:spcAft>
+                <a:spcPts val="314"/>
+              </a:spcAft>
+            </a:pPr>
+            <a:r>
+              <a:rPr sz="1100" b="0" i="0">
+                <a:solidFill>
+                  <a:srgbClr val="FFFFFF"/>
+                </a:solidFill>
+                <a:latin typeface="Calibri"/>
+              </a:rPr>
+              <a:t>    System.out.println(x);                   // usa toString() de Mascota</a:t>
+            </a:r>
+          </a:p>
+          <a:p>
+            <a:pPr>
+              <a:spcAft>
+                <a:spcPts val="314"/>
+              </a:spcAft>
+            </a:pPr>
+            <a:r>
+              <a:rPr sz="1100" b="0" i="0">
+                <a:solidFill>
+                  <a:srgbClr val="FFFFFF"/>
+                </a:solidFill>
+                <a:latin typeface="Calibri"/>
+              </a:rPr>
+              <a:t>}</a:t>
+            </a:r>
+          </a:p>
+          <a:p>
+            <a:pPr>
+              <a:spcAft>
+                <a:spcPts val="314"/>
+              </a:spcAft>
+            </a:pPr>
+            <a:r>
+              <a:rPr sz="1100" b="0" i="0">
+                <a:solidFill>
+                  <a:srgbClr val="FFFFFF"/>
+                </a:solidFill>
+                <a:latin typeface="Calibri"/>
+              </a:rPr>
+              <a:t/>
+            </a:r>
+          </a:p>
+          <a:p>
+            <a:pPr>
+              <a:spcAft>
+                <a:spcPts val="314"/>
+              </a:spcAft>
+            </a:pPr>
+            <a:r>
+              <a:rPr sz="1100" b="0" i="0">
+                <a:solidFill>
+                  <a:srgbClr val="FFFFFF"/>
+                </a:solidFill>
+                <a:latin typeface="Calibri"/>
+              </a:rPr>
+              <a:t>Iterator&lt;Mascota&gt; it = mascotas.iterator();  // para BORRAR mientras se recorre</a:t>
+            </a:r>
+          </a:p>
+          <a:p>
+            <a:pPr>
+              <a:spcAft>
+                <a:spcPts val="314"/>
+              </a:spcAft>
+            </a:pPr>
+            <a:r>
+              <a:rPr sz="1100" b="0" i="0">
+                <a:solidFill>
+                  <a:srgbClr val="FFFFFF"/>
+                </a:solidFill>
+                <a:latin typeface="Calibri"/>
+              </a:rPr>
+              <a:t>while (it.hasNext()) {</a:t>
+            </a:r>
+          </a:p>
+          <a:p>
+            <a:pPr>
+              <a:spcAft>
+                <a:spcPts val="314"/>
+              </a:spcAft>
+            </a:pPr>
+            <a:r>
+              <a:rPr sz="1100" b="0" i="0">
+                <a:solidFill>
+                  <a:srgbClr val="FFFFFF"/>
+                </a:solidFill>
+                <a:latin typeface="Calibri"/>
+              </a:rPr>
+              <a:t>    if (it.next().getEdad() &gt;= 9) it.remove();   // geriatria, sin excepcion</a:t>
+            </a:r>
+          </a:p>
+          <a:p>
+            <a:pPr>
+              <a:spcAft>
+                <a:spcPts val="314"/>
+              </a:spcAft>
+            </a:pPr>
+            <a:r>
+              <a:rPr sz="1100" b="0" i="0">
+                <a:solidFill>
+                  <a:srgbClr val="FFFFFF"/>
+                </a:solidFill>
+                <a:latin typeface="Calibri"/>
+              </a:rPr>
+              <a:t>}</a:t>
+            </a:r>
+          </a:p>
+        </p:txBody>
+      </p:sp>
+      <p:sp>
+        <p:nvSpPr>
+          <p:cNvPr id="9" name="TextBox 8"/>
+          <p:cNvSpPr txBox="1"/>
+          <p:nvPr/>
+        </p:nvSpPr>
+        <p:spPr>
+          <a:xfrm>
+            <a:off x="457200" y="6080760"/>
+            <a:ext cx="11277295" cy="320040"/>
+          </a:xfrm>
+          <a:prstGeom prst="rect">
+            <a:avLst/>
+          </a:prstGeom>
+          <a:noFill/>
+        </p:spPr>
+        <p:txBody>
+          <a:bodyPr wrap="square">
+            <a:spAutoFit/>
+          </a:bodyPr>
           <a:lstStyle/>
           <a:p>
             <a:pPr algn="ctr"/>
-          </a:p>
-        </p:txBody>
-      </p:sp>
-      <p:sp>
-        <p:nvSpPr>
-          <p:cNvPr id="10" name="Rounded Rectangle 9"/>
-          <p:cNvSpPr/>
-          <p:nvPr/>
-        </p:nvSpPr>
-        <p:spPr>
-          <a:xfrm>
-            <a:off x="594360" y="2532888"/>
-            <a:ext cx="438912" cy="438912"/>
-          </a:xfrm>
-          <a:prstGeom prst="roundRect">
-            <a:avLst>
-              <a:gd name="adj" fmla="val 12000"/>
-            </a:avLst>
-          </a:prstGeom>
-          <a:solidFill>
-            <a:srgbClr val="095292"/>
-          </a:solidFill>
-          <a:ln>
-            <a:noFill/>
-          </a:ln>
-        </p:spPr>
-        <p:style>
-          <a:lnRef idx="1">
-            <a:schemeClr val="accent1"/>
-          </a:lnRef>
-          <a:fillRef idx="3">
-            <a:schemeClr val="accent1"/>
-          </a:fillRef>
-          <a:effectRef idx="2">
-            <a:schemeClr val="accent1"/>
-          </a:effectRef>
-          <a:fontRef idx="minor">
-            <a:schemeClr val="lt1"/>
-          </a:fontRef>
-        </p:style>
-        <p:txBody>
-          <a:bodyPr rtlCol="0" anchor="ctr"/>
-          <a:lstStyle/>
-          <a:p>
-            <a:pPr algn="ctr"/>
-          </a:p>
-        </p:txBody>
-      </p:sp>
-      <p:sp>
-        <p:nvSpPr>
-          <p:cNvPr id="11" name="TextBox 10"/>
-          <p:cNvSpPr txBox="1"/>
-          <p:nvPr/>
-        </p:nvSpPr>
-        <p:spPr>
-          <a:xfrm>
-            <a:off x="594360" y="2532888"/>
-            <a:ext cx="438912" cy="438912"/>
-          </a:xfrm>
-          <a:prstGeom prst="rect">
-            <a:avLst/>
-          </a:prstGeom>
-          <a:noFill/>
-        </p:spPr>
-        <p:txBody>
-          <a:bodyPr wrap="square" anchor="ctr"/>
-          <a:lstStyle/>
-          <a:p>
-            <a:pPr algn="ctr"/>
-            <a:r>
-              <a:rPr sz="1600" b="1" i="0">
-                <a:solidFill>
-                  <a:srgbClr val="FFFFFF"/>
-                </a:solidFill>
-                <a:latin typeface="Calibri"/>
-              </a:rPr>
-              <a:t>2</a:t>
-            </a:r>
-          </a:p>
-        </p:txBody>
-      </p:sp>
-      <p:sp>
-        <p:nvSpPr>
-          <p:cNvPr id="12" name="TextBox 11"/>
-          <p:cNvSpPr txBox="1"/>
-          <p:nvPr/>
-        </p:nvSpPr>
-        <p:spPr>
-          <a:xfrm>
-            <a:off x="1188720" y="2368296"/>
-            <a:ext cx="10271455" cy="786384"/>
-          </a:xfrm>
-          <a:prstGeom prst="rect">
-            <a:avLst/>
-          </a:prstGeom>
-          <a:noFill/>
-        </p:spPr>
-        <p:txBody>
-          <a:bodyPr wrap="square" anchor="ctr"/>
-          <a:lstStyle/>
-          <a:p>
-            <a:r>
-              <a:rPr sz="1400" b="1" i="0">
-                <a:solidFill>
-                  <a:srgbClr val="095292"/>
-                </a:solidFill>
-                <a:latin typeface="Calibri"/>
-              </a:rPr>
-              <a:t>Cree la clase RegistroMascotas con el atributo private final List&lt;Mascota&gt; mascotas = new ArrayList&lt;&gt;(); y el metodo agregar(Mascota m) que rechace un ID ya existente; verifique agregando dos veces la mascota M-001 y comprobando que la consola muestra el aviso de ID repetido y que cantidad() sigue devolviendo 1.</a:t>
-            </a:r>
-          </a:p>
-        </p:txBody>
-      </p:sp>
-      <p:sp>
-        <p:nvSpPr>
-          <p:cNvPr id="13" name="Rounded Rectangle 12"/>
-          <p:cNvSpPr/>
-          <p:nvPr/>
-        </p:nvSpPr>
-        <p:spPr>
-          <a:xfrm>
-            <a:off x="457200" y="3319272"/>
-            <a:ext cx="11277295" cy="950976"/>
-          </a:xfrm>
-          <a:prstGeom prst="roundRect">
-            <a:avLst>
-              <a:gd name="adj" fmla="val 12000"/>
-            </a:avLst>
-          </a:prstGeom>
-          <a:solidFill>
-            <a:srgbClr val="F2F2F2"/>
-          </a:solidFill>
-          <a:ln>
-            <a:noFill/>
-          </a:ln>
-        </p:spPr>
-        <p:style>
-          <a:lnRef idx="1">
-            <a:schemeClr val="accent1"/>
-          </a:lnRef>
-          <a:fillRef idx="3">
-            <a:schemeClr val="accent1"/>
-          </a:fillRef>
-          <a:effectRef idx="2">
-            <a:schemeClr val="accent1"/>
-          </a:effectRef>
-          <a:fontRef idx="minor">
-            <a:schemeClr val="lt1"/>
-          </a:fontRef>
-        </p:style>
-        <p:txBody>
-          <a:bodyPr rtlCol="0" anchor="ctr"/>
-          <a:lstStyle/>
-          <a:p>
-            <a:pPr algn="ctr"/>
-          </a:p>
-        </p:txBody>
-      </p:sp>
-      <p:sp>
-        <p:nvSpPr>
-          <p:cNvPr id="14" name="Rounded Rectangle 13"/>
-          <p:cNvSpPr/>
-          <p:nvPr/>
-        </p:nvSpPr>
-        <p:spPr>
-          <a:xfrm>
-            <a:off x="594360" y="3575304"/>
-            <a:ext cx="438912" cy="438912"/>
-          </a:xfrm>
-          <a:prstGeom prst="roundRect">
-            <a:avLst>
-              <a:gd name="adj" fmla="val 12000"/>
-            </a:avLst>
-          </a:prstGeom>
-          <a:solidFill>
-            <a:srgbClr val="095292"/>
-          </a:solidFill>
-          <a:ln>
-            <a:noFill/>
-          </a:ln>
-        </p:spPr>
-        <p:style>
-          <a:lnRef idx="1">
-            <a:schemeClr val="accent1"/>
-          </a:lnRef>
-          <a:fillRef idx="3">
-            <a:schemeClr val="accent1"/>
-          </a:fillRef>
-          <a:effectRef idx="2">
-            <a:schemeClr val="accent1"/>
-          </a:effectRef>
-          <a:fontRef idx="minor">
-            <a:schemeClr val="lt1"/>
-          </a:fontRef>
-        </p:style>
-        <p:txBody>
-          <a:bodyPr rtlCol="0" anchor="ctr"/>
-          <a:lstStyle/>
-          <a:p>
-            <a:pPr algn="ctr"/>
-          </a:p>
-        </p:txBody>
-      </p:sp>
-      <p:sp>
-        <p:nvSpPr>
-          <p:cNvPr id="15" name="TextBox 14"/>
-          <p:cNvSpPr txBox="1"/>
-          <p:nvPr/>
-        </p:nvSpPr>
-        <p:spPr>
-          <a:xfrm>
-            <a:off x="594360" y="3575304"/>
-            <a:ext cx="438912" cy="438912"/>
-          </a:xfrm>
-          <a:prstGeom prst="rect">
-            <a:avLst/>
-          </a:prstGeom>
-          <a:noFill/>
-        </p:spPr>
-        <p:txBody>
-          <a:bodyPr wrap="square" anchor="ctr"/>
-          <a:lstStyle/>
-          <a:p>
-            <a:pPr algn="ctr"/>
-            <a:r>
-              <a:rPr sz="1600" b="1" i="0">
-                <a:solidFill>
-                  <a:srgbClr val="FFFFFF"/>
-                </a:solidFill>
-                <a:latin typeface="Calibri"/>
-              </a:rPr>
-              <a:t>3</a:t>
-            </a:r>
-          </a:p>
-        </p:txBody>
-      </p:sp>
-      <p:sp>
-        <p:nvSpPr>
-          <p:cNvPr id="16" name="TextBox 15"/>
-          <p:cNvSpPr txBox="1"/>
-          <p:nvPr/>
-        </p:nvSpPr>
-        <p:spPr>
-          <a:xfrm>
-            <a:off x="1188720" y="3410712"/>
-            <a:ext cx="10271455" cy="786384"/>
-          </a:xfrm>
-          <a:prstGeom prst="rect">
-            <a:avLst/>
-          </a:prstGeom>
-          <a:noFill/>
-        </p:spPr>
-        <p:txBody>
-          <a:bodyPr wrap="square" anchor="ctr"/>
-          <a:lstStyle/>
-          <a:p>
-            <a:r>
-              <a:rPr sz="1400" b="1" i="0">
-                <a:solidFill>
-                  <a:srgbClr val="095292"/>
-                </a:solidFill>
-                <a:latin typeface="Calibri"/>
-              </a:rPr>
-              <a:t>Implemente listar(), que recorra con for indexado e imprima cada ficha numerada, y buscarPorId(String id), que recorra con for-each y devuelva la Mascota o null; verifique que buscarPorId("M-003") imprime la ficha de Rocky y que buscarPorId("M-099") imprime que no existe, sin lanzar NullPointerException.</a:t>
-            </a:r>
-          </a:p>
-        </p:txBody>
-      </p:sp>
-      <p:sp>
-        <p:nvSpPr>
-          <p:cNvPr id="17" name="Rounded Rectangle 16"/>
-          <p:cNvSpPr/>
-          <p:nvPr/>
-        </p:nvSpPr>
-        <p:spPr>
-          <a:xfrm>
-            <a:off x="457200" y="4361688"/>
-            <a:ext cx="11277295" cy="950976"/>
-          </a:xfrm>
-          <a:prstGeom prst="roundRect">
-            <a:avLst>
-              <a:gd name="adj" fmla="val 12000"/>
-            </a:avLst>
-          </a:prstGeom>
-          <a:solidFill>
-            <a:srgbClr val="E8F4FA"/>
-          </a:solidFill>
-          <a:ln>
-            <a:noFill/>
-          </a:ln>
-        </p:spPr>
-        <p:style>
-          <a:lnRef idx="1">
-            <a:schemeClr val="accent1"/>
-          </a:lnRef>
-          <a:fillRef idx="3">
-            <a:schemeClr val="accent1"/>
-          </a:fillRef>
-          <a:effectRef idx="2">
-            <a:schemeClr val="accent1"/>
-          </a:effectRef>
-          <a:fontRef idx="minor">
-            <a:schemeClr val="lt1"/>
-          </a:fontRef>
-        </p:style>
-        <p:txBody>
-          <a:bodyPr rtlCol="0" anchor="ctr"/>
-          <a:lstStyle/>
-          <a:p>
-            <a:pPr algn="ctr"/>
-          </a:p>
-        </p:txBody>
-      </p:sp>
-      <p:sp>
-        <p:nvSpPr>
-          <p:cNvPr id="18" name="Rounded Rectangle 17"/>
-          <p:cNvSpPr/>
-          <p:nvPr/>
-        </p:nvSpPr>
-        <p:spPr>
-          <a:xfrm>
-            <a:off x="594360" y="4617720"/>
-            <a:ext cx="438912" cy="438912"/>
-          </a:xfrm>
-          <a:prstGeom prst="roundRect">
-            <a:avLst>
-              <a:gd name="adj" fmla="val 12000"/>
-            </a:avLst>
-          </a:prstGeom>
-          <a:solidFill>
-            <a:srgbClr val="095292"/>
-          </a:solidFill>
-          <a:ln>
-            <a:noFill/>
-          </a:ln>
-        </p:spPr>
-        <p:style>
-          <a:lnRef idx="1">
-            <a:schemeClr val="accent1"/>
-          </a:lnRef>
-          <a:fillRef idx="3">
-            <a:schemeClr val="accent1"/>
-          </a:fillRef>
-          <a:effectRef idx="2">
-            <a:schemeClr val="accent1"/>
-          </a:effectRef>
-          <a:fontRef idx="minor">
-            <a:schemeClr val="lt1"/>
-          </a:fontRef>
-        </p:style>
-        <p:txBody>
-          <a:bodyPr rtlCol="0" anchor="ctr"/>
-          <a:lstStyle/>
-          <a:p>
-            <a:pPr algn="ctr"/>
-          </a:p>
-        </p:txBody>
-      </p:sp>
-      <p:sp>
-        <p:nvSpPr>
-          <p:cNvPr id="19" name="TextBox 18"/>
-          <p:cNvSpPr txBox="1"/>
-          <p:nvPr/>
-        </p:nvSpPr>
-        <p:spPr>
-          <a:xfrm>
-            <a:off x="594360" y="4617720"/>
-            <a:ext cx="438912" cy="438912"/>
-          </a:xfrm>
-          <a:prstGeom prst="rect">
-            <a:avLst/>
-          </a:prstGeom>
-          <a:noFill/>
-        </p:spPr>
-        <p:txBody>
-          <a:bodyPr wrap="square" anchor="ctr"/>
-          <a:lstStyle/>
-          <a:p>
-            <a:pPr algn="ctr"/>
-            <a:r>
-              <a:rPr sz="1600" b="1" i="0">
-                <a:solidFill>
-                  <a:srgbClr val="FFFFFF"/>
-                </a:solidFill>
-                <a:latin typeface="Calibri"/>
-              </a:rPr>
-              <a:t>4</a:t>
-            </a:r>
-          </a:p>
-        </p:txBody>
-      </p:sp>
-      <p:sp>
-        <p:nvSpPr>
-          <p:cNvPr id="20" name="TextBox 19"/>
-          <p:cNvSpPr txBox="1"/>
-          <p:nvPr/>
-        </p:nvSpPr>
-        <p:spPr>
-          <a:xfrm>
-            <a:off x="1188720" y="4453128"/>
-            <a:ext cx="10271455" cy="786384"/>
-          </a:xfrm>
-          <a:prstGeom prst="rect">
-            <a:avLst/>
-          </a:prstGeom>
-          <a:noFill/>
-        </p:spPr>
-        <p:txBody>
-          <a:bodyPr wrap="square" anchor="ctr"/>
-          <a:lstStyle/>
-          <a:p>
-            <a:r>
-              <a:rPr sz="1400" b="1" i="0">
-                <a:solidFill>
-                  <a:srgbClr val="095292"/>
-                </a:solidFill>
-                <a:latin typeface="Calibri"/>
-              </a:rPr>
-              <a:t>Implemente eliminarPorId(String id) usando remove(objeto) y el metodo pasarAGeriatria(int edadMinima) usando Iterator con it.remove(); verifique que despues de eliminar M-002 y de pasar a geriatria a las mascotas de 9 anios o mas, size() bajo exactamente en la cantidad de fichas retiradas y el programa no lanza ConcurrentModificationException.</a:t>
-            </a:r>
-          </a:p>
-        </p:txBody>
-      </p:sp>
-      <p:sp>
-        <p:nvSpPr>
-          <p:cNvPr id="21" name="Rounded Rectangle 20"/>
-          <p:cNvSpPr/>
-          <p:nvPr/>
-        </p:nvSpPr>
-        <p:spPr>
-          <a:xfrm>
-            <a:off x="457200" y="5404104"/>
-            <a:ext cx="11277295" cy="950976"/>
-          </a:xfrm>
-          <a:prstGeom prst="roundRect">
-            <a:avLst>
-              <a:gd name="adj" fmla="val 12000"/>
-            </a:avLst>
-          </a:prstGeom>
-          <a:solidFill>
-            <a:srgbClr val="F2F2F2"/>
-          </a:solidFill>
-          <a:ln>
-            <a:noFill/>
-          </a:ln>
-        </p:spPr>
-        <p:style>
-          <a:lnRef idx="1">
-            <a:schemeClr val="accent1"/>
-          </a:lnRef>
-          <a:fillRef idx="3">
-            <a:schemeClr val="accent1"/>
-          </a:fillRef>
-          <a:effectRef idx="2">
-            <a:schemeClr val="accent1"/>
-          </a:effectRef>
-          <a:fontRef idx="minor">
-            <a:schemeClr val="lt1"/>
-          </a:fontRef>
-        </p:style>
-        <p:txBody>
-          <a:bodyPr rtlCol="0" anchor="ctr"/>
-          <a:lstStyle/>
-          <a:p>
-            <a:pPr algn="ctr"/>
-          </a:p>
-        </p:txBody>
-      </p:sp>
-      <p:sp>
-        <p:nvSpPr>
-          <p:cNvPr id="22" name="Rounded Rectangle 21"/>
-          <p:cNvSpPr/>
-          <p:nvPr/>
-        </p:nvSpPr>
-        <p:spPr>
-          <a:xfrm>
-            <a:off x="594360" y="5660136"/>
-            <a:ext cx="438912" cy="438912"/>
-          </a:xfrm>
-          <a:prstGeom prst="roundRect">
-            <a:avLst>
-              <a:gd name="adj" fmla="val 12000"/>
-            </a:avLst>
-          </a:prstGeom>
-          <a:solidFill>
-            <a:srgbClr val="095292"/>
-          </a:solidFill>
-          <a:ln>
-            <a:noFill/>
-          </a:ln>
-        </p:spPr>
-        <p:style>
-          <a:lnRef idx="1">
-            <a:schemeClr val="accent1"/>
-          </a:lnRef>
-          <a:fillRef idx="3">
-            <a:schemeClr val="accent1"/>
-          </a:fillRef>
-          <a:effectRef idx="2">
-            <a:schemeClr val="accent1"/>
-          </a:effectRef>
-          <a:fontRef idx="minor">
-            <a:schemeClr val="lt1"/>
-          </a:fontRef>
-        </p:style>
-        <p:txBody>
-          <a:bodyPr rtlCol="0" anchor="ctr"/>
-          <a:lstStyle/>
-          <a:p>
-            <a:pPr algn="ctr"/>
-          </a:p>
-        </p:txBody>
-      </p:sp>
-      <p:sp>
-        <p:nvSpPr>
-          <p:cNvPr id="23" name="TextBox 22"/>
-          <p:cNvSpPr txBox="1"/>
-          <p:nvPr/>
-        </p:nvSpPr>
-        <p:spPr>
-          <a:xfrm>
-            <a:off x="594360" y="5660136"/>
-            <a:ext cx="438912" cy="438912"/>
-          </a:xfrm>
-          <a:prstGeom prst="rect">
-            <a:avLst/>
-          </a:prstGeom>
-          <a:noFill/>
-        </p:spPr>
-        <p:txBody>
-          <a:bodyPr wrap="square" anchor="ctr"/>
-          <a:lstStyle/>
-          <a:p>
-            <a:pPr algn="ctr"/>
-            <a:r>
-              <a:rPr sz="1600" b="1" i="0">
-                <a:solidFill>
-                  <a:srgbClr val="FFFFFF"/>
-                </a:solidFill>
-                <a:latin typeface="Calibri"/>
-              </a:rPr>
-              <a:t>5</a:t>
-            </a:r>
-          </a:p>
-        </p:txBody>
-      </p:sp>
-      <p:sp>
-        <p:nvSpPr>
-          <p:cNvPr id="24" name="TextBox 23"/>
-          <p:cNvSpPr txBox="1"/>
-          <p:nvPr/>
-        </p:nvSpPr>
-        <p:spPr>
-          <a:xfrm>
-            <a:off x="1188720" y="5495544"/>
-            <a:ext cx="10271455" cy="786384"/>
-          </a:xfrm>
-          <a:prstGeom prst="rect">
-            <a:avLst/>
-          </a:prstGeom>
-          <a:noFill/>
-        </p:spPr>
-        <p:txBody>
-          <a:bodyPr wrap="square" anchor="ctr"/>
-          <a:lstStyle/>
-          <a:p>
-            <a:r>
-              <a:rPr sz="1400" b="1" i="0">
-                <a:solidFill>
-                  <a:srgbClr val="095292"/>
-                </a:solidFill>
-                <a:latin typeface="Calibri"/>
-              </a:rPr>
-              <a:t>Arme un menu de consola con Scanner y opciones 1-Agregar, 2-Listar, 3-Buscar por ID, 4-Eliminar, 5-Salir dentro de un ciclo while; ejecute el programa cargando las seis fichas del escenario, tome captura de la consola con el listado final y suba el proyecto comprimido mas la captura a la plataforma del curso.</a:t>
-            </a:r>
-          </a:p>
-        </p:txBody>
-      </p:sp>
-      <p:sp>
-        <p:nvSpPr>
-          <p:cNvPr id="25" name="TextBox 24"/>
+            <a:r>
+              <a:rPr sz="1200" b="0" i="1">
+                <a:solidFill>
+                  <a:srgbClr val="666666"/>
+                </a:solidFill>
+                <a:latin typeface="Calibri"/>
+              </a:rPr>
+              <a:t>El arreglo obliga a adivinar el futuro; el ArrayList lo administra por usted, siempre que respete size() y borre con Iterator.</a:t>
+            </a:r>
+          </a:p>
+        </p:txBody>
+      </p:sp>
+      <p:sp>
+        <p:nvSpPr>
+          <p:cNvPr id="10" name="TextBox 9"/>
           <p:cNvSpPr txBox="1"/>
           <p:nvPr/>
         </p:nvSpPr>

--- a/Programacion II/Clases/Clase 2 - Colecciones dinamicas ArrayList/Presentacion.pptx
+++ b/Programacion II/Clases/Clase 2 - Colecciones dinamicas ArrayList/Presentacion.pptx
@@ -9,40 +9,34 @@
     <p:sldId id="257" r:id="rId8"/>
     <p:sldId id="258" r:id="rId9"/>
     <p:sldId id="259" r:id="rId10"/>
-    <p:sldId id="260" r:id="rId11"/>
-    <p:sldId id="261" r:id="rId12"/>
-    <p:sldId id="262" r:id="rId13"/>
-    <p:sldId id="263" r:id="rId14"/>
-    <p:sldId id="264" r:id="rId15"/>
-    <p:sldId id="265" r:id="rId16"/>
-    <p:sldId id="266" r:id="rId17"/>
-    <p:sldId id="267" r:id="rId18"/>
-    <p:sldId id="268" r:id="rId19"/>
-    <p:sldId id="269" r:id="rId20"/>
-    <p:sldId id="270" r:id="rId21"/>
-    <p:sldId id="271" r:id="rId22"/>
-    <p:sldId id="272" r:id="rId23"/>
-    <p:sldId id="273" r:id="rId24"/>
-    <p:sldId id="274" r:id="rId25"/>
-    <p:sldId id="275" r:id="rId26"/>
-    <p:sldId id="276" r:id="rId27"/>
-    <p:sldId id="277" r:id="rId28"/>
-    <p:sldId id="278" r:id="rId29"/>
-    <p:sldId id="279" r:id="rId30"/>
-    <p:sldId id="280" r:id="rId31"/>
-    <p:sldId id="281" r:id="rId32"/>
-    <p:sldId id="282" r:id="rId33"/>
-    <p:sldId id="283" r:id="rId34"/>
-    <p:sldId id="284" r:id="rId35"/>
-    <p:sldId id="285" r:id="rId36"/>
-    <p:sldId id="286" r:id="rId37"/>
-    <p:sldId id="287" r:id="rId38"/>
-    <p:sldId id="288" r:id="rId39"/>
-    <p:sldId id="289" r:id="rId40"/>
-    <p:sldId id="290" r:id="rId41"/>
-    <p:sldId id="291" r:id="rId42"/>
-    <p:sldId id="292" r:id="rId43"/>
-    <p:sldId id="293" r:id="rId44"/>
+    <p:sldId id="260" r:id="rId12"/>
+    <p:sldId id="261" r:id="rId13"/>
+    <p:sldId id="262" r:id="rId14"/>
+    <p:sldId id="263" r:id="rId15"/>
+    <p:sldId id="264" r:id="rId16"/>
+    <p:sldId id="265" r:id="rId17"/>
+    <p:sldId id="266" r:id="rId18"/>
+    <p:sldId id="267" r:id="rId19"/>
+    <p:sldId id="268" r:id="rId20"/>
+    <p:sldId id="269" r:id="rId21"/>
+    <p:sldId id="270" r:id="rId22"/>
+    <p:sldId id="271" r:id="rId23"/>
+    <p:sldId id="272" r:id="rId24"/>
+    <p:sldId id="273" r:id="rId25"/>
+    <p:sldId id="274" r:id="rId26"/>
+    <p:sldId id="275" r:id="rId27"/>
+    <p:sldId id="276" r:id="rId28"/>
+    <p:sldId id="277" r:id="rId29"/>
+    <p:sldId id="278" r:id="rId30"/>
+    <p:sldId id="279" r:id="rId31"/>
+    <p:sldId id="280" r:id="rId32"/>
+    <p:sldId id="281" r:id="rId33"/>
+    <p:sldId id="282" r:id="rId34"/>
+    <p:sldId id="283" r:id="rId35"/>
+    <p:sldId id="284" r:id="rId36"/>
+    <p:sldId id="285" r:id="rId37"/>
+    <p:sldId id="286" r:id="rId38"/>
+    <p:sldId id="287" r:id="rId39"/>
   </p:sldIdLst>
   <p:sldSz cx="12191695" cy="6858000" type="screen4x3"/>
   <p:notesSz cx="6858000" cy="9144000"/>
@@ -142,6 +136,712 @@
     </a:lvl9pPr>
   </p:defaultTextStyle>
 </p:presentation>
+</file>
+
+<file path=ppt/notesMasters/notesMaster1.xml><?xml version="1.0" encoding="utf-8"?>
+<p:notesMaster xmlns:a="http://schemas.openxmlformats.org/drawingml/2006/main" xmlns:p="http://schemas.openxmlformats.org/presentationml/2006/main" xmlns:r="http://schemas.openxmlformats.org/officeDocument/2006/relationships">
+  <p:cSld>
+    <p:bg>
+      <p:bgRef idx="1001">
+        <a:schemeClr val="bg1"/>
+      </p:bgRef>
+    </p:bg>
+    <p:spTree>
+      <p:nvGrpSpPr>
+        <p:cNvPr id="1" name=""/>
+        <p:cNvGrpSpPr/>
+        <p:nvPr/>
+      </p:nvGrpSpPr>
+      <p:grpSpPr>
+        <a:xfrm>
+          <a:off x="0" y="0"/>
+          <a:ext cx="0" cy="0"/>
+          <a:chOff x="0" y="0"/>
+          <a:chExt cx="0" cy="0"/>
+        </a:xfrm>
+      </p:grpSpPr>
+      <p:sp>
+        <p:nvSpPr>
+          <p:cNvPr id="2" name="Header Placeholder 1"/>
+          <p:cNvSpPr>
+            <a:spLocks noGrp="1"/>
+          </p:cNvSpPr>
+          <p:nvPr>
+            <p:ph type="hdr" sz="quarter"/>
+          </p:nvPr>
+        </p:nvSpPr>
+        <p:spPr>
+          <a:xfrm>
+            <a:off x="0" y="0"/>
+            <a:ext cx="2971800" cy="457200"/>
+          </a:xfrm>
+          <a:prstGeom prst="rect">
+            <a:avLst/>
+          </a:prstGeom>
+        </p:spPr>
+        <p:txBody>
+          <a:bodyPr vert="horz" lIns="91440" tIns="45720" rIns="91440" bIns="45720" rtlCol="0"/>
+          <a:lstStyle>
+            <a:lvl1pPr algn="l">
+              <a:defRPr sz="1200"/>
+            </a:lvl1pPr>
+          </a:lstStyle>
+          <a:p>
+            <a:endParaRPr lang="en-US"/>
+          </a:p>
+        </p:txBody>
+      </p:sp>
+      <p:sp>
+        <p:nvSpPr>
+          <p:cNvPr id="3" name="Date Placeholder 2"/>
+          <p:cNvSpPr>
+            <a:spLocks noGrp="1"/>
+          </p:cNvSpPr>
+          <p:nvPr>
+            <p:ph type="dt" idx="1"/>
+          </p:nvPr>
+        </p:nvSpPr>
+        <p:spPr>
+          <a:xfrm>
+            <a:off x="3884613" y="0"/>
+            <a:ext cx="2971800" cy="457200"/>
+          </a:xfrm>
+          <a:prstGeom prst="rect">
+            <a:avLst/>
+          </a:prstGeom>
+        </p:spPr>
+        <p:txBody>
+          <a:bodyPr vert="horz" lIns="91440" tIns="45720" rIns="91440" bIns="45720" rtlCol="0"/>
+          <a:lstStyle>
+            <a:lvl1pPr algn="r">
+              <a:defRPr sz="1200"/>
+            </a:lvl1pPr>
+          </a:lstStyle>
+          <a:p>
+            <a:fld id="{0F89C1C7-3DCD-1040-A9CF-14679D8B5DDD}" type="datetimeFigureOut">
+              <a:rPr lang="en-US" smtClean="0"/>
+              <a:t>10/17/16</a:t>
+            </a:fld>
+            <a:endParaRPr lang="en-US"/>
+          </a:p>
+        </p:txBody>
+      </p:sp>
+      <p:sp>
+        <p:nvSpPr>
+          <p:cNvPr id="4" name="Slide Image Placeholder 3"/>
+          <p:cNvSpPr>
+            <a:spLocks noGrp="1" noRot="1" noChangeAspect="1"/>
+          </p:cNvSpPr>
+          <p:nvPr>
+            <p:ph type="sldImg" idx="2"/>
+          </p:nvPr>
+        </p:nvSpPr>
+        <p:spPr>
+          <a:xfrm>
+            <a:off x="1143000" y="685800"/>
+            <a:ext cx="4572000" cy="3429000"/>
+          </a:xfrm>
+          <a:prstGeom prst="rect">
+            <a:avLst/>
+          </a:prstGeom>
+          <a:noFill/>
+          <a:ln w="12700">
+            <a:solidFill>
+              <a:prstClr val="black"/>
+            </a:solidFill>
+          </a:ln>
+        </p:spPr>
+        <p:txBody>
+          <a:bodyPr vert="horz" lIns="91440" tIns="45720" rIns="91440" bIns="45720" rtlCol="0" anchor="ctr"/>
+          <a:lstStyle/>
+          <a:p>
+            <a:endParaRPr lang="en-US"/>
+          </a:p>
+        </p:txBody>
+      </p:sp>
+      <p:sp>
+        <p:nvSpPr>
+          <p:cNvPr id="5" name="Notes Placeholder 4"/>
+          <p:cNvSpPr>
+            <a:spLocks noGrp="1"/>
+          </p:cNvSpPr>
+          <p:nvPr>
+            <p:ph type="body" sz="quarter" idx="3"/>
+          </p:nvPr>
+        </p:nvSpPr>
+        <p:spPr>
+          <a:xfrm>
+            <a:off x="685800" y="4343400"/>
+            <a:ext cx="5486400" cy="4114800"/>
+          </a:xfrm>
+          <a:prstGeom prst="rect">
+            <a:avLst/>
+          </a:prstGeom>
+        </p:spPr>
+        <p:txBody>
+          <a:bodyPr vert="horz" lIns="91440" tIns="45720" rIns="91440" bIns="45720" rtlCol="0"/>
+          <a:lstStyle/>
+          <a:p>
+            <a:pPr lvl="0"/>
+            <a:r>
+              <a:rPr lang="en-US" smtClean="0"/>
+              <a:t>Click to edit Master text styles</a:t>
+            </a:r>
+          </a:p>
+          <a:p>
+            <a:pPr lvl="1"/>
+            <a:r>
+              <a:rPr lang="en-US" smtClean="0"/>
+              <a:t>Second level</a:t>
+            </a:r>
+          </a:p>
+          <a:p>
+            <a:pPr lvl="2"/>
+            <a:r>
+              <a:rPr lang="en-US" smtClean="0"/>
+              <a:t>Third level</a:t>
+            </a:r>
+          </a:p>
+          <a:p>
+            <a:pPr lvl="3"/>
+            <a:r>
+              <a:rPr lang="en-US" smtClean="0"/>
+              <a:t>Fourth level</a:t>
+            </a:r>
+          </a:p>
+          <a:p>
+            <a:pPr lvl="4"/>
+            <a:r>
+              <a:rPr lang="en-US" smtClean="0"/>
+              <a:t>Fifth level</a:t>
+            </a:r>
+            <a:endParaRPr lang="en-US"/>
+          </a:p>
+        </p:txBody>
+      </p:sp>
+      <p:sp>
+        <p:nvSpPr>
+          <p:cNvPr id="6" name="Footer Placeholder 5"/>
+          <p:cNvSpPr>
+            <a:spLocks noGrp="1"/>
+          </p:cNvSpPr>
+          <p:nvPr>
+            <p:ph type="ftr" sz="quarter" idx="4"/>
+          </p:nvPr>
+        </p:nvSpPr>
+        <p:spPr>
+          <a:xfrm>
+            <a:off x="0" y="8685213"/>
+            <a:ext cx="2971800" cy="457200"/>
+          </a:xfrm>
+          <a:prstGeom prst="rect">
+            <a:avLst/>
+          </a:prstGeom>
+        </p:spPr>
+        <p:txBody>
+          <a:bodyPr vert="horz" lIns="91440" tIns="45720" rIns="91440" bIns="45720" rtlCol="0" anchor="b"/>
+          <a:lstStyle>
+            <a:lvl1pPr algn="l">
+              <a:defRPr sz="1200"/>
+            </a:lvl1pPr>
+          </a:lstStyle>
+          <a:p>
+            <a:endParaRPr lang="en-US"/>
+          </a:p>
+        </p:txBody>
+      </p:sp>
+      <p:sp>
+        <p:nvSpPr>
+          <p:cNvPr id="7" name="Slide Number Placeholder 6"/>
+          <p:cNvSpPr>
+            <a:spLocks noGrp="1"/>
+          </p:cNvSpPr>
+          <p:nvPr>
+            <p:ph type="sldNum" sz="quarter" idx="5"/>
+          </p:nvPr>
+        </p:nvSpPr>
+        <p:spPr>
+          <a:xfrm>
+            <a:off x="3884613" y="8685213"/>
+            <a:ext cx="2971800" cy="457200"/>
+          </a:xfrm>
+          <a:prstGeom prst="rect">
+            <a:avLst/>
+          </a:prstGeom>
+        </p:spPr>
+        <p:txBody>
+          <a:bodyPr vert="horz" lIns="91440" tIns="45720" rIns="91440" bIns="45720" rtlCol="0" anchor="b"/>
+          <a:lstStyle>
+            <a:lvl1pPr algn="r">
+              <a:defRPr sz="1200"/>
+            </a:lvl1pPr>
+          </a:lstStyle>
+          <a:p>
+            <a:fld id="{BB5E49A5-4136-284D-997B-48E1D791AD67}" type="slidenum">
+              <a:rPr lang="en-US" smtClean="0"/>
+              <a:t>‹#›</a:t>
+            </a:fld>
+            <a:endParaRPr lang="en-US"/>
+          </a:p>
+        </p:txBody>
+      </p:sp>
+    </p:spTree>
+    <p:extLst>
+      <p:ext uri="{BB962C8B-B14F-4D97-AF65-F5344CB8AC3E}">
+        <p14:creationId xmlns:p14="http://schemas.microsoft.com/office/powerpoint/2010/main" val="2623252185"/>
+      </p:ext>
+    </p:extLst>
+  </p:cSld>
+  <p:clrMap bg1="lt1" tx1="dk1" bg2="lt2" tx2="dk2" accent1="accent1" accent2="accent2" accent3="accent3" accent4="accent4" accent5="accent5" accent6="accent6" hlink="hlink" folHlink="folHlink"/>
+  <p:notesStyle>
+    <a:lvl1pPr marL="0" algn="l" defTabSz="457200" rtl="0" eaLnBrk="1" latinLnBrk="0" hangingPunct="1">
+      <a:defRPr sz="1200" kern="1200">
+        <a:solidFill>
+          <a:schemeClr val="tx1"/>
+        </a:solidFill>
+        <a:latin typeface="+mn-lt"/>
+        <a:ea typeface="+mn-ea"/>
+        <a:cs typeface="+mn-cs"/>
+      </a:defRPr>
+    </a:lvl1pPr>
+    <a:lvl2pPr marL="457200" algn="l" defTabSz="457200" rtl="0" eaLnBrk="1" latinLnBrk="0" hangingPunct="1">
+      <a:defRPr sz="1200" kern="1200">
+        <a:solidFill>
+          <a:schemeClr val="tx1"/>
+        </a:solidFill>
+        <a:latin typeface="+mn-lt"/>
+        <a:ea typeface="+mn-ea"/>
+        <a:cs typeface="+mn-cs"/>
+      </a:defRPr>
+    </a:lvl2pPr>
+    <a:lvl3pPr marL="914400" algn="l" defTabSz="457200" rtl="0" eaLnBrk="1" latinLnBrk="0" hangingPunct="1">
+      <a:defRPr sz="1200" kern="1200">
+        <a:solidFill>
+          <a:schemeClr val="tx1"/>
+        </a:solidFill>
+        <a:latin typeface="+mn-lt"/>
+        <a:ea typeface="+mn-ea"/>
+        <a:cs typeface="+mn-cs"/>
+      </a:defRPr>
+    </a:lvl3pPr>
+    <a:lvl4pPr marL="1371600" algn="l" defTabSz="457200" rtl="0" eaLnBrk="1" latinLnBrk="0" hangingPunct="1">
+      <a:defRPr sz="1200" kern="1200">
+        <a:solidFill>
+          <a:schemeClr val="tx1"/>
+        </a:solidFill>
+        <a:latin typeface="+mn-lt"/>
+        <a:ea typeface="+mn-ea"/>
+        <a:cs typeface="+mn-cs"/>
+      </a:defRPr>
+    </a:lvl4pPr>
+    <a:lvl5pPr marL="1828800" algn="l" defTabSz="457200" rtl="0" eaLnBrk="1" latinLnBrk="0" hangingPunct="1">
+      <a:defRPr sz="1200" kern="1200">
+        <a:solidFill>
+          <a:schemeClr val="tx1"/>
+        </a:solidFill>
+        <a:latin typeface="+mn-lt"/>
+        <a:ea typeface="+mn-ea"/>
+        <a:cs typeface="+mn-cs"/>
+      </a:defRPr>
+    </a:lvl5pPr>
+    <a:lvl6pPr marL="2286000" algn="l" defTabSz="457200" rtl="0" eaLnBrk="1" latinLnBrk="0" hangingPunct="1">
+      <a:defRPr sz="1200" kern="1200">
+        <a:solidFill>
+          <a:schemeClr val="tx1"/>
+        </a:solidFill>
+        <a:latin typeface="+mn-lt"/>
+        <a:ea typeface="+mn-ea"/>
+        <a:cs typeface="+mn-cs"/>
+      </a:defRPr>
+    </a:lvl6pPr>
+    <a:lvl7pPr marL="2743200" algn="l" defTabSz="457200" rtl="0" eaLnBrk="1" latinLnBrk="0" hangingPunct="1">
+      <a:defRPr sz="1200" kern="1200">
+        <a:solidFill>
+          <a:schemeClr val="tx1"/>
+        </a:solidFill>
+        <a:latin typeface="+mn-lt"/>
+        <a:ea typeface="+mn-ea"/>
+        <a:cs typeface="+mn-cs"/>
+      </a:defRPr>
+    </a:lvl7pPr>
+    <a:lvl8pPr marL="3200400" algn="l" defTabSz="457200" rtl="0" eaLnBrk="1" latinLnBrk="0" hangingPunct="1">
+      <a:defRPr sz="1200" kern="1200">
+        <a:solidFill>
+          <a:schemeClr val="tx1"/>
+        </a:solidFill>
+        <a:latin typeface="+mn-lt"/>
+        <a:ea typeface="+mn-ea"/>
+        <a:cs typeface="+mn-cs"/>
+      </a:defRPr>
+    </a:lvl8pPr>
+    <a:lvl9pPr marL="3657600" algn="l" defTabSz="457200" rtl="0" eaLnBrk="1" latinLnBrk="0" hangingPunct="1">
+      <a:defRPr sz="1200" kern="1200">
+        <a:solidFill>
+          <a:schemeClr val="tx1"/>
+        </a:solidFill>
+        <a:latin typeface="+mn-lt"/>
+        <a:ea typeface="+mn-ea"/>
+        <a:cs typeface="+mn-cs"/>
+      </a:defRPr>
+    </a:lvl9pPr>
+  </p:notesStyle>
+</p:notesMaster>
+</file>
+
+<file path=ppt/notesSlides/notesSlide1.xml><?xml version="1.0" encoding="utf-8"?>
+<p:notes xmlns:a="http://schemas.openxmlformats.org/drawingml/2006/main" xmlns:p="http://schemas.openxmlformats.org/presentationml/2006/main" xmlns:r="http://schemas.openxmlformats.org/officeDocument/2006/relationships">
+  <p:cSld>
+    <p:spTree>
+      <p:nvGrpSpPr>
+        <p:cNvPr id="1" name=""/>
+        <p:cNvGrpSpPr/>
+        <p:nvPr/>
+      </p:nvGrpSpPr>
+      <p:grpSpPr>
+        <a:xfrm>
+          <a:off x="0" y="0"/>
+          <a:ext cx="0" cy="0"/>
+          <a:chOff x="0" y="0"/>
+          <a:chExt cx="0" cy="0"/>
+        </a:xfrm>
+      </p:grpSpPr>
+      <p:sp>
+        <p:nvSpPr>
+          <p:cNvPr id="2" name="Slide Image Placeholder 1"/>
+          <p:cNvSpPr>
+            <a:spLocks noGrp="1"/>
+          </p:cNvSpPr>
+          <p:nvPr>
+            <p:ph type="sldImg" idx="2"/>
+          </p:nvPr>
+        </p:nvSpPr>
+        <p:spPr/>
+      </p:sp>
+      <p:sp>
+        <p:nvSpPr>
+          <p:cNvPr id="3" name="Notes Placeholder 2"/>
+          <p:cNvSpPr>
+            <a:spLocks noGrp="1"/>
+          </p:cNvSpPr>
+          <p:nvPr>
+            <p:ph type="body" idx="3" sz="quarter"/>
+          </p:nvPr>
+        </p:nvSpPr>
+        <p:spPr/>
+        <p:txBody>
+          <a:bodyPr/>
+          <a:lstStyle/>
+          <a:p>
+            <a:r>
+              <a:t>Empecemos por el problema real de Huellitas.</a:t>
+            </a:r>
+          </a:p>
+        </p:txBody>
+      </p:sp>
+      <p:sp>
+        <p:nvSpPr>
+          <p:cNvPr id="4" name="Slide Number Placeholder 3"/>
+          <p:cNvSpPr>
+            <a:spLocks noGrp="1"/>
+          </p:cNvSpPr>
+          <p:nvPr>
+            <p:ph type="sldNum" idx="5" sz="quarter"/>
+          </p:nvPr>
+        </p:nvSpPr>
+        <p:spPr/>
+      </p:sp>
+    </p:spTree>
+  </p:cSld>
+  <p:clrMapOvr>
+    <a:masterClrMapping/>
+  </p:clrMapOvr>
+</p:notes>
+</file>
+
+<file path=ppt/notesSlides/notesSlide2.xml><?xml version="1.0" encoding="utf-8"?>
+<p:notes xmlns:a="http://schemas.openxmlformats.org/drawingml/2006/main" xmlns:p="http://schemas.openxmlformats.org/presentationml/2006/main" xmlns:r="http://schemas.openxmlformats.org/officeDocument/2006/relationships">
+  <p:cSld>
+    <p:spTree>
+      <p:nvGrpSpPr>
+        <p:cNvPr id="1" name=""/>
+        <p:cNvGrpSpPr/>
+        <p:nvPr/>
+      </p:nvGrpSpPr>
+      <p:grpSpPr>
+        <a:xfrm>
+          <a:off x="0" y="0"/>
+          <a:ext cx="0" cy="0"/>
+          <a:chOff x="0" y="0"/>
+          <a:chExt cx="0" cy="0"/>
+        </a:xfrm>
+      </p:grpSpPr>
+      <p:sp>
+        <p:nvSpPr>
+          <p:cNvPr id="2" name="Slide Image Placeholder 1"/>
+          <p:cNvSpPr>
+            <a:spLocks noGrp="1"/>
+          </p:cNvSpPr>
+          <p:nvPr>
+            <p:ph type="sldImg" idx="2"/>
+          </p:nvPr>
+        </p:nvSpPr>
+        <p:spPr/>
+      </p:sp>
+      <p:sp>
+        <p:nvSpPr>
+          <p:cNvPr id="3" name="Notes Placeholder 2"/>
+          <p:cNvSpPr>
+            <a:spLocks noGrp="1"/>
+          </p:cNvSpPr>
+          <p:nvPr>
+            <p:ph type="body" idx="3" sz="quarter"/>
+          </p:nvPr>
+        </p:nvSpPr>
+        <p:spPr/>
+        <p:txBody>
+          <a:bodyPr/>
+          <a:lstStyle/>
+          <a:p>
+            <a:r>
+              <a:t>Esa arquitectura explica el rendimiento: get(i) es instantaneo porque salta directo a la posicion i del arreglo interno, agregar al final es barato casi siempre, pero add(0, mascota) o remove(0) obligan a correr un puesto a todos los demas elementos.</a:t>
+            </a:r>
+          </a:p>
+        </p:txBody>
+      </p:sp>
+      <p:sp>
+        <p:nvSpPr>
+          <p:cNvPr id="4" name="Slide Number Placeholder 3"/>
+          <p:cNvSpPr>
+            <a:spLocks noGrp="1"/>
+          </p:cNvSpPr>
+          <p:nvPr>
+            <p:ph type="sldNum" idx="5" sz="quarter"/>
+          </p:nvPr>
+        </p:nvSpPr>
+        <p:spPr/>
+      </p:sp>
+    </p:spTree>
+  </p:cSld>
+  <p:clrMapOvr>
+    <a:masterClrMapping/>
+  </p:clrMapOvr>
+</p:notes>
+</file>
+
+<file path=ppt/notesSlides/notesSlide3.xml><?xml version="1.0" encoding="utf-8"?>
+<p:notes xmlns:a="http://schemas.openxmlformats.org/drawingml/2006/main" xmlns:p="http://schemas.openxmlformats.org/presentationml/2006/main" xmlns:r="http://schemas.openxmlformats.org/officeDocument/2006/relationships">
+  <p:cSld>
+    <p:spTree>
+      <p:nvGrpSpPr>
+        <p:cNvPr id="1" name=""/>
+        <p:cNvGrpSpPr/>
+        <p:nvPr/>
+      </p:nvGrpSpPr>
+      <p:grpSpPr>
+        <a:xfrm>
+          <a:off x="0" y="0"/>
+          <a:ext cx="0" cy="0"/>
+          <a:chOff x="0" y="0"/>
+          <a:chExt cx="0" cy="0"/>
+        </a:xfrm>
+      </p:grpSpPr>
+      <p:sp>
+        <p:nvSpPr>
+          <p:cNvPr id="2" name="Slide Image Placeholder 1"/>
+          <p:cNvSpPr>
+            <a:spLocks noGrp="1"/>
+          </p:cNvSpPr>
+          <p:nvPr>
+            <p:ph type="sldImg" idx="2"/>
+          </p:nvPr>
+        </p:nvSpPr>
+        <p:spPr/>
+      </p:sp>
+      <p:sp>
+        <p:nvSpPr>
+          <p:cNvPr id="3" name="Notes Placeholder 2"/>
+          <p:cNvSpPr>
+            <a:spLocks noGrp="1"/>
+          </p:cNvSpPr>
+          <p:nvPr>
+            <p:ph type="body" idx="3" sz="quarter"/>
+          </p:nvPr>
+        </p:nvSpPr>
+        <p:spPr/>
+        <p:txBody>
+          <a:bodyPr/>
+          <a:lstStyle/>
+          <a:p>
+            <a:r>
+              <a:t>El &lt;Mascota&gt; entre los picos se llama generico y no es decoracion: le dice al compilador que ahi solo entran Mascotas, de modo que si un estudiante intenta guardar un String el error aparece al compilar y no como un ClassCastException en plena sustentacion.</a:t>
+            </a:r>
+          </a:p>
+        </p:txBody>
+      </p:sp>
+      <p:sp>
+        <p:nvSpPr>
+          <p:cNvPr id="4" name="Slide Number Placeholder 3"/>
+          <p:cNvSpPr>
+            <a:spLocks noGrp="1"/>
+          </p:cNvSpPr>
+          <p:nvPr>
+            <p:ph type="sldNum" idx="5" sz="quarter"/>
+          </p:nvPr>
+        </p:nvSpPr>
+        <p:spPr/>
+      </p:sp>
+    </p:spTree>
+  </p:cSld>
+  <p:clrMapOvr>
+    <a:masterClrMapping/>
+  </p:clrMapOvr>
+</p:notes>
+</file>
+
+<file path=ppt/notesSlides/notesSlide4.xml><?xml version="1.0" encoding="utf-8"?>
+<p:notes xmlns:a="http://schemas.openxmlformats.org/drawingml/2006/main" xmlns:p="http://schemas.openxmlformats.org/presentationml/2006/main" xmlns:r="http://schemas.openxmlformats.org/officeDocument/2006/relationships">
+  <p:cSld>
+    <p:spTree>
+      <p:nvGrpSpPr>
+        <p:cNvPr id="1" name=""/>
+        <p:cNvGrpSpPr/>
+        <p:nvPr/>
+      </p:nvGrpSpPr>
+      <p:grpSpPr>
+        <a:xfrm>
+          <a:off x="0" y="0"/>
+          <a:ext cx="0" cy="0"/>
+          <a:chOff x="0" y="0"/>
+          <a:chExt cx="0" cy="0"/>
+        </a:xfrm>
+      </p:grpSpPr>
+      <p:sp>
+        <p:nvSpPr>
+          <p:cNvPr id="2" name="Slide Image Placeholder 1"/>
+          <p:cNvSpPr>
+            <a:spLocks noGrp="1"/>
+          </p:cNvSpPr>
+          <p:nvPr>
+            <p:ph type="sldImg" idx="2"/>
+          </p:nvPr>
+        </p:nvSpPr>
+        <p:spPr/>
+      </p:sp>
+      <p:sp>
+        <p:nvSpPr>
+          <p:cNvPr id="3" name="Notes Placeholder 2"/>
+          <p:cNvSpPr>
+            <a:spLocks noGrp="1"/>
+          </p:cNvSpPr>
+          <p:nvPr>
+            <p:ph type="body" idx="3" sz="quarter"/>
+          </p:nvPr>
+        </p:nvSpPr>
+        <p:spPr/>
+        <p:txBody>
+          <a:bodyPr/>
+          <a:lstStyle/>
+          <a:p>
+            <a:r>
+              <a:t>Recorrer la lista tiene dos formas y cada una tiene su momento.</a:t>
+            </a:r>
+          </a:p>
+        </p:txBody>
+      </p:sp>
+      <p:sp>
+        <p:nvSpPr>
+          <p:cNvPr id="4" name="Slide Number Placeholder 3"/>
+          <p:cNvSpPr>
+            <a:spLocks noGrp="1"/>
+          </p:cNvSpPr>
+          <p:nvPr>
+            <p:ph type="sldNum" idx="5" sz="quarter"/>
+          </p:nvPr>
+        </p:nvSpPr>
+        <p:spPr/>
+      </p:sp>
+    </p:spTree>
+  </p:cSld>
+  <p:clrMapOvr>
+    <a:masterClrMapping/>
+  </p:clrMapOvr>
+</p:notes>
+</file>
+
+<file path=ppt/notesSlides/notesSlide5.xml><?xml version="1.0" encoding="utf-8"?>
+<p:notes xmlns:a="http://schemas.openxmlformats.org/drawingml/2006/main" xmlns:p="http://schemas.openxmlformats.org/presentationml/2006/main" xmlns:r="http://schemas.openxmlformats.org/officeDocument/2006/relationships">
+  <p:cSld>
+    <p:spTree>
+      <p:nvGrpSpPr>
+        <p:cNvPr id="1" name=""/>
+        <p:cNvGrpSpPr/>
+        <p:nvPr/>
+      </p:nvGrpSpPr>
+      <p:grpSpPr>
+        <a:xfrm>
+          <a:off x="0" y="0"/>
+          <a:ext cx="0" cy="0"/>
+          <a:chOff x="0" y="0"/>
+          <a:chExt cx="0" cy="0"/>
+        </a:xfrm>
+      </p:grpSpPr>
+      <p:sp>
+        <p:nvSpPr>
+          <p:cNvPr id="2" name="Slide Image Placeholder 1"/>
+          <p:cNvSpPr>
+            <a:spLocks noGrp="1"/>
+          </p:cNvSpPr>
+          <p:nvPr>
+            <p:ph type="sldImg" idx="2"/>
+          </p:nvPr>
+        </p:nvSpPr>
+        <p:spPr/>
+      </p:sp>
+      <p:sp>
+        <p:nvSpPr>
+          <p:cNvPr id="3" name="Notes Placeholder 2"/>
+          <p:cNvSpPr>
+            <a:spLocks noGrp="1"/>
+          </p:cNvSpPr>
+          <p:nvPr>
+            <p:ph type="body" idx="3" sz="quarter"/>
+          </p:nvPr>
+        </p:nvSpPr>
+        <p:spPr/>
+        <p:txBody>
+          <a:bodyPr/>
+          <a:lstStyle/>
+          <a:p>
+            <a:r>
+              <a:t>La ultima idea es de diseno, y es la que hace que este codigo sirva para el resto del proyecto integrador.</a:t>
+            </a:r>
+          </a:p>
+          <a:p/>
+          <a:p>
+            <a:r>
+              <a:t>Eso es encapsulamiento aplicado a colecciones, y es lo que hara posible que en las proximas clases la misma clase RegistroMascotas alimente una tabla de Swing y despues se guarde en un archivo CSV sin cambiar una sola linea de la logica.</a:t>
+            </a:r>
+          </a:p>
+        </p:txBody>
+      </p:sp>
+      <p:sp>
+        <p:nvSpPr>
+          <p:cNvPr id="4" name="Slide Number Placeholder 3"/>
+          <p:cNvSpPr>
+            <a:spLocks noGrp="1"/>
+          </p:cNvSpPr>
+          <p:nvPr>
+            <p:ph type="sldNum" idx="5" sz="quarter"/>
+          </p:nvPr>
+        </p:nvSpPr>
+        <p:spPr/>
+      </p:sp>
+    </p:spTree>
+  </p:cSld>
+  <p:clrMapOvr>
+    <a:masterClrMapping/>
+  </p:clrMapOvr>
+</p:notes>
 </file>
 
 <file path=ppt/slideLayouts/slideLayout1.xml><?xml version="1.0" encoding="utf-8"?>
@@ -8295,7 +8995,7 @@
                 </a:solidFill>
                 <a:latin typeface="Calibri"/>
               </a:rPr>
-              <a:t>Encuadre de hoy · Objetivo del PI</a:t>
+              <a:t>Encuadre de hoy</a:t>
             </a:r>
           </a:p>
         </p:txBody>
@@ -8343,7 +9043,7 @@
                 </a:solidFill>
                 <a:latin typeface="Calibri"/>
               </a:rPr>
-              <a:t>Hoy avanzamos VetCare en:</a:t>
+              <a:t>Tema de hoy:</a:t>
             </a:r>
             <a:r>
               <a:rPr sz="2000" b="0" i="0">
@@ -8352,7 +9052,7 @@
                 </a:solidFill>
                 <a:latin typeface="Calibri"/>
               </a:rPr>
-              <a:t> El registro de mascotas de VetCare deja de vivir en un arreglo de tamano fijo y pasa a un ArrayList&lt;Mascota&gt; que crece con la clinica.</a:t>
+              <a:t> Colecciones dinamicas · ArrayList — De arreglos fijos a listas que crecen</a:t>
             </a:r>
           </a:p>
           <a:p>
@@ -8411,41 +9111,23 @@
                 </a:solidFill>
                 <a:latin typeface="Calibri"/>
               </a:rPr>
-              <a:t>–   </a:t>
-            </a:r>
-            <a:r>
-              <a:rPr sz="2000" b="1" i="0">
+              <a:t>–   Primero el concepto, despues el codigo que lo muestra y la demo en vivo.</a:t>
+            </a:r>
+          </a:p>
+          <a:p>
+            <a:pPr>
+              <a:spcAft>
+                <a:spcPts val="800"/>
+              </a:spcAft>
+            </a:pPr>
+            <a:r>
+              <a:rPr sz="2000" b="0" i="0">
                 <a:solidFill>
                   <a:srgbClr val="333333"/>
                 </a:solidFill>
                 <a:latin typeface="Calibri"/>
               </a:rPr>
-              <a:t>Entregable de hoy:</a:t>
-            </a:r>
-            <a:r>
-              <a:rPr sz="2000" b="0" i="0">
-                <a:solidFill>
-                  <a:srgbClr val="333333"/>
-                </a:solidFill>
-                <a:latin typeface="Calibri"/>
-              </a:rPr>
-              <a:t> Proyecto Java con las clases Mascota y RegistroMascotas y un menu de consola que agrega, lista, busca por ID y elimina mascotas, comprimido y subido a la plataforma del curso.</a:t>
-            </a:r>
-          </a:p>
-          <a:p>
-            <a:pPr>
-              <a:spcAft>
-                <a:spcPts val="800"/>
-              </a:spcAft>
-            </a:pPr>
-            <a:r>
-              <a:rPr sz="2000" b="0" i="0">
-                <a:solidFill>
-                  <a:srgbClr val="333333"/>
-                </a:solidFill>
-                <a:latin typeface="Calibri"/>
-              </a:rPr>
-              <a:t>–   La teoria esta al servicio del producto: al salir, VetCare avanzo.</a:t>
+              <a:t>–   Todo con el mismo dominio: la clinica veterinaria Huellitas (VetCare).</a:t>
             </a:r>
           </a:p>
         </p:txBody>
@@ -13640,7 +14322,7 @@
                 </a:solidFill>
                 <a:latin typeface="Calibri"/>
               </a:rPr>
-              <a:t>Encuadre y repaso del avance</a:t>
+              <a:t>Encuadre y repaso de la clase anterior</a:t>
             </a:r>
           </a:p>
         </p:txBody>
@@ -13985,7 +14667,7 @@
                 </a:solidFill>
                 <a:latin typeface="Calibri"/>
               </a:rPr>
-              <a:t>Taller guiado = avance del PI</a:t>
+              <a:t>Practica (opcional, guia en la carpeta)</a:t>
             </a:r>
           </a:p>
         </p:txBody>
@@ -14100,7 +14782,7 @@
                 </a:solidFill>
                 <a:latin typeface="Calibri"/>
               </a:rPr>
-              <a:t>Criterios de exito y cierre</a:t>
+              <a:t>Repaso de conceptos y cierre</a:t>
             </a:r>
           </a:p>
         </p:txBody>
@@ -15163,3163 +15845,6 @@
         <p:spPr>
           <a:xfrm>
             <a:off x="0" y="0"/>
-            <a:ext cx="12191695" cy="960120"/>
-          </a:xfrm>
-          <a:prstGeom prst="rect">
-            <a:avLst/>
-          </a:prstGeom>
-          <a:solidFill>
-            <a:srgbClr val="095292"/>
-          </a:solidFill>
-          <a:ln>
-            <a:noFill/>
-          </a:ln>
-        </p:spPr>
-        <p:style>
-          <a:lnRef idx="1">
-            <a:schemeClr val="accent1"/>
-          </a:lnRef>
-          <a:fillRef idx="3">
-            <a:schemeClr val="accent1"/>
-          </a:fillRef>
-          <a:effectRef idx="2">
-            <a:schemeClr val="accent1"/>
-          </a:effectRef>
-          <a:fontRef idx="minor">
-            <a:schemeClr val="lt1"/>
-          </a:fontRef>
-        </p:style>
-        <p:txBody>
-          <a:bodyPr rtlCol="0" anchor="ctr"/>
-          <a:lstStyle/>
-          <a:p>
-            <a:pPr algn="ctr"/>
-          </a:p>
-        </p:txBody>
-      </p:sp>
-      <p:sp>
-        <p:nvSpPr>
-          <p:cNvPr id="3" name="Rectangle 2"/>
-          <p:cNvSpPr/>
-          <p:nvPr/>
-        </p:nvSpPr>
-        <p:spPr>
-          <a:xfrm>
-            <a:off x="0" y="960120"/>
-            <a:ext cx="12191695" cy="41148"/>
-          </a:xfrm>
-          <a:prstGeom prst="rect">
-            <a:avLst/>
-          </a:prstGeom>
-          <a:solidFill>
-            <a:srgbClr val="FFD000"/>
-          </a:solidFill>
-          <a:ln>
-            <a:noFill/>
-          </a:ln>
-        </p:spPr>
-        <p:style>
-          <a:lnRef idx="1">
-            <a:schemeClr val="accent1"/>
-          </a:lnRef>
-          <a:fillRef idx="3">
-            <a:schemeClr val="accent1"/>
-          </a:fillRef>
-          <a:effectRef idx="2">
-            <a:schemeClr val="accent1"/>
-          </a:effectRef>
-          <a:fontRef idx="minor">
-            <a:schemeClr val="lt1"/>
-          </a:fontRef>
-        </p:style>
-        <p:txBody>
-          <a:bodyPr rtlCol="0" anchor="ctr"/>
-          <a:lstStyle/>
-          <a:p>
-            <a:pPr algn="ctr"/>
-          </a:p>
-        </p:txBody>
-      </p:sp>
-      <p:sp>
-        <p:nvSpPr>
-          <p:cNvPr id="4" name="TextBox 3"/>
-          <p:cNvSpPr txBox="1"/>
-          <p:nvPr/>
-        </p:nvSpPr>
-        <p:spPr>
-          <a:xfrm>
-            <a:off x="457200" y="164592"/>
-            <a:ext cx="11277295" cy="502920"/>
-          </a:xfrm>
-          <a:prstGeom prst="rect">
-            <a:avLst/>
-          </a:prstGeom>
-          <a:noFill/>
-        </p:spPr>
-        <p:txBody>
-          <a:bodyPr wrap="square">
-            <a:spAutoFit/>
-          </a:bodyPr>
-          <a:lstStyle/>
-          <a:p>
-            <a:r>
-              <a:rPr sz="2600" b="1" i="0">
-                <a:solidFill>
-                  <a:srgbClr val="FFFFFF"/>
-                </a:solidFill>
-                <a:latin typeface="Calibri"/>
-              </a:rPr>
-              <a:t>Taller PI — por que importa</a:t>
-            </a:r>
-          </a:p>
-        </p:txBody>
-      </p:sp>
-      <p:sp>
-        <p:nvSpPr>
-          <p:cNvPr id="5" name="TextBox 4"/>
-          <p:cNvSpPr txBox="1"/>
-          <p:nvPr/>
-        </p:nvSpPr>
-        <p:spPr>
-          <a:xfrm>
-            <a:off x="457200" y="1170432"/>
-            <a:ext cx="11277295" cy="5230368"/>
-          </a:xfrm>
-          <a:prstGeom prst="rect">
-            <a:avLst/>
-          </a:prstGeom>
-          <a:noFill/>
-        </p:spPr>
-        <p:txBody>
-          <a:bodyPr wrap="square">
-            <a:spAutoFit/>
-          </a:bodyPr>
-          <a:lstStyle/>
-          <a:p>
-            <a:pPr>
-              <a:spcAft>
-                <a:spcPts val="800"/>
-              </a:spcAft>
-            </a:pPr>
-            <a:r>
-              <a:rPr sz="2000" b="0" i="0">
-                <a:solidFill>
-                  <a:srgbClr val="333333"/>
-                </a:solidFill>
-                <a:latin typeface="Calibri"/>
-              </a:rPr>
-              <a:t>–   </a:t>
-            </a:r>
-            <a:r>
-              <a:rPr sz="2000" b="1" i="0">
-                <a:solidFill>
-                  <a:srgbClr val="333333"/>
-                </a:solidFill>
-                <a:latin typeface="Calibri"/>
-              </a:rPr>
-              <a:t>Por que importa al PI:</a:t>
-            </a:r>
-            <a:r>
-              <a:rPr sz="2000" b="0" i="0">
-                <a:solidFill>
-                  <a:srgbClr val="333333"/>
-                </a:solidFill>
-                <a:latin typeface="Calibri"/>
-              </a:rPr>
-              <a:t> VetCare no puede tener un tope de pacientes escrito a mano en el codigo, y toda la persistencia en CSV de las clases finales va a leer y escribir exactamente esta lista de mascotas.</a:t>
-            </a:r>
-          </a:p>
-          <a:p>
-            <a:pPr>
-              <a:spcAft>
-                <a:spcPts val="800"/>
-              </a:spcAft>
-            </a:pPr>
-            <a:r>
-              <a:rPr sz="2000" b="0" i="0">
-                <a:solidFill>
-                  <a:srgbClr val="333333"/>
-                </a:solidFill>
-                <a:latin typeface="Calibri"/>
-              </a:rPr>
-              <a:t>–   El requisito tecnico del PI pide colecciones de Java, y ArrayList es la coleccion base sobre la que despues montaremos la cola de la sala de espera, el HashMap de expedientes y la tabla de Swing.</a:t>
-            </a:r>
-          </a:p>
-          <a:p>
-            <a:pPr>
-              <a:spcAft>
-                <a:spcPts val="800"/>
-              </a:spcAft>
-            </a:pPr>
-            <a:r>
-              <a:rPr sz="2000" b="0" i="0">
-                <a:solidFill>
-                  <a:srgbClr val="333333"/>
-                </a:solidFill>
-                <a:latin typeface="Calibri"/>
-              </a:rPr>
-              <a:t>–   Encapsular la lista dentro de RegistroMascotas es lo que permitira cambiar la interfaz de consola por una ventana grafica sin reescribir la logica del negocio.</a:t>
-            </a:r>
-          </a:p>
-        </p:txBody>
-      </p:sp>
-      <p:sp>
-        <p:nvSpPr>
-          <p:cNvPr id="6" name="TextBox 5"/>
-          <p:cNvSpPr txBox="1"/>
-          <p:nvPr/>
-        </p:nvSpPr>
-        <p:spPr>
-          <a:xfrm>
-            <a:off x="11185855" y="6473952"/>
-            <a:ext cx="640080" cy="274320"/>
-          </a:xfrm>
-          <a:prstGeom prst="rect">
-            <a:avLst/>
-          </a:prstGeom>
-          <a:noFill/>
-        </p:spPr>
-        <p:txBody>
-          <a:bodyPr wrap="square">
-            <a:spAutoFit/>
-          </a:bodyPr>
-          <a:lstStyle/>
-          <a:p>
-            <a:pPr algn="r"/>
-            <a:r>
-              <a:rPr sz="1100" b="0" i="0">
-                <a:solidFill>
-                  <a:srgbClr val="666666"/>
-                </a:solidFill>
-                <a:latin typeface="Calibri"/>
-              </a:rPr>
-              <a:t>32</a:t>
-            </a:r>
-          </a:p>
-        </p:txBody>
-      </p:sp>
-    </p:spTree>
-  </p:cSld>
-  <p:clrMapOvr>
-    <a:masterClrMapping/>
-  </p:clrMapOvr>
-</p:sld>
-</file>
-
-<file path=ppt/slides/slide33.xml><?xml version="1.0" encoding="utf-8"?>
-<p:sld xmlns:a="http://schemas.openxmlformats.org/drawingml/2006/main" xmlns:p="http://schemas.openxmlformats.org/presentationml/2006/main" xmlns:r="http://schemas.openxmlformats.org/officeDocument/2006/relationships">
-  <p:cSld>
-    <p:bg>
-      <p:bgPr>
-        <a:solidFill>
-          <a:srgbClr val="FFFFFF"/>
-        </a:solidFill>
-        <a:effectLst/>
-      </p:bgPr>
-    </p:bg>
-    <p:spTree>
-      <p:nvGrpSpPr>
-        <p:cNvPr id="1" name=""/>
-        <p:cNvGrpSpPr/>
-        <p:nvPr/>
-      </p:nvGrpSpPr>
-      <p:grpSpPr/>
-      <p:sp>
-        <p:nvSpPr>
-          <p:cNvPr id="2" name="Rectangle 1"/>
-          <p:cNvSpPr/>
-          <p:nvPr/>
-        </p:nvSpPr>
-        <p:spPr>
-          <a:xfrm>
-            <a:off x="0" y="0"/>
-            <a:ext cx="12191695" cy="960120"/>
-          </a:xfrm>
-          <a:prstGeom prst="rect">
-            <a:avLst/>
-          </a:prstGeom>
-          <a:solidFill>
-            <a:srgbClr val="095292"/>
-          </a:solidFill>
-          <a:ln>
-            <a:noFill/>
-          </a:ln>
-        </p:spPr>
-        <p:style>
-          <a:lnRef idx="1">
-            <a:schemeClr val="accent1"/>
-          </a:lnRef>
-          <a:fillRef idx="3">
-            <a:schemeClr val="accent1"/>
-          </a:fillRef>
-          <a:effectRef idx="2">
-            <a:schemeClr val="accent1"/>
-          </a:effectRef>
-          <a:fontRef idx="minor">
-            <a:schemeClr val="lt1"/>
-          </a:fontRef>
-        </p:style>
-        <p:txBody>
-          <a:bodyPr rtlCol="0" anchor="ctr"/>
-          <a:lstStyle/>
-          <a:p>
-            <a:pPr algn="ctr"/>
-          </a:p>
-        </p:txBody>
-      </p:sp>
-      <p:sp>
-        <p:nvSpPr>
-          <p:cNvPr id="3" name="Rectangle 2"/>
-          <p:cNvSpPr/>
-          <p:nvPr/>
-        </p:nvSpPr>
-        <p:spPr>
-          <a:xfrm>
-            <a:off x="0" y="960120"/>
-            <a:ext cx="12191695" cy="41148"/>
-          </a:xfrm>
-          <a:prstGeom prst="rect">
-            <a:avLst/>
-          </a:prstGeom>
-          <a:solidFill>
-            <a:srgbClr val="FFD000"/>
-          </a:solidFill>
-          <a:ln>
-            <a:noFill/>
-          </a:ln>
-        </p:spPr>
-        <p:style>
-          <a:lnRef idx="1">
-            <a:schemeClr val="accent1"/>
-          </a:lnRef>
-          <a:fillRef idx="3">
-            <a:schemeClr val="accent1"/>
-          </a:fillRef>
-          <a:effectRef idx="2">
-            <a:schemeClr val="accent1"/>
-          </a:effectRef>
-          <a:fontRef idx="minor">
-            <a:schemeClr val="lt1"/>
-          </a:fontRef>
-        </p:style>
-        <p:txBody>
-          <a:bodyPr rtlCol="0" anchor="ctr"/>
-          <a:lstStyle/>
-          <a:p>
-            <a:pPr algn="ctr"/>
-          </a:p>
-        </p:txBody>
-      </p:sp>
-      <p:sp>
-        <p:nvSpPr>
-          <p:cNvPr id="4" name="TextBox 3"/>
-          <p:cNvSpPr txBox="1"/>
-          <p:nvPr/>
-        </p:nvSpPr>
-        <p:spPr>
-          <a:xfrm>
-            <a:off x="457200" y="164592"/>
-            <a:ext cx="11277295" cy="502920"/>
-          </a:xfrm>
-          <a:prstGeom prst="rect">
-            <a:avLst/>
-          </a:prstGeom>
-          <a:noFill/>
-        </p:spPr>
-        <p:txBody>
-          <a:bodyPr wrap="square">
-            <a:spAutoFit/>
-          </a:bodyPr>
-          <a:lstStyle/>
-          <a:p>
-            <a:r>
-              <a:rPr sz="2600" b="1" i="0">
-                <a:solidFill>
-                  <a:srgbClr val="FFFFFF"/>
-                </a:solidFill>
-                <a:latin typeface="Calibri"/>
-              </a:rPr>
-              <a:t>Taller PI — punto de partida</a:t>
-            </a:r>
-          </a:p>
-        </p:txBody>
-      </p:sp>
-      <p:sp>
-        <p:nvSpPr>
-          <p:cNvPr id="5" name="TextBox 4"/>
-          <p:cNvSpPr txBox="1"/>
-          <p:nvPr/>
-        </p:nvSpPr>
-        <p:spPr>
-          <a:xfrm>
-            <a:off x="457200" y="1170432"/>
-            <a:ext cx="11277295" cy="5230368"/>
-          </a:xfrm>
-          <a:prstGeom prst="rect">
-            <a:avLst/>
-          </a:prstGeom>
-          <a:noFill/>
-        </p:spPr>
-        <p:txBody>
-          <a:bodyPr wrap="square">
-            <a:spAutoFit/>
-          </a:bodyPr>
-          <a:lstStyle/>
-          <a:p>
-            <a:pPr>
-              <a:spcAft>
-                <a:spcPts val="800"/>
-              </a:spcAft>
-            </a:pPr>
-            <a:r>
-              <a:rPr sz="2000" b="0" i="0">
-                <a:solidFill>
-                  <a:srgbClr val="333333"/>
-                </a:solidFill>
-                <a:latin typeface="Calibri"/>
-              </a:rPr>
-              <a:t>–   La recepcionista de Huellitas transcribio seis fichas de papel: M-001 Firulais canino 4 anios de Ana Gomez, M-002 Michi felino 2 anios de Luis Perez, M-003 Rocky canino 9 anios de Ana Gomez, M-004 Nieve felino 1 ano de Sara Diaz, M-005 Toby canino 11 anios de Sara Diaz y una ficha repetida de M-001.</a:t>
-            </a:r>
-          </a:p>
-          <a:p>
-            <a:pPr>
-              <a:spcAft>
-                <a:spcPts val="800"/>
-              </a:spcAft>
-            </a:pPr>
-            <a:r>
-              <a:rPr sz="2000" b="0" i="0">
-                <a:solidFill>
-                  <a:srgbClr val="333333"/>
-                </a:solidFill>
-                <a:latin typeface="Calibri"/>
-              </a:rPr>
-              <a:t>–   El codigo de partida es un Mascota[3] que ya no admite mas fichas y lanza ArrayIndexOutOfBoundsException al guardar la cuarta.</a:t>
-            </a:r>
-          </a:p>
-          <a:p>
-            <a:pPr>
-              <a:spcAft>
-                <a:spcPts val="800"/>
-              </a:spcAft>
-            </a:pPr>
-            <a:r>
-              <a:rPr sz="2000" b="0" i="0">
-                <a:solidFill>
-                  <a:srgbClr val="333333"/>
-                </a:solidFill>
-                <a:latin typeface="Calibri"/>
-              </a:rPr>
-              <a:t>–   No hay archivos ni base de datos todavia: todo vive en memoria durante la ejecucion, y al cerrar el programa los datos se pierden (eso se resuelve en las clases de persistencia).</a:t>
-            </a:r>
-          </a:p>
-        </p:txBody>
-      </p:sp>
-      <p:sp>
-        <p:nvSpPr>
-          <p:cNvPr id="6" name="TextBox 5"/>
-          <p:cNvSpPr txBox="1"/>
-          <p:nvPr/>
-        </p:nvSpPr>
-        <p:spPr>
-          <a:xfrm>
-            <a:off x="11185855" y="6473952"/>
-            <a:ext cx="640080" cy="274320"/>
-          </a:xfrm>
-          <a:prstGeom prst="rect">
-            <a:avLst/>
-          </a:prstGeom>
-          <a:noFill/>
-        </p:spPr>
-        <p:txBody>
-          <a:bodyPr wrap="square">
-            <a:spAutoFit/>
-          </a:bodyPr>
-          <a:lstStyle/>
-          <a:p>
-            <a:pPr algn="r"/>
-            <a:r>
-              <a:rPr sz="1100" b="0" i="0">
-                <a:solidFill>
-                  <a:srgbClr val="666666"/>
-                </a:solidFill>
-                <a:latin typeface="Calibri"/>
-              </a:rPr>
-              <a:t>33</a:t>
-            </a:r>
-          </a:p>
-        </p:txBody>
-      </p:sp>
-    </p:spTree>
-  </p:cSld>
-  <p:clrMapOvr>
-    <a:masterClrMapping/>
-  </p:clrMapOvr>
-</p:sld>
-</file>
-
-<file path=ppt/slides/slide34.xml><?xml version="1.0" encoding="utf-8"?>
-<p:sld xmlns:a="http://schemas.openxmlformats.org/drawingml/2006/main" xmlns:p="http://schemas.openxmlformats.org/presentationml/2006/main" xmlns:r="http://schemas.openxmlformats.org/officeDocument/2006/relationships">
-  <p:cSld>
-    <p:bg>
-      <p:bgPr>
-        <a:solidFill>
-          <a:srgbClr val="FFFFFF"/>
-        </a:solidFill>
-        <a:effectLst/>
-      </p:bgPr>
-    </p:bg>
-    <p:spTree>
-      <p:nvGrpSpPr>
-        <p:cNvPr id="1" name=""/>
-        <p:cNvGrpSpPr/>
-        <p:nvPr/>
-      </p:nvGrpSpPr>
-      <p:grpSpPr/>
-      <p:sp>
-        <p:nvSpPr>
-          <p:cNvPr id="2" name="Rectangle 1"/>
-          <p:cNvSpPr/>
-          <p:nvPr/>
-        </p:nvSpPr>
-        <p:spPr>
-          <a:xfrm>
-            <a:off x="0" y="0"/>
-            <a:ext cx="12191695" cy="960120"/>
-          </a:xfrm>
-          <a:prstGeom prst="rect">
-            <a:avLst/>
-          </a:prstGeom>
-          <a:solidFill>
-            <a:srgbClr val="095292"/>
-          </a:solidFill>
-          <a:ln>
-            <a:noFill/>
-          </a:ln>
-        </p:spPr>
-        <p:style>
-          <a:lnRef idx="1">
-            <a:schemeClr val="accent1"/>
-          </a:lnRef>
-          <a:fillRef idx="3">
-            <a:schemeClr val="accent1"/>
-          </a:fillRef>
-          <a:effectRef idx="2">
-            <a:schemeClr val="accent1"/>
-          </a:effectRef>
-          <a:fontRef idx="minor">
-            <a:schemeClr val="lt1"/>
-          </a:fontRef>
-        </p:style>
-        <p:txBody>
-          <a:bodyPr rtlCol="0" anchor="ctr"/>
-          <a:lstStyle/>
-          <a:p>
-            <a:pPr algn="ctr"/>
-          </a:p>
-        </p:txBody>
-      </p:sp>
-      <p:sp>
-        <p:nvSpPr>
-          <p:cNvPr id="3" name="Rectangle 2"/>
-          <p:cNvSpPr/>
-          <p:nvPr/>
-        </p:nvSpPr>
-        <p:spPr>
-          <a:xfrm>
-            <a:off x="0" y="960120"/>
-            <a:ext cx="12191695" cy="41148"/>
-          </a:xfrm>
-          <a:prstGeom prst="rect">
-            <a:avLst/>
-          </a:prstGeom>
-          <a:solidFill>
-            <a:srgbClr val="FFD000"/>
-          </a:solidFill>
-          <a:ln>
-            <a:noFill/>
-          </a:ln>
-        </p:spPr>
-        <p:style>
-          <a:lnRef idx="1">
-            <a:schemeClr val="accent1"/>
-          </a:lnRef>
-          <a:fillRef idx="3">
-            <a:schemeClr val="accent1"/>
-          </a:fillRef>
-          <a:effectRef idx="2">
-            <a:schemeClr val="accent1"/>
-          </a:effectRef>
-          <a:fontRef idx="minor">
-            <a:schemeClr val="lt1"/>
-          </a:fontRef>
-        </p:style>
-        <p:txBody>
-          <a:bodyPr rtlCol="0" anchor="ctr"/>
-          <a:lstStyle/>
-          <a:p>
-            <a:pPr algn="ctr"/>
-          </a:p>
-        </p:txBody>
-      </p:sp>
-      <p:sp>
-        <p:nvSpPr>
-          <p:cNvPr id="4" name="TextBox 3"/>
-          <p:cNvSpPr txBox="1"/>
-          <p:nvPr/>
-        </p:nvSpPr>
-        <p:spPr>
-          <a:xfrm>
-            <a:off x="457200" y="164592"/>
-            <a:ext cx="11277295" cy="502920"/>
-          </a:xfrm>
-          <a:prstGeom prst="rect">
-            <a:avLst/>
-          </a:prstGeom>
-          <a:noFill/>
-        </p:spPr>
-        <p:txBody>
-          <a:bodyPr wrap="square">
-            <a:spAutoFit/>
-          </a:bodyPr>
-          <a:lstStyle/>
-          <a:p>
-            <a:r>
-              <a:rPr sz="2600" b="1" i="0">
-                <a:solidFill>
-                  <a:srgbClr val="FFFFFF"/>
-                </a:solidFill>
-                <a:latin typeface="Calibri"/>
-              </a:rPr>
-              <a:t>Taller PI — pasos guiados</a:t>
-            </a:r>
-          </a:p>
-        </p:txBody>
-      </p:sp>
-      <p:sp>
-        <p:nvSpPr>
-          <p:cNvPr id="5" name="Rounded Rectangle 4"/>
-          <p:cNvSpPr/>
-          <p:nvPr/>
-        </p:nvSpPr>
-        <p:spPr>
-          <a:xfrm>
-            <a:off x="457200" y="1234440"/>
-            <a:ext cx="11277295" cy="950976"/>
-          </a:xfrm>
-          <a:prstGeom prst="roundRect">
-            <a:avLst>
-              <a:gd name="adj" fmla="val 12000"/>
-            </a:avLst>
-          </a:prstGeom>
-          <a:solidFill>
-            <a:srgbClr val="F2F2F2"/>
-          </a:solidFill>
-          <a:ln>
-            <a:noFill/>
-          </a:ln>
-        </p:spPr>
-        <p:style>
-          <a:lnRef idx="1">
-            <a:schemeClr val="accent1"/>
-          </a:lnRef>
-          <a:fillRef idx="3">
-            <a:schemeClr val="accent1"/>
-          </a:fillRef>
-          <a:effectRef idx="2">
-            <a:schemeClr val="accent1"/>
-          </a:effectRef>
-          <a:fontRef idx="minor">
-            <a:schemeClr val="lt1"/>
-          </a:fontRef>
-        </p:style>
-        <p:txBody>
-          <a:bodyPr rtlCol="0" anchor="ctr"/>
-          <a:lstStyle/>
-          <a:p>
-            <a:pPr algn="ctr"/>
-          </a:p>
-        </p:txBody>
-      </p:sp>
-      <p:sp>
-        <p:nvSpPr>
-          <p:cNvPr id="6" name="Rounded Rectangle 5"/>
-          <p:cNvSpPr/>
-          <p:nvPr/>
-        </p:nvSpPr>
-        <p:spPr>
-          <a:xfrm>
-            <a:off x="594360" y="1490472"/>
-            <a:ext cx="438912" cy="438912"/>
-          </a:xfrm>
-          <a:prstGeom prst="roundRect">
-            <a:avLst>
-              <a:gd name="adj" fmla="val 12000"/>
-            </a:avLst>
-          </a:prstGeom>
-          <a:solidFill>
-            <a:srgbClr val="095292"/>
-          </a:solidFill>
-          <a:ln>
-            <a:noFill/>
-          </a:ln>
-        </p:spPr>
-        <p:style>
-          <a:lnRef idx="1">
-            <a:schemeClr val="accent1"/>
-          </a:lnRef>
-          <a:fillRef idx="3">
-            <a:schemeClr val="accent1"/>
-          </a:fillRef>
-          <a:effectRef idx="2">
-            <a:schemeClr val="accent1"/>
-          </a:effectRef>
-          <a:fontRef idx="minor">
-            <a:schemeClr val="lt1"/>
-          </a:fontRef>
-        </p:style>
-        <p:txBody>
-          <a:bodyPr rtlCol="0" anchor="ctr"/>
-          <a:lstStyle/>
-          <a:p>
-            <a:pPr algn="ctr"/>
-          </a:p>
-        </p:txBody>
-      </p:sp>
-      <p:sp>
-        <p:nvSpPr>
-          <p:cNvPr id="7" name="TextBox 6"/>
-          <p:cNvSpPr txBox="1"/>
-          <p:nvPr/>
-        </p:nvSpPr>
-        <p:spPr>
-          <a:xfrm>
-            <a:off x="594360" y="1490472"/>
-            <a:ext cx="438912" cy="438912"/>
-          </a:xfrm>
-          <a:prstGeom prst="rect">
-            <a:avLst/>
-          </a:prstGeom>
-          <a:noFill/>
-        </p:spPr>
-        <p:txBody>
-          <a:bodyPr wrap="square" anchor="ctr"/>
-          <a:lstStyle/>
-          <a:p>
-            <a:pPr algn="ctr"/>
-            <a:r>
-              <a:rPr sz="1600" b="1" i="0">
-                <a:solidFill>
-                  <a:srgbClr val="FFFFFF"/>
-                </a:solidFill>
-                <a:latin typeface="Calibri"/>
-              </a:rPr>
-              <a:t>1</a:t>
-            </a:r>
-          </a:p>
-        </p:txBody>
-      </p:sp>
-      <p:sp>
-        <p:nvSpPr>
-          <p:cNvPr id="8" name="TextBox 7"/>
-          <p:cNvSpPr txBox="1"/>
-          <p:nvPr/>
-        </p:nvSpPr>
-        <p:spPr>
-          <a:xfrm>
-            <a:off x="1188720" y="1325880"/>
-            <a:ext cx="10271455" cy="786384"/>
-          </a:xfrm>
-          <a:prstGeom prst="rect">
-            <a:avLst/>
-          </a:prstGeom>
-          <a:noFill/>
-        </p:spPr>
-        <p:txBody>
-          <a:bodyPr wrap="square" anchor="ctr"/>
-          <a:lstStyle/>
-          <a:p>
-            <a:r>
-              <a:rPr sz="1400" b="1" i="0">
-                <a:solidFill>
-                  <a:srgbClr val="095292"/>
-                </a:solidFill>
-                <a:latin typeface="Calibri"/>
-              </a:rPr>
-              <a:t>Cree en VS Code el proyecto Java llamado VetCare con paquete vetcare, y dentro de el la clase Mascota con los atributos privados id, nombre, especie, edad y dueno, su constructor completo, sus getters y el metodo toString(); verifique imprimiendo una mascota de prueba y confirmando que en consola sale el texto legible y no vetcare.Mascota@1a2b3c.</a:t>
-            </a:r>
-          </a:p>
-        </p:txBody>
-      </p:sp>
-      <p:sp>
-        <p:nvSpPr>
-          <p:cNvPr id="9" name="Rounded Rectangle 8"/>
-          <p:cNvSpPr/>
-          <p:nvPr/>
-        </p:nvSpPr>
-        <p:spPr>
-          <a:xfrm>
-            <a:off x="457200" y="2276856"/>
-            <a:ext cx="11277295" cy="950976"/>
-          </a:xfrm>
-          <a:prstGeom prst="roundRect">
-            <a:avLst>
-              <a:gd name="adj" fmla="val 12000"/>
-            </a:avLst>
-          </a:prstGeom>
-          <a:solidFill>
-            <a:srgbClr val="E8F4FA"/>
-          </a:solidFill>
-          <a:ln>
-            <a:noFill/>
-          </a:ln>
-        </p:spPr>
-        <p:style>
-          <a:lnRef idx="1">
-            <a:schemeClr val="accent1"/>
-          </a:lnRef>
-          <a:fillRef idx="3">
-            <a:schemeClr val="accent1"/>
-          </a:fillRef>
-          <a:effectRef idx="2">
-            <a:schemeClr val="accent1"/>
-          </a:effectRef>
-          <a:fontRef idx="minor">
-            <a:schemeClr val="lt1"/>
-          </a:fontRef>
-        </p:style>
-        <p:txBody>
-          <a:bodyPr rtlCol="0" anchor="ctr"/>
-          <a:lstStyle/>
-          <a:p>
-            <a:pPr algn="ctr"/>
-          </a:p>
-        </p:txBody>
-      </p:sp>
-      <p:sp>
-        <p:nvSpPr>
-          <p:cNvPr id="10" name="Rounded Rectangle 9"/>
-          <p:cNvSpPr/>
-          <p:nvPr/>
-        </p:nvSpPr>
-        <p:spPr>
-          <a:xfrm>
-            <a:off x="594360" y="2532888"/>
-            <a:ext cx="438912" cy="438912"/>
-          </a:xfrm>
-          <a:prstGeom prst="roundRect">
-            <a:avLst>
-              <a:gd name="adj" fmla="val 12000"/>
-            </a:avLst>
-          </a:prstGeom>
-          <a:solidFill>
-            <a:srgbClr val="095292"/>
-          </a:solidFill>
-          <a:ln>
-            <a:noFill/>
-          </a:ln>
-        </p:spPr>
-        <p:style>
-          <a:lnRef idx="1">
-            <a:schemeClr val="accent1"/>
-          </a:lnRef>
-          <a:fillRef idx="3">
-            <a:schemeClr val="accent1"/>
-          </a:fillRef>
-          <a:effectRef idx="2">
-            <a:schemeClr val="accent1"/>
-          </a:effectRef>
-          <a:fontRef idx="minor">
-            <a:schemeClr val="lt1"/>
-          </a:fontRef>
-        </p:style>
-        <p:txBody>
-          <a:bodyPr rtlCol="0" anchor="ctr"/>
-          <a:lstStyle/>
-          <a:p>
-            <a:pPr algn="ctr"/>
-          </a:p>
-        </p:txBody>
-      </p:sp>
-      <p:sp>
-        <p:nvSpPr>
-          <p:cNvPr id="11" name="TextBox 10"/>
-          <p:cNvSpPr txBox="1"/>
-          <p:nvPr/>
-        </p:nvSpPr>
-        <p:spPr>
-          <a:xfrm>
-            <a:off x="594360" y="2532888"/>
-            <a:ext cx="438912" cy="438912"/>
-          </a:xfrm>
-          <a:prstGeom prst="rect">
-            <a:avLst/>
-          </a:prstGeom>
-          <a:noFill/>
-        </p:spPr>
-        <p:txBody>
-          <a:bodyPr wrap="square" anchor="ctr"/>
-          <a:lstStyle/>
-          <a:p>
-            <a:pPr algn="ctr"/>
-            <a:r>
-              <a:rPr sz="1600" b="1" i="0">
-                <a:solidFill>
-                  <a:srgbClr val="FFFFFF"/>
-                </a:solidFill>
-                <a:latin typeface="Calibri"/>
-              </a:rPr>
-              <a:t>2</a:t>
-            </a:r>
-          </a:p>
-        </p:txBody>
-      </p:sp>
-      <p:sp>
-        <p:nvSpPr>
-          <p:cNvPr id="12" name="TextBox 11"/>
-          <p:cNvSpPr txBox="1"/>
-          <p:nvPr/>
-        </p:nvSpPr>
-        <p:spPr>
-          <a:xfrm>
-            <a:off x="1188720" y="2368296"/>
-            <a:ext cx="10271455" cy="786384"/>
-          </a:xfrm>
-          <a:prstGeom prst="rect">
-            <a:avLst/>
-          </a:prstGeom>
-          <a:noFill/>
-        </p:spPr>
-        <p:txBody>
-          <a:bodyPr wrap="square" anchor="ctr"/>
-          <a:lstStyle/>
-          <a:p>
-            <a:r>
-              <a:rPr sz="1400" b="1" i="0">
-                <a:solidFill>
-                  <a:srgbClr val="095292"/>
-                </a:solidFill>
-                <a:latin typeface="Calibri"/>
-              </a:rPr>
-              <a:t>Cree la clase RegistroMascotas con el atributo private final List&lt;Mascota&gt; mascotas = new ArrayList&lt;&gt;(); y el metodo agregar(Mascota m) que rechace un ID ya existente; verifique agregando dos veces la mascota M-001 y comprobando que la consola muestra el aviso de ID repetido y que cantidad() sigue devolviendo 1.</a:t>
-            </a:r>
-          </a:p>
-        </p:txBody>
-      </p:sp>
-      <p:sp>
-        <p:nvSpPr>
-          <p:cNvPr id="13" name="Rounded Rectangle 12"/>
-          <p:cNvSpPr/>
-          <p:nvPr/>
-        </p:nvSpPr>
-        <p:spPr>
-          <a:xfrm>
-            <a:off x="457200" y="3319272"/>
-            <a:ext cx="11277295" cy="950976"/>
-          </a:xfrm>
-          <a:prstGeom prst="roundRect">
-            <a:avLst>
-              <a:gd name="adj" fmla="val 12000"/>
-            </a:avLst>
-          </a:prstGeom>
-          <a:solidFill>
-            <a:srgbClr val="F2F2F2"/>
-          </a:solidFill>
-          <a:ln>
-            <a:noFill/>
-          </a:ln>
-        </p:spPr>
-        <p:style>
-          <a:lnRef idx="1">
-            <a:schemeClr val="accent1"/>
-          </a:lnRef>
-          <a:fillRef idx="3">
-            <a:schemeClr val="accent1"/>
-          </a:fillRef>
-          <a:effectRef idx="2">
-            <a:schemeClr val="accent1"/>
-          </a:effectRef>
-          <a:fontRef idx="minor">
-            <a:schemeClr val="lt1"/>
-          </a:fontRef>
-        </p:style>
-        <p:txBody>
-          <a:bodyPr rtlCol="0" anchor="ctr"/>
-          <a:lstStyle/>
-          <a:p>
-            <a:pPr algn="ctr"/>
-          </a:p>
-        </p:txBody>
-      </p:sp>
-      <p:sp>
-        <p:nvSpPr>
-          <p:cNvPr id="14" name="Rounded Rectangle 13"/>
-          <p:cNvSpPr/>
-          <p:nvPr/>
-        </p:nvSpPr>
-        <p:spPr>
-          <a:xfrm>
-            <a:off x="594360" y="3575304"/>
-            <a:ext cx="438912" cy="438912"/>
-          </a:xfrm>
-          <a:prstGeom prst="roundRect">
-            <a:avLst>
-              <a:gd name="adj" fmla="val 12000"/>
-            </a:avLst>
-          </a:prstGeom>
-          <a:solidFill>
-            <a:srgbClr val="095292"/>
-          </a:solidFill>
-          <a:ln>
-            <a:noFill/>
-          </a:ln>
-        </p:spPr>
-        <p:style>
-          <a:lnRef idx="1">
-            <a:schemeClr val="accent1"/>
-          </a:lnRef>
-          <a:fillRef idx="3">
-            <a:schemeClr val="accent1"/>
-          </a:fillRef>
-          <a:effectRef idx="2">
-            <a:schemeClr val="accent1"/>
-          </a:effectRef>
-          <a:fontRef idx="minor">
-            <a:schemeClr val="lt1"/>
-          </a:fontRef>
-        </p:style>
-        <p:txBody>
-          <a:bodyPr rtlCol="0" anchor="ctr"/>
-          <a:lstStyle/>
-          <a:p>
-            <a:pPr algn="ctr"/>
-          </a:p>
-        </p:txBody>
-      </p:sp>
-      <p:sp>
-        <p:nvSpPr>
-          <p:cNvPr id="15" name="TextBox 14"/>
-          <p:cNvSpPr txBox="1"/>
-          <p:nvPr/>
-        </p:nvSpPr>
-        <p:spPr>
-          <a:xfrm>
-            <a:off x="594360" y="3575304"/>
-            <a:ext cx="438912" cy="438912"/>
-          </a:xfrm>
-          <a:prstGeom prst="rect">
-            <a:avLst/>
-          </a:prstGeom>
-          <a:noFill/>
-        </p:spPr>
-        <p:txBody>
-          <a:bodyPr wrap="square" anchor="ctr"/>
-          <a:lstStyle/>
-          <a:p>
-            <a:pPr algn="ctr"/>
-            <a:r>
-              <a:rPr sz="1600" b="1" i="0">
-                <a:solidFill>
-                  <a:srgbClr val="FFFFFF"/>
-                </a:solidFill>
-                <a:latin typeface="Calibri"/>
-              </a:rPr>
-              <a:t>3</a:t>
-            </a:r>
-          </a:p>
-        </p:txBody>
-      </p:sp>
-      <p:sp>
-        <p:nvSpPr>
-          <p:cNvPr id="16" name="TextBox 15"/>
-          <p:cNvSpPr txBox="1"/>
-          <p:nvPr/>
-        </p:nvSpPr>
-        <p:spPr>
-          <a:xfrm>
-            <a:off x="1188720" y="3410712"/>
-            <a:ext cx="10271455" cy="786384"/>
-          </a:xfrm>
-          <a:prstGeom prst="rect">
-            <a:avLst/>
-          </a:prstGeom>
-          <a:noFill/>
-        </p:spPr>
-        <p:txBody>
-          <a:bodyPr wrap="square" anchor="ctr"/>
-          <a:lstStyle/>
-          <a:p>
-            <a:r>
-              <a:rPr sz="1400" b="1" i="0">
-                <a:solidFill>
-                  <a:srgbClr val="095292"/>
-                </a:solidFill>
-                <a:latin typeface="Calibri"/>
-              </a:rPr>
-              <a:t>Implemente listar(), que recorra con for indexado e imprima cada ficha numerada, y buscarPorId(String id), que recorra con for-each y devuelva la Mascota o null; verifique que buscarPorId("M-003") imprime la ficha de Rocky y que buscarPorId("M-099") imprime que no existe, sin lanzar NullPointerException.</a:t>
-            </a:r>
-          </a:p>
-        </p:txBody>
-      </p:sp>
-      <p:sp>
-        <p:nvSpPr>
-          <p:cNvPr id="17" name="Rounded Rectangle 16"/>
-          <p:cNvSpPr/>
-          <p:nvPr/>
-        </p:nvSpPr>
-        <p:spPr>
-          <a:xfrm>
-            <a:off x="457200" y="4361688"/>
-            <a:ext cx="11277295" cy="950976"/>
-          </a:xfrm>
-          <a:prstGeom prst="roundRect">
-            <a:avLst>
-              <a:gd name="adj" fmla="val 12000"/>
-            </a:avLst>
-          </a:prstGeom>
-          <a:solidFill>
-            <a:srgbClr val="E8F4FA"/>
-          </a:solidFill>
-          <a:ln>
-            <a:noFill/>
-          </a:ln>
-        </p:spPr>
-        <p:style>
-          <a:lnRef idx="1">
-            <a:schemeClr val="accent1"/>
-          </a:lnRef>
-          <a:fillRef idx="3">
-            <a:schemeClr val="accent1"/>
-          </a:fillRef>
-          <a:effectRef idx="2">
-            <a:schemeClr val="accent1"/>
-          </a:effectRef>
-          <a:fontRef idx="minor">
-            <a:schemeClr val="lt1"/>
-          </a:fontRef>
-        </p:style>
-        <p:txBody>
-          <a:bodyPr rtlCol="0" anchor="ctr"/>
-          <a:lstStyle/>
-          <a:p>
-            <a:pPr algn="ctr"/>
-          </a:p>
-        </p:txBody>
-      </p:sp>
-      <p:sp>
-        <p:nvSpPr>
-          <p:cNvPr id="18" name="Rounded Rectangle 17"/>
-          <p:cNvSpPr/>
-          <p:nvPr/>
-        </p:nvSpPr>
-        <p:spPr>
-          <a:xfrm>
-            <a:off x="594360" y="4617720"/>
-            <a:ext cx="438912" cy="438912"/>
-          </a:xfrm>
-          <a:prstGeom prst="roundRect">
-            <a:avLst>
-              <a:gd name="adj" fmla="val 12000"/>
-            </a:avLst>
-          </a:prstGeom>
-          <a:solidFill>
-            <a:srgbClr val="095292"/>
-          </a:solidFill>
-          <a:ln>
-            <a:noFill/>
-          </a:ln>
-        </p:spPr>
-        <p:style>
-          <a:lnRef idx="1">
-            <a:schemeClr val="accent1"/>
-          </a:lnRef>
-          <a:fillRef idx="3">
-            <a:schemeClr val="accent1"/>
-          </a:fillRef>
-          <a:effectRef idx="2">
-            <a:schemeClr val="accent1"/>
-          </a:effectRef>
-          <a:fontRef idx="minor">
-            <a:schemeClr val="lt1"/>
-          </a:fontRef>
-        </p:style>
-        <p:txBody>
-          <a:bodyPr rtlCol="0" anchor="ctr"/>
-          <a:lstStyle/>
-          <a:p>
-            <a:pPr algn="ctr"/>
-          </a:p>
-        </p:txBody>
-      </p:sp>
-      <p:sp>
-        <p:nvSpPr>
-          <p:cNvPr id="19" name="TextBox 18"/>
-          <p:cNvSpPr txBox="1"/>
-          <p:nvPr/>
-        </p:nvSpPr>
-        <p:spPr>
-          <a:xfrm>
-            <a:off x="594360" y="4617720"/>
-            <a:ext cx="438912" cy="438912"/>
-          </a:xfrm>
-          <a:prstGeom prst="rect">
-            <a:avLst/>
-          </a:prstGeom>
-          <a:noFill/>
-        </p:spPr>
-        <p:txBody>
-          <a:bodyPr wrap="square" anchor="ctr"/>
-          <a:lstStyle/>
-          <a:p>
-            <a:pPr algn="ctr"/>
-            <a:r>
-              <a:rPr sz="1600" b="1" i="0">
-                <a:solidFill>
-                  <a:srgbClr val="FFFFFF"/>
-                </a:solidFill>
-                <a:latin typeface="Calibri"/>
-              </a:rPr>
-              <a:t>4</a:t>
-            </a:r>
-          </a:p>
-        </p:txBody>
-      </p:sp>
-      <p:sp>
-        <p:nvSpPr>
-          <p:cNvPr id="20" name="TextBox 19"/>
-          <p:cNvSpPr txBox="1"/>
-          <p:nvPr/>
-        </p:nvSpPr>
-        <p:spPr>
-          <a:xfrm>
-            <a:off x="1188720" y="4453128"/>
-            <a:ext cx="10271455" cy="786384"/>
-          </a:xfrm>
-          <a:prstGeom prst="rect">
-            <a:avLst/>
-          </a:prstGeom>
-          <a:noFill/>
-        </p:spPr>
-        <p:txBody>
-          <a:bodyPr wrap="square" anchor="ctr"/>
-          <a:lstStyle/>
-          <a:p>
-            <a:r>
-              <a:rPr sz="1400" b="1" i="0">
-                <a:solidFill>
-                  <a:srgbClr val="095292"/>
-                </a:solidFill>
-                <a:latin typeface="Calibri"/>
-              </a:rPr>
-              <a:t>Implemente eliminarPorId(String id) usando remove(objeto) y el metodo pasarAGeriatria(int edadMinima) usando Iterator con it.remove(); verifique que despues de eliminar M-002 y de pasar a geriatria a las mascotas de 9 anios o mas, size() bajo exactamente en la cantidad de fichas retiradas y el programa no lanza ConcurrentModificationException.</a:t>
-            </a:r>
-          </a:p>
-        </p:txBody>
-      </p:sp>
-      <p:sp>
-        <p:nvSpPr>
-          <p:cNvPr id="21" name="Rounded Rectangle 20"/>
-          <p:cNvSpPr/>
-          <p:nvPr/>
-        </p:nvSpPr>
-        <p:spPr>
-          <a:xfrm>
-            <a:off x="457200" y="5404104"/>
-            <a:ext cx="11277295" cy="950976"/>
-          </a:xfrm>
-          <a:prstGeom prst="roundRect">
-            <a:avLst>
-              <a:gd name="adj" fmla="val 12000"/>
-            </a:avLst>
-          </a:prstGeom>
-          <a:solidFill>
-            <a:srgbClr val="F2F2F2"/>
-          </a:solidFill>
-          <a:ln>
-            <a:noFill/>
-          </a:ln>
-        </p:spPr>
-        <p:style>
-          <a:lnRef idx="1">
-            <a:schemeClr val="accent1"/>
-          </a:lnRef>
-          <a:fillRef idx="3">
-            <a:schemeClr val="accent1"/>
-          </a:fillRef>
-          <a:effectRef idx="2">
-            <a:schemeClr val="accent1"/>
-          </a:effectRef>
-          <a:fontRef idx="minor">
-            <a:schemeClr val="lt1"/>
-          </a:fontRef>
-        </p:style>
-        <p:txBody>
-          <a:bodyPr rtlCol="0" anchor="ctr"/>
-          <a:lstStyle/>
-          <a:p>
-            <a:pPr algn="ctr"/>
-          </a:p>
-        </p:txBody>
-      </p:sp>
-      <p:sp>
-        <p:nvSpPr>
-          <p:cNvPr id="22" name="Rounded Rectangle 21"/>
-          <p:cNvSpPr/>
-          <p:nvPr/>
-        </p:nvSpPr>
-        <p:spPr>
-          <a:xfrm>
-            <a:off x="594360" y="5660136"/>
-            <a:ext cx="438912" cy="438912"/>
-          </a:xfrm>
-          <a:prstGeom prst="roundRect">
-            <a:avLst>
-              <a:gd name="adj" fmla="val 12000"/>
-            </a:avLst>
-          </a:prstGeom>
-          <a:solidFill>
-            <a:srgbClr val="095292"/>
-          </a:solidFill>
-          <a:ln>
-            <a:noFill/>
-          </a:ln>
-        </p:spPr>
-        <p:style>
-          <a:lnRef idx="1">
-            <a:schemeClr val="accent1"/>
-          </a:lnRef>
-          <a:fillRef idx="3">
-            <a:schemeClr val="accent1"/>
-          </a:fillRef>
-          <a:effectRef idx="2">
-            <a:schemeClr val="accent1"/>
-          </a:effectRef>
-          <a:fontRef idx="minor">
-            <a:schemeClr val="lt1"/>
-          </a:fontRef>
-        </p:style>
-        <p:txBody>
-          <a:bodyPr rtlCol="0" anchor="ctr"/>
-          <a:lstStyle/>
-          <a:p>
-            <a:pPr algn="ctr"/>
-          </a:p>
-        </p:txBody>
-      </p:sp>
-      <p:sp>
-        <p:nvSpPr>
-          <p:cNvPr id="23" name="TextBox 22"/>
-          <p:cNvSpPr txBox="1"/>
-          <p:nvPr/>
-        </p:nvSpPr>
-        <p:spPr>
-          <a:xfrm>
-            <a:off x="594360" y="5660136"/>
-            <a:ext cx="438912" cy="438912"/>
-          </a:xfrm>
-          <a:prstGeom prst="rect">
-            <a:avLst/>
-          </a:prstGeom>
-          <a:noFill/>
-        </p:spPr>
-        <p:txBody>
-          <a:bodyPr wrap="square" anchor="ctr"/>
-          <a:lstStyle/>
-          <a:p>
-            <a:pPr algn="ctr"/>
-            <a:r>
-              <a:rPr sz="1600" b="1" i="0">
-                <a:solidFill>
-                  <a:srgbClr val="FFFFFF"/>
-                </a:solidFill>
-                <a:latin typeface="Calibri"/>
-              </a:rPr>
-              <a:t>5</a:t>
-            </a:r>
-          </a:p>
-        </p:txBody>
-      </p:sp>
-      <p:sp>
-        <p:nvSpPr>
-          <p:cNvPr id="24" name="TextBox 23"/>
-          <p:cNvSpPr txBox="1"/>
-          <p:nvPr/>
-        </p:nvSpPr>
-        <p:spPr>
-          <a:xfrm>
-            <a:off x="1188720" y="5495544"/>
-            <a:ext cx="10271455" cy="786384"/>
-          </a:xfrm>
-          <a:prstGeom prst="rect">
-            <a:avLst/>
-          </a:prstGeom>
-          <a:noFill/>
-        </p:spPr>
-        <p:txBody>
-          <a:bodyPr wrap="square" anchor="ctr"/>
-          <a:lstStyle/>
-          <a:p>
-            <a:r>
-              <a:rPr sz="1400" b="1" i="0">
-                <a:solidFill>
-                  <a:srgbClr val="095292"/>
-                </a:solidFill>
-                <a:latin typeface="Calibri"/>
-              </a:rPr>
-              <a:t>Arme un menu de consola con Scanner y opciones 1-Agregar, 2-Listar, 3-Buscar por ID, 4-Eliminar, 5-Salir dentro de un ciclo while; ejecute el programa cargando las seis fichas del escenario, tome captura de la consola con el listado final y suba el proyecto comprimido mas la captura a la plataforma del curso.</a:t>
-            </a:r>
-          </a:p>
-        </p:txBody>
-      </p:sp>
-      <p:sp>
-        <p:nvSpPr>
-          <p:cNvPr id="25" name="TextBox 24"/>
-          <p:cNvSpPr txBox="1"/>
-          <p:nvPr/>
-        </p:nvSpPr>
-        <p:spPr>
-          <a:xfrm>
-            <a:off x="11185855" y="6473952"/>
-            <a:ext cx="640080" cy="274320"/>
-          </a:xfrm>
-          <a:prstGeom prst="rect">
-            <a:avLst/>
-          </a:prstGeom>
-          <a:noFill/>
-        </p:spPr>
-        <p:txBody>
-          <a:bodyPr wrap="square">
-            <a:spAutoFit/>
-          </a:bodyPr>
-          <a:lstStyle/>
-          <a:p>
-            <a:pPr algn="r"/>
-            <a:r>
-              <a:rPr sz="1100" b="0" i="0">
-                <a:solidFill>
-                  <a:srgbClr val="666666"/>
-                </a:solidFill>
-                <a:latin typeface="Calibri"/>
-              </a:rPr>
-              <a:t>34</a:t>
-            </a:r>
-          </a:p>
-        </p:txBody>
-      </p:sp>
-    </p:spTree>
-  </p:cSld>
-  <p:clrMapOvr>
-    <a:masterClrMapping/>
-  </p:clrMapOvr>
-</p:sld>
-</file>
-
-<file path=ppt/slides/slide35.xml><?xml version="1.0" encoding="utf-8"?>
-<p:sld xmlns:a="http://schemas.openxmlformats.org/drawingml/2006/main" xmlns:p="http://schemas.openxmlformats.org/presentationml/2006/main" xmlns:r="http://schemas.openxmlformats.org/officeDocument/2006/relationships">
-  <p:cSld>
-    <p:bg>
-      <p:bgPr>
-        <a:solidFill>
-          <a:srgbClr val="FFFFFF"/>
-        </a:solidFill>
-        <a:effectLst/>
-      </p:bgPr>
-    </p:bg>
-    <p:spTree>
-      <p:nvGrpSpPr>
-        <p:cNvPr id="1" name=""/>
-        <p:cNvGrpSpPr/>
-        <p:nvPr/>
-      </p:nvGrpSpPr>
-      <p:grpSpPr/>
-      <p:sp>
-        <p:nvSpPr>
-          <p:cNvPr id="2" name="Rectangle 1"/>
-          <p:cNvSpPr/>
-          <p:nvPr/>
-        </p:nvSpPr>
-        <p:spPr>
-          <a:xfrm>
-            <a:off x="0" y="0"/>
-            <a:ext cx="12191695" cy="960120"/>
-          </a:xfrm>
-          <a:prstGeom prst="rect">
-            <a:avLst/>
-          </a:prstGeom>
-          <a:solidFill>
-            <a:srgbClr val="095292"/>
-          </a:solidFill>
-          <a:ln>
-            <a:noFill/>
-          </a:ln>
-        </p:spPr>
-        <p:style>
-          <a:lnRef idx="1">
-            <a:schemeClr val="accent1"/>
-          </a:lnRef>
-          <a:fillRef idx="3">
-            <a:schemeClr val="accent1"/>
-          </a:fillRef>
-          <a:effectRef idx="2">
-            <a:schemeClr val="accent1"/>
-          </a:effectRef>
-          <a:fontRef idx="minor">
-            <a:schemeClr val="lt1"/>
-          </a:fontRef>
-        </p:style>
-        <p:txBody>
-          <a:bodyPr rtlCol="0" anchor="ctr"/>
-          <a:lstStyle/>
-          <a:p>
-            <a:pPr algn="ctr"/>
-          </a:p>
-        </p:txBody>
-      </p:sp>
-      <p:sp>
-        <p:nvSpPr>
-          <p:cNvPr id="3" name="Rectangle 2"/>
-          <p:cNvSpPr/>
-          <p:nvPr/>
-        </p:nvSpPr>
-        <p:spPr>
-          <a:xfrm>
-            <a:off x="0" y="960120"/>
-            <a:ext cx="12191695" cy="41148"/>
-          </a:xfrm>
-          <a:prstGeom prst="rect">
-            <a:avLst/>
-          </a:prstGeom>
-          <a:solidFill>
-            <a:srgbClr val="FFD000"/>
-          </a:solidFill>
-          <a:ln>
-            <a:noFill/>
-          </a:ln>
-        </p:spPr>
-        <p:style>
-          <a:lnRef idx="1">
-            <a:schemeClr val="accent1"/>
-          </a:lnRef>
-          <a:fillRef idx="3">
-            <a:schemeClr val="accent1"/>
-          </a:fillRef>
-          <a:effectRef idx="2">
-            <a:schemeClr val="accent1"/>
-          </a:effectRef>
-          <a:fontRef idx="minor">
-            <a:schemeClr val="lt1"/>
-          </a:fontRef>
-        </p:style>
-        <p:txBody>
-          <a:bodyPr rtlCol="0" anchor="ctr"/>
-          <a:lstStyle/>
-          <a:p>
-            <a:pPr algn="ctr"/>
-          </a:p>
-        </p:txBody>
-      </p:sp>
-      <p:sp>
-        <p:nvSpPr>
-          <p:cNvPr id="4" name="TextBox 3"/>
-          <p:cNvSpPr txBox="1"/>
-          <p:nvPr/>
-        </p:nvSpPr>
-        <p:spPr>
-          <a:xfrm>
-            <a:off x="457200" y="164592"/>
-            <a:ext cx="11277295" cy="502920"/>
-          </a:xfrm>
-          <a:prstGeom prst="rect">
-            <a:avLst/>
-          </a:prstGeom>
-          <a:noFill/>
-        </p:spPr>
-        <p:txBody>
-          <a:bodyPr wrap="square">
-            <a:spAutoFit/>
-          </a:bodyPr>
-          <a:lstStyle/>
-          <a:p>
-            <a:r>
-              <a:rPr sz="2600" b="1" i="0">
-                <a:solidFill>
-                  <a:srgbClr val="FFFFFF"/>
-                </a:solidFill>
-                <a:latin typeface="Calibri"/>
-              </a:rPr>
-              <a:t>Antes de entregar — autochequeo</a:t>
-            </a:r>
-          </a:p>
-        </p:txBody>
-      </p:sp>
-      <p:sp>
-        <p:nvSpPr>
-          <p:cNvPr id="5" name="Rounded Rectangle 4"/>
-          <p:cNvSpPr/>
-          <p:nvPr/>
-        </p:nvSpPr>
-        <p:spPr>
-          <a:xfrm>
-            <a:off x="457200" y="1261872"/>
-            <a:ext cx="11277295" cy="566928"/>
-          </a:xfrm>
-          <a:prstGeom prst="roundRect">
-            <a:avLst>
-              <a:gd name="adj" fmla="val 12000"/>
-            </a:avLst>
-          </a:prstGeom>
-          <a:solidFill>
-            <a:srgbClr val="F2F2F2"/>
-          </a:solidFill>
-          <a:ln>
-            <a:noFill/>
-          </a:ln>
-        </p:spPr>
-        <p:style>
-          <a:lnRef idx="1">
-            <a:schemeClr val="accent1"/>
-          </a:lnRef>
-          <a:fillRef idx="3">
-            <a:schemeClr val="accent1"/>
-          </a:fillRef>
-          <a:effectRef idx="2">
-            <a:schemeClr val="accent1"/>
-          </a:effectRef>
-          <a:fontRef idx="minor">
-            <a:schemeClr val="lt1"/>
-          </a:fontRef>
-        </p:style>
-        <p:txBody>
-          <a:bodyPr rtlCol="0" anchor="ctr"/>
-          <a:lstStyle/>
-          <a:p>
-            <a:pPr algn="ctr"/>
-          </a:p>
-        </p:txBody>
-      </p:sp>
-      <p:sp>
-        <p:nvSpPr>
-          <p:cNvPr id="6" name="Rectangle 5"/>
-          <p:cNvSpPr/>
-          <p:nvPr/>
-        </p:nvSpPr>
-        <p:spPr>
-          <a:xfrm>
-            <a:off x="640080" y="1408175"/>
-            <a:ext cx="274320" cy="274320"/>
-          </a:xfrm>
-          <a:prstGeom prst="rect">
-            <a:avLst/>
-          </a:prstGeom>
-          <a:solidFill>
-            <a:srgbClr val="FFFFFF"/>
-          </a:solidFill>
-          <a:ln>
-            <a:solidFill>
-              <a:srgbClr val="333333"/>
-            </a:solidFill>
-          </a:ln>
-        </p:spPr>
-        <p:style>
-          <a:lnRef idx="1">
-            <a:schemeClr val="accent1"/>
-          </a:lnRef>
-          <a:fillRef idx="3">
-            <a:schemeClr val="accent1"/>
-          </a:fillRef>
-          <a:effectRef idx="2">
-            <a:schemeClr val="accent1"/>
-          </a:effectRef>
-          <a:fontRef idx="minor">
-            <a:schemeClr val="lt1"/>
-          </a:fontRef>
-        </p:style>
-        <p:txBody>
-          <a:bodyPr rtlCol="0" anchor="ctr"/>
-          <a:lstStyle/>
-          <a:p>
-            <a:pPr algn="ctr"/>
-          </a:p>
-        </p:txBody>
-      </p:sp>
-      <p:sp>
-        <p:nvSpPr>
-          <p:cNvPr id="7" name="Rectangle 6"/>
-          <p:cNvSpPr/>
-          <p:nvPr/>
-        </p:nvSpPr>
-        <p:spPr>
-          <a:xfrm>
-            <a:off x="640080" y="1408175"/>
-            <a:ext cx="73152" cy="274320"/>
-          </a:xfrm>
-          <a:prstGeom prst="rect">
-            <a:avLst/>
-          </a:prstGeom>
-          <a:solidFill>
-            <a:srgbClr val="269CCB"/>
-          </a:solidFill>
-          <a:ln>
-            <a:noFill/>
-          </a:ln>
-        </p:spPr>
-        <p:style>
-          <a:lnRef idx="1">
-            <a:schemeClr val="accent1"/>
-          </a:lnRef>
-          <a:fillRef idx="3">
-            <a:schemeClr val="accent1"/>
-          </a:fillRef>
-          <a:effectRef idx="2">
-            <a:schemeClr val="accent1"/>
-          </a:effectRef>
-          <a:fontRef idx="minor">
-            <a:schemeClr val="lt1"/>
-          </a:fontRef>
-        </p:style>
-        <p:txBody>
-          <a:bodyPr rtlCol="0" anchor="ctr"/>
-          <a:lstStyle/>
-          <a:p>
-            <a:pPr algn="ctr"/>
-          </a:p>
-        </p:txBody>
-      </p:sp>
-      <p:sp>
-        <p:nvSpPr>
-          <p:cNvPr id="8" name="TextBox 7"/>
-          <p:cNvSpPr txBox="1"/>
-          <p:nvPr/>
-        </p:nvSpPr>
-        <p:spPr>
-          <a:xfrm>
-            <a:off x="1097280" y="1353312"/>
-            <a:ext cx="10362895" cy="402336"/>
-          </a:xfrm>
-          <a:prstGeom prst="rect">
-            <a:avLst/>
-          </a:prstGeom>
-          <a:noFill/>
-        </p:spPr>
-        <p:txBody>
-          <a:bodyPr wrap="square" anchor="ctr"/>
-          <a:lstStyle/>
-          <a:p>
-            <a:r>
-              <a:rPr sz="1500" b="0" i="0">
-                <a:solidFill>
-                  <a:srgbClr val="333333"/>
-                </a:solidFill>
-                <a:latin typeface="Calibri"/>
-              </a:rPr>
-              <a:t>Si su lista imprime algo como vetcare.Mascota@6d06d69c, que metodo heredado de Object le esta faltando a la clase Mascota?</a:t>
-            </a:r>
-          </a:p>
-        </p:txBody>
-      </p:sp>
-      <p:sp>
-        <p:nvSpPr>
-          <p:cNvPr id="9" name="Rounded Rectangle 8"/>
-          <p:cNvSpPr/>
-          <p:nvPr/>
-        </p:nvSpPr>
-        <p:spPr>
-          <a:xfrm>
-            <a:off x="457200" y="1938528"/>
-            <a:ext cx="11277295" cy="566928"/>
-          </a:xfrm>
-          <a:prstGeom prst="roundRect">
-            <a:avLst>
-              <a:gd name="adj" fmla="val 12000"/>
-            </a:avLst>
-          </a:prstGeom>
-          <a:solidFill>
-            <a:srgbClr val="F2F2F2"/>
-          </a:solidFill>
-          <a:ln>
-            <a:noFill/>
-          </a:ln>
-        </p:spPr>
-        <p:style>
-          <a:lnRef idx="1">
-            <a:schemeClr val="accent1"/>
-          </a:lnRef>
-          <a:fillRef idx="3">
-            <a:schemeClr val="accent1"/>
-          </a:fillRef>
-          <a:effectRef idx="2">
-            <a:schemeClr val="accent1"/>
-          </a:effectRef>
-          <a:fontRef idx="minor">
-            <a:schemeClr val="lt1"/>
-          </a:fontRef>
-        </p:style>
-        <p:txBody>
-          <a:bodyPr rtlCol="0" anchor="ctr"/>
-          <a:lstStyle/>
-          <a:p>
-            <a:pPr algn="ctr"/>
-          </a:p>
-        </p:txBody>
-      </p:sp>
-      <p:sp>
-        <p:nvSpPr>
-          <p:cNvPr id="10" name="Rectangle 9"/>
-          <p:cNvSpPr/>
-          <p:nvPr/>
-        </p:nvSpPr>
-        <p:spPr>
-          <a:xfrm>
-            <a:off x="640080" y="2084832"/>
-            <a:ext cx="274320" cy="274320"/>
-          </a:xfrm>
-          <a:prstGeom prst="rect">
-            <a:avLst/>
-          </a:prstGeom>
-          <a:solidFill>
-            <a:srgbClr val="FFFFFF"/>
-          </a:solidFill>
-          <a:ln>
-            <a:solidFill>
-              <a:srgbClr val="333333"/>
-            </a:solidFill>
-          </a:ln>
-        </p:spPr>
-        <p:style>
-          <a:lnRef idx="1">
-            <a:schemeClr val="accent1"/>
-          </a:lnRef>
-          <a:fillRef idx="3">
-            <a:schemeClr val="accent1"/>
-          </a:fillRef>
-          <a:effectRef idx="2">
-            <a:schemeClr val="accent1"/>
-          </a:effectRef>
-          <a:fontRef idx="minor">
-            <a:schemeClr val="lt1"/>
-          </a:fontRef>
-        </p:style>
-        <p:txBody>
-          <a:bodyPr rtlCol="0" anchor="ctr"/>
-          <a:lstStyle/>
-          <a:p>
-            <a:pPr algn="ctr"/>
-          </a:p>
-        </p:txBody>
-      </p:sp>
-      <p:sp>
-        <p:nvSpPr>
-          <p:cNvPr id="11" name="Rectangle 10"/>
-          <p:cNvSpPr/>
-          <p:nvPr/>
-        </p:nvSpPr>
-        <p:spPr>
-          <a:xfrm>
-            <a:off x="640080" y="2084832"/>
-            <a:ext cx="73152" cy="274320"/>
-          </a:xfrm>
-          <a:prstGeom prst="rect">
-            <a:avLst/>
-          </a:prstGeom>
-          <a:solidFill>
-            <a:srgbClr val="269CCB"/>
-          </a:solidFill>
-          <a:ln>
-            <a:noFill/>
-          </a:ln>
-        </p:spPr>
-        <p:style>
-          <a:lnRef idx="1">
-            <a:schemeClr val="accent1"/>
-          </a:lnRef>
-          <a:fillRef idx="3">
-            <a:schemeClr val="accent1"/>
-          </a:fillRef>
-          <a:effectRef idx="2">
-            <a:schemeClr val="accent1"/>
-          </a:effectRef>
-          <a:fontRef idx="minor">
-            <a:schemeClr val="lt1"/>
-          </a:fontRef>
-        </p:style>
-        <p:txBody>
-          <a:bodyPr rtlCol="0" anchor="ctr"/>
-          <a:lstStyle/>
-          <a:p>
-            <a:pPr algn="ctr"/>
-          </a:p>
-        </p:txBody>
-      </p:sp>
-      <p:sp>
-        <p:nvSpPr>
-          <p:cNvPr id="12" name="TextBox 11"/>
-          <p:cNvSpPr txBox="1"/>
-          <p:nvPr/>
-        </p:nvSpPr>
-        <p:spPr>
-          <a:xfrm>
-            <a:off x="1097280" y="2029968"/>
-            <a:ext cx="10362895" cy="402336"/>
-          </a:xfrm>
-          <a:prstGeom prst="rect">
-            <a:avLst/>
-          </a:prstGeom>
-          <a:noFill/>
-        </p:spPr>
-        <p:txBody>
-          <a:bodyPr wrap="square" anchor="ctr"/>
-          <a:lstStyle/>
-          <a:p>
-            <a:r>
-              <a:rPr sz="1500" b="0" i="0">
-                <a:solidFill>
-                  <a:srgbClr val="333333"/>
-                </a:solidFill>
-                <a:latin typeface="Calibri"/>
-              </a:rPr>
-              <a:t>Cuando el recorrido llega a la ultima ficha y truena con IndexOutOfBoundsException, revise la condicion del for: el ultimo indice valido es igual a size() o es size() menos uno?</a:t>
-            </a:r>
-          </a:p>
-        </p:txBody>
-      </p:sp>
-      <p:sp>
-        <p:nvSpPr>
-          <p:cNvPr id="13" name="Rounded Rectangle 12"/>
-          <p:cNvSpPr/>
-          <p:nvPr/>
-        </p:nvSpPr>
-        <p:spPr>
-          <a:xfrm>
-            <a:off x="457200" y="2615184"/>
-            <a:ext cx="11277295" cy="566928"/>
-          </a:xfrm>
-          <a:prstGeom prst="roundRect">
-            <a:avLst>
-              <a:gd name="adj" fmla="val 12000"/>
-            </a:avLst>
-          </a:prstGeom>
-          <a:solidFill>
-            <a:srgbClr val="F2F2F2"/>
-          </a:solidFill>
-          <a:ln>
-            <a:noFill/>
-          </a:ln>
-        </p:spPr>
-        <p:style>
-          <a:lnRef idx="1">
-            <a:schemeClr val="accent1"/>
-          </a:lnRef>
-          <a:fillRef idx="3">
-            <a:schemeClr val="accent1"/>
-          </a:fillRef>
-          <a:effectRef idx="2">
-            <a:schemeClr val="accent1"/>
-          </a:effectRef>
-          <a:fontRef idx="minor">
-            <a:schemeClr val="lt1"/>
-          </a:fontRef>
-        </p:style>
-        <p:txBody>
-          <a:bodyPr rtlCol="0" anchor="ctr"/>
-          <a:lstStyle/>
-          <a:p>
-            <a:pPr algn="ctr"/>
-          </a:p>
-        </p:txBody>
-      </p:sp>
-      <p:sp>
-        <p:nvSpPr>
-          <p:cNvPr id="14" name="Rectangle 13"/>
-          <p:cNvSpPr/>
-          <p:nvPr/>
-        </p:nvSpPr>
-        <p:spPr>
-          <a:xfrm>
-            <a:off x="640080" y="2761488"/>
-            <a:ext cx="274320" cy="274320"/>
-          </a:xfrm>
-          <a:prstGeom prst="rect">
-            <a:avLst/>
-          </a:prstGeom>
-          <a:solidFill>
-            <a:srgbClr val="FFFFFF"/>
-          </a:solidFill>
-          <a:ln>
-            <a:solidFill>
-              <a:srgbClr val="333333"/>
-            </a:solidFill>
-          </a:ln>
-        </p:spPr>
-        <p:style>
-          <a:lnRef idx="1">
-            <a:schemeClr val="accent1"/>
-          </a:lnRef>
-          <a:fillRef idx="3">
-            <a:schemeClr val="accent1"/>
-          </a:fillRef>
-          <a:effectRef idx="2">
-            <a:schemeClr val="accent1"/>
-          </a:effectRef>
-          <a:fontRef idx="minor">
-            <a:schemeClr val="lt1"/>
-          </a:fontRef>
-        </p:style>
-        <p:txBody>
-          <a:bodyPr rtlCol="0" anchor="ctr"/>
-          <a:lstStyle/>
-          <a:p>
-            <a:pPr algn="ctr"/>
-          </a:p>
-        </p:txBody>
-      </p:sp>
-      <p:sp>
-        <p:nvSpPr>
-          <p:cNvPr id="15" name="Rectangle 14"/>
-          <p:cNvSpPr/>
-          <p:nvPr/>
-        </p:nvSpPr>
-        <p:spPr>
-          <a:xfrm>
-            <a:off x="640080" y="2761488"/>
-            <a:ext cx="73152" cy="274320"/>
-          </a:xfrm>
-          <a:prstGeom prst="rect">
-            <a:avLst/>
-          </a:prstGeom>
-          <a:solidFill>
-            <a:srgbClr val="269CCB"/>
-          </a:solidFill>
-          <a:ln>
-            <a:noFill/>
-          </a:ln>
-        </p:spPr>
-        <p:style>
-          <a:lnRef idx="1">
-            <a:schemeClr val="accent1"/>
-          </a:lnRef>
-          <a:fillRef idx="3">
-            <a:schemeClr val="accent1"/>
-          </a:fillRef>
-          <a:effectRef idx="2">
-            <a:schemeClr val="accent1"/>
-          </a:effectRef>
-          <a:fontRef idx="minor">
-            <a:schemeClr val="lt1"/>
-          </a:fontRef>
-        </p:style>
-        <p:txBody>
-          <a:bodyPr rtlCol="0" anchor="ctr"/>
-          <a:lstStyle/>
-          <a:p>
-            <a:pPr algn="ctr"/>
-          </a:p>
-        </p:txBody>
-      </p:sp>
-      <p:sp>
-        <p:nvSpPr>
-          <p:cNvPr id="16" name="TextBox 15"/>
-          <p:cNvSpPr txBox="1"/>
-          <p:nvPr/>
-        </p:nvSpPr>
-        <p:spPr>
-          <a:xfrm>
-            <a:off x="1097280" y="2706624"/>
-            <a:ext cx="10362895" cy="402336"/>
-          </a:xfrm>
-          <a:prstGeom prst="rect">
-            <a:avLst/>
-          </a:prstGeom>
-          <a:noFill/>
-        </p:spPr>
-        <p:txBody>
-          <a:bodyPr wrap="square" anchor="ctr"/>
-          <a:lstStyle/>
-          <a:p>
-            <a:r>
-              <a:rPr sz="1500" b="0" i="0">
-                <a:solidFill>
-                  <a:srgbClr val="333333"/>
-                </a:solidFill>
-                <a:latin typeface="Calibri"/>
-              </a:rPr>
-              <a:t>Si borra una mascota justo dentro de un for-each y aparece ConcurrentModificationException, quien deberia estar autorizado para sacar el elemento: la lista o el objeto que la esta recorriendo?</a:t>
-            </a:r>
-          </a:p>
-        </p:txBody>
-      </p:sp>
-      <p:sp>
-        <p:nvSpPr>
-          <p:cNvPr id="17" name="TextBox 16"/>
-          <p:cNvSpPr txBox="1"/>
-          <p:nvPr/>
-        </p:nvSpPr>
-        <p:spPr>
-          <a:xfrm>
-            <a:off x="11185855" y="6473952"/>
-            <a:ext cx="640080" cy="274320"/>
-          </a:xfrm>
-          <a:prstGeom prst="rect">
-            <a:avLst/>
-          </a:prstGeom>
-          <a:noFill/>
-        </p:spPr>
-        <p:txBody>
-          <a:bodyPr wrap="square">
-            <a:spAutoFit/>
-          </a:bodyPr>
-          <a:lstStyle/>
-          <a:p>
-            <a:pPr algn="r"/>
-            <a:r>
-              <a:rPr sz="1100" b="0" i="0">
-                <a:solidFill>
-                  <a:srgbClr val="666666"/>
-                </a:solidFill>
-                <a:latin typeface="Calibri"/>
-              </a:rPr>
-              <a:t>35</a:t>
-            </a:r>
-          </a:p>
-        </p:txBody>
-      </p:sp>
-    </p:spTree>
-  </p:cSld>
-  <p:clrMapOvr>
-    <a:masterClrMapping/>
-  </p:clrMapOvr>
-</p:sld>
-</file>
-
-<file path=ppt/slides/slide36.xml><?xml version="1.0" encoding="utf-8"?>
-<p:sld xmlns:a="http://schemas.openxmlformats.org/drawingml/2006/main" xmlns:p="http://schemas.openxmlformats.org/presentationml/2006/main" xmlns:r="http://schemas.openxmlformats.org/officeDocument/2006/relationships">
-  <p:cSld>
-    <p:bg>
-      <p:bgPr>
-        <a:solidFill>
-          <a:srgbClr val="FFFFFF"/>
-        </a:solidFill>
-        <a:effectLst/>
-      </p:bgPr>
-    </p:bg>
-    <p:spTree>
-      <p:nvGrpSpPr>
-        <p:cNvPr id="1" name=""/>
-        <p:cNvGrpSpPr/>
-        <p:nvPr/>
-      </p:nvGrpSpPr>
-      <p:grpSpPr/>
-      <p:sp>
-        <p:nvSpPr>
-          <p:cNvPr id="2" name="Rectangle 1"/>
-          <p:cNvSpPr/>
-          <p:nvPr/>
-        </p:nvSpPr>
-        <p:spPr>
-          <a:xfrm>
-            <a:off x="0" y="0"/>
-            <a:ext cx="12191695" cy="960120"/>
-          </a:xfrm>
-          <a:prstGeom prst="rect">
-            <a:avLst/>
-          </a:prstGeom>
-          <a:solidFill>
-            <a:srgbClr val="095292"/>
-          </a:solidFill>
-          <a:ln>
-            <a:noFill/>
-          </a:ln>
-        </p:spPr>
-        <p:style>
-          <a:lnRef idx="1">
-            <a:schemeClr val="accent1"/>
-          </a:lnRef>
-          <a:fillRef idx="3">
-            <a:schemeClr val="accent1"/>
-          </a:fillRef>
-          <a:effectRef idx="2">
-            <a:schemeClr val="accent1"/>
-          </a:effectRef>
-          <a:fontRef idx="minor">
-            <a:schemeClr val="lt1"/>
-          </a:fontRef>
-        </p:style>
-        <p:txBody>
-          <a:bodyPr rtlCol="0" anchor="ctr"/>
-          <a:lstStyle/>
-          <a:p>
-            <a:pPr algn="ctr"/>
-          </a:p>
-        </p:txBody>
-      </p:sp>
-      <p:sp>
-        <p:nvSpPr>
-          <p:cNvPr id="3" name="Rectangle 2"/>
-          <p:cNvSpPr/>
-          <p:nvPr/>
-        </p:nvSpPr>
-        <p:spPr>
-          <a:xfrm>
-            <a:off x="0" y="960120"/>
-            <a:ext cx="12191695" cy="41148"/>
-          </a:xfrm>
-          <a:prstGeom prst="rect">
-            <a:avLst/>
-          </a:prstGeom>
-          <a:solidFill>
-            <a:srgbClr val="FFD000"/>
-          </a:solidFill>
-          <a:ln>
-            <a:noFill/>
-          </a:ln>
-        </p:spPr>
-        <p:style>
-          <a:lnRef idx="1">
-            <a:schemeClr val="accent1"/>
-          </a:lnRef>
-          <a:fillRef idx="3">
-            <a:schemeClr val="accent1"/>
-          </a:fillRef>
-          <a:effectRef idx="2">
-            <a:schemeClr val="accent1"/>
-          </a:effectRef>
-          <a:fontRef idx="minor">
-            <a:schemeClr val="lt1"/>
-          </a:fontRef>
-        </p:style>
-        <p:txBody>
-          <a:bodyPr rtlCol="0" anchor="ctr"/>
-          <a:lstStyle/>
-          <a:p>
-            <a:pPr algn="ctr"/>
-          </a:p>
-        </p:txBody>
-      </p:sp>
-      <p:sp>
-        <p:nvSpPr>
-          <p:cNvPr id="4" name="TextBox 3"/>
-          <p:cNvSpPr txBox="1"/>
-          <p:nvPr/>
-        </p:nvSpPr>
-        <p:spPr>
-          <a:xfrm>
-            <a:off x="457200" y="164592"/>
-            <a:ext cx="11277295" cy="502920"/>
-          </a:xfrm>
-          <a:prstGeom prst="rect">
-            <a:avLst/>
-          </a:prstGeom>
-          <a:noFill/>
-        </p:spPr>
-        <p:txBody>
-          <a:bodyPr wrap="square">
-            <a:spAutoFit/>
-          </a:bodyPr>
-          <a:lstStyle/>
-          <a:p>
-            <a:r>
-              <a:rPr sz="2600" b="1" i="0">
-                <a:solidFill>
-                  <a:srgbClr val="FFFFFF"/>
-                </a:solidFill>
-                <a:latin typeface="Calibri"/>
-              </a:rPr>
-              <a:t>Criterios de exito / entregable</a:t>
-            </a:r>
-          </a:p>
-        </p:txBody>
-      </p:sp>
-      <p:sp>
-        <p:nvSpPr>
-          <p:cNvPr id="5" name="TextBox 4"/>
-          <p:cNvSpPr txBox="1"/>
-          <p:nvPr/>
-        </p:nvSpPr>
-        <p:spPr>
-          <a:xfrm>
-            <a:off x="457200" y="1170432"/>
-            <a:ext cx="11277295" cy="5230368"/>
-          </a:xfrm>
-          <a:prstGeom prst="rect">
-            <a:avLst/>
-          </a:prstGeom>
-          <a:noFill/>
-        </p:spPr>
-        <p:txBody>
-          <a:bodyPr wrap="square">
-            <a:spAutoFit/>
-          </a:bodyPr>
-          <a:lstStyle/>
-          <a:p>
-            <a:pPr>
-              <a:spcAft>
-                <a:spcPts val="800"/>
-              </a:spcAft>
-            </a:pPr>
-            <a:r>
-              <a:rPr sz="2000" b="0" i="0">
-                <a:solidFill>
-                  <a:srgbClr val="333333"/>
-                </a:solidFill>
-                <a:latin typeface="Calibri"/>
-              </a:rPr>
-              <a:t>–   </a:t>
-            </a:r>
-            <a:r>
-              <a:rPr sz="2000" b="1" i="0">
-                <a:solidFill>
-                  <a:srgbClr val="333333"/>
-                </a:solidFill>
-                <a:latin typeface="Calibri"/>
-              </a:rPr>
-              <a:t>Entregable:</a:t>
-            </a:r>
-            <a:r>
-              <a:rPr sz="2000" b="0" i="0">
-                <a:solidFill>
-                  <a:srgbClr val="333333"/>
-                </a:solidFill>
-                <a:latin typeface="Calibri"/>
-              </a:rPr>
-              <a:t> Proyecto Java con las clases Mascota y RegistroMascotas y un menu de consola que agrega, lista, busca por ID y elimina mascotas, comprimido y subido a la plataforma del curso.</a:t>
-            </a:r>
-          </a:p>
-          <a:p>
-            <a:pPr>
-              <a:spcAft>
-                <a:spcPts val="800"/>
-              </a:spcAft>
-            </a:pPr>
-            <a:r>
-              <a:rPr sz="2000" b="0" i="0">
-                <a:solidFill>
-                  <a:srgbClr val="333333"/>
-                </a:solidFill>
-                <a:latin typeface="Calibri"/>
-              </a:rPr>
-              <a:t>–   </a:t>
-            </a:r>
-            <a:r>
-              <a:rPr sz="2000" b="1" i="0">
-                <a:solidFill>
-                  <a:srgbClr val="333333"/>
-                </a:solidFill>
-                <a:latin typeface="Calibri"/>
-              </a:rPr>
-              <a:t>Exito:</a:t>
-            </a:r>
-            <a:r>
-              <a:rPr sz="2000" b="0" i="0">
-                <a:solidFill>
-                  <a:srgbClr val="333333"/>
-                </a:solidFill>
-                <a:latin typeface="Calibri"/>
-              </a:rPr>
-              <a:t> El registro acepta mas de tres mascotas sin declarar ningun tamano fijo y size() refleja el numero real de fichas activas.</a:t>
-            </a:r>
-          </a:p>
-          <a:p>
-            <a:pPr>
-              <a:spcAft>
-                <a:spcPts val="800"/>
-              </a:spcAft>
-            </a:pPr>
-            <a:r>
-              <a:rPr sz="2000" b="0" i="0">
-                <a:solidFill>
-                  <a:srgbClr val="333333"/>
-                </a:solidFill>
-                <a:latin typeface="Calibri"/>
-              </a:rPr>
-              <a:t>–   </a:t>
-            </a:r>
-            <a:r>
-              <a:rPr sz="2000" b="1" i="0">
-                <a:solidFill>
-                  <a:srgbClr val="333333"/>
-                </a:solidFill>
-                <a:latin typeface="Calibri"/>
-              </a:rPr>
-              <a:t>Exito:</a:t>
-            </a:r>
-            <a:r>
-              <a:rPr sz="2000" b="0" i="0">
-                <a:solidFill>
-                  <a:srgbClr val="333333"/>
-                </a:solidFill>
-                <a:latin typeface="Calibri"/>
-              </a:rPr>
-              <a:t> Al intentar agregar un ID ya existente el programa lo rechaza con mensaje claro y no aumenta el tamano de la lista.</a:t>
-            </a:r>
-          </a:p>
-          <a:p>
-            <a:pPr>
-              <a:spcAft>
-                <a:spcPts val="800"/>
-              </a:spcAft>
-            </a:pPr>
-            <a:r>
-              <a:rPr sz="2000" b="0" i="0">
-                <a:solidFill>
-                  <a:srgbClr val="333333"/>
-                </a:solidFill>
-                <a:latin typeface="Calibri"/>
-              </a:rPr>
-              <a:t>–   </a:t>
-            </a:r>
-            <a:r>
-              <a:rPr sz="2000" b="1" i="0">
-                <a:solidFill>
-                  <a:srgbClr val="333333"/>
-                </a:solidFill>
-                <a:latin typeface="Calibri"/>
-              </a:rPr>
-              <a:t>Exito:</a:t>
-            </a:r>
-            <a:r>
-              <a:rPr sz="2000" b="0" i="0">
-                <a:solidFill>
-                  <a:srgbClr val="333333"/>
-                </a:solidFill>
-                <a:latin typeface="Calibri"/>
-              </a:rPr>
-              <a:t> buscarPorId devuelve la mascota correcta cuando existe y maneja el caso de no encontrada sin lanzar NullPointerException.</a:t>
-            </a:r>
-          </a:p>
-          <a:p>
-            <a:pPr>
-              <a:spcAft>
-                <a:spcPts val="800"/>
-              </a:spcAft>
-            </a:pPr>
-            <a:r>
-              <a:rPr sz="2000" b="0" i="0">
-                <a:solidFill>
-                  <a:srgbClr val="333333"/>
-                </a:solidFill>
-                <a:latin typeface="Calibri"/>
-              </a:rPr>
-              <a:t>–   </a:t>
-            </a:r>
-            <a:r>
-              <a:rPr sz="2000" b="1" i="0">
-                <a:solidFill>
-                  <a:srgbClr val="333333"/>
-                </a:solidFill>
-                <a:latin typeface="Calibri"/>
-              </a:rPr>
-              <a:t>Exito:</a:t>
-            </a:r>
-            <a:r>
-              <a:rPr sz="2000" b="0" i="0">
-                <a:solidFill>
-                  <a:srgbClr val="333333"/>
-                </a:solidFill>
-                <a:latin typeface="Calibri"/>
-              </a:rPr>
-              <a:t> La eliminacion masiva por edad se hace con Iterator o removeIf y el programa termina sin ConcurrentModificationException.</a:t>
-            </a:r>
-          </a:p>
-          <a:p>
-            <a:pPr>
-              <a:spcAft>
-                <a:spcPts val="800"/>
-              </a:spcAft>
-            </a:pPr>
-            <a:r>
-              <a:rPr sz="2000" b="0" i="0">
-                <a:solidFill>
-                  <a:srgbClr val="333333"/>
-                </a:solidFill>
-                <a:latin typeface="Calibri"/>
-              </a:rPr>
-              <a:t>–   </a:t>
-            </a:r>
-            <a:r>
-              <a:rPr sz="2000" b="1" i="0">
-                <a:solidFill>
-                  <a:srgbClr val="333333"/>
-                </a:solidFill>
-                <a:latin typeface="Calibri"/>
-              </a:rPr>
-              <a:t>Entrega en la plataforma del curso</a:t>
-            </a:r>
-            <a:r>
-              <a:rPr sz="2000" b="0" i="0">
-                <a:solidFill>
-                  <a:srgbClr val="333333"/>
-                </a:solidFill>
-                <a:latin typeface="Calibri"/>
-              </a:rPr>
-              <a:t> — en la fecha que indique el docente.</a:t>
-            </a:r>
-          </a:p>
-        </p:txBody>
-      </p:sp>
-      <p:sp>
-        <p:nvSpPr>
-          <p:cNvPr id="6" name="TextBox 5"/>
-          <p:cNvSpPr txBox="1"/>
-          <p:nvPr/>
-        </p:nvSpPr>
-        <p:spPr>
-          <a:xfrm>
-            <a:off x="11185855" y="6473952"/>
-            <a:ext cx="640080" cy="274320"/>
-          </a:xfrm>
-          <a:prstGeom prst="rect">
-            <a:avLst/>
-          </a:prstGeom>
-          <a:noFill/>
-        </p:spPr>
-        <p:txBody>
-          <a:bodyPr wrap="square">
-            <a:spAutoFit/>
-          </a:bodyPr>
-          <a:lstStyle/>
-          <a:p>
-            <a:pPr algn="r"/>
-            <a:r>
-              <a:rPr sz="1100" b="0" i="0">
-                <a:solidFill>
-                  <a:srgbClr val="666666"/>
-                </a:solidFill>
-                <a:latin typeface="Calibri"/>
-              </a:rPr>
-              <a:t>36</a:t>
-            </a:r>
-          </a:p>
-        </p:txBody>
-      </p:sp>
-    </p:spTree>
-  </p:cSld>
-  <p:clrMapOvr>
-    <a:masterClrMapping/>
-  </p:clrMapOvr>
-</p:sld>
-</file>
-
-<file path=ppt/slides/slide37.xml><?xml version="1.0" encoding="utf-8"?>
-<p:sld xmlns:a="http://schemas.openxmlformats.org/drawingml/2006/main" xmlns:p="http://schemas.openxmlformats.org/presentationml/2006/main" xmlns:r="http://schemas.openxmlformats.org/officeDocument/2006/relationships">
-  <p:cSld>
-    <p:bg>
-      <p:bgPr>
-        <a:solidFill>
-          <a:srgbClr val="FFFFFF"/>
-        </a:solidFill>
-        <a:effectLst/>
-      </p:bgPr>
-    </p:bg>
-    <p:spTree>
-      <p:nvGrpSpPr>
-        <p:cNvPr id="1" name=""/>
-        <p:cNvGrpSpPr/>
-        <p:nvPr/>
-      </p:nvGrpSpPr>
-      <p:grpSpPr/>
-      <p:sp>
-        <p:nvSpPr>
-          <p:cNvPr id="2" name="Rectangle 1"/>
-          <p:cNvSpPr/>
-          <p:nvPr/>
-        </p:nvSpPr>
-        <p:spPr>
-          <a:xfrm>
-            <a:off x="0" y="0"/>
-            <a:ext cx="12191695" cy="960120"/>
-          </a:xfrm>
-          <a:prstGeom prst="rect">
-            <a:avLst/>
-          </a:prstGeom>
-          <a:solidFill>
-            <a:srgbClr val="095292"/>
-          </a:solidFill>
-          <a:ln>
-            <a:noFill/>
-          </a:ln>
-        </p:spPr>
-        <p:style>
-          <a:lnRef idx="1">
-            <a:schemeClr val="accent1"/>
-          </a:lnRef>
-          <a:fillRef idx="3">
-            <a:schemeClr val="accent1"/>
-          </a:fillRef>
-          <a:effectRef idx="2">
-            <a:schemeClr val="accent1"/>
-          </a:effectRef>
-          <a:fontRef idx="minor">
-            <a:schemeClr val="lt1"/>
-          </a:fontRef>
-        </p:style>
-        <p:txBody>
-          <a:bodyPr rtlCol="0" anchor="ctr"/>
-          <a:lstStyle/>
-          <a:p>
-            <a:pPr algn="ctr"/>
-          </a:p>
-        </p:txBody>
-      </p:sp>
-      <p:sp>
-        <p:nvSpPr>
-          <p:cNvPr id="3" name="Rectangle 2"/>
-          <p:cNvSpPr/>
-          <p:nvPr/>
-        </p:nvSpPr>
-        <p:spPr>
-          <a:xfrm>
-            <a:off x="0" y="960120"/>
-            <a:ext cx="12191695" cy="41148"/>
-          </a:xfrm>
-          <a:prstGeom prst="rect">
-            <a:avLst/>
-          </a:prstGeom>
-          <a:solidFill>
-            <a:srgbClr val="FFD000"/>
-          </a:solidFill>
-          <a:ln>
-            <a:noFill/>
-          </a:ln>
-        </p:spPr>
-        <p:style>
-          <a:lnRef idx="1">
-            <a:schemeClr val="accent1"/>
-          </a:lnRef>
-          <a:fillRef idx="3">
-            <a:schemeClr val="accent1"/>
-          </a:fillRef>
-          <a:effectRef idx="2">
-            <a:schemeClr val="accent1"/>
-          </a:effectRef>
-          <a:fontRef idx="minor">
-            <a:schemeClr val="lt1"/>
-          </a:fontRef>
-        </p:style>
-        <p:txBody>
-          <a:bodyPr rtlCol="0" anchor="ctr"/>
-          <a:lstStyle/>
-          <a:p>
-            <a:pPr algn="ctr"/>
-          </a:p>
-        </p:txBody>
-      </p:sp>
-      <p:sp>
-        <p:nvSpPr>
-          <p:cNvPr id="4" name="TextBox 3"/>
-          <p:cNvSpPr txBox="1"/>
-          <p:nvPr/>
-        </p:nvSpPr>
-        <p:spPr>
-          <a:xfrm>
-            <a:off x="457200" y="164592"/>
-            <a:ext cx="11277295" cy="502920"/>
-          </a:xfrm>
-          <a:prstGeom prst="rect">
-            <a:avLst/>
-          </a:prstGeom>
-          <a:noFill/>
-        </p:spPr>
-        <p:txBody>
-          <a:bodyPr wrap="square">
-            <a:spAutoFit/>
-          </a:bodyPr>
-          <a:lstStyle/>
-          <a:p>
-            <a:r>
-              <a:rPr sz="2600" b="1" i="0">
-                <a:solidFill>
-                  <a:srgbClr val="FFFFFF"/>
-                </a:solidFill>
-                <a:latin typeface="Calibri"/>
-              </a:rPr>
-              <a:t>Para el PI esta semana</a:t>
-            </a:r>
-          </a:p>
-        </p:txBody>
-      </p:sp>
-      <p:sp>
-        <p:nvSpPr>
-          <p:cNvPr id="5" name="Rounded Rectangle 4"/>
-          <p:cNvSpPr/>
-          <p:nvPr/>
-        </p:nvSpPr>
-        <p:spPr>
-          <a:xfrm>
-            <a:off x="457200" y="1261872"/>
-            <a:ext cx="11277295" cy="1051560"/>
-          </a:xfrm>
-          <a:prstGeom prst="roundRect">
-            <a:avLst>
-              <a:gd name="adj" fmla="val 12000"/>
-            </a:avLst>
-          </a:prstGeom>
-          <a:solidFill>
-            <a:srgbClr val="E8F4FA"/>
-          </a:solidFill>
-          <a:ln>
-            <a:noFill/>
-          </a:ln>
-        </p:spPr>
-        <p:style>
-          <a:lnRef idx="1">
-            <a:schemeClr val="accent1"/>
-          </a:lnRef>
-          <a:fillRef idx="3">
-            <a:schemeClr val="accent1"/>
-          </a:fillRef>
-          <a:effectRef idx="2">
-            <a:schemeClr val="accent1"/>
-          </a:effectRef>
-          <a:fontRef idx="minor">
-            <a:schemeClr val="lt1"/>
-          </a:fontRef>
-        </p:style>
-        <p:txBody>
-          <a:bodyPr rtlCol="0" anchor="ctr"/>
-          <a:lstStyle/>
-          <a:p>
-            <a:pPr algn="ctr"/>
-          </a:p>
-        </p:txBody>
-      </p:sp>
-      <p:sp>
-        <p:nvSpPr>
-          <p:cNvPr id="6" name="Rectangle 5"/>
-          <p:cNvSpPr/>
-          <p:nvPr/>
-        </p:nvSpPr>
-        <p:spPr>
-          <a:xfrm>
-            <a:off x="457200" y="1261872"/>
-            <a:ext cx="128016" cy="1051560"/>
-          </a:xfrm>
-          <a:prstGeom prst="rect">
-            <a:avLst/>
-          </a:prstGeom>
-          <a:solidFill>
-            <a:srgbClr val="269CCB"/>
-          </a:solidFill>
-          <a:ln>
-            <a:noFill/>
-          </a:ln>
-        </p:spPr>
-        <p:style>
-          <a:lnRef idx="1">
-            <a:schemeClr val="accent1"/>
-          </a:lnRef>
-          <a:fillRef idx="3">
-            <a:schemeClr val="accent1"/>
-          </a:fillRef>
-          <a:effectRef idx="2">
-            <a:schemeClr val="accent1"/>
-          </a:effectRef>
-          <a:fontRef idx="minor">
-            <a:schemeClr val="lt1"/>
-          </a:fontRef>
-        </p:style>
-        <p:txBody>
-          <a:bodyPr rtlCol="0" anchor="ctr"/>
-          <a:lstStyle/>
-          <a:p>
-            <a:pPr algn="ctr"/>
-          </a:p>
-        </p:txBody>
-      </p:sp>
-      <p:sp>
-        <p:nvSpPr>
-          <p:cNvPr id="7" name="TextBox 6"/>
-          <p:cNvSpPr txBox="1"/>
-          <p:nvPr/>
-        </p:nvSpPr>
-        <p:spPr>
-          <a:xfrm>
-            <a:off x="777240" y="1399031"/>
-            <a:ext cx="10774375" cy="822959"/>
-          </a:xfrm>
-          <a:prstGeom prst="rect">
-            <a:avLst/>
-          </a:prstGeom>
-          <a:noFill/>
-        </p:spPr>
-        <p:txBody>
-          <a:bodyPr wrap="square">
-            <a:spAutoFit/>
-          </a:bodyPr>
-          <a:lstStyle/>
-          <a:p>
-            <a:r>
-              <a:rPr sz="1200" b="1" i="0">
-                <a:solidFill>
-                  <a:srgbClr val="269CCB"/>
-                </a:solidFill>
-                <a:latin typeface="Calibri"/>
-              </a:rPr>
-              <a:t>Info</a:t>
-            </a:r>
-          </a:p>
-          <a:p>
-            <a:pPr>
-              <a:spcBef>
-                <a:spcPts val="400"/>
-              </a:spcBef>
-            </a:pPr>
-            <a:r>
-              <a:rPr sz="1400" b="0" i="0">
-                <a:solidFill>
-                  <a:srgbClr val="333333"/>
-                </a:solidFill>
-                <a:latin typeface="Calibri"/>
-              </a:rPr>
-              <a:t>Hito: El registro de mascotas de VetCare deja de vivir en un arreglo de tamano fijo y pasa a un ArrayList&lt;Mascota&gt; que crece con la clinica.</a:t>
-            </a:r>
-          </a:p>
-        </p:txBody>
-      </p:sp>
-      <p:sp>
-        <p:nvSpPr>
-          <p:cNvPr id="8" name="Rounded Rectangle 7"/>
-          <p:cNvSpPr/>
-          <p:nvPr/>
-        </p:nvSpPr>
-        <p:spPr>
-          <a:xfrm>
-            <a:off x="457200" y="2478024"/>
-            <a:ext cx="11277295" cy="1051560"/>
-          </a:xfrm>
-          <a:prstGeom prst="roundRect">
-            <a:avLst>
-              <a:gd name="adj" fmla="val 12000"/>
-            </a:avLst>
-          </a:prstGeom>
-          <a:solidFill>
-            <a:srgbClr val="FFF8E1"/>
-          </a:solidFill>
-          <a:ln>
-            <a:noFill/>
-          </a:ln>
-        </p:spPr>
-        <p:style>
-          <a:lnRef idx="1">
-            <a:schemeClr val="accent1"/>
-          </a:lnRef>
-          <a:fillRef idx="3">
-            <a:schemeClr val="accent1"/>
-          </a:fillRef>
-          <a:effectRef idx="2">
-            <a:schemeClr val="accent1"/>
-          </a:effectRef>
-          <a:fontRef idx="minor">
-            <a:schemeClr val="lt1"/>
-          </a:fontRef>
-        </p:style>
-        <p:txBody>
-          <a:bodyPr rtlCol="0" anchor="ctr"/>
-          <a:lstStyle/>
-          <a:p>
-            <a:pPr algn="ctr"/>
-          </a:p>
-        </p:txBody>
-      </p:sp>
-      <p:sp>
-        <p:nvSpPr>
-          <p:cNvPr id="9" name="Rectangle 8"/>
-          <p:cNvSpPr/>
-          <p:nvPr/>
-        </p:nvSpPr>
-        <p:spPr>
-          <a:xfrm>
-            <a:off x="457200" y="2478024"/>
-            <a:ext cx="128016" cy="1051560"/>
-          </a:xfrm>
-          <a:prstGeom prst="rect">
-            <a:avLst/>
-          </a:prstGeom>
-          <a:solidFill>
-            <a:srgbClr val="FFD000"/>
-          </a:solidFill>
-          <a:ln>
-            <a:noFill/>
-          </a:ln>
-        </p:spPr>
-        <p:style>
-          <a:lnRef idx="1">
-            <a:schemeClr val="accent1"/>
-          </a:lnRef>
-          <a:fillRef idx="3">
-            <a:schemeClr val="accent1"/>
-          </a:fillRef>
-          <a:effectRef idx="2">
-            <a:schemeClr val="accent1"/>
-          </a:effectRef>
-          <a:fontRef idx="minor">
-            <a:schemeClr val="lt1"/>
-          </a:fontRef>
-        </p:style>
-        <p:txBody>
-          <a:bodyPr rtlCol="0" anchor="ctr"/>
-          <a:lstStyle/>
-          <a:p>
-            <a:pPr algn="ctr"/>
-          </a:p>
-        </p:txBody>
-      </p:sp>
-      <p:sp>
-        <p:nvSpPr>
-          <p:cNvPr id="10" name="TextBox 9"/>
-          <p:cNvSpPr txBox="1"/>
-          <p:nvPr/>
-        </p:nvSpPr>
-        <p:spPr>
-          <a:xfrm>
-            <a:off x="777240" y="2615184"/>
-            <a:ext cx="10774375" cy="822959"/>
-          </a:xfrm>
-          <a:prstGeom prst="rect">
-            <a:avLst/>
-          </a:prstGeom>
-          <a:noFill/>
-        </p:spPr>
-        <p:txBody>
-          <a:bodyPr wrap="square">
-            <a:spAutoFit/>
-          </a:bodyPr>
-          <a:lstStyle/>
-          <a:p>
-            <a:r>
-              <a:rPr sz="1200" b="1" i="0">
-                <a:solidFill>
-                  <a:srgbClr val="FFD000"/>
-                </a:solidFill>
-                <a:latin typeface="Calibri"/>
-              </a:rPr>
-              <a:t>Aclaración</a:t>
-            </a:r>
-          </a:p>
-          <a:p>
-            <a:pPr>
-              <a:spcBef>
-                <a:spcPts val="400"/>
-              </a:spcBef>
-            </a:pPr>
-            <a:r>
-              <a:rPr sz="1400" b="0" i="0">
-                <a:solidFill>
-                  <a:srgbClr val="333333"/>
-                </a:solidFill>
-                <a:latin typeface="Calibri"/>
-              </a:rPr>
-              <a:t>Enunciado completo: Clases/Proyecto Integrador/ (VetCare).</a:t>
-            </a:r>
-          </a:p>
-        </p:txBody>
-      </p:sp>
-      <p:sp>
-        <p:nvSpPr>
-          <p:cNvPr id="11" name="Rounded Rectangle 10"/>
-          <p:cNvSpPr/>
-          <p:nvPr/>
-        </p:nvSpPr>
-        <p:spPr>
-          <a:xfrm>
-            <a:off x="457200" y="3694176"/>
-            <a:ext cx="11277295" cy="1051560"/>
-          </a:xfrm>
-          <a:prstGeom prst="roundRect">
-            <a:avLst>
-              <a:gd name="adj" fmla="val 12000"/>
-            </a:avLst>
-          </a:prstGeom>
-          <a:solidFill>
-            <a:srgbClr val="FBE4E4"/>
-          </a:solidFill>
-          <a:ln>
-            <a:noFill/>
-          </a:ln>
-        </p:spPr>
-        <p:style>
-          <a:lnRef idx="1">
-            <a:schemeClr val="accent1"/>
-          </a:lnRef>
-          <a:fillRef idx="3">
-            <a:schemeClr val="accent1"/>
-          </a:fillRef>
-          <a:effectRef idx="2">
-            <a:schemeClr val="accent1"/>
-          </a:effectRef>
-          <a:fontRef idx="minor">
-            <a:schemeClr val="lt1"/>
-          </a:fontRef>
-        </p:style>
-        <p:txBody>
-          <a:bodyPr rtlCol="0" anchor="ctr"/>
-          <a:lstStyle/>
-          <a:p>
-            <a:pPr algn="ctr"/>
-          </a:p>
-        </p:txBody>
-      </p:sp>
-      <p:sp>
-        <p:nvSpPr>
-          <p:cNvPr id="12" name="Rectangle 11"/>
-          <p:cNvSpPr/>
-          <p:nvPr/>
-        </p:nvSpPr>
-        <p:spPr>
-          <a:xfrm>
-            <a:off x="457200" y="3694176"/>
-            <a:ext cx="128016" cy="1051560"/>
-          </a:xfrm>
-          <a:prstGeom prst="rect">
-            <a:avLst/>
-          </a:prstGeom>
-          <a:solidFill>
-            <a:srgbClr val="A02030"/>
-          </a:solidFill>
-          <a:ln>
-            <a:noFill/>
-          </a:ln>
-        </p:spPr>
-        <p:style>
-          <a:lnRef idx="1">
-            <a:schemeClr val="accent1"/>
-          </a:lnRef>
-          <a:fillRef idx="3">
-            <a:schemeClr val="accent1"/>
-          </a:fillRef>
-          <a:effectRef idx="2">
-            <a:schemeClr val="accent1"/>
-          </a:effectRef>
-          <a:fontRef idx="minor">
-            <a:schemeClr val="lt1"/>
-          </a:fontRef>
-        </p:style>
-        <p:txBody>
-          <a:bodyPr rtlCol="0" anchor="ctr"/>
-          <a:lstStyle/>
-          <a:p>
-            <a:pPr algn="ctr"/>
-          </a:p>
-        </p:txBody>
-      </p:sp>
-      <p:sp>
-        <p:nvSpPr>
-          <p:cNvPr id="13" name="TextBox 12"/>
-          <p:cNvSpPr txBox="1"/>
-          <p:nvPr/>
-        </p:nvSpPr>
-        <p:spPr>
-          <a:xfrm>
-            <a:off x="777240" y="3831336"/>
-            <a:ext cx="10774375" cy="822959"/>
-          </a:xfrm>
-          <a:prstGeom prst="rect">
-            <a:avLst/>
-          </a:prstGeom>
-          <a:noFill/>
-        </p:spPr>
-        <p:txBody>
-          <a:bodyPr wrap="square">
-            <a:spAutoFit/>
-          </a:bodyPr>
-          <a:lstStyle/>
-          <a:p>
-            <a:r>
-              <a:rPr sz="1200" b="1" i="0">
-                <a:solidFill>
-                  <a:srgbClr val="A02030"/>
-                </a:solidFill>
-                <a:latin typeface="Calibri"/>
-              </a:rPr>
-              <a:t>Atención</a:t>
-            </a:r>
-          </a:p>
-          <a:p>
-            <a:pPr>
-              <a:spcBef>
-                <a:spcPts val="400"/>
-              </a:spcBef>
-            </a:pPr>
-            <a:r>
-              <a:rPr sz="1400" b="0" i="0">
-                <a:solidFill>
-                  <a:srgbClr val="333333"/>
-                </a:solidFill>
-                <a:latin typeface="Calibri"/>
-              </a:rPr>
-              <a:t>Entrega del taller, si el docente lo asigna · en la fecha que indique el docente.</a:t>
-            </a:r>
-          </a:p>
-        </p:txBody>
-      </p:sp>
-      <p:sp>
-        <p:nvSpPr>
-          <p:cNvPr id="14" name="TextBox 13"/>
-          <p:cNvSpPr txBox="1"/>
-          <p:nvPr/>
-        </p:nvSpPr>
-        <p:spPr>
-          <a:xfrm>
-            <a:off x="11185855" y="6473952"/>
-            <a:ext cx="640080" cy="274320"/>
-          </a:xfrm>
-          <a:prstGeom prst="rect">
-            <a:avLst/>
-          </a:prstGeom>
-          <a:noFill/>
-        </p:spPr>
-        <p:txBody>
-          <a:bodyPr wrap="square">
-            <a:spAutoFit/>
-          </a:bodyPr>
-          <a:lstStyle/>
-          <a:p>
-            <a:pPr algn="r"/>
-            <a:r>
-              <a:rPr sz="1100" b="0" i="0">
-                <a:solidFill>
-                  <a:srgbClr val="666666"/>
-                </a:solidFill>
-                <a:latin typeface="Calibri"/>
-              </a:rPr>
-              <a:t>37</a:t>
-            </a:r>
-          </a:p>
-        </p:txBody>
-      </p:sp>
-    </p:spTree>
-  </p:cSld>
-  <p:clrMapOvr>
-    <a:masterClrMapping/>
-  </p:clrMapOvr>
-</p:sld>
-</file>
-
-<file path=ppt/slides/slide38.xml><?xml version="1.0" encoding="utf-8"?>
-<p:sld xmlns:a="http://schemas.openxmlformats.org/drawingml/2006/main" xmlns:p="http://schemas.openxmlformats.org/presentationml/2006/main" xmlns:r="http://schemas.openxmlformats.org/officeDocument/2006/relationships">
-  <p:cSld>
-    <p:bg>
-      <p:bgPr>
-        <a:solidFill>
-          <a:srgbClr val="FFFFFF"/>
-        </a:solidFill>
-        <a:effectLst/>
-      </p:bgPr>
-    </p:bg>
-    <p:spTree>
-      <p:nvGrpSpPr>
-        <p:cNvPr id="1" name=""/>
-        <p:cNvGrpSpPr/>
-        <p:nvPr/>
-      </p:nvGrpSpPr>
-      <p:grpSpPr/>
-      <p:sp>
-        <p:nvSpPr>
-          <p:cNvPr id="2" name="Rectangle 1"/>
-          <p:cNvSpPr/>
-          <p:nvPr/>
-        </p:nvSpPr>
-        <p:spPr>
-          <a:xfrm>
-            <a:off x="0" y="0"/>
             <a:ext cx="12191695" cy="164592"/>
           </a:xfrm>
           <a:prstGeom prst="rect">
@@ -18406,7 +15931,7 @@
                 </a:solidFill>
                 <a:latin typeface="Calibri"/>
               </a:rPr>
-              <a:t>Clase 2 · VetCare avanza</a:t>
+              <a:t>Clase 2 · Colecciones dinamicas · ArrayList</a:t>
             </a:r>
           </a:p>
         </p:txBody>
@@ -18445,7 +15970,7 @@
                 </a:solidFill>
                 <a:latin typeface="Calibri"/>
               </a:rPr>
-              <a:t>El registro de mascotas de VetCare deja de vivir en un arreglo de tamano fijo y pasa a un ArrayList&lt;Mascota&gt; que crece con la clinica.</a:t>
+              <a:t>De arreglos fijos a listas que crecen</a:t>
             </a:r>
           </a:p>
           <a:p>
@@ -18461,7 +15986,7 @@
                 </a:solidFill>
                 <a:latin typeface="Calibri"/>
               </a:rPr>
-              <a:t>Entregable: Proyecto Java con las clases Mascota y RegistroMascotas y un menu de consola que agrega, lista, busca por ID y elimina mascotas, comprimido y subido a la plataforma del curso.</a:t>
+              <a:t>Repasa las laminas de concepto y el codigo de la demo</a:t>
             </a:r>
           </a:p>
           <a:p>
@@ -18477,7 +16002,7 @@
                 </a:solidFill>
                 <a:latin typeface="Calibri"/>
               </a:rPr>
-              <a:t>Siguiente clase: continuamos el hilo del PI</a:t>
+              <a:t>Siguiente clase: continuamos el hilo del tema</a:t>
             </a:r>
           </a:p>
         </p:txBody>
@@ -20443,4 +17968,324 @@
   </a:objectDefaults>
   <a:extraClrSchemeLst/>
 </a:theme>
+</file>
+
+<file path=ppt/theme/theme2.xml><?xml version="1.0" encoding="utf-8"?>
+<a:theme xmlns:a="http://schemas.openxmlformats.org/drawingml/2006/main" name="Office Theme">
+  <a:themeElements>
+    <a:clrScheme name="Office">
+      <a:dk1>
+        <a:sysClr val="windowText" lastClr="000000"/>
+      </a:dk1>
+      <a:lt1>
+        <a:sysClr val="window" lastClr="FFFFFF"/>
+      </a:lt1>
+      <a:dk2>
+        <a:srgbClr val="1F497D"/>
+      </a:dk2>
+      <a:lt2>
+        <a:srgbClr val="EEECE1"/>
+      </a:lt2>
+      <a:accent1>
+        <a:srgbClr val="4F81BD"/>
+      </a:accent1>
+      <a:accent2>
+        <a:srgbClr val="C0504D"/>
+      </a:accent2>
+      <a:accent3>
+        <a:srgbClr val="9BBB59"/>
+      </a:accent3>
+      <a:accent4>
+        <a:srgbClr val="8064A2"/>
+      </a:accent4>
+      <a:accent5>
+        <a:srgbClr val="4BACC6"/>
+      </a:accent5>
+      <a:accent6>
+        <a:srgbClr val="F79646"/>
+      </a:accent6>
+      <a:hlink>
+        <a:srgbClr val="0000FF"/>
+      </a:hlink>
+      <a:folHlink>
+        <a:srgbClr val="800080"/>
+      </a:folHlink>
+    </a:clrScheme>
+    <a:fontScheme name="Office">
+      <a:majorFont>
+        <a:latin typeface="Calibri"/>
+        <a:ea typeface=""/>
+        <a:cs typeface=""/>
+        <a:font script="Jpan" typeface="ＭＳ Ｐゴシック"/>
+        <a:font script="Hang" typeface="맑은 고딕"/>
+        <a:font script="Hans" typeface="宋体"/>
+        <a:font script="Hant" typeface="新細明體"/>
+        <a:font script="Arab" typeface="Times New Roman"/>
+        <a:font script="Hebr" typeface="Times New Roman"/>
+        <a:font script="Thai" typeface="Angsana New"/>
+        <a:font script="Ethi" typeface="Nyala"/>
+        <a:font script="Beng" typeface="Vrinda"/>
+        <a:font script="Gujr" typeface="Shruti"/>
+        <a:font script="Khmr" typeface="MoolBoran"/>
+        <a:font script="Knda" typeface="Tunga"/>
+        <a:font script="Guru" typeface="Raavi"/>
+        <a:font script="Cans" typeface="Euphemia"/>
+        <a:font script="Cher" typeface="Plantagenet Cherokee"/>
+        <a:font script="Yiii" typeface="Microsoft Yi Baiti"/>
+        <a:font script="Tibt" typeface="Microsoft Himalaya"/>
+        <a:font script="Thaa" typeface="MV Boli"/>
+        <a:font script="Deva" typeface="Mangal"/>
+        <a:font script="Telu" typeface="Gautami"/>
+        <a:font script="Taml" typeface="Latha"/>
+        <a:font script="Syrc" typeface="Estrangelo Edessa"/>
+        <a:font script="Orya" typeface="Kalinga"/>
+        <a:font script="Mlym" typeface="Kartika"/>
+        <a:font script="Laoo" typeface="DokChampa"/>
+        <a:font script="Sinh" typeface="Iskoola Pota"/>
+        <a:font script="Mong" typeface="Mongolian Baiti"/>
+        <a:font script="Viet" typeface="Times New Roman"/>
+        <a:font script="Uigh" typeface="Microsoft Uighur"/>
+        <a:font script="Geor" typeface="Sylfaen"/>
+      </a:majorFont>
+      <a:minorFont>
+        <a:latin typeface="Calibri"/>
+        <a:ea typeface=""/>
+        <a:cs typeface=""/>
+        <a:font script="Jpan" typeface="ＭＳ Ｐゴシック"/>
+        <a:font script="Hang" typeface="맑은 고딕"/>
+        <a:font script="Hans" typeface="宋体"/>
+        <a:font script="Hant" typeface="新細明體"/>
+        <a:font script="Arab" typeface="Arial"/>
+        <a:font script="Hebr" typeface="Arial"/>
+        <a:font script="Thai" typeface="Cordia New"/>
+        <a:font script="Ethi" typeface="Nyala"/>
+        <a:font script="Beng" typeface="Vrinda"/>
+        <a:font script="Gujr" typeface="Shruti"/>
+        <a:font script="Khmr" typeface="DaunPenh"/>
+        <a:font script="Knda" typeface="Tunga"/>
+        <a:font script="Guru" typeface="Raavi"/>
+        <a:font script="Cans" typeface="Euphemia"/>
+        <a:font script="Cher" typeface="Plantagenet Cherokee"/>
+        <a:font script="Yiii" typeface="Microsoft Yi Baiti"/>
+        <a:font script="Tibt" typeface="Microsoft Himalaya"/>
+        <a:font script="Thaa" typeface="MV Boli"/>
+        <a:font script="Deva" typeface="Mangal"/>
+        <a:font script="Telu" typeface="Gautami"/>
+        <a:font script="Taml" typeface="Latha"/>
+        <a:font script="Syrc" typeface="Estrangelo Edessa"/>
+        <a:font script="Orya" typeface="Kalinga"/>
+        <a:font script="Mlym" typeface="Kartika"/>
+        <a:font script="Laoo" typeface="DokChampa"/>
+        <a:font script="Sinh" typeface="Iskoola Pota"/>
+        <a:font script="Mong" typeface="Mongolian Baiti"/>
+        <a:font script="Viet" typeface="Arial"/>
+        <a:font script="Uigh" typeface="Microsoft Uighur"/>
+        <a:font script="Geor" typeface="Sylfaen"/>
+      </a:minorFont>
+    </a:fontScheme>
+    <a:fmtScheme name="Office">
+      <a:fillStyleLst>
+        <a:solidFill>
+          <a:schemeClr val="phClr"/>
+        </a:solidFill>
+        <a:gradFill rotWithShape="1">
+          <a:gsLst>
+            <a:gs pos="0">
+              <a:schemeClr val="phClr">
+                <a:tint val="50000"/>
+                <a:satMod val="300000"/>
+              </a:schemeClr>
+            </a:gs>
+            <a:gs pos="35000">
+              <a:schemeClr val="phClr">
+                <a:tint val="37000"/>
+                <a:satMod val="300000"/>
+              </a:schemeClr>
+            </a:gs>
+            <a:gs pos="100000">
+              <a:schemeClr val="phClr">
+                <a:tint val="15000"/>
+                <a:satMod val="350000"/>
+              </a:schemeClr>
+            </a:gs>
+          </a:gsLst>
+          <a:lin ang="16200000" scaled="1"/>
+        </a:gradFill>
+        <a:gradFill rotWithShape="1">
+          <a:gsLst>
+            <a:gs pos="0">
+              <a:schemeClr val="phClr">
+                <a:tint val="100000"/>
+                <a:shade val="100000"/>
+                <a:satMod val="130000"/>
+              </a:schemeClr>
+            </a:gs>
+            <a:gs pos="100000">
+              <a:schemeClr val="phClr">
+                <a:tint val="50000"/>
+                <a:shade val="100000"/>
+                <a:satMod val="350000"/>
+              </a:schemeClr>
+            </a:gs>
+          </a:gsLst>
+          <a:lin ang="16200000" scaled="0"/>
+        </a:gradFill>
+      </a:fillStyleLst>
+      <a:lnStyleLst>
+        <a:ln w="9525" cap="flat" cmpd="sng" algn="ctr">
+          <a:solidFill>
+            <a:schemeClr val="phClr">
+              <a:shade val="95000"/>
+              <a:satMod val="105000"/>
+            </a:schemeClr>
+          </a:solidFill>
+          <a:prstDash val="solid"/>
+        </a:ln>
+        <a:ln w="25400" cap="flat" cmpd="sng" algn="ctr">
+          <a:solidFill>
+            <a:schemeClr val="phClr"/>
+          </a:solidFill>
+          <a:prstDash val="solid"/>
+        </a:ln>
+        <a:ln w="38100" cap="flat" cmpd="sng" algn="ctr">
+          <a:solidFill>
+            <a:schemeClr val="phClr"/>
+          </a:solidFill>
+          <a:prstDash val="solid"/>
+        </a:ln>
+      </a:lnStyleLst>
+      <a:effectStyleLst>
+        <a:effectStyle>
+          <a:effectLst>
+            <a:outerShdw blurRad="40000" dist="20000" dir="5400000" rotWithShape="0">
+              <a:srgbClr val="000000">
+                <a:alpha val="38000"/>
+              </a:srgbClr>
+            </a:outerShdw>
+          </a:effectLst>
+        </a:effectStyle>
+        <a:effectStyle>
+          <a:effectLst>
+            <a:outerShdw blurRad="40000" dist="23000" dir="5400000" rotWithShape="0">
+              <a:srgbClr val="000000">
+                <a:alpha val="35000"/>
+              </a:srgbClr>
+            </a:outerShdw>
+          </a:effectLst>
+        </a:effectStyle>
+        <a:effectStyle>
+          <a:effectLst>
+            <a:outerShdw blurRad="40000" dist="23000" dir="5400000" rotWithShape="0">
+              <a:srgbClr val="000000">
+                <a:alpha val="35000"/>
+              </a:srgbClr>
+            </a:outerShdw>
+          </a:effectLst>
+          <a:scene3d>
+            <a:camera prst="orthographicFront">
+              <a:rot lat="0" lon="0" rev="0"/>
+            </a:camera>
+            <a:lightRig rig="threePt" dir="t">
+              <a:rot lat="0" lon="0" rev="1200000"/>
+            </a:lightRig>
+          </a:scene3d>
+          <a:sp3d>
+            <a:bevelT w="63500" h="25400"/>
+          </a:sp3d>
+        </a:effectStyle>
+      </a:effectStyleLst>
+      <a:bgFillStyleLst>
+        <a:solidFill>
+          <a:schemeClr val="phClr"/>
+        </a:solidFill>
+        <a:gradFill rotWithShape="1">
+          <a:gsLst>
+            <a:gs pos="0">
+              <a:schemeClr val="phClr">
+                <a:tint val="40000"/>
+                <a:satMod val="350000"/>
+              </a:schemeClr>
+            </a:gs>
+            <a:gs pos="40000">
+              <a:schemeClr val="phClr">
+                <a:tint val="45000"/>
+                <a:shade val="99000"/>
+                <a:satMod val="350000"/>
+              </a:schemeClr>
+            </a:gs>
+            <a:gs pos="100000">
+              <a:schemeClr val="phClr">
+                <a:shade val="20000"/>
+                <a:satMod val="255000"/>
+              </a:schemeClr>
+            </a:gs>
+          </a:gsLst>
+          <a:path path="circle">
+            <a:fillToRect l="50000" t="-80000" r="50000" b="180000"/>
+          </a:path>
+        </a:gradFill>
+        <a:gradFill rotWithShape="1">
+          <a:gsLst>
+            <a:gs pos="0">
+              <a:schemeClr val="phClr">
+                <a:tint val="80000"/>
+                <a:satMod val="300000"/>
+              </a:schemeClr>
+            </a:gs>
+            <a:gs pos="100000">
+              <a:schemeClr val="phClr">
+                <a:shade val="30000"/>
+                <a:satMod val="200000"/>
+              </a:schemeClr>
+            </a:gs>
+          </a:gsLst>
+          <a:path path="circle">
+            <a:fillToRect l="50000" t="50000" r="50000" b="50000"/>
+          </a:path>
+        </a:gradFill>
+      </a:bgFillStyleLst>
+    </a:fmtScheme>
+  </a:themeElements>
+  <a:objectDefaults>
+    <a:spDef>
+      <a:spPr/>
+      <a:bodyPr/>
+      <a:lstStyle/>
+      <a:style>
+        <a:lnRef idx="1">
+          <a:schemeClr val="accent1"/>
+        </a:lnRef>
+        <a:fillRef idx="3">
+          <a:schemeClr val="accent1"/>
+        </a:fillRef>
+        <a:effectRef idx="2">
+          <a:schemeClr val="accent1"/>
+        </a:effectRef>
+        <a:fontRef idx="minor">
+          <a:schemeClr val="lt1"/>
+        </a:fontRef>
+      </a:style>
+    </a:spDef>
+    <a:lnDef>
+      <a:spPr/>
+      <a:bodyPr/>
+      <a:lstStyle/>
+      <a:style>
+        <a:lnRef idx="2">
+          <a:schemeClr val="accent1"/>
+        </a:lnRef>
+        <a:fillRef idx="0">
+          <a:schemeClr val="accent1"/>
+        </a:fillRef>
+        <a:effectRef idx="1">
+          <a:schemeClr val="accent1"/>
+        </a:effectRef>
+        <a:fontRef idx="minor">
+          <a:schemeClr val="tx1"/>
+        </a:fontRef>
+      </a:style>
+    </a:lnDef>
+  </a:objectDefaults>
+  <a:extraClrSchemeLst/>
+</a:theme>
 </file>
--- a/Programacion II/Clases/Clase 2 - Colecciones dinamicas ArrayList/Presentacion.pptx
+++ b/Programacion II/Clases/Clase 2 - Colecciones dinamicas ArrayList/Presentacion.pptx
@@ -533,7 +533,7 @@
           <a:lstStyle/>
           <a:p>
             <a:r>
-              <a:t>Empecemos por el problema real de Huellitas.</a:t>
+              <a:t>Empecemos por el problema real de la clinica.</a:t>
             </a:r>
           </a:p>
         </p:txBody>
@@ -4650,7 +4650,7 @@
                 </a:solidFill>
                 <a:latin typeface="Calibri"/>
               </a:rPr>
-              <a:t>–   En VetCare esto aparece apenas queremos pasar a control geriatrico a todas las mascotas de nueve anios o mas: se recorre con Iterator, se saca con it.remove() y no truena nada.</a:t>
+              <a:t>–   En el sistema de la clinica esto aparece apenas queremos pasar a control geriatrico a todas las mascotas de nueve anios o mas: se recorre con Iterator, se saca con it.remove() y no truena nada.</a:t>
             </a:r>
           </a:p>
         </p:txBody>
@@ -4918,7 +4918,7 @@
                 </a:solidFill>
                 <a:latin typeface="Calibri"/>
               </a:rPr>
-              <a:t>–   Y sobreescriba toString() en Mascota desde ya: sin el, imprimir la lista muestra basura como vetcare.Mascota@6d06d69c y los estudiantes creen que el programa fallo.</a:t>
+              <a:t>–   Y sobreescriba toString() en Mascota desde ya: sin el, imprimir la lista muestra basura como clinica.Mascota@6d06d69c y los estudiantes creen que el programa fallo.</a:t>
             </a:r>
           </a:p>
         </p:txBody>
@@ -5099,7 +5099,7 @@
                 </a:solidFill>
                 <a:latin typeface="Calibri"/>
               </a:rPr>
-              <a:t>class VetCareRegistroMascotas</a:t>
+              <a:t>class ClinicaRegistroMascotas</a:t>
             </a:r>
           </a:p>
         </p:txBody>
@@ -5258,7 +5258,7 @@
                 </a:solidFill>
                 <a:latin typeface="Calibri"/>
               </a:rPr>
-              <a:t>public class VetCareRegistroMascotas {</a:t>
+              <a:t>public class ClinicaRegistroMascotas {</a:t>
             </a:r>
           </a:p>
           <a:p>
@@ -5455,7 +5455,7 @@
                 </a:solidFill>
                 <a:latin typeface="Calibri"/>
               </a:rPr>
-              <a:t>VetCareRegistroMascotas.java — main() (1/3)</a:t>
+              <a:t>ClinicaRegistroMascotas.java — main() (1/3)</a:t>
             </a:r>
           </a:p>
         </p:txBody>
@@ -6122,7 +6122,7 @@
                 </a:solidFill>
                 <a:latin typeface="Calibri"/>
               </a:rPr>
-              <a:t>VetCareRegistroMascotas.java — main() (2/3)</a:t>
+              <a:t>ClinicaRegistroMascotas.java — main() (2/3)</a:t>
             </a:r>
           </a:p>
         </p:txBody>
@@ -6789,7 +6789,7 @@
                 </a:solidFill>
                 <a:latin typeface="Calibri"/>
               </a:rPr>
-              <a:t>VetCareRegistroMascotas.java — main() (3/3)</a:t>
+              <a:t>ClinicaRegistroMascotas.java — main() (3/3)</a:t>
             </a:r>
           </a:p>
         </p:txBody>
@@ -7161,7 +7161,7 @@
                 </a:solidFill>
                 <a:latin typeface="Calibri"/>
               </a:rPr>
-              <a:t>VetCareRegistroMascotas.java — menu() (1/3)</a:t>
+              <a:t>ClinicaRegistroMascotas.java — menu() (1/3)</a:t>
             </a:r>
           </a:p>
         </p:txBody>
@@ -7828,7 +7828,7 @@
                 </a:solidFill>
                 <a:latin typeface="Calibri"/>
               </a:rPr>
-              <a:t>VetCareRegistroMascotas.java — menu() (2/3)</a:t>
+              <a:t>ClinicaRegistroMascotas.java — menu() (2/3)</a:t>
             </a:r>
           </a:p>
         </p:txBody>
@@ -8495,7 +8495,7 @@
                 </a:solidFill>
                 <a:latin typeface="Calibri"/>
               </a:rPr>
-              <a:t>VetCareRegistroMascotas.java — menu() (3/3)</a:t>
+              <a:t>ClinicaRegistroMascotas.java — menu() (3/3)</a:t>
             </a:r>
           </a:p>
         </p:txBody>
@@ -9127,7 +9127,7 @@
                 </a:solidFill>
                 <a:latin typeface="Calibri"/>
               </a:rPr>
-              <a:t>–   Todo con el mismo dominio: la clinica veterinaria Huellitas (VetCare).</a:t>
+              <a:t>–   Todo con el mismo dominio: una clinica veterinaria.</a:t>
             </a:r>
           </a:p>
         </p:txBody>
@@ -9308,7 +9308,7 @@
                 </a:solidFill>
                 <a:latin typeface="Calibri"/>
               </a:rPr>
-              <a:t>VetCareRegistroMascotas.java — leerEntero()</a:t>
+              <a:t>ClinicaRegistroMascotas.java — leerEntero()</a:t>
             </a:r>
           </a:p>
         </p:txBody>
@@ -9792,7 +9792,7 @@
                 </a:solidFill>
                 <a:latin typeface="Calibri"/>
               </a:rPr>
-              <a:t>VetCareRegistroMascotas.java — class Mascota</a:t>
+              <a:t>ClinicaRegistroMascotas.java — class Mascota</a:t>
             </a:r>
           </a:p>
         </p:txBody>
@@ -10244,7 +10244,7 @@
                 </a:solidFill>
                 <a:latin typeface="Calibri"/>
               </a:rPr>
-              <a:t>VetCareRegistroMascotas.java — Mascota()</a:t>
+              <a:t>ClinicaRegistroMascotas.java — Mascota()</a:t>
             </a:r>
           </a:p>
         </p:txBody>
@@ -10808,7 +10808,7 @@
                 </a:solidFill>
                 <a:latin typeface="Calibri"/>
               </a:rPr>
-              <a:t>VetCareRegistroMascotas.java — class RegistroMascotas</a:t>
+              <a:t>ClinicaRegistroMascotas.java — class RegistroMascotas</a:t>
             </a:r>
           </a:p>
         </p:txBody>
@@ -11212,7 +11212,7 @@
                 </a:solidFill>
                 <a:latin typeface="Calibri"/>
               </a:rPr>
-              <a:t>VetCareRegistroMascotas.java — agregar()</a:t>
+              <a:t>ClinicaRegistroMascotas.java — agregar()</a:t>
             </a:r>
           </a:p>
         </p:txBody>
@@ -11760,7 +11760,7 @@
                 </a:solidFill>
                 <a:latin typeface="Calibri"/>
               </a:rPr>
-              <a:t>VetCareRegistroMascotas.java — buscarPorId()</a:t>
+              <a:t>ClinicaRegistroMascotas.java — buscarPorId()</a:t>
             </a:r>
           </a:p>
         </p:txBody>
@@ -12276,7 +12276,7 @@
                 </a:solidFill>
                 <a:latin typeface="Calibri"/>
               </a:rPr>
-              <a:t>VetCareRegistroMascotas.java — eliminarPorId()</a:t>
+              <a:t>ClinicaRegistroMascotas.java — eliminarPorId()</a:t>
             </a:r>
           </a:p>
         </p:txBody>
@@ -12776,7 +12776,7 @@
                 </a:solidFill>
                 <a:latin typeface="Calibri"/>
               </a:rPr>
-              <a:t>VetCareRegistroMascotas.java — pasarAGeriatria()</a:t>
+              <a:t>ClinicaRegistroMascotas.java — pasarAGeriatria()</a:t>
             </a:r>
           </a:p>
         </p:txBody>
@@ -13276,7 +13276,7 @@
                 </a:solidFill>
                 <a:latin typeface="Calibri"/>
               </a:rPr>
-              <a:t>VetCareRegistroMascotas.java — listar()</a:t>
+              <a:t>ClinicaRegistroMascotas.java — listar()</a:t>
             </a:r>
           </a:p>
         </p:txBody>
@@ -13760,7 +13760,7 @@
                 </a:solidFill>
                 <a:latin typeface="Calibri"/>
               </a:rPr>
-              <a:t>VetCareRegistroMascotas.java — cantidad()</a:t>
+              <a:t>ClinicaRegistroMascotas.java — cantidad()</a:t>
             </a:r>
           </a:p>
         </p:txBody>
@@ -14552,7 +14552,7 @@
                 </a:solidFill>
                 <a:latin typeface="Calibri"/>
               </a:rPr>
-              <a:t>Demo en vivo sobre VetCare</a:t>
+              <a:t>Demo en vivo sobre el tema</a:t>
             </a:r>
           </a:p>
         </p:txBody>
@@ -15770,7 +15770,7 @@
                 </a:solidFill>
                 <a:latin typeface="Calibri"/>
               </a:rPr>
-              <a:t>–   Mismo dominio VetCare — no otro ejemplo.</a:t>
+              <a:t>–   Mismo dominio de la clinica — no otro ejemplo.</a:t>
             </a:r>
           </a:p>
         </p:txBody>
@@ -16183,7 +16183,7 @@
                 </a:solidFill>
                 <a:latin typeface="Calibri"/>
               </a:rPr>
-              <a:t>El problema real de Huellitas (1/2)</a:t>
+              <a:t>El problema real de la clinica (1/2)</a:t>
             </a:r>
           </a:p>
         </p:txBody>
@@ -16435,7 +16435,7 @@
                 </a:solidFill>
                 <a:latin typeface="Calibri"/>
               </a:rPr>
-              <a:t>El problema real de Huellitas (2/2)</a:t>
+              <a:t>El problema real de la clinica (2/2)</a:t>
             </a:r>
           </a:p>
         </p:txBody>
@@ -16758,7 +16758,7 @@
                 </a:solidFill>
                 <a:latin typeface="Calibri"/>
               </a:rPr>
-              <a:t>–   En VetCare eso significa que agregar la mascota nueva al final del registro no cuesta nada, mientras que borrar siempre la primera ficha de una lista de 5.000 pacientes es la operacion mas cara que usted puede pedir.</a:t>
+              <a:t>–   En el sistema de la clinica eso significa que agregar la mascota nueva al final del registro no cuesta nada, mientras que borrar siempre la primera ficha de una lista de 5.000 pacientes es la operacion mas cara que usted puede pedir.</a:t>
             </a:r>
           </a:p>
         </p:txBody>
@@ -17262,7 +17262,7 @@
                 </a:solidFill>
                 <a:latin typeface="Calibri"/>
               </a:rPr>
-              <a:t>–   Por eso en VetCare buscamos por ID recorriendo la lista y comparando m.getId().equalsIgnoreCase(id).</a:t>
+              <a:t>–   Por eso en el sistema de la clinica buscamos por ID recorriendo la lista y comparando m.getId().equalsIgnoreCase(id).</a:t>
             </a:r>
           </a:p>
         </p:txBody>

--- a/Programacion II/Clases/Clase 2 - Colecciones dinamicas ArrayList/Presentacion.pptx
+++ b/Programacion II/Clases/Clase 2 - Colecciones dinamicas ArrayList/Presentacion.pptx
@@ -829,94 +829,6 @@
           <a:p>
             <a:r>
               <a:t>La ultima idea es de diseno, y es la que hace que este codigo sirva para el resto del proyecto integrador. La lista no debe ser un atributo publico que cualquiera manipula desde main; debe vivir privada dentro de la clase RegistroMascotas, y el mundo exterior solo puede hablarle a traves de metodos con reglas de negocio: agregar valida que el ID no este repetido, eliminarPorId avisa si la mascota no existe, buscarPorId devuelve null cuando no la encuentra. Eso es encapsulamiento aplicado a colecciones, y es lo que hara posible que en las proximas clases la misma clase RegistroMascotas alimente una tabla de Swing y despues se guarde en un archivo CSV sin cambiar una sola linea de la logica. Programe siempre contra la interfaz (List) y no contra la implementacion (ArrayList), porque si manana necesita cambiar a LinkedList solo toca una linea. Y sobreescriba toString() en Mascota desde ya: sin el, imprimir la lista muestra basura como clinica.Mascota@6d06d69c y los estudiantes creen que el programa fallo.</a:t>
-            </a:r>
-          </a:p>
-        </p:txBody>
-      </p:sp>
-      <p:sp>
-        <p:nvSpPr>
-          <p:cNvPr id="4" name="Slide Number Placeholder 3"/>
-          <p:cNvSpPr>
-            <a:spLocks noGrp="1"/>
-          </p:cNvSpPr>
-          <p:nvPr>
-            <p:ph type="sldNum" idx="5" sz="quarter"/>
-          </p:nvPr>
-        </p:nvSpPr>
-        <p:spPr/>
-      </p:sp>
-    </p:spTree>
-  </p:cSld>
-  <p:clrMapOvr>
-    <a:masterClrMapping/>
-  </p:clrMapOvr>
-</p:notes>
-</file>
-
-<file path=ppt/notesSlides/notesSlide6.xml><?xml version="1.0" encoding="utf-8"?>
-<p:notes xmlns:a="http://schemas.openxmlformats.org/drawingml/2006/main" xmlns:p="http://schemas.openxmlformats.org/presentationml/2006/main" xmlns:r="http://schemas.openxmlformats.org/officeDocument/2006/relationships">
-  <p:cSld>
-    <p:spTree>
-      <p:nvGrpSpPr>
-        <p:cNvPr id="1" name=""/>
-        <p:cNvGrpSpPr/>
-        <p:nvPr/>
-      </p:nvGrpSpPr>
-      <p:grpSpPr>
-        <a:xfrm>
-          <a:off x="0" y="0"/>
-          <a:ext cx="0" cy="0"/>
-          <a:chOff x="0" y="0"/>
-          <a:chExt cx="0" cy="0"/>
-        </a:xfrm>
-      </p:grpSpPr>
-      <p:sp>
-        <p:nvSpPr>
-          <p:cNvPr id="2" name="Slide Image Placeholder 1"/>
-          <p:cNvSpPr>
-            <a:spLocks noGrp="1"/>
-          </p:cNvSpPr>
-          <p:nvPr>
-            <p:ph type="sldImg" idx="2"/>
-          </p:nvPr>
-        </p:nvSpPr>
-        <p:spPr/>
-      </p:sp>
-      <p:sp>
-        <p:nvSpPr>
-          <p:cNvPr id="3" name="Notes Placeholder 2"/>
-          <p:cNvSpPr>
-            <a:spLocks noGrp="1"/>
-          </p:cNvSpPr>
-          <p:nvPr>
-            <p:ph type="body" idx="3" sz="quarter"/>
-          </p:nvPr>
-        </p:nvSpPr>
-        <p:spPr/>
-        <p:txBody>
-          <a:bodyPr/>
-          <a:lstStyle/>
-          <a:p>
-            <a:r>
-              <a:t>TEXTO COMPLETO DE LA LÁMINA (se proyecta resumido):</a:t>
-            </a:r>
-          </a:p>
-          <a:p/>
-          <a:p>
-            <a:r>
-              <a:t>Herramienta: Visual Studio Code (Java)</a:t>
-            </a:r>
-          </a:p>
-          <a:p/>
-          <a:p>
-            <a:r>
-              <a:t>Demo: El docente muestra un Mascota[3] que revienta al intentar guardar la cuarta ficha y luego el mismo caso resuelto con ArrayList, imprimiendo size() despues de cada operacion.</a:t>
-            </a:r>
-          </a:p>
-          <a:p/>
-          <a:p>
-            <a:r>
-              <a:t>Mismo dominio de la clinica — no otro ejemplo.</a:t>
             </a:r>
           </a:p>
         </p:txBody>
@@ -10618,83 +10530,14 @@
       </p:sp>
       <p:sp>
         <p:nvSpPr>
-          <p:cNvPr id="5" name="Rounded Rectangle 4"/>
-          <p:cNvSpPr/>
-          <p:nvPr/>
-        </p:nvSpPr>
-        <p:spPr>
-          <a:xfrm>
-            <a:off x="5797149" y="1573813"/>
-            <a:ext cx="6010497" cy="4057845"/>
-          </a:xfrm>
-          <a:prstGeom prst="roundRect">
-            <a:avLst>
-              <a:gd name="adj" fmla="val 4000"/>
-            </a:avLst>
-          </a:prstGeom>
-          <a:solidFill>
-            <a:srgbClr val="E8EEF4"/>
-          </a:solidFill>
-          <a:ln>
-            <a:noFill/>
-          </a:ln>
-        </p:spPr>
-        <p:style>
-          <a:lnRef idx="1">
-            <a:schemeClr val="accent1"/>
-          </a:lnRef>
-          <a:fillRef idx="3">
-            <a:schemeClr val="accent1"/>
-          </a:fillRef>
-          <a:effectRef idx="2">
-            <a:schemeClr val="accent1"/>
-          </a:effectRef>
-          <a:fontRef idx="minor">
-            <a:schemeClr val="lt1"/>
-          </a:fontRef>
-        </p:style>
-        <p:txBody>
-          <a:bodyPr rtlCol="0" anchor="ctr"/>
-          <a:lstStyle/>
-          <a:p>
-            <a:pPr algn="ctr"/>
-          </a:p>
-        </p:txBody>
-      </p:sp>
-      <p:pic>
-        <p:nvPicPr>
-          <p:cNvPr id="6" name="Picture 5" descr="laptop-code-live-demo.jpg"/>
-          <p:cNvPicPr>
-            <a:picLocks noChangeAspect="1"/>
-          </p:cNvPicPr>
-          <p:nvPr/>
-        </p:nvPicPr>
-        <p:blipFill>
-          <a:blip r:embed="rId2"/>
-          <a:stretch>
-            <a:fillRect/>
-          </a:stretch>
-        </p:blipFill>
-        <p:spPr>
-          <a:xfrm>
-            <a:off x="5870301" y="1646965"/>
-            <a:ext cx="5864193" cy="3911541"/>
-          </a:xfrm>
-          <a:prstGeom prst="rect">
-            <a:avLst/>
-          </a:prstGeom>
-        </p:spPr>
-      </p:pic>
-      <p:sp>
-        <p:nvSpPr>
-          <p:cNvPr id="7" name="TextBox 6"/>
+          <p:cNvPr id="5" name="TextBox 4"/>
           <p:cNvSpPr txBox="1"/>
           <p:nvPr/>
         </p:nvSpPr>
         <p:spPr>
           <a:xfrm>
-            <a:off x="5870301" y="5961888"/>
-            <a:ext cx="5864193" cy="320040"/>
+            <a:off x="457200" y="1170432"/>
+            <a:ext cx="11277295" cy="5230368"/>
           </a:xfrm>
           <a:prstGeom prst="rect">
             <a:avLst/>
@@ -10707,40 +10550,39 @@
           </a:bodyPr>
           <a:lstStyle/>
           <a:p>
-            <a:pPr algn="ctr"/>
-            <a:r>
-              <a:rPr sz="1100" b="0" i="1">
-                <a:solidFill>
-                  <a:srgbClr val="666666"/>
+            <a:pPr>
+              <a:spcAft>
+                <a:spcPts val="800"/>
+              </a:spcAft>
+            </a:pPr>
+            <a:r>
+              <a:rPr sz="2000" b="0" i="0">
+                <a:solidFill>
+                  <a:srgbClr val="333333"/>
                 </a:solidFill>
                 <a:latin typeface="Calibri"/>
               </a:rPr>
-              <a:t>Foto: olia danilevich · Pexels</a:t>
-            </a:r>
-          </a:p>
-        </p:txBody>
-      </p:sp>
-      <p:sp>
-        <p:nvSpPr>
-          <p:cNvPr id="8" name="TextBox 7"/>
-          <p:cNvSpPr txBox="1"/>
-          <p:nvPr/>
-        </p:nvSpPr>
-        <p:spPr>
-          <a:xfrm>
-            <a:off x="457200" y="1353312"/>
-            <a:ext cx="5093061" cy="5047488"/>
-          </a:xfrm>
-          <a:prstGeom prst="rect">
-            <a:avLst/>
-          </a:prstGeom>
-          <a:noFill/>
-        </p:spPr>
-        <p:txBody>
-          <a:bodyPr wrap="square">
-            <a:spAutoFit/>
-          </a:bodyPr>
-          <a:lstStyle/>
+              <a:t>–   </a:t>
+            </a:r>
+            <a:r>
+              <a:rPr sz="2000" b="1" i="0">
+                <a:solidFill>
+                  <a:srgbClr val="333333"/>
+                </a:solidFill>
+                <a:latin typeface="Calibri"/>
+              </a:rPr>
+              <a:t>Herramienta:</a:t>
+            </a:r>
+            <a:r>
+              <a:rPr sz="2000" b="0" i="0">
+                <a:solidFill>
+                  <a:srgbClr val="333333"/>
+                </a:solidFill>
+                <a:latin typeface="Calibri"/>
+              </a:rPr>
+              <a:t> Visual Studio Code (Java)</a:t>
+            </a:r>
+          </a:p>
           <a:p>
             <a:pPr>
               <a:spcAft>
@@ -10763,7 +10605,7 @@
                 </a:solidFill>
                 <a:latin typeface="Calibri"/>
               </a:rPr>
-              <a:t>Herramienta:</a:t>
+              <a:t>Demo:</a:t>
             </a:r>
             <a:r>
               <a:rPr sz="2000" b="0" i="0">
@@ -10772,7 +10614,7 @@
                 </a:solidFill>
                 <a:latin typeface="Calibri"/>
               </a:rPr>
-              <a:t> Visual Studio Code (Java)</a:t>
+              <a:t> El docente muestra un Mascota[3] que revienta al intentar guardar la cuarta ficha y luego el mismo caso resuelto con ArrayList, imprimiendo size() despues de cada operacion.</a:t>
             </a:r>
           </a:p>
           <a:p>
@@ -10788,31 +10630,6 @@
                 </a:solidFill>
                 <a:latin typeface="Calibri"/>
               </a:rPr>
-              <a:t>–   </a:t>
-            </a:r>
-            <a:r>
-              <a:rPr sz="2000" b="1" i="0">
-                <a:solidFill>
-                  <a:srgbClr val="333333"/>
-                </a:solidFill>
-                <a:latin typeface="Calibri"/>
-              </a:rPr>
-              <a:t>Demo:</a:t>
-            </a:r>
-          </a:p>
-          <a:p>
-            <a:pPr>
-              <a:spcAft>
-                <a:spcPts val="800"/>
-              </a:spcAft>
-            </a:pPr>
-            <a:r>
-              <a:rPr sz="2000" b="0" i="0">
-                <a:solidFill>
-                  <a:srgbClr val="333333"/>
-                </a:solidFill>
-                <a:latin typeface="Calibri"/>
-              </a:rPr>
               <a:t>–   Mismo dominio de la clinica — no otro ejemplo.</a:t>
             </a:r>
           </a:p>
@@ -10820,7 +10637,7 @@
       </p:sp>
       <p:sp>
         <p:nvSpPr>
-          <p:cNvPr id="9" name="TextBox 8"/>
+          <p:cNvPr id="6" name="TextBox 5"/>
           <p:cNvSpPr txBox="1"/>
           <p:nvPr/>
         </p:nvSpPr>
@@ -11233,83 +11050,14 @@
       </p:sp>
       <p:sp>
         <p:nvSpPr>
-          <p:cNvPr id="5" name="Rounded Rectangle 4"/>
-          <p:cNvSpPr/>
-          <p:nvPr/>
-        </p:nvSpPr>
-        <p:spPr>
-          <a:xfrm>
-            <a:off x="5797149" y="1573813"/>
-            <a:ext cx="6010497" cy="4057845"/>
-          </a:xfrm>
-          <a:prstGeom prst="roundRect">
-            <a:avLst>
-              <a:gd name="adj" fmla="val 4000"/>
-            </a:avLst>
-          </a:prstGeom>
-          <a:solidFill>
-            <a:srgbClr val="E8EEF4"/>
-          </a:solidFill>
-          <a:ln>
-            <a:noFill/>
-          </a:ln>
-        </p:spPr>
-        <p:style>
-          <a:lnRef idx="1">
-            <a:schemeClr val="accent1"/>
-          </a:lnRef>
-          <a:fillRef idx="3">
-            <a:schemeClr val="accent1"/>
-          </a:fillRef>
-          <a:effectRef idx="2">
-            <a:schemeClr val="accent1"/>
-          </a:effectRef>
-          <a:fontRef idx="minor">
-            <a:schemeClr val="lt1"/>
-          </a:fontRef>
-        </p:style>
-        <p:txBody>
-          <a:bodyPr rtlCol="0" anchor="ctr"/>
-          <a:lstStyle/>
-          <a:p>
-            <a:pPr algn="ctr"/>
-          </a:p>
-        </p:txBody>
-      </p:sp>
-      <p:pic>
-        <p:nvPicPr>
-          <p:cNvPr id="6" name="Picture 5" descr="notebook-planning-desk-coffee.jpg"/>
-          <p:cNvPicPr>
-            <a:picLocks noChangeAspect="1"/>
-          </p:cNvPicPr>
-          <p:nvPr/>
-        </p:nvPicPr>
-        <p:blipFill>
-          <a:blip r:embed="rId2"/>
-          <a:stretch>
-            <a:fillRect/>
-          </a:stretch>
-        </p:blipFill>
-        <p:spPr>
-          <a:xfrm>
-            <a:off x="5870301" y="1646965"/>
-            <a:ext cx="5864193" cy="3911541"/>
-          </a:xfrm>
-          <a:prstGeom prst="rect">
-            <a:avLst/>
-          </a:prstGeom>
-        </p:spPr>
-      </p:pic>
-      <p:sp>
-        <p:nvSpPr>
-          <p:cNvPr id="7" name="TextBox 6"/>
+          <p:cNvPr id="5" name="TextBox 4"/>
           <p:cNvSpPr txBox="1"/>
           <p:nvPr/>
         </p:nvSpPr>
         <p:spPr>
           <a:xfrm>
-            <a:off x="5870301" y="5961888"/>
-            <a:ext cx="5864193" cy="320040"/>
+            <a:off x="457200" y="1170432"/>
+            <a:ext cx="11277295" cy="5230368"/>
           </a:xfrm>
           <a:prstGeom prst="rect">
             <a:avLst/>
@@ -11322,40 +11070,39 @@
           </a:bodyPr>
           <a:lstStyle/>
           <a:p>
-            <a:pPr algn="ctr"/>
-            <a:r>
-              <a:rPr sz="1100" b="0" i="1">
-                <a:solidFill>
-                  <a:srgbClr val="666666"/>
+            <a:pPr>
+              <a:spcAft>
+                <a:spcPts val="800"/>
+              </a:spcAft>
+            </a:pPr>
+            <a:r>
+              <a:rPr sz="2000" b="0" i="0">
+                <a:solidFill>
+                  <a:srgbClr val="333333"/>
                 </a:solidFill>
                 <a:latin typeface="Calibri"/>
               </a:rPr>
-              <a:t>Foto: Cup of  Couple · Pexels</a:t>
-            </a:r>
-          </a:p>
-        </p:txBody>
-      </p:sp>
-      <p:sp>
-        <p:nvSpPr>
-          <p:cNvPr id="8" name="TextBox 7"/>
-          <p:cNvSpPr txBox="1"/>
-          <p:nvPr/>
-        </p:nvSpPr>
-        <p:spPr>
-          <a:xfrm>
-            <a:off x="457200" y="1353312"/>
-            <a:ext cx="5093061" cy="5047488"/>
-          </a:xfrm>
-          <a:prstGeom prst="rect">
-            <a:avLst/>
-          </a:prstGeom>
-          <a:noFill/>
-        </p:spPr>
-        <p:txBody>
-          <a:bodyPr wrap="square">
-            <a:spAutoFit/>
-          </a:bodyPr>
-          <a:lstStyle/>
+              <a:t>–   </a:t>
+            </a:r>
+            <a:r>
+              <a:rPr sz="2000" b="1" i="0">
+                <a:solidFill>
+                  <a:srgbClr val="333333"/>
+                </a:solidFill>
+                <a:latin typeface="Calibri"/>
+              </a:rPr>
+              <a:t>Tema de hoy:</a:t>
+            </a:r>
+            <a:r>
+              <a:rPr sz="2000" b="0" i="0">
+                <a:solidFill>
+                  <a:srgbClr val="333333"/>
+                </a:solidFill>
+                <a:latin typeface="Calibri"/>
+              </a:rPr>
+              <a:t> Colecciones dinamicas · ArrayList — De arreglos fijos a listas que crecen</a:t>
+            </a:r>
+          </a:p>
           <a:p>
             <a:pPr>
               <a:spcAft>
@@ -11369,7 +11116,7 @@
                 </a:solidFill>
                 <a:latin typeface="Calibri"/>
               </a:rPr>
-              <a:t>–   </a:t>
+              <a:t>–   Herramienta: </a:t>
             </a:r>
             <a:r>
               <a:rPr sz="2000" b="1" i="0">
@@ -11378,7 +11125,7 @@
                 </a:solidFill>
                 <a:latin typeface="Calibri"/>
               </a:rPr>
-              <a:t>Tema de hoy:</a:t>
+              <a:t>Visual Studio Code (Java)</a:t>
             </a:r>
             <a:r>
               <a:rPr sz="2000" b="0" i="0">
@@ -11387,7 +11134,16 @@
                 </a:solidFill>
                 <a:latin typeface="Calibri"/>
               </a:rPr>
-              <a:t> Colecciones dinamicas · ArrayList — De arreglos fijos a listas que crecen</a:t>
+              <a:t> · Bloque </a:t>
+            </a:r>
+            <a:r>
+              <a:rPr sz="2000" b="1" i="0">
+                <a:solidFill>
+                  <a:srgbClr val="333333"/>
+                </a:solidFill>
+                <a:latin typeface="Calibri"/>
+              </a:rPr>
+              <a:t>120 min</a:t>
             </a:r>
           </a:p>
           <a:p>
@@ -11403,65 +11159,22 @@
                 </a:solidFill>
                 <a:latin typeface="Calibri"/>
               </a:rPr>
-              <a:t>–   Herramienta: </a:t>
-            </a:r>
-            <a:r>
-              <a:rPr sz="2000" b="1" i="0">
+              <a:t>–   Primero el concepto, despues el codigo que lo muestra y la demo en vivo.</a:t>
+            </a:r>
+          </a:p>
+          <a:p>
+            <a:pPr>
+              <a:spcAft>
+                <a:spcPts val="800"/>
+              </a:spcAft>
+            </a:pPr>
+            <a:r>
+              <a:rPr sz="2000" b="0" i="0">
                 <a:solidFill>
                   <a:srgbClr val="333333"/>
                 </a:solidFill>
                 <a:latin typeface="Calibri"/>
               </a:rPr>
-              <a:t>Visual Studio Code (Java)</a:t>
-            </a:r>
-            <a:r>
-              <a:rPr sz="2000" b="0" i="0">
-                <a:solidFill>
-                  <a:srgbClr val="333333"/>
-                </a:solidFill>
-                <a:latin typeface="Calibri"/>
-              </a:rPr>
-              <a:t> · Bloque </a:t>
-            </a:r>
-            <a:r>
-              <a:rPr sz="2000" b="1" i="0">
-                <a:solidFill>
-                  <a:srgbClr val="333333"/>
-                </a:solidFill>
-                <a:latin typeface="Calibri"/>
-              </a:rPr>
-              <a:t>120 min</a:t>
-            </a:r>
-          </a:p>
-          <a:p>
-            <a:pPr>
-              <a:spcAft>
-                <a:spcPts val="800"/>
-              </a:spcAft>
-            </a:pPr>
-            <a:r>
-              <a:rPr sz="2000" b="0" i="0">
-                <a:solidFill>
-                  <a:srgbClr val="333333"/>
-                </a:solidFill>
-                <a:latin typeface="Calibri"/>
-              </a:rPr>
-              <a:t>–   Primero el concepto, despues el codigo que lo muestra y la demo en vivo.</a:t>
-            </a:r>
-          </a:p>
-          <a:p>
-            <a:pPr>
-              <a:spcAft>
-                <a:spcPts val="800"/>
-              </a:spcAft>
-            </a:pPr>
-            <a:r>
-              <a:rPr sz="2000" b="0" i="0">
-                <a:solidFill>
-                  <a:srgbClr val="333333"/>
-                </a:solidFill>
-                <a:latin typeface="Calibri"/>
-              </a:rPr>
               <a:t>–   Todo con el mismo dominio: una clinica veterinaria.</a:t>
             </a:r>
           </a:p>
@@ -11469,7 +11182,7 @@
       </p:sp>
       <p:sp>
         <p:nvSpPr>
-          <p:cNvPr id="9" name="TextBox 8"/>
+          <p:cNvPr id="6" name="TextBox 5"/>
           <p:cNvSpPr txBox="1"/>
           <p:nvPr/>
         </p:nvSpPr>
@@ -15561,83 +15274,14 @@
       </p:sp>
       <p:sp>
         <p:nvSpPr>
-          <p:cNvPr id="5" name="Rounded Rectangle 4"/>
-          <p:cNvSpPr/>
-          <p:nvPr/>
-        </p:nvSpPr>
-        <p:spPr>
-          <a:xfrm>
-            <a:off x="5797149" y="1879499"/>
-            <a:ext cx="6010497" cy="3446472"/>
-          </a:xfrm>
-          <a:prstGeom prst="roundRect">
-            <a:avLst>
-              <a:gd name="adj" fmla="val 4000"/>
-            </a:avLst>
-          </a:prstGeom>
-          <a:solidFill>
-            <a:srgbClr val="E8EEF4"/>
-          </a:solidFill>
-          <a:ln>
-            <a:noFill/>
-          </a:ln>
-        </p:spPr>
-        <p:style>
-          <a:lnRef idx="1">
-            <a:schemeClr val="accent1"/>
-          </a:lnRef>
-          <a:fillRef idx="3">
-            <a:schemeClr val="accent1"/>
-          </a:fillRef>
-          <a:effectRef idx="2">
-            <a:schemeClr val="accent1"/>
-          </a:effectRef>
-          <a:fontRef idx="minor">
-            <a:schemeClr val="lt1"/>
-          </a:fontRef>
-        </p:style>
-        <p:txBody>
-          <a:bodyPr rtlCol="0" anchor="ctr"/>
-          <a:lstStyle/>
-          <a:p>
-            <a:pPr algn="ctr"/>
-          </a:p>
-        </p:txBody>
-      </p:sp>
-      <p:pic>
-        <p:nvPicPr>
-          <p:cNvPr id="6" name="Picture 5" descr="list-notebook-checklist.jpg"/>
-          <p:cNvPicPr>
-            <a:picLocks noChangeAspect="1"/>
-          </p:cNvPicPr>
-          <p:nvPr/>
-        </p:nvPicPr>
-        <p:blipFill>
-          <a:blip r:embed="rId2"/>
-          <a:stretch>
-            <a:fillRect/>
-          </a:stretch>
-        </p:blipFill>
-        <p:spPr>
-          <a:xfrm>
-            <a:off x="5870301" y="1952651"/>
-            <a:ext cx="5864193" cy="3300168"/>
-          </a:xfrm>
-          <a:prstGeom prst="rect">
-            <a:avLst/>
-          </a:prstGeom>
-        </p:spPr>
-      </p:pic>
-      <p:sp>
-        <p:nvSpPr>
-          <p:cNvPr id="7" name="TextBox 6"/>
+          <p:cNvPr id="5" name="TextBox 4"/>
           <p:cNvSpPr txBox="1"/>
           <p:nvPr/>
         </p:nvSpPr>
         <p:spPr>
           <a:xfrm>
-            <a:off x="5870301" y="5961888"/>
-            <a:ext cx="5864193" cy="320040"/>
+            <a:off x="457200" y="1170432"/>
+            <a:ext cx="11277295" cy="5230368"/>
           </a:xfrm>
           <a:prstGeom prst="rect">
             <a:avLst/>
@@ -15650,40 +15294,21 @@
           </a:bodyPr>
           <a:lstStyle/>
           <a:p>
-            <a:pPr algn="ctr"/>
-            <a:r>
-              <a:rPr sz="1100" b="0" i="1">
-                <a:solidFill>
-                  <a:srgbClr val="666666"/>
+            <a:pPr>
+              <a:spcAft>
+                <a:spcPts val="800"/>
+              </a:spcAft>
+            </a:pPr>
+            <a:r>
+              <a:rPr sz="2000" b="0" i="0">
+                <a:solidFill>
+                  <a:srgbClr val="333333"/>
                 </a:solidFill>
                 <a:latin typeface="Calibri"/>
               </a:rPr>
-              <a:t>Foto: Jakub Zerdzicki · Pexels</a:t>
-            </a:r>
-          </a:p>
-        </p:txBody>
-      </p:sp>
-      <p:sp>
-        <p:nvSpPr>
-          <p:cNvPr id="8" name="TextBox 7"/>
-          <p:cNvSpPr txBox="1"/>
-          <p:nvPr/>
-        </p:nvSpPr>
-        <p:spPr>
-          <a:xfrm>
-            <a:off x="457200" y="1353312"/>
-            <a:ext cx="5093061" cy="5047488"/>
-          </a:xfrm>
-          <a:prstGeom prst="rect">
-            <a:avLst/>
-          </a:prstGeom>
-          <a:noFill/>
-        </p:spPr>
-        <p:txBody>
-          <a:bodyPr wrap="square">
-            <a:spAutoFit/>
-          </a:bodyPr>
-          <a:lstStyle/>
+              <a:t>–   List&lt;Mascota&gt; mascotas = new ArrayList&lt;&gt;(); a la izquierda el contrato, a la derecha la clase.</a:t>
+            </a:r>
+          </a:p>
           <a:p>
             <a:pPr>
               <a:spcAft>
@@ -15697,7 +15322,7 @@
                 </a:solidFill>
                 <a:latin typeface="Calibri"/>
               </a:rPr>
-              <a:t>–   List&lt;Mascota&gt; mascotas = new ArrayList&lt;&gt;(); a la izquierda el contrato, a la derecha la clase.</a:t>
+              <a:t>–   add, get, size, remove, set, isEmpty, contains, indexOf: la API de toda la clase.</a:t>
             </a:r>
           </a:p>
           <a:p>
@@ -15713,7 +15338,7 @@
                 </a:solidFill>
                 <a:latin typeface="Calibri"/>
               </a:rPr>
-              <a:t>–   add, get, size, remove, set, isEmpty, contains, indexOf: la API de toda la clase.</a:t>
+              <a:t>–   &lt;Mascota&gt; es el genérico: si entra un String, el error aparece al compilar.</a:t>
             </a:r>
           </a:p>
           <a:p>
@@ -15729,22 +15354,6 @@
                 </a:solidFill>
                 <a:latin typeface="Calibri"/>
               </a:rPr>
-              <a:t>–   &lt;Mascota&gt; es el genérico: si entra un String, el error aparece al compilar.</a:t>
-            </a:r>
-          </a:p>
-          <a:p>
-            <a:pPr>
-              <a:spcAft>
-                <a:spcPts val="800"/>
-              </a:spcAft>
-            </a:pPr>
-            <a:r>
-              <a:rPr sz="2000" b="0" i="0">
-                <a:solidFill>
-                  <a:srgbClr val="333333"/>
-                </a:solidFill>
-                <a:latin typeface="Calibri"/>
-              </a:rPr>
               <a:t>–   contains e indexOf usan equals: sin sobrescribirlo, se busca por id recorriendo.</a:t>
             </a:r>
           </a:p>
@@ -15752,7 +15361,7 @@
       </p:sp>
       <p:sp>
         <p:nvSpPr>
-          <p:cNvPr id="9" name="TextBox 8"/>
+          <p:cNvPr id="6" name="TextBox 5"/>
           <p:cNvSpPr txBox="1"/>
           <p:nvPr/>
         </p:nvSpPr>

--- a/Programacion II/Clases/Clase 2 - Colecciones dinamicas ArrayList/Presentacion.pptx
+++ b/Programacion II/Clases/Clase 2 - Colecciones dinamicas ArrayList/Presentacion.pptx
@@ -4454,7 +4454,7 @@
         <p:spPr>
           <a:xfrm>
             <a:off x="457200" y="1261872"/>
-            <a:ext cx="11277295" cy="4220725"/>
+            <a:ext cx="11277295" cy="4065696"/>
           </a:xfrm>
           <a:prstGeom prst="roundRect">
             <a:avLst>
@@ -4704,7 +4704,7 @@
         <p:spPr>
           <a:xfrm>
             <a:off x="685800" y="1719072"/>
-            <a:ext cx="502920" cy="3626365"/>
+            <a:ext cx="502920" cy="3471336"/>
           </a:xfrm>
           <a:prstGeom prst="rect">
             <a:avLst/>
@@ -4719,11 +4719,11 @@
           <a:p>
             <a:pPr algn="r">
               <a:spcAft>
-                <a:spcPts val="428"/>
-              </a:spcAft>
-            </a:pPr>
-            <a:r>
-              <a:rPr sz="2000" i="0" b="0">
+                <a:spcPts val="407"/>
+              </a:spcAft>
+            </a:pPr>
+            <a:r>
+              <a:rPr sz="1900" i="0" b="0">
                 <a:solidFill>
                   <a:srgbClr val="858585"/>
                 </a:solidFill>
@@ -4735,11 +4735,11 @@
           <a:p>
             <a:pPr algn="r">
               <a:spcAft>
-                <a:spcPts val="428"/>
-              </a:spcAft>
-            </a:pPr>
-            <a:r>
-              <a:rPr sz="2000" i="0" b="0">
+                <a:spcPts val="407"/>
+              </a:spcAft>
+            </a:pPr>
+            <a:r>
+              <a:rPr sz="1900" i="0" b="0">
                 <a:solidFill>
                   <a:srgbClr val="858585"/>
                 </a:solidFill>
@@ -4751,11 +4751,11 @@
           <a:p>
             <a:pPr algn="r">
               <a:spcAft>
-                <a:spcPts val="428"/>
-              </a:spcAft>
-            </a:pPr>
-            <a:r>
-              <a:rPr sz="2000" i="0" b="0">
+                <a:spcPts val="407"/>
+              </a:spcAft>
+            </a:pPr>
+            <a:r>
+              <a:rPr sz="1900" i="0" b="0">
                 <a:solidFill>
                   <a:srgbClr val="858585"/>
                 </a:solidFill>
@@ -4767,11 +4767,11 @@
           <a:p>
             <a:pPr algn="r">
               <a:spcAft>
-                <a:spcPts val="428"/>
-              </a:spcAft>
-            </a:pPr>
-            <a:r>
-              <a:rPr sz="2000" i="0" b="0">
+                <a:spcPts val="407"/>
+              </a:spcAft>
+            </a:pPr>
+            <a:r>
+              <a:rPr sz="1900" i="0" b="0">
                 <a:solidFill>
                   <a:srgbClr val="858585"/>
                 </a:solidFill>
@@ -4783,11 +4783,11 @@
           <a:p>
             <a:pPr algn="r">
               <a:spcAft>
-                <a:spcPts val="428"/>
-              </a:spcAft>
-            </a:pPr>
-            <a:r>
-              <a:rPr sz="2000" i="0" b="0">
+                <a:spcPts val="407"/>
+              </a:spcAft>
+            </a:pPr>
+            <a:r>
+              <a:rPr sz="1900" i="0" b="0">
                 <a:solidFill>
                   <a:srgbClr val="858585"/>
                 </a:solidFill>
@@ -4799,11 +4799,11 @@
           <a:p>
             <a:pPr algn="r">
               <a:spcAft>
-                <a:spcPts val="428"/>
-              </a:spcAft>
-            </a:pPr>
-            <a:r>
-              <a:rPr sz="2000" i="0" b="0">
+                <a:spcPts val="407"/>
+              </a:spcAft>
+            </a:pPr>
+            <a:r>
+              <a:rPr sz="1900" i="0" b="0">
                 <a:solidFill>
                   <a:srgbClr val="858585"/>
                 </a:solidFill>
@@ -4815,11 +4815,11 @@
           <a:p>
             <a:pPr algn="r">
               <a:spcAft>
-                <a:spcPts val="428"/>
-              </a:spcAft>
-            </a:pPr>
-            <a:r>
-              <a:rPr sz="2000" i="0" b="0">
+                <a:spcPts val="407"/>
+              </a:spcAft>
+            </a:pPr>
+            <a:r>
+              <a:rPr sz="1900" i="0" b="0">
                 <a:solidFill>
                   <a:srgbClr val="858585"/>
                 </a:solidFill>
@@ -4831,11 +4831,11 @@
           <a:p>
             <a:pPr algn="r">
               <a:spcAft>
-                <a:spcPts val="428"/>
-              </a:spcAft>
-            </a:pPr>
-            <a:r>
-              <a:rPr sz="2000" i="0" b="0">
+                <a:spcPts val="407"/>
+              </a:spcAft>
+            </a:pPr>
+            <a:r>
+              <a:rPr sz="1900" i="0" b="0">
                 <a:solidFill>
                   <a:srgbClr val="858585"/>
                 </a:solidFill>
@@ -4847,11 +4847,11 @@
           <a:p>
             <a:pPr algn="r">
               <a:spcAft>
-                <a:spcPts val="428"/>
-              </a:spcAft>
-            </a:pPr>
-            <a:r>
-              <a:rPr sz="2000" i="0" b="0">
+                <a:spcPts val="407"/>
+              </a:spcAft>
+            </a:pPr>
+            <a:r>
+              <a:rPr sz="1900" i="0" b="0">
                 <a:solidFill>
                   <a:srgbClr val="858585"/>
                 </a:solidFill>
@@ -4863,11 +4863,11 @@
           <a:p>
             <a:pPr algn="r">
               <a:spcAft>
-                <a:spcPts val="428"/>
-              </a:spcAft>
-            </a:pPr>
-            <a:r>
-              <a:rPr sz="2000" i="0" b="0">
+                <a:spcPts val="407"/>
+              </a:spcAft>
+            </a:pPr>
+            <a:r>
+              <a:rPr sz="1900" i="0" b="0">
                 <a:solidFill>
                   <a:srgbClr val="858585"/>
                 </a:solidFill>
@@ -4887,7 +4887,7 @@
         <p:spPr>
           <a:xfrm>
             <a:off x="1188720" y="1719072"/>
-            <a:ext cx="10271455" cy="3626365"/>
+            <a:ext cx="10271455" cy="3471336"/>
           </a:xfrm>
           <a:prstGeom prst="rect">
             <a:avLst/>
@@ -4902,11 +4902,11 @@
           <a:p>
             <a:pPr>
               <a:spcAft>
-                <a:spcPts val="428"/>
-              </a:spcAft>
-            </a:pPr>
-            <a:r>
-              <a:rPr sz="2000" i="0" b="0">
+                <a:spcPts val="407"/>
+              </a:spcAft>
+            </a:pPr>
+            <a:r>
+              <a:rPr sz="1900" i="0" b="0">
                 <a:solidFill>
                   <a:srgbClr val="569CD6"/>
                 </a:solidFill>
@@ -4915,7 +4915,7 @@
               <a:t>public</a:t>
             </a:r>
             <a:r>
-              <a:rPr sz="2000" i="0" b="0">
+              <a:rPr sz="1900" i="0" b="0">
                 <a:solidFill>
                   <a:srgbClr val="D4D4D4"/>
                 </a:solidFill>
@@ -4924,7 +4924,7 @@
               <a:t> </a:t>
             </a:r>
             <a:r>
-              <a:rPr sz="2000" i="0" b="0">
+              <a:rPr sz="1900" i="0" b="0">
                 <a:solidFill>
                   <a:srgbClr val="4EC9B0"/>
                 </a:solidFill>
@@ -4933,7 +4933,7 @@
               <a:t>boolean</a:t>
             </a:r>
             <a:r>
-              <a:rPr sz="2000" i="0" b="0">
+              <a:rPr sz="1900" i="0" b="0">
                 <a:solidFill>
                   <a:srgbClr val="D4D4D4"/>
                 </a:solidFill>
@@ -4942,7 +4942,7 @@
               <a:t> </a:t>
             </a:r>
             <a:r>
-              <a:rPr sz="2000" i="0" b="0">
+              <a:rPr sz="1900" i="0" b="0">
                 <a:solidFill>
                   <a:srgbClr val="DCDCAA"/>
                 </a:solidFill>
@@ -4951,7 +4951,7 @@
               <a:t>eliminarPorId</a:t>
             </a:r>
             <a:r>
-              <a:rPr sz="2000" i="0" b="0">
+              <a:rPr sz="1900" i="0" b="0">
                 <a:solidFill>
                   <a:srgbClr val="D4D4D4"/>
                 </a:solidFill>
@@ -4960,7 +4960,7 @@
               <a:t>(</a:t>
             </a:r>
             <a:r>
-              <a:rPr sz="2000" i="0" b="0">
+              <a:rPr sz="1900" i="0" b="0">
                 <a:solidFill>
                   <a:srgbClr val="4EC9B0"/>
                 </a:solidFill>
@@ -4969,7 +4969,7 @@
               <a:t>String</a:t>
             </a:r>
             <a:r>
-              <a:rPr sz="2000" i="0" b="0">
+              <a:rPr sz="1900" i="0" b="0">
                 <a:solidFill>
                   <a:srgbClr val="D4D4D4"/>
                 </a:solidFill>
@@ -4978,7 +4978,7 @@
               <a:t> </a:t>
             </a:r>
             <a:r>
-              <a:rPr sz="2000" i="0" b="0">
+              <a:rPr sz="1900" i="0" b="0">
                 <a:solidFill>
                   <a:srgbClr val="D4D4D4"/>
                 </a:solidFill>
@@ -4987,7 +4987,7 @@
               <a:t>id</a:t>
             </a:r>
             <a:r>
-              <a:rPr sz="2000" i="0" b="0">
+              <a:rPr sz="1900" i="0" b="0">
                 <a:solidFill>
                   <a:srgbClr val="D4D4D4"/>
                 </a:solidFill>
@@ -4999,11 +4999,11 @@
           <a:p>
             <a:pPr>
               <a:spcAft>
-                <a:spcPts val="428"/>
-              </a:spcAft>
-            </a:pPr>
-            <a:r>
-              <a:rPr sz="2000" i="0" b="0">
+                <a:spcPts val="407"/>
+              </a:spcAft>
+            </a:pPr>
+            <a:r>
+              <a:rPr sz="1900" i="0" b="0">
                 <a:solidFill>
                   <a:srgbClr val="D4D4D4"/>
                 </a:solidFill>
@@ -5012,7 +5012,7 @@
               <a:t>    </a:t>
             </a:r>
             <a:r>
-              <a:rPr sz="2000" i="0" b="0">
+              <a:rPr sz="1900" i="0" b="0">
                 <a:solidFill>
                   <a:srgbClr val="D4D4D4"/>
                 </a:solidFill>
@@ -5021,7 +5021,7 @@
               <a:t>Mascota</a:t>
             </a:r>
             <a:r>
-              <a:rPr sz="2000" i="0" b="0">
+              <a:rPr sz="1900" i="0" b="0">
                 <a:solidFill>
                   <a:srgbClr val="D4D4D4"/>
                 </a:solidFill>
@@ -5030,7 +5030,7 @@
               <a:t> </a:t>
             </a:r>
             <a:r>
-              <a:rPr sz="2000" i="0" b="0">
+              <a:rPr sz="1900" i="0" b="0">
                 <a:solidFill>
                   <a:srgbClr val="D4D4D4"/>
                 </a:solidFill>
@@ -5039,7 +5039,7 @@
               <a:t>m</a:t>
             </a:r>
             <a:r>
-              <a:rPr sz="2000" i="0" b="0">
+              <a:rPr sz="1900" i="0" b="0">
                 <a:solidFill>
                   <a:srgbClr val="D4D4D4"/>
                 </a:solidFill>
@@ -5048,7 +5048,7 @@
               <a:t> = </a:t>
             </a:r>
             <a:r>
-              <a:rPr sz="2000" i="0" b="0">
+              <a:rPr sz="1900" i="0" b="0">
                 <a:solidFill>
                   <a:srgbClr val="DCDCAA"/>
                 </a:solidFill>
@@ -5057,7 +5057,7 @@
               <a:t>buscarPorId</a:t>
             </a:r>
             <a:r>
-              <a:rPr sz="2000" i="0" b="0">
+              <a:rPr sz="1900" i="0" b="0">
                 <a:solidFill>
                   <a:srgbClr val="D4D4D4"/>
                 </a:solidFill>
@@ -5066,7 +5066,7 @@
               <a:t>(</a:t>
             </a:r>
             <a:r>
-              <a:rPr sz="2000" i="0" b="0">
+              <a:rPr sz="1900" i="0" b="0">
                 <a:solidFill>
                   <a:srgbClr val="D4D4D4"/>
                 </a:solidFill>
@@ -5075,7 +5075,7 @@
               <a:t>id</a:t>
             </a:r>
             <a:r>
-              <a:rPr sz="2000" i="0" b="0">
+              <a:rPr sz="1900" i="0" b="0">
                 <a:solidFill>
                   <a:srgbClr val="D4D4D4"/>
                 </a:solidFill>
@@ -5087,11 +5087,11 @@
           <a:p>
             <a:pPr>
               <a:spcAft>
-                <a:spcPts val="428"/>
-              </a:spcAft>
-            </a:pPr>
-            <a:r>
-              <a:rPr sz="2000" i="0" b="0">
+                <a:spcPts val="407"/>
+              </a:spcAft>
+            </a:pPr>
+            <a:r>
+              <a:rPr sz="1900" i="0" b="0">
                 <a:solidFill>
                   <a:srgbClr val="D4D4D4"/>
                 </a:solidFill>
@@ -5100,7 +5100,7 @@
               <a:t>    </a:t>
             </a:r>
             <a:r>
-              <a:rPr sz="2000" i="0" b="0">
+              <a:rPr sz="1900" i="0" b="0">
                 <a:solidFill>
                   <a:srgbClr val="569CD6"/>
                 </a:solidFill>
@@ -5109,7 +5109,7 @@
               <a:t>if</a:t>
             </a:r>
             <a:r>
-              <a:rPr sz="2000" i="0" b="0">
+              <a:rPr sz="1900" i="0" b="0">
                 <a:solidFill>
                   <a:srgbClr val="D4D4D4"/>
                 </a:solidFill>
@@ -5118,7 +5118,7 @@
               <a:t> (</a:t>
             </a:r>
             <a:r>
-              <a:rPr sz="2000" i="0" b="0">
+              <a:rPr sz="1900" i="0" b="0">
                 <a:solidFill>
                   <a:srgbClr val="D4D4D4"/>
                 </a:solidFill>
@@ -5127,7 +5127,7 @@
               <a:t>m</a:t>
             </a:r>
             <a:r>
-              <a:rPr sz="2000" i="0" b="0">
+              <a:rPr sz="1900" i="0" b="0">
                 <a:solidFill>
                   <a:srgbClr val="D4D4D4"/>
                 </a:solidFill>
@@ -5136,7 +5136,7 @@
               <a:t> == </a:t>
             </a:r>
             <a:r>
-              <a:rPr sz="2000" i="0" b="0">
+              <a:rPr sz="1900" i="0" b="0">
                 <a:solidFill>
                   <a:srgbClr val="569CD6"/>
                 </a:solidFill>
@@ -5145,7 +5145,7 @@
               <a:t>null</a:t>
             </a:r>
             <a:r>
-              <a:rPr sz="2000" i="0" b="0">
+              <a:rPr sz="1900" i="0" b="0">
                 <a:solidFill>
                   <a:srgbClr val="D4D4D4"/>
                 </a:solidFill>
@@ -5157,11 +5157,11 @@
           <a:p>
             <a:pPr>
               <a:spcAft>
-                <a:spcPts val="428"/>
-              </a:spcAft>
-            </a:pPr>
-            <a:r>
-              <a:rPr sz="2000" i="0" b="0">
+                <a:spcPts val="407"/>
+              </a:spcAft>
+            </a:pPr>
+            <a:r>
+              <a:rPr sz="1900" i="0" b="0">
                 <a:solidFill>
                   <a:srgbClr val="D4D4D4"/>
                 </a:solidFill>
@@ -5170,7 +5170,7 @@
               <a:t>        </a:t>
             </a:r>
             <a:r>
-              <a:rPr sz="2000" i="0" b="0">
+              <a:rPr sz="1900" i="0" b="0">
                 <a:solidFill>
                   <a:srgbClr val="DCDCAA"/>
                 </a:solidFill>
@@ -5179,7 +5179,7 @@
               <a:t>System.out.println</a:t>
             </a:r>
             <a:r>
-              <a:rPr sz="2000" i="0" b="0">
+              <a:rPr sz="1900" i="0" b="0">
                 <a:solidFill>
                   <a:srgbClr val="D4D4D4"/>
                 </a:solidFill>
@@ -5188,7 +5188,7 @@
               <a:t>(</a:t>
             </a:r>
             <a:r>
-              <a:rPr sz="2000" i="0" b="0">
+              <a:rPr sz="1900" i="0" b="0">
                 <a:solidFill>
                   <a:srgbClr val="CE9178"/>
                 </a:solidFill>
@@ -5197,7 +5197,7 @@
               <a:t>"No existe la mascota "</a:t>
             </a:r>
             <a:r>
-              <a:rPr sz="2000" i="0" b="0">
+              <a:rPr sz="1900" i="0" b="0">
                 <a:solidFill>
                   <a:srgbClr val="D4D4D4"/>
                 </a:solidFill>
@@ -5206,7 +5206,7 @@
               <a:t> + </a:t>
             </a:r>
             <a:r>
-              <a:rPr sz="2000" i="0" b="0">
+              <a:rPr sz="1900" i="0" b="0">
                 <a:solidFill>
                   <a:srgbClr val="D4D4D4"/>
                 </a:solidFill>
@@ -5215,7 +5215,7 @@
               <a:t>id</a:t>
             </a:r>
             <a:r>
-              <a:rPr sz="2000" i="0" b="0">
+              <a:rPr sz="1900" i="0" b="0">
                 <a:solidFill>
                   <a:srgbClr val="D4D4D4"/>
                 </a:solidFill>
@@ -5227,11 +5227,11 @@
           <a:p>
             <a:pPr>
               <a:spcAft>
-                <a:spcPts val="428"/>
-              </a:spcAft>
-            </a:pPr>
-            <a:r>
-              <a:rPr sz="2000" i="0" b="0">
+                <a:spcPts val="407"/>
+              </a:spcAft>
+            </a:pPr>
+            <a:r>
+              <a:rPr sz="1900" i="0" b="0">
                 <a:solidFill>
                   <a:srgbClr val="D4D4D4"/>
                 </a:solidFill>
@@ -5240,7 +5240,7 @@
               <a:t>        </a:t>
             </a:r>
             <a:r>
-              <a:rPr sz="2000" i="0" b="0">
+              <a:rPr sz="1900" i="0" b="0">
                 <a:solidFill>
                   <a:srgbClr val="569CD6"/>
                 </a:solidFill>
@@ -5249,7 +5249,7 @@
               <a:t>return</a:t>
             </a:r>
             <a:r>
-              <a:rPr sz="2000" i="0" b="0">
+              <a:rPr sz="1900" i="0" b="0">
                 <a:solidFill>
                   <a:srgbClr val="D4D4D4"/>
                 </a:solidFill>
@@ -5258,7 +5258,7 @@
               <a:t> </a:t>
             </a:r>
             <a:r>
-              <a:rPr sz="2000" i="0" b="0">
+              <a:rPr sz="1900" i="0" b="0">
                 <a:solidFill>
                   <a:srgbClr val="569CD6"/>
                 </a:solidFill>
@@ -5267,7 +5267,7 @@
               <a:t>false</a:t>
             </a:r>
             <a:r>
-              <a:rPr sz="2000" i="0" b="0">
+              <a:rPr sz="1900" i="0" b="0">
                 <a:solidFill>
                   <a:srgbClr val="D4D4D4"/>
                 </a:solidFill>
@@ -5279,11 +5279,11 @@
           <a:p>
             <a:pPr>
               <a:spcAft>
-                <a:spcPts val="428"/>
-              </a:spcAft>
-            </a:pPr>
-            <a:r>
-              <a:rPr sz="2000" i="0" b="0">
+                <a:spcPts val="407"/>
+              </a:spcAft>
+            </a:pPr>
+            <a:r>
+              <a:rPr sz="1900" i="0" b="0">
                 <a:solidFill>
                   <a:srgbClr val="D4D4D4"/>
                 </a:solidFill>
@@ -5295,11 +5295,11 @@
           <a:p>
             <a:pPr>
               <a:spcAft>
-                <a:spcPts val="428"/>
-              </a:spcAft>
-            </a:pPr>
-            <a:r>
-              <a:rPr sz="2000" i="0" b="0">
+                <a:spcPts val="407"/>
+              </a:spcAft>
+            </a:pPr>
+            <a:r>
+              <a:rPr sz="1900" i="0" b="0">
                 <a:solidFill>
                   <a:srgbClr val="D4D4D4"/>
                 </a:solidFill>
@@ -5308,7 +5308,7 @@
               <a:t>    </a:t>
             </a:r>
             <a:r>
-              <a:rPr sz="2000" i="0" b="0">
+              <a:rPr sz="1900" i="0" b="0">
                 <a:solidFill>
                   <a:srgbClr val="DCDCAA"/>
                 </a:solidFill>
@@ -5317,7 +5317,7 @@
               <a:t>mascotas.remove</a:t>
             </a:r>
             <a:r>
-              <a:rPr sz="2000" i="0" b="0">
+              <a:rPr sz="1900" i="0" b="0">
                 <a:solidFill>
                   <a:srgbClr val="D4D4D4"/>
                 </a:solidFill>
@@ -5326,7 +5326,7 @@
               <a:t>(</a:t>
             </a:r>
             <a:r>
-              <a:rPr sz="2000" i="0" b="0">
+              <a:rPr sz="1900" i="0" b="0">
                 <a:solidFill>
                   <a:srgbClr val="D4D4D4"/>
                 </a:solidFill>
@@ -5335,7 +5335,7 @@
               <a:t>m</a:t>
             </a:r>
             <a:r>
-              <a:rPr sz="2000" i="0" b="0">
+              <a:rPr sz="1900" i="0" b="0">
                 <a:solidFill>
                   <a:srgbClr val="D4D4D4"/>
                 </a:solidFill>
@@ -5344,7 +5344,7 @@
               <a:t>); </a:t>
             </a:r>
             <a:r>
-              <a:rPr sz="2000" i="1" b="0">
+              <a:rPr sz="1900" i="1" b="0">
                 <a:solidFill>
                   <a:srgbClr val="6A9955"/>
                 </a:solidFill>
@@ -5356,11 +5356,11 @@
           <a:p>
             <a:pPr>
               <a:spcAft>
-                <a:spcPts val="428"/>
-              </a:spcAft>
-            </a:pPr>
-            <a:r>
-              <a:rPr sz="2000" i="0" b="0">
+                <a:spcPts val="407"/>
+              </a:spcAft>
+            </a:pPr>
+            <a:r>
+              <a:rPr sz="1900" i="0" b="0">
                 <a:solidFill>
                   <a:srgbClr val="D4D4D4"/>
                 </a:solidFill>
@@ -5369,7 +5369,7 @@
               <a:t>    </a:t>
             </a:r>
             <a:r>
-              <a:rPr sz="2000" i="0" b="0">
+              <a:rPr sz="1900" i="0" b="0">
                 <a:solidFill>
                   <a:srgbClr val="DCDCAA"/>
                 </a:solidFill>
@@ -5378,7 +5378,7 @@
               <a:t>System.out.println</a:t>
             </a:r>
             <a:r>
-              <a:rPr sz="2000" i="0" b="0">
+              <a:rPr sz="1900" i="0" b="0">
                 <a:solidFill>
                   <a:srgbClr val="D4D4D4"/>
                 </a:solidFill>
@@ -5387,7 +5387,7 @@
               <a:t>(</a:t>
             </a:r>
             <a:r>
-              <a:rPr sz="2000" i="0" b="0">
+              <a:rPr sz="1900" i="0" b="0">
                 <a:solidFill>
                   <a:srgbClr val="CE9178"/>
                 </a:solidFill>
@@ -5396,7 +5396,7 @@
               <a:t>"Retirada de la lista activa: "</a:t>
             </a:r>
             <a:r>
-              <a:rPr sz="2000" i="0" b="0">
+              <a:rPr sz="1900" i="0" b="0">
                 <a:solidFill>
                   <a:srgbClr val="D4D4D4"/>
                 </a:solidFill>
@@ -5405,7 +5405,7 @@
               <a:t> + </a:t>
             </a:r>
             <a:r>
-              <a:rPr sz="2000" i="0" b="0">
+              <a:rPr sz="1900" i="0" b="0">
                 <a:solidFill>
                   <a:srgbClr val="DCDCAA"/>
                 </a:solidFill>
@@ -5414,7 +5414,7 @@
               <a:t>m.getNombre</a:t>
             </a:r>
             <a:r>
-              <a:rPr sz="2000" i="0" b="0">
+              <a:rPr sz="1900" i="0" b="0">
                 <a:solidFill>
                   <a:srgbClr val="D4D4D4"/>
                 </a:solidFill>
@@ -5426,11 +5426,11 @@
           <a:p>
             <a:pPr>
               <a:spcAft>
-                <a:spcPts val="428"/>
-              </a:spcAft>
-            </a:pPr>
-            <a:r>
-              <a:rPr sz="2000" i="0" b="0">
+                <a:spcPts val="407"/>
+              </a:spcAft>
+            </a:pPr>
+            <a:r>
+              <a:rPr sz="1900" i="0" b="0">
                 <a:solidFill>
                   <a:srgbClr val="D4D4D4"/>
                 </a:solidFill>
@@ -5439,7 +5439,7 @@
               <a:t>    </a:t>
             </a:r>
             <a:r>
-              <a:rPr sz="2000" i="0" b="0">
+              <a:rPr sz="1900" i="0" b="0">
                 <a:solidFill>
                   <a:srgbClr val="569CD6"/>
                 </a:solidFill>
@@ -5448,7 +5448,7 @@
               <a:t>return</a:t>
             </a:r>
             <a:r>
-              <a:rPr sz="2000" i="0" b="0">
+              <a:rPr sz="1900" i="0" b="0">
                 <a:solidFill>
                   <a:srgbClr val="D4D4D4"/>
                 </a:solidFill>
@@ -5457,7 +5457,7 @@
               <a:t> </a:t>
             </a:r>
             <a:r>
-              <a:rPr sz="2000" i="0" b="0">
+              <a:rPr sz="1900" i="0" b="0">
                 <a:solidFill>
                   <a:srgbClr val="569CD6"/>
                 </a:solidFill>
@@ -5466,7 +5466,7 @@
               <a:t>true</a:t>
             </a:r>
             <a:r>
-              <a:rPr sz="2000" i="0" b="0">
+              <a:rPr sz="1900" i="0" b="0">
                 <a:solidFill>
                   <a:srgbClr val="D4D4D4"/>
                 </a:solidFill>
@@ -5478,11 +5478,11 @@
           <a:p>
             <a:pPr>
               <a:spcAft>
-                <a:spcPts val="428"/>
-              </a:spcAft>
-            </a:pPr>
-            <a:r>
-              <a:rPr sz="2000" i="0" b="0">
+                <a:spcPts val="407"/>
+              </a:spcAft>
+            </a:pPr>
+            <a:r>
+              <a:rPr sz="1900" i="0" b="0">
                 <a:solidFill>
                   <a:srgbClr val="D4D4D4"/>
                 </a:solidFill>
@@ -9504,7 +9504,7 @@
         <p:spPr>
           <a:xfrm>
             <a:off x="457200" y="1261872"/>
-            <a:ext cx="11277295" cy="4530784"/>
+            <a:ext cx="11277295" cy="3445579"/>
           </a:xfrm>
           <a:prstGeom prst="roundRect">
             <a:avLst>
@@ -9753,8 +9753,8 @@
         </p:nvSpPr>
         <p:spPr>
           <a:xfrm>
-            <a:off x="1188720" y="1719072"/>
-            <a:ext cx="10271455" cy="3936424"/>
+            <a:off x="685800" y="1719072"/>
+            <a:ext cx="502920" cy="2851219"/>
           </a:xfrm>
           <a:prstGeom prst="rect">
             <a:avLst/>
@@ -9767,712 +9767,163 @@
           </a:bodyPr>
           <a:lstStyle/>
           <a:p>
-            <a:pPr>
-              <a:spcAft>
-                <a:spcPts val="428"/>
-              </a:spcAft>
-            </a:pPr>
-            <a:r>
-              <a:rPr sz="2000" i="0" b="0">
-                <a:solidFill>
-                  <a:srgbClr val="569CD6"/>
-                </a:solidFill>
-                <a:latin typeface="Consolas"/>
-              </a:rPr>
-              <a:t>private</a:t>
-            </a:r>
-            <a:r>
-              <a:rPr sz="2000" i="0" b="0">
-                <a:solidFill>
-                  <a:srgbClr val="D4D4D4"/>
-                </a:solidFill>
-                <a:latin typeface="Consolas"/>
-              </a:rPr>
-              <a:t> </a:t>
-            </a:r>
-            <a:r>
-              <a:rPr sz="2000" i="0" b="0">
-                <a:solidFill>
-                  <a:srgbClr val="569CD6"/>
-                </a:solidFill>
-                <a:latin typeface="Consolas"/>
-              </a:rPr>
-              <a:t>final</a:t>
-            </a:r>
-            <a:r>
-              <a:rPr sz="2000" i="0" b="0">
-                <a:solidFill>
-                  <a:srgbClr val="D4D4D4"/>
-                </a:solidFill>
-                <a:latin typeface="Consolas"/>
-              </a:rPr>
-              <a:t> </a:t>
-            </a:r>
-            <a:r>
-              <a:rPr sz="2000" i="0" b="0">
-                <a:solidFill>
-                  <a:srgbClr val="4EC9B0"/>
-                </a:solidFill>
-                <a:latin typeface="Consolas"/>
-              </a:rPr>
-              <a:t>String</a:t>
-            </a:r>
-            <a:r>
-              <a:rPr sz="2000" i="0" b="0">
-                <a:solidFill>
-                  <a:srgbClr val="D4D4D4"/>
-                </a:solidFill>
-                <a:latin typeface="Consolas"/>
-              </a:rPr>
-              <a:t> </a:t>
-            </a:r>
-            <a:r>
-              <a:rPr sz="2000" i="0" b="0">
-                <a:solidFill>
-                  <a:srgbClr val="D4D4D4"/>
-                </a:solidFill>
-                <a:latin typeface="Consolas"/>
-              </a:rPr>
-              <a:t>id</a:t>
-            </a:r>
-            <a:r>
-              <a:rPr sz="2000" i="0" b="0">
-                <a:solidFill>
-                  <a:srgbClr val="D4D4D4"/>
-                </a:solidFill>
-                <a:latin typeface="Consolas"/>
-              </a:rPr>
-              <a:t>;</a:t>
-            </a:r>
-          </a:p>
-          <a:p>
-            <a:pPr>
-              <a:spcAft>
-                <a:spcPts val="428"/>
-              </a:spcAft>
-            </a:pPr>
-            <a:r>
-              <a:rPr sz="2000" i="0" b="0">
-                <a:solidFill>
-                  <a:srgbClr val="569CD6"/>
-                </a:solidFill>
-                <a:latin typeface="Consolas"/>
-              </a:rPr>
-              <a:t>private</a:t>
-            </a:r>
-            <a:r>
-              <a:rPr sz="2000" i="0" b="0">
-                <a:solidFill>
-                  <a:srgbClr val="D4D4D4"/>
-                </a:solidFill>
-                <a:latin typeface="Consolas"/>
-              </a:rPr>
-              <a:t> </a:t>
-            </a:r>
-            <a:r>
-              <a:rPr sz="2000" i="0" b="0">
-                <a:solidFill>
-                  <a:srgbClr val="569CD6"/>
-                </a:solidFill>
-                <a:latin typeface="Consolas"/>
-              </a:rPr>
-              <a:t>final</a:t>
-            </a:r>
-            <a:r>
-              <a:rPr sz="2000" i="0" b="0">
-                <a:solidFill>
-                  <a:srgbClr val="D4D4D4"/>
-                </a:solidFill>
-                <a:latin typeface="Consolas"/>
-              </a:rPr>
-              <a:t> </a:t>
-            </a:r>
-            <a:r>
-              <a:rPr sz="2000" i="0" b="0">
-                <a:solidFill>
-                  <a:srgbClr val="4EC9B0"/>
-                </a:solidFill>
-                <a:latin typeface="Consolas"/>
-              </a:rPr>
-              <a:t>String</a:t>
-            </a:r>
-            <a:r>
-              <a:rPr sz="2000" i="0" b="0">
-                <a:solidFill>
-                  <a:srgbClr val="D4D4D4"/>
-                </a:solidFill>
-                <a:latin typeface="Consolas"/>
-              </a:rPr>
-              <a:t> </a:t>
-            </a:r>
-            <a:r>
-              <a:rPr sz="2000" i="0" b="0">
-                <a:solidFill>
-                  <a:srgbClr val="D4D4D4"/>
-                </a:solidFill>
-                <a:latin typeface="Consolas"/>
-              </a:rPr>
-              <a:t>nombre</a:t>
-            </a:r>
-            <a:r>
-              <a:rPr sz="2000" i="0" b="0">
-                <a:solidFill>
-                  <a:srgbClr val="D4D4D4"/>
-                </a:solidFill>
-                <a:latin typeface="Consolas"/>
-              </a:rPr>
-              <a:t>;</a:t>
-            </a:r>
-          </a:p>
-          <a:p>
-            <a:pPr>
-              <a:spcAft>
-                <a:spcPts val="428"/>
-              </a:spcAft>
-            </a:pPr>
-            <a:r>
-              <a:rPr sz="2000" i="0" b="0">
-                <a:solidFill>
-                  <a:srgbClr val="569CD6"/>
-                </a:solidFill>
-                <a:latin typeface="Consolas"/>
-              </a:rPr>
-              <a:t>private</a:t>
-            </a:r>
-            <a:r>
-              <a:rPr sz="2000" i="0" b="0">
-                <a:solidFill>
-                  <a:srgbClr val="D4D4D4"/>
-                </a:solidFill>
-                <a:latin typeface="Consolas"/>
-              </a:rPr>
-              <a:t> </a:t>
-            </a:r>
-            <a:r>
-              <a:rPr sz="2000" i="0" b="0">
-                <a:solidFill>
-                  <a:srgbClr val="569CD6"/>
-                </a:solidFill>
-                <a:latin typeface="Consolas"/>
-              </a:rPr>
-              <a:t>final</a:t>
-            </a:r>
-            <a:r>
-              <a:rPr sz="2000" i="0" b="0">
-                <a:solidFill>
-                  <a:srgbClr val="D4D4D4"/>
-                </a:solidFill>
-                <a:latin typeface="Consolas"/>
-              </a:rPr>
-              <a:t> </a:t>
-            </a:r>
-            <a:r>
-              <a:rPr sz="2000" i="0" b="0">
-                <a:solidFill>
-                  <a:srgbClr val="4EC9B0"/>
-                </a:solidFill>
-                <a:latin typeface="Consolas"/>
-              </a:rPr>
-              <a:t>String</a:t>
-            </a:r>
-            <a:r>
-              <a:rPr sz="2000" i="0" b="0">
-                <a:solidFill>
-                  <a:srgbClr val="D4D4D4"/>
-                </a:solidFill>
-                <a:latin typeface="Consolas"/>
-              </a:rPr>
-              <a:t> </a:t>
-            </a:r>
-            <a:r>
-              <a:rPr sz="2000" i="0" b="0">
-                <a:solidFill>
-                  <a:srgbClr val="D4D4D4"/>
-                </a:solidFill>
-                <a:latin typeface="Consolas"/>
-              </a:rPr>
-              <a:t>especie</a:t>
-            </a:r>
-            <a:r>
-              <a:rPr sz="2000" i="0" b="0">
-                <a:solidFill>
-                  <a:srgbClr val="D4D4D4"/>
-                </a:solidFill>
-                <a:latin typeface="Consolas"/>
-              </a:rPr>
-              <a:t>;</a:t>
-            </a:r>
-          </a:p>
-          <a:p>
-            <a:pPr>
-              <a:spcAft>
-                <a:spcPts val="428"/>
-              </a:spcAft>
-            </a:pPr>
-            <a:r>
-              <a:rPr sz="2000" i="0" b="0">
-                <a:solidFill>
-                  <a:srgbClr val="569CD6"/>
-                </a:solidFill>
-                <a:latin typeface="Consolas"/>
-              </a:rPr>
-              <a:t>private</a:t>
-            </a:r>
-            <a:r>
-              <a:rPr sz="2000" i="0" b="0">
-                <a:solidFill>
-                  <a:srgbClr val="D4D4D4"/>
-                </a:solidFill>
-                <a:latin typeface="Consolas"/>
-              </a:rPr>
-              <a:t> </a:t>
-            </a:r>
-            <a:r>
-              <a:rPr sz="2000" i="0" b="0">
-                <a:solidFill>
-                  <a:srgbClr val="569CD6"/>
-                </a:solidFill>
-                <a:latin typeface="Consolas"/>
-              </a:rPr>
-              <a:t>final</a:t>
-            </a:r>
-            <a:r>
-              <a:rPr sz="2000" i="0" b="0">
-                <a:solidFill>
-                  <a:srgbClr val="D4D4D4"/>
-                </a:solidFill>
-                <a:latin typeface="Consolas"/>
-              </a:rPr>
-              <a:t> </a:t>
-            </a:r>
-            <a:r>
-              <a:rPr sz="2000" i="0" b="0">
-                <a:solidFill>
-                  <a:srgbClr val="4EC9B0"/>
-                </a:solidFill>
-                <a:latin typeface="Consolas"/>
-              </a:rPr>
-              <a:t>int</a:t>
-            </a:r>
-            <a:r>
-              <a:rPr sz="2000" i="0" b="0">
-                <a:solidFill>
-                  <a:srgbClr val="D4D4D4"/>
-                </a:solidFill>
-                <a:latin typeface="Consolas"/>
-              </a:rPr>
-              <a:t> </a:t>
-            </a:r>
-            <a:r>
-              <a:rPr sz="2000" i="0" b="0">
-                <a:solidFill>
-                  <a:srgbClr val="D4D4D4"/>
-                </a:solidFill>
-                <a:latin typeface="Consolas"/>
-              </a:rPr>
-              <a:t>edad</a:t>
-            </a:r>
-            <a:r>
-              <a:rPr sz="2000" i="0" b="0">
-                <a:solidFill>
-                  <a:srgbClr val="D4D4D4"/>
-                </a:solidFill>
-                <a:latin typeface="Consolas"/>
-              </a:rPr>
-              <a:t>;</a:t>
-            </a:r>
-          </a:p>
-          <a:p>
-            <a:pPr>
-              <a:spcAft>
-                <a:spcPts val="428"/>
-              </a:spcAft>
-            </a:pPr>
-            <a:r>
-              <a:rPr sz="2000" i="0" b="0">
-                <a:solidFill>
-                  <a:srgbClr val="569CD6"/>
-                </a:solidFill>
-                <a:latin typeface="Consolas"/>
-              </a:rPr>
-              <a:t>private</a:t>
-            </a:r>
-            <a:r>
-              <a:rPr sz="2000" i="0" b="0">
-                <a:solidFill>
-                  <a:srgbClr val="D4D4D4"/>
-                </a:solidFill>
-                <a:latin typeface="Consolas"/>
-              </a:rPr>
-              <a:t> </a:t>
-            </a:r>
-            <a:r>
-              <a:rPr sz="2000" i="0" b="0">
-                <a:solidFill>
-                  <a:srgbClr val="569CD6"/>
-                </a:solidFill>
-                <a:latin typeface="Consolas"/>
-              </a:rPr>
-              <a:t>final</a:t>
-            </a:r>
-            <a:r>
-              <a:rPr sz="2000" i="0" b="0">
-                <a:solidFill>
-                  <a:srgbClr val="D4D4D4"/>
-                </a:solidFill>
-                <a:latin typeface="Consolas"/>
-              </a:rPr>
-              <a:t> </a:t>
-            </a:r>
-            <a:r>
-              <a:rPr sz="2000" i="0" b="0">
-                <a:solidFill>
-                  <a:srgbClr val="4EC9B0"/>
-                </a:solidFill>
-                <a:latin typeface="Consolas"/>
-              </a:rPr>
-              <a:t>String</a:t>
-            </a:r>
-            <a:r>
-              <a:rPr sz="2000" i="0" b="0">
-                <a:solidFill>
-                  <a:srgbClr val="D4D4D4"/>
-                </a:solidFill>
-                <a:latin typeface="Consolas"/>
-              </a:rPr>
-              <a:t> </a:t>
-            </a:r>
-            <a:r>
-              <a:rPr sz="2000" i="0" b="0">
-                <a:solidFill>
-                  <a:srgbClr val="D4D4D4"/>
-                </a:solidFill>
-                <a:latin typeface="Consolas"/>
-              </a:rPr>
-              <a:t>dueno</a:t>
-            </a:r>
-            <a:r>
-              <a:rPr sz="2000" i="0" b="0">
-                <a:solidFill>
-                  <a:srgbClr val="D4D4D4"/>
-                </a:solidFill>
-                <a:latin typeface="Consolas"/>
-              </a:rPr>
-              <a:t>;</a:t>
-            </a:r>
-          </a:p>
-          <a:p>
-            <a:pPr>
-              <a:spcAft>
-                <a:spcPts val="428"/>
-              </a:spcAft>
-            </a:pPr>
-            <a:r>
-              <a:rPr sz="2000" i="0" b="0">
-                <a:solidFill>
-                  <a:srgbClr val="D4D4D4"/>
-                </a:solidFill>
-                <a:latin typeface="Consolas"/>
-              </a:rPr>
-              <a:t/>
-            </a:r>
-          </a:p>
-          <a:p>
-            <a:pPr>
-              <a:spcAft>
-                <a:spcPts val="428"/>
-              </a:spcAft>
-            </a:pPr>
-            <a:r>
-              <a:rPr sz="2000" i="0" b="0">
-                <a:solidFill>
-                  <a:srgbClr val="D4D4D4"/>
-                </a:solidFill>
-                <a:latin typeface="Consolas"/>
-              </a:rPr>
-              <a:t>@</a:t>
-            </a:r>
-            <a:r>
-              <a:rPr sz="2000" i="0" b="0">
-                <a:solidFill>
-                  <a:srgbClr val="D4D4D4"/>
-                </a:solidFill>
-                <a:latin typeface="Consolas"/>
-              </a:rPr>
-              <a:t>Override</a:t>
-            </a:r>
-          </a:p>
-          <a:p>
-            <a:pPr>
-              <a:spcAft>
-                <a:spcPts val="428"/>
-              </a:spcAft>
-            </a:pPr>
-            <a:r>
-              <a:rPr sz="2000" i="0" b="0">
-                <a:solidFill>
-                  <a:srgbClr val="569CD6"/>
-                </a:solidFill>
-                <a:latin typeface="Consolas"/>
-              </a:rPr>
-              <a:t>public</a:t>
-            </a:r>
-            <a:r>
-              <a:rPr sz="2000" i="0" b="0">
-                <a:solidFill>
-                  <a:srgbClr val="D4D4D4"/>
-                </a:solidFill>
-                <a:latin typeface="Consolas"/>
-              </a:rPr>
-              <a:t> </a:t>
-            </a:r>
-            <a:r>
-              <a:rPr sz="2000" i="0" b="0">
-                <a:solidFill>
-                  <a:srgbClr val="4EC9B0"/>
-                </a:solidFill>
-                <a:latin typeface="Consolas"/>
-              </a:rPr>
-              <a:t>String</a:t>
-            </a:r>
-            <a:r>
-              <a:rPr sz="2000" i="0" b="0">
-                <a:solidFill>
-                  <a:srgbClr val="D4D4D4"/>
-                </a:solidFill>
-                <a:latin typeface="Consolas"/>
-              </a:rPr>
-              <a:t> </a:t>
-            </a:r>
-            <a:r>
-              <a:rPr sz="2000" i="0" b="0">
-                <a:solidFill>
-                  <a:srgbClr val="DCDCAA"/>
-                </a:solidFill>
-                <a:latin typeface="Consolas"/>
-              </a:rPr>
-              <a:t>toString</a:t>
-            </a:r>
-            <a:r>
-              <a:rPr sz="2000" i="0" b="0">
-                <a:solidFill>
-                  <a:srgbClr val="D4D4D4"/>
-                </a:solidFill>
-                <a:latin typeface="Consolas"/>
-              </a:rPr>
-              <a:t>() {</a:t>
-            </a:r>
-          </a:p>
-          <a:p>
-            <a:pPr>
-              <a:spcAft>
-                <a:spcPts val="428"/>
-              </a:spcAft>
-            </a:pPr>
-            <a:r>
-              <a:rPr sz="2000" i="0" b="0">
-                <a:solidFill>
-                  <a:srgbClr val="D4D4D4"/>
-                </a:solidFill>
-                <a:latin typeface="Consolas"/>
-              </a:rPr>
-              <a:t>    </a:t>
-            </a:r>
-            <a:r>
-              <a:rPr sz="2000" i="0" b="0">
-                <a:solidFill>
-                  <a:srgbClr val="569CD6"/>
-                </a:solidFill>
-                <a:latin typeface="Consolas"/>
-              </a:rPr>
-              <a:t>return</a:t>
-            </a:r>
-            <a:r>
-              <a:rPr sz="2000" i="0" b="0">
-                <a:solidFill>
-                  <a:srgbClr val="D4D4D4"/>
-                </a:solidFill>
-                <a:latin typeface="Consolas"/>
-              </a:rPr>
-              <a:t> </a:t>
-            </a:r>
-            <a:r>
-              <a:rPr sz="2000" i="0" b="0">
-                <a:solidFill>
-                  <a:srgbClr val="D4D4D4"/>
-                </a:solidFill>
-                <a:latin typeface="Consolas"/>
-              </a:rPr>
-              <a:t>id</a:t>
-            </a:r>
-            <a:r>
-              <a:rPr sz="2000" i="0" b="0">
-                <a:solidFill>
-                  <a:srgbClr val="D4D4D4"/>
-                </a:solidFill>
-                <a:latin typeface="Consolas"/>
-              </a:rPr>
-              <a:t> + </a:t>
-            </a:r>
-            <a:r>
-              <a:rPr sz="2000" i="0" b="0">
-                <a:solidFill>
-                  <a:srgbClr val="CE9178"/>
-                </a:solidFill>
-                <a:latin typeface="Consolas"/>
-              </a:rPr>
-              <a:t>" | "</a:t>
-            </a:r>
-            <a:r>
-              <a:rPr sz="2000" i="0" b="0">
-                <a:solidFill>
-                  <a:srgbClr val="D4D4D4"/>
-                </a:solidFill>
-                <a:latin typeface="Consolas"/>
-              </a:rPr>
-              <a:t> + </a:t>
-            </a:r>
-            <a:r>
-              <a:rPr sz="2000" i="0" b="0">
-                <a:solidFill>
-                  <a:srgbClr val="D4D4D4"/>
-                </a:solidFill>
-                <a:latin typeface="Consolas"/>
-              </a:rPr>
-              <a:t>nombre</a:t>
-            </a:r>
-            <a:r>
-              <a:rPr sz="2000" i="0" b="0">
-                <a:solidFill>
-                  <a:srgbClr val="D4D4D4"/>
-                </a:solidFill>
-                <a:latin typeface="Consolas"/>
-              </a:rPr>
-              <a:t> + </a:t>
-            </a:r>
-            <a:r>
-              <a:rPr sz="2000" i="0" b="0">
-                <a:solidFill>
-                  <a:srgbClr val="CE9178"/>
-                </a:solidFill>
-                <a:latin typeface="Consolas"/>
-              </a:rPr>
-              <a:t>" ("</a:t>
-            </a:r>
-            <a:r>
-              <a:rPr sz="2000" i="0" b="0">
-                <a:solidFill>
-                  <a:srgbClr val="D4D4D4"/>
-                </a:solidFill>
-                <a:latin typeface="Consolas"/>
-              </a:rPr>
-              <a:t> + </a:t>
-            </a:r>
-            <a:r>
-              <a:rPr sz="2000" i="0" b="0">
-                <a:solidFill>
-                  <a:srgbClr val="D4D4D4"/>
-                </a:solidFill>
-                <a:latin typeface="Consolas"/>
-              </a:rPr>
-              <a:t>especie</a:t>
-            </a:r>
-            <a:r>
-              <a:rPr sz="2000" i="0" b="0">
-                <a:solidFill>
-                  <a:srgbClr val="D4D4D4"/>
-                </a:solidFill>
-                <a:latin typeface="Consolas"/>
-              </a:rPr>
-              <a:t> + </a:t>
-            </a:r>
-            <a:r>
-              <a:rPr sz="2000" i="0" b="0">
-                <a:solidFill>
-                  <a:srgbClr val="CE9178"/>
-                </a:solidFill>
-                <a:latin typeface="Consolas"/>
-              </a:rPr>
-              <a:t>", "</a:t>
-            </a:r>
-            <a:r>
-              <a:rPr sz="2000" i="0" b="0">
-                <a:solidFill>
-                  <a:srgbClr val="D4D4D4"/>
-                </a:solidFill>
-                <a:latin typeface="Consolas"/>
-              </a:rPr>
-              <a:t> + </a:t>
-            </a:r>
-            <a:r>
-              <a:rPr sz="2000" i="0" b="0">
-                <a:solidFill>
-                  <a:srgbClr val="D4D4D4"/>
-                </a:solidFill>
-                <a:latin typeface="Consolas"/>
-              </a:rPr>
-              <a:t>edad</a:t>
-            </a:r>
-            <a:r>
-              <a:rPr sz="2000" i="0" b="0">
-                <a:solidFill>
-                  <a:srgbClr val="D4D4D4"/>
-                </a:solidFill>
-                <a:latin typeface="Consolas"/>
-              </a:rPr>
-              <a:t> + </a:t>
-            </a:r>
-            <a:r>
-              <a:rPr sz="2000" i="0" b="0">
-                <a:solidFill>
-                  <a:srgbClr val="CE9178"/>
-                </a:solidFill>
-                <a:latin typeface="Consolas"/>
-              </a:rPr>
-              <a:t>" anios) - dueno: "</a:t>
-            </a:r>
-            <a:r>
-              <a:rPr sz="2000" i="0" b="0">
-                <a:solidFill>
-                  <a:srgbClr val="D4D4D4"/>
-                </a:solidFill>
-                <a:latin typeface="Consolas"/>
-              </a:rPr>
-              <a:t> + </a:t>
-            </a:r>
-            <a:r>
-              <a:rPr sz="2000" i="0" b="0">
-                <a:solidFill>
-                  <a:srgbClr val="D4D4D4"/>
-                </a:solidFill>
-                <a:latin typeface="Consolas"/>
-              </a:rPr>
-              <a:t>dueno</a:t>
-            </a:r>
-            <a:r>
-              <a:rPr sz="2000" i="0" b="0">
-                <a:solidFill>
-                  <a:srgbClr val="D4D4D4"/>
-                </a:solidFill>
-                <a:latin typeface="Consolas"/>
-              </a:rPr>
-              <a:t>;</a:t>
-            </a:r>
-          </a:p>
-          <a:p>
-            <a:pPr>
-              <a:spcAft>
-                <a:spcPts val="428"/>
-              </a:spcAft>
-            </a:pPr>
-            <a:r>
-              <a:rPr sz="2000" i="0" b="0">
-                <a:solidFill>
-                  <a:srgbClr val="D4D4D4"/>
-                </a:solidFill>
-                <a:latin typeface="Consolas"/>
-              </a:rPr>
-              <a:t>}</a:t>
+            <a:pPr algn="r">
+              <a:spcAft>
+                <a:spcPts val="321"/>
+              </a:spcAft>
+            </a:pPr>
+            <a:r>
+              <a:rPr sz="1500" i="0" b="0">
+                <a:solidFill>
+                  <a:srgbClr val="858585"/>
+                </a:solidFill>
+                <a:latin typeface="Consolas"/>
+              </a:rPr>
+              <a:t>1</a:t>
+            </a:r>
+          </a:p>
+          <a:p>
+            <a:pPr algn="r">
+              <a:spcAft>
+                <a:spcPts val="321"/>
+              </a:spcAft>
+            </a:pPr>
+            <a:r>
+              <a:rPr sz="1500" i="0" b="0">
+                <a:solidFill>
+                  <a:srgbClr val="858585"/>
+                </a:solidFill>
+                <a:latin typeface="Consolas"/>
+              </a:rPr>
+              <a:t>2</a:t>
+            </a:r>
+          </a:p>
+          <a:p>
+            <a:pPr algn="r">
+              <a:spcAft>
+                <a:spcPts val="321"/>
+              </a:spcAft>
+            </a:pPr>
+            <a:r>
+              <a:rPr sz="1500" i="0" b="0">
+                <a:solidFill>
+                  <a:srgbClr val="858585"/>
+                </a:solidFill>
+                <a:latin typeface="Consolas"/>
+              </a:rPr>
+              <a:t>3</a:t>
+            </a:r>
+          </a:p>
+          <a:p>
+            <a:pPr algn="r">
+              <a:spcAft>
+                <a:spcPts val="321"/>
+              </a:spcAft>
+            </a:pPr>
+            <a:r>
+              <a:rPr sz="1500" i="0" b="0">
+                <a:solidFill>
+                  <a:srgbClr val="858585"/>
+                </a:solidFill>
+                <a:latin typeface="Consolas"/>
+              </a:rPr>
+              <a:t>4</a:t>
+            </a:r>
+          </a:p>
+          <a:p>
+            <a:pPr algn="r">
+              <a:spcAft>
+                <a:spcPts val="321"/>
+              </a:spcAft>
+            </a:pPr>
+            <a:r>
+              <a:rPr sz="1500" i="0" b="0">
+                <a:solidFill>
+                  <a:srgbClr val="858585"/>
+                </a:solidFill>
+                <a:latin typeface="Consolas"/>
+              </a:rPr>
+              <a:t>5</a:t>
+            </a:r>
+          </a:p>
+          <a:p>
+            <a:pPr algn="r">
+              <a:spcAft>
+                <a:spcPts val="321"/>
+              </a:spcAft>
+            </a:pPr>
+            <a:r>
+              <a:rPr sz="1500" i="0" b="0">
+                <a:solidFill>
+                  <a:srgbClr val="858585"/>
+                </a:solidFill>
+                <a:latin typeface="Consolas"/>
+              </a:rPr>
+              <a:t>6</a:t>
+            </a:r>
+          </a:p>
+          <a:p>
+            <a:pPr algn="r">
+              <a:spcAft>
+                <a:spcPts val="321"/>
+              </a:spcAft>
+            </a:pPr>
+            <a:r>
+              <a:rPr sz="1500" i="0" b="0">
+                <a:solidFill>
+                  <a:srgbClr val="858585"/>
+                </a:solidFill>
+                <a:latin typeface="Consolas"/>
+              </a:rPr>
+              <a:t>7</a:t>
+            </a:r>
+          </a:p>
+          <a:p>
+            <a:pPr algn="r">
+              <a:spcAft>
+                <a:spcPts val="321"/>
+              </a:spcAft>
+            </a:pPr>
+            <a:r>
+              <a:rPr sz="1500" i="0" b="0">
+                <a:solidFill>
+                  <a:srgbClr val="858585"/>
+                </a:solidFill>
+                <a:latin typeface="Consolas"/>
+              </a:rPr>
+              <a:t>8</a:t>
+            </a:r>
+          </a:p>
+          <a:p>
+            <a:pPr algn="r">
+              <a:spcAft>
+                <a:spcPts val="321"/>
+              </a:spcAft>
+            </a:pPr>
+            <a:r>
+              <a:rPr sz="1500" i="0" b="0">
+                <a:solidFill>
+                  <a:srgbClr val="858585"/>
+                </a:solidFill>
+                <a:latin typeface="Consolas"/>
+              </a:rPr>
+              <a:t>9</a:t>
+            </a:r>
+          </a:p>
+          <a:p>
+            <a:pPr algn="r">
+              <a:spcAft>
+                <a:spcPts val="321"/>
+              </a:spcAft>
+            </a:pPr>
+            <a:r>
+              <a:rPr sz="1500" i="0" b="0">
+                <a:solidFill>
+                  <a:srgbClr val="858585"/>
+                </a:solidFill>
+                <a:latin typeface="Consolas"/>
+              </a:rPr>
+              <a:t>10</a:t>
             </a:r>
           </a:p>
         </p:txBody>
@@ -10485,8 +9936,8 @@
         </p:nvSpPr>
         <p:spPr>
           <a:xfrm>
-            <a:off x="457200" y="6035040"/>
-            <a:ext cx="11277295" cy="365760"/>
+            <a:off x="1188720" y="1719072"/>
+            <a:ext cx="10271455" cy="2851219"/>
           </a:xfrm>
           <a:prstGeom prst="rect">
             <a:avLst/>
@@ -10499,6 +9950,738 @@
           </a:bodyPr>
           <a:lstStyle/>
           <a:p>
+            <a:pPr>
+              <a:spcAft>
+                <a:spcPts val="321"/>
+              </a:spcAft>
+            </a:pPr>
+            <a:r>
+              <a:rPr sz="1500" i="0" b="0">
+                <a:solidFill>
+                  <a:srgbClr val="569CD6"/>
+                </a:solidFill>
+                <a:latin typeface="Consolas"/>
+              </a:rPr>
+              <a:t>private</a:t>
+            </a:r>
+            <a:r>
+              <a:rPr sz="1500" i="0" b="0">
+                <a:solidFill>
+                  <a:srgbClr val="D4D4D4"/>
+                </a:solidFill>
+                <a:latin typeface="Consolas"/>
+              </a:rPr>
+              <a:t> </a:t>
+            </a:r>
+            <a:r>
+              <a:rPr sz="1500" i="0" b="0">
+                <a:solidFill>
+                  <a:srgbClr val="569CD6"/>
+                </a:solidFill>
+                <a:latin typeface="Consolas"/>
+              </a:rPr>
+              <a:t>final</a:t>
+            </a:r>
+            <a:r>
+              <a:rPr sz="1500" i="0" b="0">
+                <a:solidFill>
+                  <a:srgbClr val="D4D4D4"/>
+                </a:solidFill>
+                <a:latin typeface="Consolas"/>
+              </a:rPr>
+              <a:t> </a:t>
+            </a:r>
+            <a:r>
+              <a:rPr sz="1500" i="0" b="0">
+                <a:solidFill>
+                  <a:srgbClr val="4EC9B0"/>
+                </a:solidFill>
+                <a:latin typeface="Consolas"/>
+              </a:rPr>
+              <a:t>String</a:t>
+            </a:r>
+            <a:r>
+              <a:rPr sz="1500" i="0" b="0">
+                <a:solidFill>
+                  <a:srgbClr val="D4D4D4"/>
+                </a:solidFill>
+                <a:latin typeface="Consolas"/>
+              </a:rPr>
+              <a:t> </a:t>
+            </a:r>
+            <a:r>
+              <a:rPr sz="1500" i="0" b="0">
+                <a:solidFill>
+                  <a:srgbClr val="D4D4D4"/>
+                </a:solidFill>
+                <a:latin typeface="Consolas"/>
+              </a:rPr>
+              <a:t>id</a:t>
+            </a:r>
+            <a:r>
+              <a:rPr sz="1500" i="0" b="0">
+                <a:solidFill>
+                  <a:srgbClr val="D4D4D4"/>
+                </a:solidFill>
+                <a:latin typeface="Consolas"/>
+              </a:rPr>
+              <a:t>;</a:t>
+            </a:r>
+          </a:p>
+          <a:p>
+            <a:pPr>
+              <a:spcAft>
+                <a:spcPts val="321"/>
+              </a:spcAft>
+            </a:pPr>
+            <a:r>
+              <a:rPr sz="1500" i="0" b="0">
+                <a:solidFill>
+                  <a:srgbClr val="569CD6"/>
+                </a:solidFill>
+                <a:latin typeface="Consolas"/>
+              </a:rPr>
+              <a:t>private</a:t>
+            </a:r>
+            <a:r>
+              <a:rPr sz="1500" i="0" b="0">
+                <a:solidFill>
+                  <a:srgbClr val="D4D4D4"/>
+                </a:solidFill>
+                <a:latin typeface="Consolas"/>
+              </a:rPr>
+              <a:t> </a:t>
+            </a:r>
+            <a:r>
+              <a:rPr sz="1500" i="0" b="0">
+                <a:solidFill>
+                  <a:srgbClr val="569CD6"/>
+                </a:solidFill>
+                <a:latin typeface="Consolas"/>
+              </a:rPr>
+              <a:t>final</a:t>
+            </a:r>
+            <a:r>
+              <a:rPr sz="1500" i="0" b="0">
+                <a:solidFill>
+                  <a:srgbClr val="D4D4D4"/>
+                </a:solidFill>
+                <a:latin typeface="Consolas"/>
+              </a:rPr>
+              <a:t> </a:t>
+            </a:r>
+            <a:r>
+              <a:rPr sz="1500" i="0" b="0">
+                <a:solidFill>
+                  <a:srgbClr val="4EC9B0"/>
+                </a:solidFill>
+                <a:latin typeface="Consolas"/>
+              </a:rPr>
+              <a:t>String</a:t>
+            </a:r>
+            <a:r>
+              <a:rPr sz="1500" i="0" b="0">
+                <a:solidFill>
+                  <a:srgbClr val="D4D4D4"/>
+                </a:solidFill>
+                <a:latin typeface="Consolas"/>
+              </a:rPr>
+              <a:t> </a:t>
+            </a:r>
+            <a:r>
+              <a:rPr sz="1500" i="0" b="0">
+                <a:solidFill>
+                  <a:srgbClr val="D4D4D4"/>
+                </a:solidFill>
+                <a:latin typeface="Consolas"/>
+              </a:rPr>
+              <a:t>nombre</a:t>
+            </a:r>
+            <a:r>
+              <a:rPr sz="1500" i="0" b="0">
+                <a:solidFill>
+                  <a:srgbClr val="D4D4D4"/>
+                </a:solidFill>
+                <a:latin typeface="Consolas"/>
+              </a:rPr>
+              <a:t>;</a:t>
+            </a:r>
+          </a:p>
+          <a:p>
+            <a:pPr>
+              <a:spcAft>
+                <a:spcPts val="321"/>
+              </a:spcAft>
+            </a:pPr>
+            <a:r>
+              <a:rPr sz="1500" i="0" b="0">
+                <a:solidFill>
+                  <a:srgbClr val="569CD6"/>
+                </a:solidFill>
+                <a:latin typeface="Consolas"/>
+              </a:rPr>
+              <a:t>private</a:t>
+            </a:r>
+            <a:r>
+              <a:rPr sz="1500" i="0" b="0">
+                <a:solidFill>
+                  <a:srgbClr val="D4D4D4"/>
+                </a:solidFill>
+                <a:latin typeface="Consolas"/>
+              </a:rPr>
+              <a:t> </a:t>
+            </a:r>
+            <a:r>
+              <a:rPr sz="1500" i="0" b="0">
+                <a:solidFill>
+                  <a:srgbClr val="569CD6"/>
+                </a:solidFill>
+                <a:latin typeface="Consolas"/>
+              </a:rPr>
+              <a:t>final</a:t>
+            </a:r>
+            <a:r>
+              <a:rPr sz="1500" i="0" b="0">
+                <a:solidFill>
+                  <a:srgbClr val="D4D4D4"/>
+                </a:solidFill>
+                <a:latin typeface="Consolas"/>
+              </a:rPr>
+              <a:t> </a:t>
+            </a:r>
+            <a:r>
+              <a:rPr sz="1500" i="0" b="0">
+                <a:solidFill>
+                  <a:srgbClr val="4EC9B0"/>
+                </a:solidFill>
+                <a:latin typeface="Consolas"/>
+              </a:rPr>
+              <a:t>String</a:t>
+            </a:r>
+            <a:r>
+              <a:rPr sz="1500" i="0" b="0">
+                <a:solidFill>
+                  <a:srgbClr val="D4D4D4"/>
+                </a:solidFill>
+                <a:latin typeface="Consolas"/>
+              </a:rPr>
+              <a:t> </a:t>
+            </a:r>
+            <a:r>
+              <a:rPr sz="1500" i="0" b="0">
+                <a:solidFill>
+                  <a:srgbClr val="D4D4D4"/>
+                </a:solidFill>
+                <a:latin typeface="Consolas"/>
+              </a:rPr>
+              <a:t>especie</a:t>
+            </a:r>
+            <a:r>
+              <a:rPr sz="1500" i="0" b="0">
+                <a:solidFill>
+                  <a:srgbClr val="D4D4D4"/>
+                </a:solidFill>
+                <a:latin typeface="Consolas"/>
+              </a:rPr>
+              <a:t>;</a:t>
+            </a:r>
+          </a:p>
+          <a:p>
+            <a:pPr>
+              <a:spcAft>
+                <a:spcPts val="321"/>
+              </a:spcAft>
+            </a:pPr>
+            <a:r>
+              <a:rPr sz="1500" i="0" b="0">
+                <a:solidFill>
+                  <a:srgbClr val="569CD6"/>
+                </a:solidFill>
+                <a:latin typeface="Consolas"/>
+              </a:rPr>
+              <a:t>private</a:t>
+            </a:r>
+            <a:r>
+              <a:rPr sz="1500" i="0" b="0">
+                <a:solidFill>
+                  <a:srgbClr val="D4D4D4"/>
+                </a:solidFill>
+                <a:latin typeface="Consolas"/>
+              </a:rPr>
+              <a:t> </a:t>
+            </a:r>
+            <a:r>
+              <a:rPr sz="1500" i="0" b="0">
+                <a:solidFill>
+                  <a:srgbClr val="569CD6"/>
+                </a:solidFill>
+                <a:latin typeface="Consolas"/>
+              </a:rPr>
+              <a:t>final</a:t>
+            </a:r>
+            <a:r>
+              <a:rPr sz="1500" i="0" b="0">
+                <a:solidFill>
+                  <a:srgbClr val="D4D4D4"/>
+                </a:solidFill>
+                <a:latin typeface="Consolas"/>
+              </a:rPr>
+              <a:t> </a:t>
+            </a:r>
+            <a:r>
+              <a:rPr sz="1500" i="0" b="0">
+                <a:solidFill>
+                  <a:srgbClr val="4EC9B0"/>
+                </a:solidFill>
+                <a:latin typeface="Consolas"/>
+              </a:rPr>
+              <a:t>int</a:t>
+            </a:r>
+            <a:r>
+              <a:rPr sz="1500" i="0" b="0">
+                <a:solidFill>
+                  <a:srgbClr val="D4D4D4"/>
+                </a:solidFill>
+                <a:latin typeface="Consolas"/>
+              </a:rPr>
+              <a:t> </a:t>
+            </a:r>
+            <a:r>
+              <a:rPr sz="1500" i="0" b="0">
+                <a:solidFill>
+                  <a:srgbClr val="D4D4D4"/>
+                </a:solidFill>
+                <a:latin typeface="Consolas"/>
+              </a:rPr>
+              <a:t>edad</a:t>
+            </a:r>
+            <a:r>
+              <a:rPr sz="1500" i="0" b="0">
+                <a:solidFill>
+                  <a:srgbClr val="D4D4D4"/>
+                </a:solidFill>
+                <a:latin typeface="Consolas"/>
+              </a:rPr>
+              <a:t>;</a:t>
+            </a:r>
+          </a:p>
+          <a:p>
+            <a:pPr>
+              <a:spcAft>
+                <a:spcPts val="321"/>
+              </a:spcAft>
+            </a:pPr>
+            <a:r>
+              <a:rPr sz="1500" i="0" b="0">
+                <a:solidFill>
+                  <a:srgbClr val="569CD6"/>
+                </a:solidFill>
+                <a:latin typeface="Consolas"/>
+              </a:rPr>
+              <a:t>private</a:t>
+            </a:r>
+            <a:r>
+              <a:rPr sz="1500" i="0" b="0">
+                <a:solidFill>
+                  <a:srgbClr val="D4D4D4"/>
+                </a:solidFill>
+                <a:latin typeface="Consolas"/>
+              </a:rPr>
+              <a:t> </a:t>
+            </a:r>
+            <a:r>
+              <a:rPr sz="1500" i="0" b="0">
+                <a:solidFill>
+                  <a:srgbClr val="569CD6"/>
+                </a:solidFill>
+                <a:latin typeface="Consolas"/>
+              </a:rPr>
+              <a:t>final</a:t>
+            </a:r>
+            <a:r>
+              <a:rPr sz="1500" i="0" b="0">
+                <a:solidFill>
+                  <a:srgbClr val="D4D4D4"/>
+                </a:solidFill>
+                <a:latin typeface="Consolas"/>
+              </a:rPr>
+              <a:t> </a:t>
+            </a:r>
+            <a:r>
+              <a:rPr sz="1500" i="0" b="0">
+                <a:solidFill>
+                  <a:srgbClr val="4EC9B0"/>
+                </a:solidFill>
+                <a:latin typeface="Consolas"/>
+              </a:rPr>
+              <a:t>String</a:t>
+            </a:r>
+            <a:r>
+              <a:rPr sz="1500" i="0" b="0">
+                <a:solidFill>
+                  <a:srgbClr val="D4D4D4"/>
+                </a:solidFill>
+                <a:latin typeface="Consolas"/>
+              </a:rPr>
+              <a:t> </a:t>
+            </a:r>
+            <a:r>
+              <a:rPr sz="1500" i="0" b="0">
+                <a:solidFill>
+                  <a:srgbClr val="D4D4D4"/>
+                </a:solidFill>
+                <a:latin typeface="Consolas"/>
+              </a:rPr>
+              <a:t>dueno</a:t>
+            </a:r>
+            <a:r>
+              <a:rPr sz="1500" i="0" b="0">
+                <a:solidFill>
+                  <a:srgbClr val="D4D4D4"/>
+                </a:solidFill>
+                <a:latin typeface="Consolas"/>
+              </a:rPr>
+              <a:t>;</a:t>
+            </a:r>
+          </a:p>
+          <a:p>
+            <a:pPr>
+              <a:spcAft>
+                <a:spcPts val="321"/>
+              </a:spcAft>
+            </a:pPr>
+            <a:r>
+              <a:rPr sz="1500" i="0" b="0">
+                <a:solidFill>
+                  <a:srgbClr val="D4D4D4"/>
+                </a:solidFill>
+                <a:latin typeface="Consolas"/>
+              </a:rPr>
+              <a:t/>
+            </a:r>
+          </a:p>
+          <a:p>
+            <a:pPr>
+              <a:spcAft>
+                <a:spcPts val="321"/>
+              </a:spcAft>
+            </a:pPr>
+            <a:r>
+              <a:rPr sz="1500" i="0" b="0">
+                <a:solidFill>
+                  <a:srgbClr val="D4D4D4"/>
+                </a:solidFill>
+                <a:latin typeface="Consolas"/>
+              </a:rPr>
+              <a:t>@</a:t>
+            </a:r>
+            <a:r>
+              <a:rPr sz="1500" i="0" b="0">
+                <a:solidFill>
+                  <a:srgbClr val="D4D4D4"/>
+                </a:solidFill>
+                <a:latin typeface="Consolas"/>
+              </a:rPr>
+              <a:t>Override</a:t>
+            </a:r>
+          </a:p>
+          <a:p>
+            <a:pPr>
+              <a:spcAft>
+                <a:spcPts val="321"/>
+              </a:spcAft>
+            </a:pPr>
+            <a:r>
+              <a:rPr sz="1500" i="0" b="0">
+                <a:solidFill>
+                  <a:srgbClr val="569CD6"/>
+                </a:solidFill>
+                <a:latin typeface="Consolas"/>
+              </a:rPr>
+              <a:t>public</a:t>
+            </a:r>
+            <a:r>
+              <a:rPr sz="1500" i="0" b="0">
+                <a:solidFill>
+                  <a:srgbClr val="D4D4D4"/>
+                </a:solidFill>
+                <a:latin typeface="Consolas"/>
+              </a:rPr>
+              <a:t> </a:t>
+            </a:r>
+            <a:r>
+              <a:rPr sz="1500" i="0" b="0">
+                <a:solidFill>
+                  <a:srgbClr val="4EC9B0"/>
+                </a:solidFill>
+                <a:latin typeface="Consolas"/>
+              </a:rPr>
+              <a:t>String</a:t>
+            </a:r>
+            <a:r>
+              <a:rPr sz="1500" i="0" b="0">
+                <a:solidFill>
+                  <a:srgbClr val="D4D4D4"/>
+                </a:solidFill>
+                <a:latin typeface="Consolas"/>
+              </a:rPr>
+              <a:t> </a:t>
+            </a:r>
+            <a:r>
+              <a:rPr sz="1500" i="0" b="0">
+                <a:solidFill>
+                  <a:srgbClr val="DCDCAA"/>
+                </a:solidFill>
+                <a:latin typeface="Consolas"/>
+              </a:rPr>
+              <a:t>toString</a:t>
+            </a:r>
+            <a:r>
+              <a:rPr sz="1500" i="0" b="0">
+                <a:solidFill>
+                  <a:srgbClr val="D4D4D4"/>
+                </a:solidFill>
+                <a:latin typeface="Consolas"/>
+              </a:rPr>
+              <a:t>() {</a:t>
+            </a:r>
+          </a:p>
+          <a:p>
+            <a:pPr>
+              <a:spcAft>
+                <a:spcPts val="321"/>
+              </a:spcAft>
+            </a:pPr>
+            <a:r>
+              <a:rPr sz="1500" i="0" b="0">
+                <a:solidFill>
+                  <a:srgbClr val="D4D4D4"/>
+                </a:solidFill>
+                <a:latin typeface="Consolas"/>
+              </a:rPr>
+              <a:t>    </a:t>
+            </a:r>
+            <a:r>
+              <a:rPr sz="1500" i="0" b="0">
+                <a:solidFill>
+                  <a:srgbClr val="569CD6"/>
+                </a:solidFill>
+                <a:latin typeface="Consolas"/>
+              </a:rPr>
+              <a:t>return</a:t>
+            </a:r>
+            <a:r>
+              <a:rPr sz="1500" i="0" b="0">
+                <a:solidFill>
+                  <a:srgbClr val="D4D4D4"/>
+                </a:solidFill>
+                <a:latin typeface="Consolas"/>
+              </a:rPr>
+              <a:t> </a:t>
+            </a:r>
+            <a:r>
+              <a:rPr sz="1500" i="0" b="0">
+                <a:solidFill>
+                  <a:srgbClr val="D4D4D4"/>
+                </a:solidFill>
+                <a:latin typeface="Consolas"/>
+              </a:rPr>
+              <a:t>id</a:t>
+            </a:r>
+            <a:r>
+              <a:rPr sz="1500" i="0" b="0">
+                <a:solidFill>
+                  <a:srgbClr val="D4D4D4"/>
+                </a:solidFill>
+                <a:latin typeface="Consolas"/>
+              </a:rPr>
+              <a:t> + </a:t>
+            </a:r>
+            <a:r>
+              <a:rPr sz="1500" i="0" b="0">
+                <a:solidFill>
+                  <a:srgbClr val="CE9178"/>
+                </a:solidFill>
+                <a:latin typeface="Consolas"/>
+              </a:rPr>
+              <a:t>" | "</a:t>
+            </a:r>
+            <a:r>
+              <a:rPr sz="1500" i="0" b="0">
+                <a:solidFill>
+                  <a:srgbClr val="D4D4D4"/>
+                </a:solidFill>
+                <a:latin typeface="Consolas"/>
+              </a:rPr>
+              <a:t> + </a:t>
+            </a:r>
+            <a:r>
+              <a:rPr sz="1500" i="0" b="0">
+                <a:solidFill>
+                  <a:srgbClr val="D4D4D4"/>
+                </a:solidFill>
+                <a:latin typeface="Consolas"/>
+              </a:rPr>
+              <a:t>nombre</a:t>
+            </a:r>
+            <a:r>
+              <a:rPr sz="1500" i="0" b="0">
+                <a:solidFill>
+                  <a:srgbClr val="D4D4D4"/>
+                </a:solidFill>
+                <a:latin typeface="Consolas"/>
+              </a:rPr>
+              <a:t> + </a:t>
+            </a:r>
+            <a:r>
+              <a:rPr sz="1500" i="0" b="0">
+                <a:solidFill>
+                  <a:srgbClr val="CE9178"/>
+                </a:solidFill>
+                <a:latin typeface="Consolas"/>
+              </a:rPr>
+              <a:t>" ("</a:t>
+            </a:r>
+            <a:r>
+              <a:rPr sz="1500" i="0" b="0">
+                <a:solidFill>
+                  <a:srgbClr val="D4D4D4"/>
+                </a:solidFill>
+                <a:latin typeface="Consolas"/>
+              </a:rPr>
+              <a:t> + </a:t>
+            </a:r>
+            <a:r>
+              <a:rPr sz="1500" i="0" b="0">
+                <a:solidFill>
+                  <a:srgbClr val="D4D4D4"/>
+                </a:solidFill>
+                <a:latin typeface="Consolas"/>
+              </a:rPr>
+              <a:t>especie</a:t>
+            </a:r>
+            <a:r>
+              <a:rPr sz="1500" i="0" b="0">
+                <a:solidFill>
+                  <a:srgbClr val="D4D4D4"/>
+                </a:solidFill>
+                <a:latin typeface="Consolas"/>
+              </a:rPr>
+              <a:t> + </a:t>
+            </a:r>
+            <a:r>
+              <a:rPr sz="1500" i="0" b="0">
+                <a:solidFill>
+                  <a:srgbClr val="CE9178"/>
+                </a:solidFill>
+                <a:latin typeface="Consolas"/>
+              </a:rPr>
+              <a:t>", "</a:t>
+            </a:r>
+            <a:r>
+              <a:rPr sz="1500" i="0" b="0">
+                <a:solidFill>
+                  <a:srgbClr val="D4D4D4"/>
+                </a:solidFill>
+                <a:latin typeface="Consolas"/>
+              </a:rPr>
+              <a:t> + </a:t>
+            </a:r>
+            <a:r>
+              <a:rPr sz="1500" i="0" b="0">
+                <a:solidFill>
+                  <a:srgbClr val="D4D4D4"/>
+                </a:solidFill>
+                <a:latin typeface="Consolas"/>
+              </a:rPr>
+              <a:t>edad</a:t>
+            </a:r>
+            <a:r>
+              <a:rPr sz="1500" i="0" b="0">
+                <a:solidFill>
+                  <a:srgbClr val="D4D4D4"/>
+                </a:solidFill>
+                <a:latin typeface="Consolas"/>
+              </a:rPr>
+              <a:t> + </a:t>
+            </a:r>
+            <a:r>
+              <a:rPr sz="1500" i="0" b="0">
+                <a:solidFill>
+                  <a:srgbClr val="CE9178"/>
+                </a:solidFill>
+                <a:latin typeface="Consolas"/>
+              </a:rPr>
+              <a:t>" anios) - dueno: "</a:t>
+            </a:r>
+            <a:r>
+              <a:rPr sz="1500" i="0" b="0">
+                <a:solidFill>
+                  <a:srgbClr val="D4D4D4"/>
+                </a:solidFill>
+                <a:latin typeface="Consolas"/>
+              </a:rPr>
+              <a:t> + </a:t>
+            </a:r>
+            <a:r>
+              <a:rPr sz="1500" i="0" b="0">
+                <a:solidFill>
+                  <a:srgbClr val="D4D4D4"/>
+                </a:solidFill>
+                <a:latin typeface="Consolas"/>
+              </a:rPr>
+              <a:t>dueno</a:t>
+            </a:r>
+            <a:r>
+              <a:rPr sz="1500" i="0" b="0">
+                <a:solidFill>
+                  <a:srgbClr val="D4D4D4"/>
+                </a:solidFill>
+                <a:latin typeface="Consolas"/>
+              </a:rPr>
+              <a:t>;</a:t>
+            </a:r>
+          </a:p>
+          <a:p>
+            <a:pPr>
+              <a:spcAft>
+                <a:spcPts val="321"/>
+              </a:spcAft>
+            </a:pPr>
+            <a:r>
+              <a:rPr sz="1500" i="0" b="0">
+                <a:solidFill>
+                  <a:srgbClr val="D4D4D4"/>
+                </a:solidFill>
+                <a:latin typeface="Consolas"/>
+              </a:rPr>
+              <a:t>}</a:t>
+            </a:r>
+          </a:p>
+        </p:txBody>
+      </p:sp>
+      <p:sp>
+        <p:nvSpPr>
+          <p:cNvPr id="13" name="TextBox 12"/>
+          <p:cNvSpPr txBox="1"/>
+          <p:nvPr/>
+        </p:nvSpPr>
+        <p:spPr>
+          <a:xfrm>
+            <a:off x="457200" y="6035040"/>
+            <a:ext cx="11277295" cy="365760"/>
+          </a:xfrm>
+          <a:prstGeom prst="rect">
+            <a:avLst/>
+          </a:prstGeom>
+          <a:noFill/>
+        </p:spPr>
+        <p:txBody>
+          <a:bodyPr wrap="square">
+            <a:spAutoFit/>
+          </a:bodyPr>
+          <a:lstStyle/>
+          <a:p>
             <a:pPr algn="ctr"/>
             <a:r>
               <a:rPr sz="1300" b="0" i="1">
@@ -10514,7 +10697,7 @@
       </p:sp>
       <p:sp>
         <p:nvSpPr>
-          <p:cNvPr id="13" name="TextBox 12"/>
+          <p:cNvPr id="14" name="TextBox 13"/>
           <p:cNvSpPr txBox="1"/>
           <p:nvPr/>
         </p:nvSpPr>
